--- a/app/slides/Final_Presentation.pptx
+++ b/app/slides/Final_Presentation.pptx
@@ -4,13 +4,16 @@
   <p:sldMasterIdLst>
     <p:sldMasterId id="2147483648" r:id="rId1"/>
   </p:sldMasterIdLst>
+  <p:notesMasterIdLst>
+    <p:notesMasterId r:id="rId6"/>
+  </p:notesMasterIdLst>
   <p:sldIdLst>
-    <p:sldId id="256" r:id="rId7"/>
-    <p:sldId id="257" r:id="rId9"/>
-    <p:sldId id="258" r:id="rId10"/>
-    <p:sldId id="259" r:id="rId11"/>
+    <p:sldId id="256" r:id="rId2"/>
+    <p:sldId id="257" r:id="rId3"/>
+    <p:sldId id="258" r:id="rId4"/>
+    <p:sldId id="259" r:id="rId5"/>
   </p:sldIdLst>
-  <p:sldSz cx="12191695" cy="6858000" type="screen4x3"/>
+  <p:sldSz cx="12192000" cy="6858000"/>
   <p:notesSz cx="6858000" cy="9144000"/>
   <p:defaultTextStyle>
     <a:defPPr>
@@ -107,11 +110,27 @@
       </a:defRPr>
     </a:lvl9pPr>
   </p:defaultTextStyle>
+  <p:extLst>
+    <p:ext uri="{EFAFB233-063F-42B5-8137-9DF3F51BA10A}">
+      <p15:sldGuideLst xmlns:p15="http://schemas.microsoft.com/office/powerpoint/2012/main">
+        <p15:guide id="1" orient="horz" pos="2160">
+          <p15:clr>
+            <a:srgbClr val="A4A3A4"/>
+          </p15:clr>
+        </p15:guide>
+        <p15:guide id="2" pos="2880">
+          <p15:clr>
+            <a:srgbClr val="A4A3A4"/>
+          </p15:clr>
+        </p15:guide>
+      </p15:sldGuideLst>
+    </p:ext>
+  </p:extLst>
 </p:presentation>
 </file>
 
 <file path=ppt/notesMasters/notesMaster1.xml><?xml version="1.0" encoding="utf-8"?>
-<p:notesMaster xmlns:a="http://schemas.openxmlformats.org/drawingml/2006/main" xmlns:p="http://schemas.openxmlformats.org/presentationml/2006/main" xmlns:r="http://schemas.openxmlformats.org/officeDocument/2006/relationships">
+<p:notesMaster xmlns:a="http://schemas.openxmlformats.org/drawingml/2006/main" xmlns:r="http://schemas.openxmlformats.org/officeDocument/2006/relationships" xmlns:p="http://schemas.openxmlformats.org/presentationml/2006/main">
   <p:cSld>
     <p:bg>
       <p:bgRef idx="1001">
@@ -132,241 +151,16 @@
           <a:chExt cx="0" cy="0"/>
         </a:xfrm>
       </p:grpSpPr>
-      <p:sp>
-        <p:nvSpPr>
-          <p:cNvPr id="2" name="Header Placeholder 1"/>
-          <p:cNvSpPr>
-            <a:spLocks noGrp="1"/>
-          </p:cNvSpPr>
-          <p:nvPr>
-            <p:ph type="hdr" sz="quarter"/>
-          </p:nvPr>
-        </p:nvSpPr>
-        <p:spPr>
-          <a:xfrm>
-            <a:off x="0" y="0"/>
-            <a:ext cx="2971800" cy="457200"/>
-          </a:xfrm>
-          <a:prstGeom prst="rect">
-            <a:avLst/>
-          </a:prstGeom>
-        </p:spPr>
-        <p:txBody>
-          <a:bodyPr vert="horz" lIns="91440" tIns="45720" rIns="91440" bIns="45720" rtlCol="0"/>
-          <a:lstStyle>
-            <a:lvl1pPr algn="l">
-              <a:defRPr sz="1200"/>
-            </a:lvl1pPr>
-          </a:lstStyle>
-          <a:p>
-            <a:endParaRPr lang="en-US"/>
-          </a:p>
-        </p:txBody>
-      </p:sp>
-      <p:sp>
-        <p:nvSpPr>
-          <p:cNvPr id="3" name="Date Placeholder 2"/>
-          <p:cNvSpPr>
-            <a:spLocks noGrp="1"/>
-          </p:cNvSpPr>
-          <p:nvPr>
-            <p:ph type="dt" idx="1"/>
-          </p:nvPr>
-        </p:nvSpPr>
-        <p:spPr>
-          <a:xfrm>
-            <a:off x="3884613" y="0"/>
-            <a:ext cx="2971800" cy="457200"/>
-          </a:xfrm>
-          <a:prstGeom prst="rect">
-            <a:avLst/>
-          </a:prstGeom>
-        </p:spPr>
-        <p:txBody>
-          <a:bodyPr vert="horz" lIns="91440" tIns="45720" rIns="91440" bIns="45720" rtlCol="0"/>
-          <a:lstStyle>
-            <a:lvl1pPr algn="r">
-              <a:defRPr sz="1200"/>
-            </a:lvl1pPr>
-          </a:lstStyle>
-          <a:p>
-            <a:fld id="{0F89C1C7-3DCD-1040-A9CF-14679D8B5DDD}" type="datetimeFigureOut">
-              <a:rPr lang="en-US" smtClean="0"/>
-              <a:t>10/17/16</a:t>
-            </a:fld>
-            <a:endParaRPr lang="en-US"/>
-          </a:p>
-        </p:txBody>
-      </p:sp>
-      <p:sp>
-        <p:nvSpPr>
-          <p:cNvPr id="4" name="Slide Image Placeholder 3"/>
-          <p:cNvSpPr>
-            <a:spLocks noGrp="1" noRot="1" noChangeAspect="1"/>
-          </p:cNvSpPr>
-          <p:nvPr>
-            <p:ph type="sldImg" idx="2"/>
-          </p:nvPr>
-        </p:nvSpPr>
-        <p:spPr>
-          <a:xfrm>
-            <a:off x="1143000" y="685800"/>
-            <a:ext cx="4572000" cy="3429000"/>
-          </a:xfrm>
-          <a:prstGeom prst="rect">
-            <a:avLst/>
-          </a:prstGeom>
-          <a:noFill/>
-          <a:ln w="12700">
-            <a:solidFill>
-              <a:prstClr val="black"/>
-            </a:solidFill>
-          </a:ln>
-        </p:spPr>
-        <p:txBody>
-          <a:bodyPr vert="horz" lIns="91440" tIns="45720" rIns="91440" bIns="45720" rtlCol="0" anchor="ctr"/>
-          <a:lstStyle/>
-          <a:p>
-            <a:endParaRPr lang="en-US"/>
-          </a:p>
-        </p:txBody>
-      </p:sp>
-      <p:sp>
-        <p:nvSpPr>
-          <p:cNvPr id="5" name="Notes Placeholder 4"/>
-          <p:cNvSpPr>
-            <a:spLocks noGrp="1"/>
-          </p:cNvSpPr>
-          <p:nvPr>
-            <p:ph type="body" sz="quarter" idx="3"/>
-          </p:nvPr>
-        </p:nvSpPr>
-        <p:spPr>
-          <a:xfrm>
-            <a:off x="685800" y="4343400"/>
-            <a:ext cx="5486400" cy="4114800"/>
-          </a:xfrm>
-          <a:prstGeom prst="rect">
-            <a:avLst/>
-          </a:prstGeom>
-        </p:spPr>
-        <p:txBody>
-          <a:bodyPr vert="horz" lIns="91440" tIns="45720" rIns="91440" bIns="45720" rtlCol="0"/>
-          <a:lstStyle/>
-          <a:p>
-            <a:pPr lvl="0"/>
-            <a:r>
-              <a:rPr lang="en-US" smtClean="0"/>
-              <a:t>Click to edit Master text styles</a:t>
-            </a:r>
-          </a:p>
-          <a:p>
-            <a:pPr lvl="1"/>
-            <a:r>
-              <a:rPr lang="en-US" smtClean="0"/>
-              <a:t>Second level</a:t>
-            </a:r>
-          </a:p>
-          <a:p>
-            <a:pPr lvl="2"/>
-            <a:r>
-              <a:rPr lang="en-US" smtClean="0"/>
-              <a:t>Third level</a:t>
-            </a:r>
-          </a:p>
-          <a:p>
-            <a:pPr lvl="3"/>
-            <a:r>
-              <a:rPr lang="en-US" smtClean="0"/>
-              <a:t>Fourth level</a:t>
-            </a:r>
-          </a:p>
-          <a:p>
-            <a:pPr lvl="4"/>
-            <a:r>
-              <a:rPr lang="en-US" smtClean="0"/>
-              <a:t>Fifth level</a:t>
-            </a:r>
-            <a:endParaRPr lang="en-US"/>
-          </a:p>
-        </p:txBody>
-      </p:sp>
-      <p:sp>
-        <p:nvSpPr>
-          <p:cNvPr id="6" name="Footer Placeholder 5"/>
-          <p:cNvSpPr>
-            <a:spLocks noGrp="1"/>
-          </p:cNvSpPr>
-          <p:nvPr>
-            <p:ph type="ftr" sz="quarter" idx="4"/>
-          </p:nvPr>
-        </p:nvSpPr>
-        <p:spPr>
-          <a:xfrm>
-            <a:off x="0" y="8685213"/>
-            <a:ext cx="2971800" cy="457200"/>
-          </a:xfrm>
-          <a:prstGeom prst="rect">
-            <a:avLst/>
-          </a:prstGeom>
-        </p:spPr>
-        <p:txBody>
-          <a:bodyPr vert="horz" lIns="91440" tIns="45720" rIns="91440" bIns="45720" rtlCol="0" anchor="b"/>
-          <a:lstStyle>
-            <a:lvl1pPr algn="l">
-              <a:defRPr sz="1200"/>
-            </a:lvl1pPr>
-          </a:lstStyle>
-          <a:p>
-            <a:endParaRPr lang="en-US"/>
-          </a:p>
-        </p:txBody>
-      </p:sp>
-      <p:sp>
-        <p:nvSpPr>
-          <p:cNvPr id="7" name="Slide Number Placeholder 6"/>
-          <p:cNvSpPr>
-            <a:spLocks noGrp="1"/>
-          </p:cNvSpPr>
-          <p:nvPr>
-            <p:ph type="sldNum" sz="quarter" idx="5"/>
-          </p:nvPr>
-        </p:nvSpPr>
-        <p:spPr>
-          <a:xfrm>
-            <a:off x="3884613" y="8685213"/>
-            <a:ext cx="2971800" cy="457200"/>
-          </a:xfrm>
-          <a:prstGeom prst="rect">
-            <a:avLst/>
-          </a:prstGeom>
-        </p:spPr>
-        <p:txBody>
-          <a:bodyPr vert="horz" lIns="91440" tIns="45720" rIns="91440" bIns="45720" rtlCol="0" anchor="b"/>
-          <a:lstStyle>
-            <a:lvl1pPr algn="r">
-              <a:defRPr sz="1200"/>
-            </a:lvl1pPr>
-          </a:lstStyle>
-          <a:p>
-            <a:fld id="{BB5E49A5-4136-284D-997B-48E1D791AD67}" type="slidenum">
-              <a:rPr lang="en-US" smtClean="0"/>
-              <a:t>‹#›</a:t>
-            </a:fld>
-            <a:endParaRPr lang="en-US"/>
-          </a:p>
-        </p:txBody>
-      </p:sp>
     </p:spTree>
     <p:extLst>
       <p:ext uri="{BB962C8B-B14F-4D97-AF65-F5344CB8AC3E}">
-        <p14:creationId xmlns:p14="http://schemas.microsoft.com/office/powerpoint/2010/main" val="2623252185"/>
+        <p14:creationId xmlns:p14="http://schemas.microsoft.com/office/powerpoint/2010/main" val="6000159"/>
       </p:ext>
     </p:extLst>
   </p:cSld>
   <p:clrMap bg1="lt1" tx1="dk1" bg2="lt2" tx2="dk2" accent1="accent1" accent2="accent2" accent3="accent3" accent4="accent4" accent5="accent5" accent6="accent6" hlink="hlink" folHlink="folHlink"/>
   <p:notesStyle>
-    <a:lvl1pPr marL="0" algn="l" defTabSz="457200" rtl="0" eaLnBrk="1" latinLnBrk="0" hangingPunct="1">
+    <a:lvl1pPr marL="0" algn="l" defTabSz="914400" rtl="0" eaLnBrk="1" latinLnBrk="0" hangingPunct="1">
       <a:defRPr sz="1200" kern="1200">
         <a:solidFill>
           <a:schemeClr val="tx1"/>
@@ -376,7 +170,7 @@
         <a:cs typeface="+mn-cs"/>
       </a:defRPr>
     </a:lvl1pPr>
-    <a:lvl2pPr marL="457200" algn="l" defTabSz="457200" rtl="0" eaLnBrk="1" latinLnBrk="0" hangingPunct="1">
+    <a:lvl2pPr marL="457200" algn="l" defTabSz="914400" rtl="0" eaLnBrk="1" latinLnBrk="0" hangingPunct="1">
       <a:defRPr sz="1200" kern="1200">
         <a:solidFill>
           <a:schemeClr val="tx1"/>
@@ -386,7 +180,7 @@
         <a:cs typeface="+mn-cs"/>
       </a:defRPr>
     </a:lvl2pPr>
-    <a:lvl3pPr marL="914400" algn="l" defTabSz="457200" rtl="0" eaLnBrk="1" latinLnBrk="0" hangingPunct="1">
+    <a:lvl3pPr marL="914400" algn="l" defTabSz="914400" rtl="0" eaLnBrk="1" latinLnBrk="0" hangingPunct="1">
       <a:defRPr sz="1200" kern="1200">
         <a:solidFill>
           <a:schemeClr val="tx1"/>
@@ -396,7 +190,7 @@
         <a:cs typeface="+mn-cs"/>
       </a:defRPr>
     </a:lvl3pPr>
-    <a:lvl4pPr marL="1371600" algn="l" defTabSz="457200" rtl="0" eaLnBrk="1" latinLnBrk="0" hangingPunct="1">
+    <a:lvl4pPr marL="1371600" algn="l" defTabSz="914400" rtl="0" eaLnBrk="1" latinLnBrk="0" hangingPunct="1">
       <a:defRPr sz="1200" kern="1200">
         <a:solidFill>
           <a:schemeClr val="tx1"/>
@@ -406,7 +200,7 @@
         <a:cs typeface="+mn-cs"/>
       </a:defRPr>
     </a:lvl4pPr>
-    <a:lvl5pPr marL="1828800" algn="l" defTabSz="457200" rtl="0" eaLnBrk="1" latinLnBrk="0" hangingPunct="1">
+    <a:lvl5pPr marL="1828800" algn="l" defTabSz="914400" rtl="0" eaLnBrk="1" latinLnBrk="0" hangingPunct="1">
       <a:defRPr sz="1200" kern="1200">
         <a:solidFill>
           <a:schemeClr val="tx1"/>
@@ -416,7 +210,7 @@
         <a:cs typeface="+mn-cs"/>
       </a:defRPr>
     </a:lvl5pPr>
-    <a:lvl6pPr marL="2286000" algn="l" defTabSz="457200" rtl="0" eaLnBrk="1" latinLnBrk="0" hangingPunct="1">
+    <a:lvl6pPr marL="2286000" algn="l" defTabSz="914400" rtl="0" eaLnBrk="1" latinLnBrk="0" hangingPunct="1">
       <a:defRPr sz="1200" kern="1200">
         <a:solidFill>
           <a:schemeClr val="tx1"/>
@@ -426,7 +220,7 @@
         <a:cs typeface="+mn-cs"/>
       </a:defRPr>
     </a:lvl6pPr>
-    <a:lvl7pPr marL="2743200" algn="l" defTabSz="457200" rtl="0" eaLnBrk="1" latinLnBrk="0" hangingPunct="1">
+    <a:lvl7pPr marL="2743200" algn="l" defTabSz="914400" rtl="0" eaLnBrk="1" latinLnBrk="0" hangingPunct="1">
       <a:defRPr sz="1200" kern="1200">
         <a:solidFill>
           <a:schemeClr val="tx1"/>
@@ -436,7 +230,7 @@
         <a:cs typeface="+mn-cs"/>
       </a:defRPr>
     </a:lvl7pPr>
-    <a:lvl8pPr marL="3200400" algn="l" defTabSz="457200" rtl="0" eaLnBrk="1" latinLnBrk="0" hangingPunct="1">
+    <a:lvl8pPr marL="3200400" algn="l" defTabSz="914400" rtl="0" eaLnBrk="1" latinLnBrk="0" hangingPunct="1">
       <a:defRPr sz="1200" kern="1200">
         <a:solidFill>
           <a:schemeClr val="tx1"/>
@@ -446,7 +240,7 @@
         <a:cs typeface="+mn-cs"/>
       </a:defRPr>
     </a:lvl8pPr>
-    <a:lvl9pPr marL="3657600" algn="l" defTabSz="457200" rtl="0" eaLnBrk="1" latinLnBrk="0" hangingPunct="1">
+    <a:lvl9pPr marL="3657600" algn="l" defTabSz="914400" rtl="0" eaLnBrk="1" latinLnBrk="0" hangingPunct="1">
       <a:defRPr sz="1200" kern="1200">
         <a:solidFill>
           <a:schemeClr val="tx1"/>
@@ -461,7 +255,7 @@
 </file>
 
 <file path=ppt/notesSlides/notesSlide1.xml><?xml version="1.0" encoding="utf-8"?>
-<p:notes xmlns:a="http://schemas.openxmlformats.org/drawingml/2006/main" xmlns:p="http://schemas.openxmlformats.org/presentationml/2006/main" xmlns:r="http://schemas.openxmlformats.org/officeDocument/2006/relationships">
+<p:notes xmlns:a="http://schemas.openxmlformats.org/drawingml/2006/main" xmlns:r="http://schemas.openxmlformats.org/officeDocument/2006/relationships" xmlns:p="http://schemas.openxmlformats.org/presentationml/2006/main">
   <p:cSld>
     <p:spTree>
       <p:nvGrpSpPr>
@@ -481,7 +275,7 @@
         <p:nvSpPr>
           <p:cNvPr id="2" name="Slide Image Placeholder 1"/>
           <p:cNvSpPr>
-            <a:spLocks noGrp="1"/>
+            <a:spLocks noGrp="1" noRot="1" noChangeAspect="1"/>
           </p:cNvSpPr>
           <p:nvPr>
             <p:ph type="sldImg" idx="2"/>
@@ -496,7 +290,7 @@
             <a:spLocks noGrp="1"/>
           </p:cNvSpPr>
           <p:nvPr>
-            <p:ph type="body" idx="3" sz="quarter"/>
+            <p:ph type="body" sz="quarter" idx="3"/>
           </p:nvPr>
         </p:nvSpPr>
         <p:spPr/>
@@ -517,7 +311,7 @@
             <a:spLocks noGrp="1"/>
           </p:cNvSpPr>
           <p:nvPr>
-            <p:ph type="sldNum" idx="5" sz="quarter"/>
+            <p:ph type="sldNum" sz="quarter" idx="5"/>
           </p:nvPr>
         </p:nvSpPr>
         <p:spPr/>
@@ -531,7 +325,7 @@
 </file>
 
 <file path=ppt/notesSlides/notesSlide2.xml><?xml version="1.0" encoding="utf-8"?>
-<p:notes xmlns:a="http://schemas.openxmlformats.org/drawingml/2006/main" xmlns:p="http://schemas.openxmlformats.org/presentationml/2006/main" xmlns:r="http://schemas.openxmlformats.org/officeDocument/2006/relationships">
+<p:notes xmlns:a="http://schemas.openxmlformats.org/drawingml/2006/main" xmlns:r="http://schemas.openxmlformats.org/officeDocument/2006/relationships" xmlns:p="http://schemas.openxmlformats.org/presentationml/2006/main">
   <p:cSld>
     <p:spTree>
       <p:nvGrpSpPr>
@@ -551,7 +345,7 @@
         <p:nvSpPr>
           <p:cNvPr id="2" name="Slide Image Placeholder 1"/>
           <p:cNvSpPr>
-            <a:spLocks noGrp="1"/>
+            <a:spLocks noGrp="1" noRot="1" noChangeAspect="1"/>
           </p:cNvSpPr>
           <p:nvPr>
             <p:ph type="sldImg" idx="2"/>
@@ -566,7 +360,7 @@
             <a:spLocks noGrp="1"/>
           </p:cNvSpPr>
           <p:nvPr>
-            <p:ph type="body" idx="3" sz="quarter"/>
+            <p:ph type="body" sz="quarter" idx="3"/>
           </p:nvPr>
         </p:nvSpPr>
         <p:spPr/>
@@ -587,7 +381,7 @@
             <a:spLocks noGrp="1"/>
           </p:cNvSpPr>
           <p:nvPr>
-            <p:ph type="sldNum" idx="5" sz="quarter"/>
+            <p:ph type="sldNum" sz="quarter" idx="5"/>
           </p:nvPr>
         </p:nvSpPr>
         <p:spPr/>
@@ -601,7 +395,7 @@
 </file>
 
 <file path=ppt/notesSlides/notesSlide3.xml><?xml version="1.0" encoding="utf-8"?>
-<p:notes xmlns:a="http://schemas.openxmlformats.org/drawingml/2006/main" xmlns:p="http://schemas.openxmlformats.org/presentationml/2006/main" xmlns:r="http://schemas.openxmlformats.org/officeDocument/2006/relationships">
+<p:notes xmlns:a="http://schemas.openxmlformats.org/drawingml/2006/main" xmlns:r="http://schemas.openxmlformats.org/officeDocument/2006/relationships" xmlns:p="http://schemas.openxmlformats.org/presentationml/2006/main">
   <p:cSld>
     <p:spTree>
       <p:nvGrpSpPr>
@@ -621,7 +415,7 @@
         <p:nvSpPr>
           <p:cNvPr id="2" name="Slide Image Placeholder 1"/>
           <p:cNvSpPr>
-            <a:spLocks noGrp="1"/>
+            <a:spLocks noGrp="1" noRot="1" noChangeAspect="1"/>
           </p:cNvSpPr>
           <p:nvPr>
             <p:ph type="sldImg" idx="2"/>
@@ -636,7 +430,7 @@
             <a:spLocks noGrp="1"/>
           </p:cNvSpPr>
           <p:nvPr>
-            <p:ph type="body" idx="3" sz="quarter"/>
+            <p:ph type="body" sz="quarter" idx="3"/>
           </p:nvPr>
         </p:nvSpPr>
         <p:spPr/>
@@ -657,7 +451,7 @@
             <a:spLocks noGrp="1"/>
           </p:cNvSpPr>
           <p:nvPr>
-            <p:ph type="sldNum" idx="5" sz="quarter"/>
+            <p:ph type="sldNum" sz="quarter" idx="5"/>
           </p:nvPr>
         </p:nvSpPr>
         <p:spPr/>
@@ -671,7 +465,7 @@
 </file>
 
 <file path=ppt/notesSlides/notesSlide4.xml><?xml version="1.0" encoding="utf-8"?>
-<p:notes xmlns:a="http://schemas.openxmlformats.org/drawingml/2006/main" xmlns:p="http://schemas.openxmlformats.org/presentationml/2006/main" xmlns:r="http://schemas.openxmlformats.org/officeDocument/2006/relationships">
+<p:notes xmlns:a="http://schemas.openxmlformats.org/drawingml/2006/main" xmlns:r="http://schemas.openxmlformats.org/officeDocument/2006/relationships" xmlns:p="http://schemas.openxmlformats.org/presentationml/2006/main">
   <p:cSld>
     <p:spTree>
       <p:nvGrpSpPr>
@@ -691,7 +485,7 @@
         <p:nvSpPr>
           <p:cNvPr id="2" name="Slide Image Placeholder 1"/>
           <p:cNvSpPr>
-            <a:spLocks noGrp="1"/>
+            <a:spLocks noGrp="1" noRot="1" noChangeAspect="1"/>
           </p:cNvSpPr>
           <p:nvPr>
             <p:ph type="sldImg" idx="2"/>
@@ -706,7 +500,7 @@
             <a:spLocks noGrp="1"/>
           </p:cNvSpPr>
           <p:nvPr>
-            <p:ph type="body" idx="3" sz="quarter"/>
+            <p:ph type="body" sz="quarter" idx="3"/>
           </p:nvPr>
         </p:nvSpPr>
         <p:spPr/>
@@ -727,7 +521,7 @@
             <a:spLocks noGrp="1"/>
           </p:cNvSpPr>
           <p:nvPr>
-            <p:ph type="sldNum" idx="5" sz="quarter"/>
+            <p:ph type="sldNum" sz="quarter" idx="5"/>
           </p:nvPr>
         </p:nvSpPr>
         <p:spPr/>
@@ -778,10 +572,9 @@
           <a:lstStyle/>
           <a:p>
             <a:r>
-              <a:rPr lang="en-US" smtClean="0"/>
+              <a:rPr lang="en-US"/>
               <a:t>Click to edit Master title style</a:t>
             </a:r>
-            <a:endParaRPr lang="en-US"/>
           </a:p>
         </p:txBody>
       </p:sp>
@@ -897,10 +690,9 @@
           </a:lstStyle>
           <a:p>
             <a:r>
-              <a:rPr lang="en-US" smtClean="0"/>
+              <a:rPr lang="en-US"/>
               <a:t>Click to edit Master subtitle style</a:t>
             </a:r>
-            <a:endParaRPr lang="en-US"/>
           </a:p>
         </p:txBody>
       </p:sp>
@@ -921,7 +713,7 @@
           <a:p>
             <a:fld id="{5BCAD085-E8A6-8845-BD4E-CB4CCA059FC4}" type="datetimeFigureOut">
               <a:rPr lang="en-US" smtClean="0"/>
-              <a:t>1/27/13</a:t>
+              <a:t>10/26/2026</a:t>
             </a:fld>
             <a:endParaRPr lang="en-US"/>
           </a:p>
@@ -1015,10 +807,9 @@
           <a:lstStyle/>
           <a:p>
             <a:r>
-              <a:rPr lang="en-US" smtClean="0"/>
+              <a:rPr lang="en-US"/>
               <a:t>Click to edit Master title style</a:t>
             </a:r>
-            <a:endParaRPr lang="en-US"/>
           </a:p>
         </p:txBody>
       </p:sp>
@@ -1039,38 +830,37 @@
           <a:p>
             <a:pPr lvl="0"/>
             <a:r>
-              <a:rPr lang="en-US" smtClean="0"/>
+              <a:rPr lang="en-US"/>
               <a:t>Click to edit Master text styles</a:t>
             </a:r>
           </a:p>
           <a:p>
             <a:pPr lvl="1"/>
             <a:r>
-              <a:rPr lang="en-US" smtClean="0"/>
+              <a:rPr lang="en-US"/>
               <a:t>Second level</a:t>
             </a:r>
           </a:p>
           <a:p>
             <a:pPr lvl="2"/>
             <a:r>
-              <a:rPr lang="en-US" smtClean="0"/>
+              <a:rPr lang="en-US"/>
               <a:t>Third level</a:t>
             </a:r>
           </a:p>
           <a:p>
             <a:pPr lvl="3"/>
             <a:r>
-              <a:rPr lang="en-US" smtClean="0"/>
+              <a:rPr lang="en-US"/>
               <a:t>Fourth level</a:t>
             </a:r>
           </a:p>
           <a:p>
             <a:pPr lvl="4"/>
             <a:r>
-              <a:rPr lang="en-US" smtClean="0"/>
+              <a:rPr lang="en-US"/>
               <a:t>Fifth level</a:t>
             </a:r>
-            <a:endParaRPr lang="en-US"/>
           </a:p>
         </p:txBody>
       </p:sp>
@@ -1091,7 +881,7 @@
           <a:p>
             <a:fld id="{5BCAD085-E8A6-8845-BD4E-CB4CCA059FC4}" type="datetimeFigureOut">
               <a:rPr lang="en-US" smtClean="0"/>
-              <a:t>1/27/13</a:t>
+              <a:t>10/26/2026</a:t>
             </a:fld>
             <a:endParaRPr lang="en-US"/>
           </a:p>
@@ -1190,10 +980,9 @@
           <a:lstStyle/>
           <a:p>
             <a:r>
-              <a:rPr lang="en-US" smtClean="0"/>
+              <a:rPr lang="en-US"/>
               <a:t>Click to edit Master title style</a:t>
             </a:r>
-            <a:endParaRPr lang="en-US"/>
           </a:p>
         </p:txBody>
       </p:sp>
@@ -1219,38 +1008,37 @@
           <a:p>
             <a:pPr lvl="0"/>
             <a:r>
-              <a:rPr lang="en-US" smtClean="0"/>
+              <a:rPr lang="en-US"/>
               <a:t>Click to edit Master text styles</a:t>
             </a:r>
           </a:p>
           <a:p>
             <a:pPr lvl="1"/>
             <a:r>
-              <a:rPr lang="en-US" smtClean="0"/>
+              <a:rPr lang="en-US"/>
               <a:t>Second level</a:t>
             </a:r>
           </a:p>
           <a:p>
             <a:pPr lvl="2"/>
             <a:r>
-              <a:rPr lang="en-US" smtClean="0"/>
+              <a:rPr lang="en-US"/>
               <a:t>Third level</a:t>
             </a:r>
           </a:p>
           <a:p>
             <a:pPr lvl="3"/>
             <a:r>
-              <a:rPr lang="en-US" smtClean="0"/>
+              <a:rPr lang="en-US"/>
               <a:t>Fourth level</a:t>
             </a:r>
           </a:p>
           <a:p>
             <a:pPr lvl="4"/>
             <a:r>
-              <a:rPr lang="en-US" smtClean="0"/>
+              <a:rPr lang="en-US"/>
               <a:t>Fifth level</a:t>
             </a:r>
-            <a:endParaRPr lang="en-US"/>
           </a:p>
         </p:txBody>
       </p:sp>
@@ -1271,7 +1059,7 @@
           <a:p>
             <a:fld id="{5BCAD085-E8A6-8845-BD4E-CB4CCA059FC4}" type="datetimeFigureOut">
               <a:rPr lang="en-US" smtClean="0"/>
-              <a:t>1/27/13</a:t>
+              <a:t>10/26/2026</a:t>
             </a:fld>
             <a:endParaRPr lang="en-US"/>
           </a:p>
@@ -1365,10 +1153,9 @@
           <a:lstStyle/>
           <a:p>
             <a:r>
-              <a:rPr lang="en-US" smtClean="0"/>
+              <a:rPr lang="en-US"/>
               <a:t>Click to edit Master title style</a:t>
             </a:r>
-            <a:endParaRPr lang="en-US"/>
           </a:p>
         </p:txBody>
       </p:sp>
@@ -1389,38 +1176,37 @@
           <a:p>
             <a:pPr lvl="0"/>
             <a:r>
-              <a:rPr lang="en-US" smtClean="0"/>
+              <a:rPr lang="en-US"/>
               <a:t>Click to edit Master text styles</a:t>
             </a:r>
           </a:p>
           <a:p>
             <a:pPr lvl="1"/>
             <a:r>
-              <a:rPr lang="en-US" smtClean="0"/>
+              <a:rPr lang="en-US"/>
               <a:t>Second level</a:t>
             </a:r>
           </a:p>
           <a:p>
             <a:pPr lvl="2"/>
             <a:r>
-              <a:rPr lang="en-US" smtClean="0"/>
+              <a:rPr lang="en-US"/>
               <a:t>Third level</a:t>
             </a:r>
           </a:p>
           <a:p>
             <a:pPr lvl="3"/>
             <a:r>
-              <a:rPr lang="en-US" smtClean="0"/>
+              <a:rPr lang="en-US"/>
               <a:t>Fourth level</a:t>
             </a:r>
           </a:p>
           <a:p>
             <a:pPr lvl="4"/>
             <a:r>
-              <a:rPr lang="en-US" smtClean="0"/>
+              <a:rPr lang="en-US"/>
               <a:t>Fifth level</a:t>
             </a:r>
-            <a:endParaRPr lang="en-US"/>
           </a:p>
         </p:txBody>
       </p:sp>
@@ -1441,7 +1227,7 @@
           <a:p>
             <a:fld id="{5BCAD085-E8A6-8845-BD4E-CB4CCA059FC4}" type="datetimeFigureOut">
               <a:rPr lang="en-US" smtClean="0"/>
-              <a:t>1/27/13</a:t>
+              <a:t>10/26/2026</a:t>
             </a:fld>
             <a:endParaRPr lang="en-US"/>
           </a:p>
@@ -1544,10 +1330,9 @@
           </a:lstStyle>
           <a:p>
             <a:r>
-              <a:rPr lang="en-US" smtClean="0"/>
+              <a:rPr lang="en-US"/>
               <a:t>Click to edit Master title style</a:t>
             </a:r>
-            <a:endParaRPr lang="en-US"/>
           </a:p>
         </p:txBody>
       </p:sp>
@@ -1664,7 +1449,7 @@
           <a:p>
             <a:pPr lvl="0"/>
             <a:r>
-              <a:rPr lang="en-US" smtClean="0"/>
+              <a:rPr lang="en-US"/>
               <a:t>Click to edit Master text styles</a:t>
             </a:r>
           </a:p>
@@ -1687,7 +1472,7 @@
           <a:p>
             <a:fld id="{5BCAD085-E8A6-8845-BD4E-CB4CCA059FC4}" type="datetimeFigureOut">
               <a:rPr lang="en-US" smtClean="0"/>
-              <a:t>1/27/13</a:t>
+              <a:t>10/26/2026</a:t>
             </a:fld>
             <a:endParaRPr lang="en-US"/>
           </a:p>
@@ -1781,10 +1566,9 @@
           <a:lstStyle/>
           <a:p>
             <a:r>
-              <a:rPr lang="en-US" smtClean="0"/>
+              <a:rPr lang="en-US"/>
               <a:t>Click to edit Master title style</a:t>
             </a:r>
-            <a:endParaRPr lang="en-US"/>
           </a:p>
         </p:txBody>
       </p:sp>
@@ -1838,38 +1622,37 @@
           <a:p>
             <a:pPr lvl="0"/>
             <a:r>
-              <a:rPr lang="en-US" smtClean="0"/>
+              <a:rPr lang="en-US"/>
               <a:t>Click to edit Master text styles</a:t>
             </a:r>
           </a:p>
           <a:p>
             <a:pPr lvl="1"/>
             <a:r>
-              <a:rPr lang="en-US" smtClean="0"/>
+              <a:rPr lang="en-US"/>
               <a:t>Second level</a:t>
             </a:r>
           </a:p>
           <a:p>
             <a:pPr lvl="2"/>
             <a:r>
-              <a:rPr lang="en-US" smtClean="0"/>
+              <a:rPr lang="en-US"/>
               <a:t>Third level</a:t>
             </a:r>
           </a:p>
           <a:p>
             <a:pPr lvl="3"/>
             <a:r>
-              <a:rPr lang="en-US" smtClean="0"/>
+              <a:rPr lang="en-US"/>
               <a:t>Fourth level</a:t>
             </a:r>
           </a:p>
           <a:p>
             <a:pPr lvl="4"/>
             <a:r>
-              <a:rPr lang="en-US" smtClean="0"/>
+              <a:rPr lang="en-US"/>
               <a:t>Fifth level</a:t>
             </a:r>
-            <a:endParaRPr lang="en-US"/>
           </a:p>
         </p:txBody>
       </p:sp>
@@ -1923,38 +1706,37 @@
           <a:p>
             <a:pPr lvl="0"/>
             <a:r>
-              <a:rPr lang="en-US" smtClean="0"/>
+              <a:rPr lang="en-US"/>
               <a:t>Click to edit Master text styles</a:t>
             </a:r>
           </a:p>
           <a:p>
             <a:pPr lvl="1"/>
             <a:r>
-              <a:rPr lang="en-US" smtClean="0"/>
+              <a:rPr lang="en-US"/>
               <a:t>Second level</a:t>
             </a:r>
           </a:p>
           <a:p>
             <a:pPr lvl="2"/>
             <a:r>
-              <a:rPr lang="en-US" smtClean="0"/>
+              <a:rPr lang="en-US"/>
               <a:t>Third level</a:t>
             </a:r>
           </a:p>
           <a:p>
             <a:pPr lvl="3"/>
             <a:r>
-              <a:rPr lang="en-US" smtClean="0"/>
+              <a:rPr lang="en-US"/>
               <a:t>Fourth level</a:t>
             </a:r>
           </a:p>
           <a:p>
             <a:pPr lvl="4"/>
             <a:r>
-              <a:rPr lang="en-US" smtClean="0"/>
+              <a:rPr lang="en-US"/>
               <a:t>Fifth level</a:t>
             </a:r>
-            <a:endParaRPr lang="en-US"/>
           </a:p>
         </p:txBody>
       </p:sp>
@@ -1975,7 +1757,7 @@
           <a:p>
             <a:fld id="{5BCAD085-E8A6-8845-BD4E-CB4CCA059FC4}" type="datetimeFigureOut">
               <a:rPr lang="en-US" smtClean="0"/>
-              <a:t>1/27/13</a:t>
+              <a:t>10/26/2026</a:t>
             </a:fld>
             <a:endParaRPr lang="en-US"/>
           </a:p>
@@ -2073,10 +1855,9 @@
           </a:lstStyle>
           <a:p>
             <a:r>
-              <a:rPr lang="en-US" smtClean="0"/>
+              <a:rPr lang="en-US"/>
               <a:t>Click to edit Master title style</a:t>
             </a:r>
-            <a:endParaRPr lang="en-US"/>
           </a:p>
         </p:txBody>
       </p:sp>
@@ -2139,7 +1920,7 @@
           <a:p>
             <a:pPr lvl="0"/>
             <a:r>
-              <a:rPr lang="en-US" smtClean="0"/>
+              <a:rPr lang="en-US"/>
               <a:t>Click to edit Master text styles</a:t>
             </a:r>
           </a:p>
@@ -2195,38 +1976,37 @@
           <a:p>
             <a:pPr lvl="0"/>
             <a:r>
-              <a:rPr lang="en-US" smtClean="0"/>
+              <a:rPr lang="en-US"/>
               <a:t>Click to edit Master text styles</a:t>
             </a:r>
           </a:p>
           <a:p>
             <a:pPr lvl="1"/>
             <a:r>
-              <a:rPr lang="en-US" smtClean="0"/>
+              <a:rPr lang="en-US"/>
               <a:t>Second level</a:t>
             </a:r>
           </a:p>
           <a:p>
             <a:pPr lvl="2"/>
             <a:r>
-              <a:rPr lang="en-US" smtClean="0"/>
+              <a:rPr lang="en-US"/>
               <a:t>Third level</a:t>
             </a:r>
           </a:p>
           <a:p>
             <a:pPr lvl="3"/>
             <a:r>
-              <a:rPr lang="en-US" smtClean="0"/>
+              <a:rPr lang="en-US"/>
               <a:t>Fourth level</a:t>
             </a:r>
           </a:p>
           <a:p>
             <a:pPr lvl="4"/>
             <a:r>
-              <a:rPr lang="en-US" smtClean="0"/>
+              <a:rPr lang="en-US"/>
               <a:t>Fifth level</a:t>
             </a:r>
-            <a:endParaRPr lang="en-US"/>
           </a:p>
         </p:txBody>
       </p:sp>
@@ -2289,7 +2069,7 @@
           <a:p>
             <a:pPr lvl="0"/>
             <a:r>
-              <a:rPr lang="en-US" smtClean="0"/>
+              <a:rPr lang="en-US"/>
               <a:t>Click to edit Master text styles</a:t>
             </a:r>
           </a:p>
@@ -2345,38 +2125,37 @@
           <a:p>
             <a:pPr lvl="0"/>
             <a:r>
-              <a:rPr lang="en-US" smtClean="0"/>
+              <a:rPr lang="en-US"/>
               <a:t>Click to edit Master text styles</a:t>
             </a:r>
           </a:p>
           <a:p>
             <a:pPr lvl="1"/>
             <a:r>
-              <a:rPr lang="en-US" smtClean="0"/>
+              <a:rPr lang="en-US"/>
               <a:t>Second level</a:t>
             </a:r>
           </a:p>
           <a:p>
             <a:pPr lvl="2"/>
             <a:r>
-              <a:rPr lang="en-US" smtClean="0"/>
+              <a:rPr lang="en-US"/>
               <a:t>Third level</a:t>
             </a:r>
           </a:p>
           <a:p>
             <a:pPr lvl="3"/>
             <a:r>
-              <a:rPr lang="en-US" smtClean="0"/>
+              <a:rPr lang="en-US"/>
               <a:t>Fourth level</a:t>
             </a:r>
           </a:p>
           <a:p>
             <a:pPr lvl="4"/>
             <a:r>
-              <a:rPr lang="en-US" smtClean="0"/>
+              <a:rPr lang="en-US"/>
               <a:t>Fifth level</a:t>
             </a:r>
-            <a:endParaRPr lang="en-US"/>
           </a:p>
         </p:txBody>
       </p:sp>
@@ -2397,7 +2176,7 @@
           <a:p>
             <a:fld id="{5BCAD085-E8A6-8845-BD4E-CB4CCA059FC4}" type="datetimeFigureOut">
               <a:rPr lang="en-US" smtClean="0"/>
-              <a:t>1/27/13</a:t>
+              <a:t>10/26/2026</a:t>
             </a:fld>
             <a:endParaRPr lang="en-US"/>
           </a:p>
@@ -2491,10 +2270,9 @@
           <a:lstStyle/>
           <a:p>
             <a:r>
-              <a:rPr lang="en-US" smtClean="0"/>
+              <a:rPr lang="en-US"/>
               <a:t>Click to edit Master title style</a:t>
             </a:r>
-            <a:endParaRPr lang="en-US"/>
           </a:p>
         </p:txBody>
       </p:sp>
@@ -2515,7 +2293,7 @@
           <a:p>
             <a:fld id="{5BCAD085-E8A6-8845-BD4E-CB4CCA059FC4}" type="datetimeFigureOut">
               <a:rPr lang="en-US" smtClean="0"/>
-              <a:t>1/27/13</a:t>
+              <a:t>10/26/2026</a:t>
             </a:fld>
             <a:endParaRPr lang="en-US"/>
           </a:p>
@@ -2610,7 +2388,7 @@
           <a:p>
             <a:fld id="{5BCAD085-E8A6-8845-BD4E-CB4CCA059FC4}" type="datetimeFigureOut">
               <a:rPr lang="en-US" smtClean="0"/>
-              <a:t>1/27/13</a:t>
+              <a:t>10/26/2026</a:t>
             </a:fld>
             <a:endParaRPr lang="en-US"/>
           </a:p>
@@ -2713,10 +2491,9 @@
           </a:lstStyle>
           <a:p>
             <a:r>
-              <a:rPr lang="en-US" smtClean="0"/>
+              <a:rPr lang="en-US"/>
               <a:t>Click to edit Master title style</a:t>
             </a:r>
-            <a:endParaRPr lang="en-US"/>
           </a:p>
         </p:txBody>
       </p:sp>
@@ -2770,38 +2547,37 @@
           <a:p>
             <a:pPr lvl="0"/>
             <a:r>
-              <a:rPr lang="en-US" smtClean="0"/>
+              <a:rPr lang="en-US"/>
               <a:t>Click to edit Master text styles</a:t>
             </a:r>
           </a:p>
           <a:p>
             <a:pPr lvl="1"/>
             <a:r>
-              <a:rPr lang="en-US" smtClean="0"/>
+              <a:rPr lang="en-US"/>
               <a:t>Second level</a:t>
             </a:r>
           </a:p>
           <a:p>
             <a:pPr lvl="2"/>
             <a:r>
-              <a:rPr lang="en-US" smtClean="0"/>
+              <a:rPr lang="en-US"/>
               <a:t>Third level</a:t>
             </a:r>
           </a:p>
           <a:p>
             <a:pPr lvl="3"/>
             <a:r>
-              <a:rPr lang="en-US" smtClean="0"/>
+              <a:rPr lang="en-US"/>
               <a:t>Fourth level</a:t>
             </a:r>
           </a:p>
           <a:p>
             <a:pPr lvl="4"/>
             <a:r>
-              <a:rPr lang="en-US" smtClean="0"/>
+              <a:rPr lang="en-US"/>
               <a:t>Fifth level</a:t>
             </a:r>
-            <a:endParaRPr lang="en-US"/>
           </a:p>
         </p:txBody>
       </p:sp>
@@ -2864,7 +2640,7 @@
           <a:p>
             <a:pPr lvl="0"/>
             <a:r>
-              <a:rPr lang="en-US" smtClean="0"/>
+              <a:rPr lang="en-US"/>
               <a:t>Click to edit Master text styles</a:t>
             </a:r>
           </a:p>
@@ -2887,7 +2663,7 @@
           <a:p>
             <a:fld id="{5BCAD085-E8A6-8845-BD4E-CB4CCA059FC4}" type="datetimeFigureOut">
               <a:rPr lang="en-US" smtClean="0"/>
-              <a:t>1/27/13</a:t>
+              <a:t>10/26/2026</a:t>
             </a:fld>
             <a:endParaRPr lang="en-US"/>
           </a:p>
@@ -2990,10 +2766,9 @@
           </a:lstStyle>
           <a:p>
             <a:r>
-              <a:rPr lang="en-US" smtClean="0"/>
+              <a:rPr lang="en-US"/>
               <a:t>Click to edit Master title style</a:t>
             </a:r>
-            <a:endParaRPr lang="en-US"/>
           </a:p>
         </p:txBody>
       </p:sp>
@@ -3117,7 +2892,7 @@
           <a:p>
             <a:pPr lvl="0"/>
             <a:r>
-              <a:rPr lang="en-US" smtClean="0"/>
+              <a:rPr lang="en-US"/>
               <a:t>Click to edit Master text styles</a:t>
             </a:r>
           </a:p>
@@ -3140,7 +2915,7 @@
           <a:p>
             <a:fld id="{5BCAD085-E8A6-8845-BD4E-CB4CCA059FC4}" type="datetimeFigureOut">
               <a:rPr lang="en-US" smtClean="0"/>
-              <a:t>1/27/13</a:t>
+              <a:t>10/26/2026</a:t>
             </a:fld>
             <a:endParaRPr lang="en-US"/>
           </a:p>
@@ -3249,10 +3024,9 @@
           <a:lstStyle/>
           <a:p>
             <a:r>
-              <a:rPr lang="en-US" smtClean="0"/>
+              <a:rPr lang="en-US"/>
               <a:t>Click to edit Master title style</a:t>
             </a:r>
-            <a:endParaRPr lang="en-US"/>
           </a:p>
         </p:txBody>
       </p:sp>
@@ -3283,38 +3057,37 @@
           <a:p>
             <a:pPr lvl="0"/>
             <a:r>
-              <a:rPr lang="en-US" smtClean="0"/>
+              <a:rPr lang="en-US"/>
               <a:t>Click to edit Master text styles</a:t>
             </a:r>
           </a:p>
           <a:p>
             <a:pPr lvl="1"/>
             <a:r>
-              <a:rPr lang="en-US" smtClean="0"/>
+              <a:rPr lang="en-US"/>
               <a:t>Second level</a:t>
             </a:r>
           </a:p>
           <a:p>
             <a:pPr lvl="2"/>
             <a:r>
-              <a:rPr lang="en-US" smtClean="0"/>
+              <a:rPr lang="en-US"/>
               <a:t>Third level</a:t>
             </a:r>
           </a:p>
           <a:p>
             <a:pPr lvl="3"/>
             <a:r>
-              <a:rPr lang="en-US" smtClean="0"/>
+              <a:rPr lang="en-US"/>
               <a:t>Fourth level</a:t>
             </a:r>
           </a:p>
           <a:p>
             <a:pPr lvl="4"/>
             <a:r>
-              <a:rPr lang="en-US" smtClean="0"/>
+              <a:rPr lang="en-US"/>
               <a:t>Fifth level</a:t>
             </a:r>
-            <a:endParaRPr lang="en-US"/>
           </a:p>
         </p:txBody>
       </p:sp>
@@ -3353,7 +3126,7 @@
           <a:p>
             <a:fld id="{5BCAD085-E8A6-8845-BD4E-CB4CCA059FC4}" type="datetimeFigureOut">
               <a:rPr lang="en-US" smtClean="0"/>
-              <a:t>1/27/13</a:t>
+              <a:t>10/26/2026</a:t>
             </a:fld>
             <a:endParaRPr lang="en-US"/>
           </a:p>
@@ -3712,7 +3485,1950 @@
 </file>
 
 <file path=ppt/slides/slide1.xml><?xml version="1.0" encoding="utf-8"?>
-<p:sld xmlns:a="http://schemas.openxmlformats.org/drawingml/2006/main" xmlns:p="http://schemas.openxmlformats.org/presentationml/2006/main" xmlns:r="http://schemas.openxmlformats.org/officeDocument/2006/relationships">
+<p:sld xmlns:a="http://schemas.openxmlformats.org/drawingml/2006/main" xmlns:r="http://schemas.openxmlformats.org/officeDocument/2006/relationships" xmlns:p="http://schemas.openxmlformats.org/presentationml/2006/main">
+  <p:cSld>
+    <p:bg>
+      <p:bgPr>
+        <a:gradFill flip="none" rotWithShape="1">
+          <a:gsLst>
+            <a:gs pos="0">
+              <a:schemeClr val="accent1">
+                <a:lumMod val="5000"/>
+                <a:lumOff val="95000"/>
+              </a:schemeClr>
+            </a:gs>
+            <a:gs pos="30266">
+              <a:srgbClr val="ECF2FA"/>
+            </a:gs>
+            <a:gs pos="17000">
+              <a:srgbClr val="EAF1F9"/>
+            </a:gs>
+            <a:gs pos="100000">
+              <a:schemeClr val="tx2">
+                <a:alpha val="39000"/>
+                <a:lumMod val="20000"/>
+                <a:lumOff val="80000"/>
+              </a:schemeClr>
+            </a:gs>
+          </a:gsLst>
+          <a:lin ang="10800000" scaled="1"/>
+          <a:tileRect/>
+        </a:gradFill>
+        <a:effectLst/>
+      </p:bgPr>
+    </p:bg>
+    <p:spTree>
+      <p:nvGrpSpPr>
+        <p:cNvPr id="1" name=""/>
+        <p:cNvGrpSpPr/>
+        <p:nvPr/>
+      </p:nvGrpSpPr>
+      <p:grpSpPr>
+        <a:xfrm>
+          <a:off x="0" y="0"/>
+          <a:ext cx="0" cy="0"/>
+          <a:chOff x="0" y="0"/>
+          <a:chExt cx="0" cy="0"/>
+        </a:xfrm>
+      </p:grpSpPr>
+      <p:sp>
+        <p:nvSpPr>
+          <p:cNvPr id="2" name="TextBox 1"/>
+          <p:cNvSpPr txBox="1"/>
+          <p:nvPr/>
+        </p:nvSpPr>
+        <p:spPr>
+          <a:xfrm>
+            <a:off x="640080" y="365760"/>
+            <a:ext cx="8229600" cy="274320"/>
+          </a:xfrm>
+          <a:prstGeom prst="rect">
+            <a:avLst/>
+          </a:prstGeom>
+          <a:noFill/>
+        </p:spPr>
+        <p:txBody>
+          <a:bodyPr wrap="square" lIns="0" tIns="0" rIns="0" bIns="0" anchor="t">
+            <a:spAutoFit/>
+          </a:bodyPr>
+          <a:lstStyle/>
+          <a:p>
+            <a:pPr>
+              <a:spcAft>
+                <a:spcPts val="600"/>
+              </a:spcAft>
+            </a:pPr>
+            <a:r>
+              <a:rPr sz="1200" dirty="0">
+                <a:solidFill>
+                  <a:srgbClr val="2A6FD1"/>
+                </a:solidFill>
+                <a:latin typeface="Segoe UI Semibold"/>
+              </a:rPr>
+              <a:t>THE PROBLEM</a:t>
+            </a:r>
+          </a:p>
+        </p:txBody>
+      </p:sp>
+      <p:sp>
+        <p:nvSpPr>
+          <p:cNvPr id="3" name="TextBox 2"/>
+          <p:cNvSpPr txBox="1"/>
+          <p:nvPr/>
+        </p:nvSpPr>
+        <p:spPr>
+          <a:xfrm>
+            <a:off x="640080" y="658368"/>
+            <a:ext cx="10881360" cy="984885"/>
+          </a:xfrm>
+          <a:prstGeom prst="rect">
+            <a:avLst/>
+          </a:prstGeom>
+          <a:noFill/>
+        </p:spPr>
+        <p:txBody>
+          <a:bodyPr wrap="square" lIns="0" tIns="0" rIns="0" bIns="0" anchor="t">
+            <a:spAutoFit/>
+          </a:bodyPr>
+          <a:lstStyle/>
+          <a:p>
+            <a:pPr>
+              <a:spcAft>
+                <a:spcPts val="600"/>
+              </a:spcAft>
+            </a:pPr>
+            <a:r>
+              <a:rPr lang="en-AU" sz="3200" dirty="0"/>
+              <a:t>Packing Smarter: Can AI Learn to Outperform Traditional Methods for Managing Cloud Resources </a:t>
+            </a:r>
+            <a:endParaRPr sz="3000" dirty="0">
+              <a:solidFill>
+                <a:srgbClr val="0E2238"/>
+              </a:solidFill>
+              <a:latin typeface="Segoe UI Semibold"/>
+            </a:endParaRPr>
+          </a:p>
+        </p:txBody>
+      </p:sp>
+      <p:sp>
+        <p:nvSpPr>
+          <p:cNvPr id="4" name="TextBox 3"/>
+          <p:cNvSpPr txBox="1"/>
+          <p:nvPr/>
+        </p:nvSpPr>
+        <p:spPr>
+          <a:xfrm>
+            <a:off x="640080" y="6446520"/>
+            <a:ext cx="7315200" cy="274320"/>
+          </a:xfrm>
+          <a:prstGeom prst="rect">
+            <a:avLst/>
+          </a:prstGeom>
+          <a:noFill/>
+        </p:spPr>
+        <p:txBody>
+          <a:bodyPr wrap="square" lIns="0" tIns="0" rIns="0" bIns="0" anchor="t">
+            <a:spAutoFit/>
+          </a:bodyPr>
+          <a:lstStyle/>
+          <a:p>
+            <a:pPr>
+              <a:spcAft>
+                <a:spcPts val="600"/>
+              </a:spcAft>
+            </a:pPr>
+            <a:r>
+              <a:rPr sz="1000">
+                <a:solidFill>
+                  <a:srgbClr val="56677A"/>
+                </a:solidFill>
+                <a:latin typeface="Segoe UI"/>
+              </a:rPr>
+              <a:t>Ethan Ty Riekert  |  Curtin University  |  Supervisors: Elham Mardaneh, Tony Mathew</a:t>
+            </a:r>
+          </a:p>
+        </p:txBody>
+      </p:sp>
+      <p:sp>
+        <p:nvSpPr>
+          <p:cNvPr id="5" name="TextBox 4"/>
+          <p:cNvSpPr txBox="1"/>
+          <p:nvPr/>
+        </p:nvSpPr>
+        <p:spPr>
+          <a:xfrm>
+            <a:off x="10332720" y="6446520"/>
+            <a:ext cx="1234440" cy="274320"/>
+          </a:xfrm>
+          <a:prstGeom prst="rect">
+            <a:avLst/>
+          </a:prstGeom>
+          <a:noFill/>
+        </p:spPr>
+        <p:txBody>
+          <a:bodyPr wrap="square" lIns="0" tIns="0" rIns="0" bIns="0" anchor="t">
+            <a:spAutoFit/>
+          </a:bodyPr>
+          <a:lstStyle/>
+          <a:p>
+            <a:pPr algn="r">
+              <a:spcAft>
+                <a:spcPts val="600"/>
+              </a:spcAft>
+            </a:pPr>
+            <a:r>
+              <a:rPr sz="1000">
+                <a:solidFill>
+                  <a:srgbClr val="56677A"/>
+                </a:solidFill>
+                <a:latin typeface="Segoe UI"/>
+              </a:rPr>
+              <a:t>1 / 4</a:t>
+            </a:r>
+          </a:p>
+        </p:txBody>
+      </p:sp>
+      <p:sp>
+        <p:nvSpPr>
+          <p:cNvPr id="6" name="Rounded Rectangle 5"/>
+          <p:cNvSpPr/>
+          <p:nvPr/>
+        </p:nvSpPr>
+        <p:spPr>
+          <a:xfrm>
+            <a:off x="640080" y="1821872"/>
+            <a:ext cx="6309360" cy="3337560"/>
+          </a:xfrm>
+          <a:prstGeom prst="roundRect">
+            <a:avLst>
+              <a:gd name="adj" fmla="val 4000"/>
+            </a:avLst>
+          </a:prstGeom>
+          <a:solidFill>
+            <a:srgbClr val="EEF4FC"/>
+          </a:solidFill>
+          <a:ln w="15875">
+            <a:solidFill>
+              <a:srgbClr val="CBD9EE"/>
+            </a:solidFill>
+          </a:ln>
+          <a:effectLst/>
+        </p:spPr>
+        <p:style>
+          <a:lnRef idx="1">
+            <a:schemeClr val="accent1"/>
+          </a:lnRef>
+          <a:fillRef idx="3">
+            <a:schemeClr val="accent1"/>
+          </a:fillRef>
+          <a:effectRef idx="2">
+            <a:schemeClr val="accent1"/>
+          </a:effectRef>
+          <a:fontRef idx="minor">
+            <a:schemeClr val="lt1"/>
+          </a:fontRef>
+        </p:style>
+        <p:txBody>
+          <a:bodyPr rtlCol="0" anchor="ctr"/>
+          <a:lstStyle/>
+          <a:p>
+            <a:pPr algn="ctr"/>
+            <a:endParaRPr/>
+          </a:p>
+        </p:txBody>
+      </p:sp>
+      <p:sp>
+        <p:nvSpPr>
+          <p:cNvPr id="7" name="TextBox 6"/>
+          <p:cNvSpPr txBox="1"/>
+          <p:nvPr/>
+        </p:nvSpPr>
+        <p:spPr>
+          <a:xfrm>
+            <a:off x="868680" y="2279072"/>
+            <a:ext cx="640080" cy="274320"/>
+          </a:xfrm>
+          <a:prstGeom prst="rect">
+            <a:avLst/>
+          </a:prstGeom>
+          <a:noFill/>
+        </p:spPr>
+        <p:txBody>
+          <a:bodyPr wrap="square" lIns="0" tIns="0" rIns="0" bIns="0" anchor="t">
+            <a:spAutoFit/>
+          </a:bodyPr>
+          <a:lstStyle/>
+          <a:p>
+            <a:pPr>
+              <a:spcAft>
+                <a:spcPts val="600"/>
+              </a:spcAft>
+            </a:pPr>
+            <a:r>
+              <a:rPr sz="1300">
+                <a:solidFill>
+                  <a:srgbClr val="56677A"/>
+                </a:solidFill>
+                <a:latin typeface="Segoe UI Semibold"/>
+              </a:rPr>
+              <a:t>M1</a:t>
+            </a:r>
+          </a:p>
+        </p:txBody>
+      </p:sp>
+      <p:sp>
+        <p:nvSpPr>
+          <p:cNvPr id="8" name="Rounded Rectangle 7"/>
+          <p:cNvSpPr/>
+          <p:nvPr/>
+        </p:nvSpPr>
+        <p:spPr>
+          <a:xfrm>
+            <a:off x="1600200" y="2187632"/>
+            <a:ext cx="5029200" cy="457200"/>
+          </a:xfrm>
+          <a:prstGeom prst="roundRect">
+            <a:avLst>
+              <a:gd name="adj" fmla="val 20000"/>
+            </a:avLst>
+          </a:prstGeom>
+          <a:solidFill>
+            <a:srgbClr val="FFFFFF"/>
+          </a:solidFill>
+          <a:ln w="12700">
+            <a:solidFill>
+              <a:srgbClr val="CBD9EE"/>
+            </a:solidFill>
+          </a:ln>
+          <a:effectLst/>
+        </p:spPr>
+        <p:style>
+          <a:lnRef idx="1">
+            <a:schemeClr val="accent1"/>
+          </a:lnRef>
+          <a:fillRef idx="3">
+            <a:schemeClr val="accent1"/>
+          </a:fillRef>
+          <a:effectRef idx="2">
+            <a:schemeClr val="accent1"/>
+          </a:effectRef>
+          <a:fontRef idx="minor">
+            <a:schemeClr val="lt1"/>
+          </a:fontRef>
+        </p:style>
+        <p:txBody>
+          <a:bodyPr rtlCol="0" anchor="ctr"/>
+          <a:lstStyle/>
+          <a:p>
+            <a:pPr algn="ctr"/>
+            <a:endParaRPr/>
+          </a:p>
+        </p:txBody>
+      </p:sp>
+      <p:sp>
+        <p:nvSpPr>
+          <p:cNvPr id="9" name="Rounded Rectangle 8"/>
+          <p:cNvSpPr/>
+          <p:nvPr/>
+        </p:nvSpPr>
+        <p:spPr>
+          <a:xfrm>
+            <a:off x="1627632" y="2242496"/>
+            <a:ext cx="850392" cy="347472"/>
+          </a:xfrm>
+          <a:prstGeom prst="roundRect">
+            <a:avLst>
+              <a:gd name="adj" fmla="val 25000"/>
+            </a:avLst>
+          </a:prstGeom>
+          <a:solidFill>
+            <a:srgbClr val="2A6FD1"/>
+          </a:solidFill>
+          <a:ln>
+            <a:noFill/>
+          </a:ln>
+          <a:effectLst/>
+        </p:spPr>
+        <p:style>
+          <a:lnRef idx="1">
+            <a:schemeClr val="accent1"/>
+          </a:lnRef>
+          <a:fillRef idx="3">
+            <a:schemeClr val="accent1"/>
+          </a:fillRef>
+          <a:effectRef idx="2">
+            <a:schemeClr val="accent1"/>
+          </a:effectRef>
+          <a:fontRef idx="minor">
+            <a:schemeClr val="lt1"/>
+          </a:fontRef>
+        </p:style>
+        <p:txBody>
+          <a:bodyPr rtlCol="0" anchor="ctr"/>
+          <a:lstStyle/>
+          <a:p>
+            <a:pPr algn="ctr"/>
+            <a:endParaRPr/>
+          </a:p>
+        </p:txBody>
+      </p:sp>
+      <p:sp>
+        <p:nvSpPr>
+          <p:cNvPr id="10" name="Rounded Rectangle 9"/>
+          <p:cNvSpPr/>
+          <p:nvPr/>
+        </p:nvSpPr>
+        <p:spPr>
+          <a:xfrm>
+            <a:off x="2633472" y="2242496"/>
+            <a:ext cx="1051560" cy="347472"/>
+          </a:xfrm>
+          <a:prstGeom prst="roundRect">
+            <a:avLst>
+              <a:gd name="adj" fmla="val 25000"/>
+            </a:avLst>
+          </a:prstGeom>
+          <a:solidFill>
+            <a:srgbClr val="2A6FD1"/>
+          </a:solidFill>
+          <a:ln>
+            <a:noFill/>
+          </a:ln>
+          <a:effectLst/>
+        </p:spPr>
+        <p:style>
+          <a:lnRef idx="1">
+            <a:schemeClr val="accent1"/>
+          </a:lnRef>
+          <a:fillRef idx="3">
+            <a:schemeClr val="accent1"/>
+          </a:fillRef>
+          <a:effectRef idx="2">
+            <a:schemeClr val="accent1"/>
+          </a:effectRef>
+          <a:fontRef idx="minor">
+            <a:schemeClr val="lt1"/>
+          </a:fontRef>
+        </p:style>
+        <p:txBody>
+          <a:bodyPr rtlCol="0" anchor="ctr"/>
+          <a:lstStyle/>
+          <a:p>
+            <a:pPr algn="ctr"/>
+            <a:endParaRPr/>
+          </a:p>
+        </p:txBody>
+      </p:sp>
+      <p:sp>
+        <p:nvSpPr>
+          <p:cNvPr id="11" name="Rounded Rectangle 10"/>
+          <p:cNvSpPr/>
+          <p:nvPr/>
+        </p:nvSpPr>
+        <p:spPr>
+          <a:xfrm>
+            <a:off x="3840480" y="2242496"/>
+            <a:ext cx="950976" cy="347472"/>
+          </a:xfrm>
+          <a:prstGeom prst="roundRect">
+            <a:avLst>
+              <a:gd name="adj" fmla="val 25000"/>
+            </a:avLst>
+          </a:prstGeom>
+          <a:solidFill>
+            <a:srgbClr val="2A6FD1"/>
+          </a:solidFill>
+          <a:ln>
+            <a:noFill/>
+          </a:ln>
+          <a:effectLst/>
+        </p:spPr>
+        <p:style>
+          <a:lnRef idx="1">
+            <a:schemeClr val="accent1"/>
+          </a:lnRef>
+          <a:fillRef idx="3">
+            <a:schemeClr val="accent1"/>
+          </a:fillRef>
+          <a:effectRef idx="2">
+            <a:schemeClr val="accent1"/>
+          </a:effectRef>
+          <a:fontRef idx="minor">
+            <a:schemeClr val="lt1"/>
+          </a:fontRef>
+        </p:style>
+        <p:txBody>
+          <a:bodyPr rtlCol="0" anchor="ctr"/>
+          <a:lstStyle/>
+          <a:p>
+            <a:pPr algn="ctr"/>
+            <a:endParaRPr/>
+          </a:p>
+        </p:txBody>
+      </p:sp>
+      <p:sp>
+        <p:nvSpPr>
+          <p:cNvPr id="12" name="Rounded Rectangle 11"/>
+          <p:cNvSpPr/>
+          <p:nvPr/>
+        </p:nvSpPr>
+        <p:spPr>
+          <a:xfrm>
+            <a:off x="4946904" y="2242496"/>
+            <a:ext cx="1051560" cy="347472"/>
+          </a:xfrm>
+          <a:prstGeom prst="roundRect">
+            <a:avLst>
+              <a:gd name="adj" fmla="val 25000"/>
+            </a:avLst>
+          </a:prstGeom>
+          <a:solidFill>
+            <a:srgbClr val="E0702A"/>
+          </a:solidFill>
+          <a:ln>
+            <a:noFill/>
+          </a:ln>
+          <a:effectLst/>
+        </p:spPr>
+        <p:style>
+          <a:lnRef idx="1">
+            <a:schemeClr val="accent1"/>
+          </a:lnRef>
+          <a:fillRef idx="3">
+            <a:schemeClr val="accent1"/>
+          </a:fillRef>
+          <a:effectRef idx="2">
+            <a:schemeClr val="accent1"/>
+          </a:effectRef>
+          <a:fontRef idx="minor">
+            <a:schemeClr val="lt1"/>
+          </a:fontRef>
+        </p:style>
+        <p:txBody>
+          <a:bodyPr rtlCol="0" anchor="ctr"/>
+          <a:lstStyle/>
+          <a:p>
+            <a:pPr algn="ctr"/>
+            <a:endParaRPr/>
+          </a:p>
+        </p:txBody>
+      </p:sp>
+      <p:sp>
+        <p:nvSpPr>
+          <p:cNvPr id="13" name="TextBox 12"/>
+          <p:cNvSpPr txBox="1"/>
+          <p:nvPr/>
+        </p:nvSpPr>
+        <p:spPr>
+          <a:xfrm>
+            <a:off x="868680" y="2900864"/>
+            <a:ext cx="640080" cy="274320"/>
+          </a:xfrm>
+          <a:prstGeom prst="rect">
+            <a:avLst/>
+          </a:prstGeom>
+          <a:noFill/>
+        </p:spPr>
+        <p:txBody>
+          <a:bodyPr wrap="square" lIns="0" tIns="0" rIns="0" bIns="0" anchor="t">
+            <a:spAutoFit/>
+          </a:bodyPr>
+          <a:lstStyle/>
+          <a:p>
+            <a:pPr>
+              <a:spcAft>
+                <a:spcPts val="600"/>
+              </a:spcAft>
+            </a:pPr>
+            <a:r>
+              <a:rPr sz="1300">
+                <a:solidFill>
+                  <a:srgbClr val="56677A"/>
+                </a:solidFill>
+                <a:latin typeface="Segoe UI Semibold"/>
+              </a:rPr>
+              <a:t>M2</a:t>
+            </a:r>
+          </a:p>
+        </p:txBody>
+      </p:sp>
+      <p:sp>
+        <p:nvSpPr>
+          <p:cNvPr id="14" name="Rounded Rectangle 13"/>
+          <p:cNvSpPr/>
+          <p:nvPr/>
+        </p:nvSpPr>
+        <p:spPr>
+          <a:xfrm>
+            <a:off x="1600200" y="2809424"/>
+            <a:ext cx="5029200" cy="457200"/>
+          </a:xfrm>
+          <a:prstGeom prst="roundRect">
+            <a:avLst>
+              <a:gd name="adj" fmla="val 20000"/>
+            </a:avLst>
+          </a:prstGeom>
+          <a:solidFill>
+            <a:srgbClr val="FFFFFF"/>
+          </a:solidFill>
+          <a:ln w="12700">
+            <a:solidFill>
+              <a:srgbClr val="CBD9EE"/>
+            </a:solidFill>
+          </a:ln>
+          <a:effectLst/>
+        </p:spPr>
+        <p:style>
+          <a:lnRef idx="1">
+            <a:schemeClr val="accent1"/>
+          </a:lnRef>
+          <a:fillRef idx="3">
+            <a:schemeClr val="accent1"/>
+          </a:fillRef>
+          <a:effectRef idx="2">
+            <a:schemeClr val="accent1"/>
+          </a:effectRef>
+          <a:fontRef idx="minor">
+            <a:schemeClr val="lt1"/>
+          </a:fontRef>
+        </p:style>
+        <p:txBody>
+          <a:bodyPr rtlCol="0" anchor="ctr"/>
+          <a:lstStyle/>
+          <a:p>
+            <a:pPr algn="ctr"/>
+            <a:endParaRPr/>
+          </a:p>
+        </p:txBody>
+      </p:sp>
+      <p:sp>
+        <p:nvSpPr>
+          <p:cNvPr id="15" name="Rounded Rectangle 14"/>
+          <p:cNvSpPr/>
+          <p:nvPr/>
+        </p:nvSpPr>
+        <p:spPr>
+          <a:xfrm>
+            <a:off x="1627632" y="2864288"/>
+            <a:ext cx="1453895" cy="347472"/>
+          </a:xfrm>
+          <a:prstGeom prst="roundRect">
+            <a:avLst>
+              <a:gd name="adj" fmla="val 25000"/>
+            </a:avLst>
+          </a:prstGeom>
+          <a:solidFill>
+            <a:srgbClr val="2A6FD1"/>
+          </a:solidFill>
+          <a:ln>
+            <a:noFill/>
+          </a:ln>
+          <a:effectLst/>
+        </p:spPr>
+        <p:style>
+          <a:lnRef idx="1">
+            <a:schemeClr val="accent1"/>
+          </a:lnRef>
+          <a:fillRef idx="3">
+            <a:schemeClr val="accent1"/>
+          </a:fillRef>
+          <a:effectRef idx="2">
+            <a:schemeClr val="accent1"/>
+          </a:effectRef>
+          <a:fontRef idx="minor">
+            <a:schemeClr val="lt1"/>
+          </a:fontRef>
+        </p:style>
+        <p:txBody>
+          <a:bodyPr rtlCol="0" anchor="ctr"/>
+          <a:lstStyle/>
+          <a:p>
+            <a:pPr algn="ctr"/>
+            <a:endParaRPr/>
+          </a:p>
+        </p:txBody>
+      </p:sp>
+      <p:sp>
+        <p:nvSpPr>
+          <p:cNvPr id="16" name="Rounded Rectangle 15"/>
+          <p:cNvSpPr/>
+          <p:nvPr/>
+        </p:nvSpPr>
+        <p:spPr>
+          <a:xfrm>
+            <a:off x="3236975" y="2864288"/>
+            <a:ext cx="850392" cy="347472"/>
+          </a:xfrm>
+          <a:prstGeom prst="roundRect">
+            <a:avLst>
+              <a:gd name="adj" fmla="val 25000"/>
+            </a:avLst>
+          </a:prstGeom>
+          <a:solidFill>
+            <a:srgbClr val="2A6FD1"/>
+          </a:solidFill>
+          <a:ln>
+            <a:noFill/>
+          </a:ln>
+          <a:effectLst/>
+        </p:spPr>
+        <p:style>
+          <a:lnRef idx="1">
+            <a:schemeClr val="accent1"/>
+          </a:lnRef>
+          <a:fillRef idx="3">
+            <a:schemeClr val="accent1"/>
+          </a:fillRef>
+          <a:effectRef idx="2">
+            <a:schemeClr val="accent1"/>
+          </a:effectRef>
+          <a:fontRef idx="minor">
+            <a:schemeClr val="lt1"/>
+          </a:fontRef>
+        </p:style>
+        <p:txBody>
+          <a:bodyPr rtlCol="0" anchor="ctr"/>
+          <a:lstStyle/>
+          <a:p>
+            <a:pPr algn="ctr"/>
+            <a:endParaRPr/>
+          </a:p>
+        </p:txBody>
+      </p:sp>
+      <p:sp>
+        <p:nvSpPr>
+          <p:cNvPr id="17" name="Rounded Rectangle 16"/>
+          <p:cNvSpPr/>
+          <p:nvPr/>
+        </p:nvSpPr>
+        <p:spPr>
+          <a:xfrm>
+            <a:off x="4242816" y="2864288"/>
+            <a:ext cx="1152143" cy="347472"/>
+          </a:xfrm>
+          <a:prstGeom prst="roundRect">
+            <a:avLst>
+              <a:gd name="adj" fmla="val 25000"/>
+            </a:avLst>
+          </a:prstGeom>
+          <a:solidFill>
+            <a:srgbClr val="2A6FD1"/>
+          </a:solidFill>
+          <a:ln>
+            <a:noFill/>
+          </a:ln>
+          <a:effectLst/>
+        </p:spPr>
+        <p:style>
+          <a:lnRef idx="1">
+            <a:schemeClr val="accent1"/>
+          </a:lnRef>
+          <a:fillRef idx="3">
+            <a:schemeClr val="accent1"/>
+          </a:fillRef>
+          <a:effectRef idx="2">
+            <a:schemeClr val="accent1"/>
+          </a:effectRef>
+          <a:fontRef idx="minor">
+            <a:schemeClr val="lt1"/>
+          </a:fontRef>
+        </p:style>
+        <p:txBody>
+          <a:bodyPr rtlCol="0" anchor="ctr"/>
+          <a:lstStyle/>
+          <a:p>
+            <a:pPr algn="ctr"/>
+            <a:endParaRPr/>
+          </a:p>
+        </p:txBody>
+      </p:sp>
+      <p:sp>
+        <p:nvSpPr>
+          <p:cNvPr id="18" name="Rounded Rectangle 17"/>
+          <p:cNvSpPr/>
+          <p:nvPr/>
+        </p:nvSpPr>
+        <p:spPr>
+          <a:xfrm>
+            <a:off x="5550408" y="2864288"/>
+            <a:ext cx="649224" cy="347472"/>
+          </a:xfrm>
+          <a:prstGeom prst="roundRect">
+            <a:avLst>
+              <a:gd name="adj" fmla="val 25000"/>
+            </a:avLst>
+          </a:prstGeom>
+          <a:solidFill>
+            <a:srgbClr val="E0702A"/>
+          </a:solidFill>
+          <a:ln>
+            <a:noFill/>
+          </a:ln>
+          <a:effectLst/>
+        </p:spPr>
+        <p:style>
+          <a:lnRef idx="1">
+            <a:schemeClr val="accent1"/>
+          </a:lnRef>
+          <a:fillRef idx="3">
+            <a:schemeClr val="accent1"/>
+          </a:fillRef>
+          <a:effectRef idx="2">
+            <a:schemeClr val="accent1"/>
+          </a:effectRef>
+          <a:fontRef idx="minor">
+            <a:schemeClr val="lt1"/>
+          </a:fontRef>
+        </p:style>
+        <p:txBody>
+          <a:bodyPr rtlCol="0" anchor="ctr"/>
+          <a:lstStyle/>
+          <a:p>
+            <a:pPr algn="ctr"/>
+            <a:endParaRPr/>
+          </a:p>
+        </p:txBody>
+      </p:sp>
+      <p:sp>
+        <p:nvSpPr>
+          <p:cNvPr id="19" name="TextBox 18"/>
+          <p:cNvSpPr txBox="1"/>
+          <p:nvPr/>
+        </p:nvSpPr>
+        <p:spPr>
+          <a:xfrm>
+            <a:off x="868680" y="3522656"/>
+            <a:ext cx="640080" cy="274320"/>
+          </a:xfrm>
+          <a:prstGeom prst="rect">
+            <a:avLst/>
+          </a:prstGeom>
+          <a:noFill/>
+        </p:spPr>
+        <p:txBody>
+          <a:bodyPr wrap="square" lIns="0" tIns="0" rIns="0" bIns="0" anchor="t">
+            <a:spAutoFit/>
+          </a:bodyPr>
+          <a:lstStyle/>
+          <a:p>
+            <a:pPr>
+              <a:spcAft>
+                <a:spcPts val="600"/>
+              </a:spcAft>
+            </a:pPr>
+            <a:r>
+              <a:rPr sz="1300">
+                <a:solidFill>
+                  <a:srgbClr val="56677A"/>
+                </a:solidFill>
+                <a:latin typeface="Segoe UI Semibold"/>
+              </a:rPr>
+              <a:t>M3</a:t>
+            </a:r>
+          </a:p>
+        </p:txBody>
+      </p:sp>
+      <p:sp>
+        <p:nvSpPr>
+          <p:cNvPr id="20" name="Rounded Rectangle 19"/>
+          <p:cNvSpPr/>
+          <p:nvPr/>
+        </p:nvSpPr>
+        <p:spPr>
+          <a:xfrm>
+            <a:off x="1600200" y="3431216"/>
+            <a:ext cx="5029200" cy="457200"/>
+          </a:xfrm>
+          <a:prstGeom prst="roundRect">
+            <a:avLst>
+              <a:gd name="adj" fmla="val 20000"/>
+            </a:avLst>
+          </a:prstGeom>
+          <a:solidFill>
+            <a:srgbClr val="FFFFFF"/>
+          </a:solidFill>
+          <a:ln w="12700">
+            <a:solidFill>
+              <a:srgbClr val="CBD9EE"/>
+            </a:solidFill>
+          </a:ln>
+          <a:effectLst/>
+        </p:spPr>
+        <p:style>
+          <a:lnRef idx="1">
+            <a:schemeClr val="accent1"/>
+          </a:lnRef>
+          <a:fillRef idx="3">
+            <a:schemeClr val="accent1"/>
+          </a:fillRef>
+          <a:effectRef idx="2">
+            <a:schemeClr val="accent1"/>
+          </a:effectRef>
+          <a:fontRef idx="minor">
+            <a:schemeClr val="lt1"/>
+          </a:fontRef>
+        </p:style>
+        <p:txBody>
+          <a:bodyPr rtlCol="0" anchor="ctr"/>
+          <a:lstStyle/>
+          <a:p>
+            <a:pPr algn="ctr"/>
+            <a:endParaRPr/>
+          </a:p>
+        </p:txBody>
+      </p:sp>
+      <p:sp>
+        <p:nvSpPr>
+          <p:cNvPr id="21" name="Rounded Rectangle 20"/>
+          <p:cNvSpPr/>
+          <p:nvPr/>
+        </p:nvSpPr>
+        <p:spPr>
+          <a:xfrm>
+            <a:off x="1627632" y="3486080"/>
+            <a:ext cx="649224" cy="347472"/>
+          </a:xfrm>
+          <a:prstGeom prst="roundRect">
+            <a:avLst>
+              <a:gd name="adj" fmla="val 25000"/>
+            </a:avLst>
+          </a:prstGeom>
+          <a:solidFill>
+            <a:srgbClr val="2A6FD1"/>
+          </a:solidFill>
+          <a:ln>
+            <a:noFill/>
+          </a:ln>
+          <a:effectLst/>
+        </p:spPr>
+        <p:style>
+          <a:lnRef idx="1">
+            <a:schemeClr val="accent1"/>
+          </a:lnRef>
+          <a:fillRef idx="3">
+            <a:schemeClr val="accent1"/>
+          </a:fillRef>
+          <a:effectRef idx="2">
+            <a:schemeClr val="accent1"/>
+          </a:effectRef>
+          <a:fontRef idx="minor">
+            <a:schemeClr val="lt1"/>
+          </a:fontRef>
+        </p:style>
+        <p:txBody>
+          <a:bodyPr rtlCol="0" anchor="ctr"/>
+          <a:lstStyle/>
+          <a:p>
+            <a:pPr algn="ctr"/>
+            <a:endParaRPr/>
+          </a:p>
+        </p:txBody>
+      </p:sp>
+      <p:sp>
+        <p:nvSpPr>
+          <p:cNvPr id="22" name="Rounded Rectangle 21"/>
+          <p:cNvSpPr/>
+          <p:nvPr/>
+        </p:nvSpPr>
+        <p:spPr>
+          <a:xfrm>
+            <a:off x="2432303" y="3486080"/>
+            <a:ext cx="1453895" cy="347472"/>
+          </a:xfrm>
+          <a:prstGeom prst="roundRect">
+            <a:avLst>
+              <a:gd name="adj" fmla="val 25000"/>
+            </a:avLst>
+          </a:prstGeom>
+          <a:solidFill>
+            <a:srgbClr val="2A6FD1"/>
+          </a:solidFill>
+          <a:ln>
+            <a:noFill/>
+          </a:ln>
+          <a:effectLst/>
+        </p:spPr>
+        <p:style>
+          <a:lnRef idx="1">
+            <a:schemeClr val="accent1"/>
+          </a:lnRef>
+          <a:fillRef idx="3">
+            <a:schemeClr val="accent1"/>
+          </a:fillRef>
+          <a:effectRef idx="2">
+            <a:schemeClr val="accent1"/>
+          </a:effectRef>
+          <a:fontRef idx="minor">
+            <a:schemeClr val="lt1"/>
+          </a:fontRef>
+        </p:style>
+        <p:txBody>
+          <a:bodyPr rtlCol="0" anchor="ctr"/>
+          <a:lstStyle/>
+          <a:p>
+            <a:pPr algn="ctr"/>
+            <a:endParaRPr/>
+          </a:p>
+        </p:txBody>
+      </p:sp>
+      <p:sp>
+        <p:nvSpPr>
+          <p:cNvPr id="23" name="Rounded Rectangle 22"/>
+          <p:cNvSpPr/>
+          <p:nvPr/>
+        </p:nvSpPr>
+        <p:spPr>
+          <a:xfrm>
+            <a:off x="4041648" y="3486080"/>
+            <a:ext cx="950976" cy="347472"/>
+          </a:xfrm>
+          <a:prstGeom prst="roundRect">
+            <a:avLst>
+              <a:gd name="adj" fmla="val 25000"/>
+            </a:avLst>
+          </a:prstGeom>
+          <a:solidFill>
+            <a:srgbClr val="2A6FD1"/>
+          </a:solidFill>
+          <a:ln>
+            <a:noFill/>
+          </a:ln>
+          <a:effectLst/>
+        </p:spPr>
+        <p:style>
+          <a:lnRef idx="1">
+            <a:schemeClr val="accent1"/>
+          </a:lnRef>
+          <a:fillRef idx="3">
+            <a:schemeClr val="accent1"/>
+          </a:fillRef>
+          <a:effectRef idx="2">
+            <a:schemeClr val="accent1"/>
+          </a:effectRef>
+          <a:fontRef idx="minor">
+            <a:schemeClr val="lt1"/>
+          </a:fontRef>
+        </p:style>
+        <p:txBody>
+          <a:bodyPr rtlCol="0" anchor="ctr"/>
+          <a:lstStyle/>
+          <a:p>
+            <a:pPr algn="ctr"/>
+            <a:endParaRPr/>
+          </a:p>
+        </p:txBody>
+      </p:sp>
+      <p:sp>
+        <p:nvSpPr>
+          <p:cNvPr id="24" name="Rounded Rectangle 23"/>
+          <p:cNvSpPr/>
+          <p:nvPr/>
+        </p:nvSpPr>
+        <p:spPr>
+          <a:xfrm>
+            <a:off x="5148072" y="3486080"/>
+            <a:ext cx="950976" cy="347472"/>
+          </a:xfrm>
+          <a:prstGeom prst="roundRect">
+            <a:avLst>
+              <a:gd name="adj" fmla="val 25000"/>
+            </a:avLst>
+          </a:prstGeom>
+          <a:solidFill>
+            <a:srgbClr val="E0702A"/>
+          </a:solidFill>
+          <a:ln>
+            <a:noFill/>
+          </a:ln>
+          <a:effectLst/>
+        </p:spPr>
+        <p:style>
+          <a:lnRef idx="1">
+            <a:schemeClr val="accent1"/>
+          </a:lnRef>
+          <a:fillRef idx="3">
+            <a:schemeClr val="accent1"/>
+          </a:fillRef>
+          <a:effectRef idx="2">
+            <a:schemeClr val="accent1"/>
+          </a:effectRef>
+          <a:fontRef idx="minor">
+            <a:schemeClr val="lt1"/>
+          </a:fontRef>
+        </p:style>
+        <p:txBody>
+          <a:bodyPr rtlCol="0" anchor="ctr"/>
+          <a:lstStyle/>
+          <a:p>
+            <a:pPr algn="ctr"/>
+            <a:endParaRPr/>
+          </a:p>
+        </p:txBody>
+      </p:sp>
+      <p:sp>
+        <p:nvSpPr>
+          <p:cNvPr id="25" name="TextBox 24"/>
+          <p:cNvSpPr txBox="1"/>
+          <p:nvPr/>
+        </p:nvSpPr>
+        <p:spPr>
+          <a:xfrm>
+            <a:off x="868680" y="4144447"/>
+            <a:ext cx="640080" cy="274320"/>
+          </a:xfrm>
+          <a:prstGeom prst="rect">
+            <a:avLst/>
+          </a:prstGeom>
+          <a:noFill/>
+        </p:spPr>
+        <p:txBody>
+          <a:bodyPr wrap="square" lIns="0" tIns="0" rIns="0" bIns="0" anchor="t">
+            <a:spAutoFit/>
+          </a:bodyPr>
+          <a:lstStyle/>
+          <a:p>
+            <a:pPr>
+              <a:spcAft>
+                <a:spcPts val="600"/>
+              </a:spcAft>
+            </a:pPr>
+            <a:r>
+              <a:rPr sz="1300">
+                <a:solidFill>
+                  <a:srgbClr val="56677A"/>
+                </a:solidFill>
+                <a:latin typeface="Segoe UI Semibold"/>
+              </a:rPr>
+              <a:t>M4</a:t>
+            </a:r>
+          </a:p>
+        </p:txBody>
+      </p:sp>
+      <p:sp>
+        <p:nvSpPr>
+          <p:cNvPr id="26" name="Rounded Rectangle 25"/>
+          <p:cNvSpPr/>
+          <p:nvPr/>
+        </p:nvSpPr>
+        <p:spPr>
+          <a:xfrm>
+            <a:off x="1600200" y="4053007"/>
+            <a:ext cx="5029200" cy="457200"/>
+          </a:xfrm>
+          <a:prstGeom prst="roundRect">
+            <a:avLst>
+              <a:gd name="adj" fmla="val 20000"/>
+            </a:avLst>
+          </a:prstGeom>
+          <a:solidFill>
+            <a:srgbClr val="FFFFFF"/>
+          </a:solidFill>
+          <a:ln w="12700">
+            <a:solidFill>
+              <a:srgbClr val="CBD9EE"/>
+            </a:solidFill>
+          </a:ln>
+          <a:effectLst/>
+        </p:spPr>
+        <p:style>
+          <a:lnRef idx="1">
+            <a:schemeClr val="accent1"/>
+          </a:lnRef>
+          <a:fillRef idx="3">
+            <a:schemeClr val="accent1"/>
+          </a:fillRef>
+          <a:effectRef idx="2">
+            <a:schemeClr val="accent1"/>
+          </a:effectRef>
+          <a:fontRef idx="minor">
+            <a:schemeClr val="lt1"/>
+          </a:fontRef>
+        </p:style>
+        <p:txBody>
+          <a:bodyPr rtlCol="0" anchor="ctr"/>
+          <a:lstStyle/>
+          <a:p>
+            <a:pPr algn="ctr"/>
+            <a:endParaRPr/>
+          </a:p>
+        </p:txBody>
+      </p:sp>
+      <p:sp>
+        <p:nvSpPr>
+          <p:cNvPr id="27" name="Rounded Rectangle 26"/>
+          <p:cNvSpPr/>
+          <p:nvPr/>
+        </p:nvSpPr>
+        <p:spPr>
+          <a:xfrm>
+            <a:off x="1627632" y="4107871"/>
+            <a:ext cx="1152143" cy="347472"/>
+          </a:xfrm>
+          <a:prstGeom prst="roundRect">
+            <a:avLst>
+              <a:gd name="adj" fmla="val 25000"/>
+            </a:avLst>
+          </a:prstGeom>
+          <a:solidFill>
+            <a:srgbClr val="2A6FD1"/>
+          </a:solidFill>
+          <a:ln>
+            <a:noFill/>
+          </a:ln>
+          <a:effectLst/>
+        </p:spPr>
+        <p:style>
+          <a:lnRef idx="1">
+            <a:schemeClr val="accent1"/>
+          </a:lnRef>
+          <a:fillRef idx="3">
+            <a:schemeClr val="accent1"/>
+          </a:fillRef>
+          <a:effectRef idx="2">
+            <a:schemeClr val="accent1"/>
+          </a:effectRef>
+          <a:fontRef idx="minor">
+            <a:schemeClr val="lt1"/>
+          </a:fontRef>
+        </p:style>
+        <p:txBody>
+          <a:bodyPr rtlCol="0" anchor="ctr"/>
+          <a:lstStyle/>
+          <a:p>
+            <a:pPr algn="ctr"/>
+            <a:endParaRPr/>
+          </a:p>
+        </p:txBody>
+      </p:sp>
+      <p:sp>
+        <p:nvSpPr>
+          <p:cNvPr id="28" name="Rounded Rectangle 27"/>
+          <p:cNvSpPr/>
+          <p:nvPr/>
+        </p:nvSpPr>
+        <p:spPr>
+          <a:xfrm>
+            <a:off x="2935224" y="4107871"/>
+            <a:ext cx="749808" cy="347472"/>
+          </a:xfrm>
+          <a:prstGeom prst="roundRect">
+            <a:avLst>
+              <a:gd name="adj" fmla="val 25000"/>
+            </a:avLst>
+          </a:prstGeom>
+          <a:solidFill>
+            <a:srgbClr val="2A6FD1"/>
+          </a:solidFill>
+          <a:ln>
+            <a:noFill/>
+          </a:ln>
+          <a:effectLst/>
+        </p:spPr>
+        <p:style>
+          <a:lnRef idx="1">
+            <a:schemeClr val="accent1"/>
+          </a:lnRef>
+          <a:fillRef idx="3">
+            <a:schemeClr val="accent1"/>
+          </a:fillRef>
+          <a:effectRef idx="2">
+            <a:schemeClr val="accent1"/>
+          </a:effectRef>
+          <a:fontRef idx="minor">
+            <a:schemeClr val="lt1"/>
+          </a:fontRef>
+        </p:style>
+        <p:txBody>
+          <a:bodyPr rtlCol="0" anchor="ctr"/>
+          <a:lstStyle/>
+          <a:p>
+            <a:pPr algn="ctr"/>
+            <a:endParaRPr/>
+          </a:p>
+        </p:txBody>
+      </p:sp>
+      <p:sp>
+        <p:nvSpPr>
+          <p:cNvPr id="29" name="Rounded Rectangle 28"/>
+          <p:cNvSpPr/>
+          <p:nvPr/>
+        </p:nvSpPr>
+        <p:spPr>
+          <a:xfrm>
+            <a:off x="3840480" y="4107871"/>
+            <a:ext cx="1453895" cy="347472"/>
+          </a:xfrm>
+          <a:prstGeom prst="roundRect">
+            <a:avLst>
+              <a:gd name="adj" fmla="val 25000"/>
+            </a:avLst>
+          </a:prstGeom>
+          <a:solidFill>
+            <a:srgbClr val="2A6FD1"/>
+          </a:solidFill>
+          <a:ln>
+            <a:noFill/>
+          </a:ln>
+          <a:effectLst/>
+        </p:spPr>
+        <p:style>
+          <a:lnRef idx="1">
+            <a:schemeClr val="accent1"/>
+          </a:lnRef>
+          <a:fillRef idx="3">
+            <a:schemeClr val="accent1"/>
+          </a:fillRef>
+          <a:effectRef idx="2">
+            <a:schemeClr val="accent1"/>
+          </a:effectRef>
+          <a:fontRef idx="minor">
+            <a:schemeClr val="lt1"/>
+          </a:fontRef>
+        </p:style>
+        <p:txBody>
+          <a:bodyPr rtlCol="0" anchor="ctr"/>
+          <a:lstStyle/>
+          <a:p>
+            <a:pPr algn="ctr"/>
+            <a:endParaRPr/>
+          </a:p>
+        </p:txBody>
+      </p:sp>
+      <p:sp>
+        <p:nvSpPr>
+          <p:cNvPr id="30" name="Rounded Rectangle 29"/>
+          <p:cNvSpPr/>
+          <p:nvPr/>
+        </p:nvSpPr>
+        <p:spPr>
+          <a:xfrm>
+            <a:off x="5449824" y="4107871"/>
+            <a:ext cx="850392" cy="347472"/>
+          </a:xfrm>
+          <a:prstGeom prst="roundRect">
+            <a:avLst>
+              <a:gd name="adj" fmla="val 25000"/>
+            </a:avLst>
+          </a:prstGeom>
+          <a:solidFill>
+            <a:srgbClr val="E0702A"/>
+          </a:solidFill>
+          <a:ln>
+            <a:noFill/>
+          </a:ln>
+          <a:effectLst/>
+        </p:spPr>
+        <p:style>
+          <a:lnRef idx="1">
+            <a:schemeClr val="accent1"/>
+          </a:lnRef>
+          <a:fillRef idx="3">
+            <a:schemeClr val="accent1"/>
+          </a:fillRef>
+          <a:effectRef idx="2">
+            <a:schemeClr val="accent1"/>
+          </a:effectRef>
+          <a:fontRef idx="minor">
+            <a:schemeClr val="lt1"/>
+          </a:fontRef>
+        </p:style>
+        <p:txBody>
+          <a:bodyPr rtlCol="0" anchor="ctr"/>
+          <a:lstStyle/>
+          <a:p>
+            <a:pPr algn="ctr"/>
+            <a:endParaRPr/>
+          </a:p>
+        </p:txBody>
+      </p:sp>
+      <p:sp>
+        <p:nvSpPr>
+          <p:cNvPr id="31" name="Rectangle 30"/>
+          <p:cNvSpPr/>
+          <p:nvPr/>
+        </p:nvSpPr>
+        <p:spPr>
+          <a:xfrm>
+            <a:off x="5522976" y="1976857"/>
+            <a:ext cx="32004" cy="2532888"/>
+          </a:xfrm>
+          <a:prstGeom prst="rect">
+            <a:avLst/>
+          </a:prstGeom>
+          <a:solidFill>
+            <a:srgbClr val="0E2238"/>
+          </a:solidFill>
+          <a:ln>
+            <a:noFill/>
+          </a:ln>
+          <a:effectLst/>
+        </p:spPr>
+        <p:style>
+          <a:lnRef idx="1">
+            <a:schemeClr val="accent1"/>
+          </a:lnRef>
+          <a:fillRef idx="3">
+            <a:schemeClr val="accent1"/>
+          </a:fillRef>
+          <a:effectRef idx="2">
+            <a:schemeClr val="accent1"/>
+          </a:effectRef>
+          <a:fontRef idx="minor">
+            <a:schemeClr val="lt1"/>
+          </a:fontRef>
+        </p:style>
+        <p:txBody>
+          <a:bodyPr rtlCol="0" anchor="ctr"/>
+          <a:lstStyle/>
+          <a:p>
+            <a:pPr algn="ctr"/>
+            <a:endParaRPr/>
+          </a:p>
+        </p:txBody>
+      </p:sp>
+      <p:sp>
+        <p:nvSpPr>
+          <p:cNvPr id="32" name="TextBox 31"/>
+          <p:cNvSpPr txBox="1"/>
+          <p:nvPr/>
+        </p:nvSpPr>
+        <p:spPr>
+          <a:xfrm>
+            <a:off x="5019595" y="1813096"/>
+            <a:ext cx="1097280" cy="274320"/>
+          </a:xfrm>
+          <a:prstGeom prst="rect">
+            <a:avLst/>
+          </a:prstGeom>
+          <a:noFill/>
+        </p:spPr>
+        <p:txBody>
+          <a:bodyPr wrap="square" lIns="0" tIns="0" rIns="0" bIns="0" anchor="t">
+            <a:spAutoFit/>
+          </a:bodyPr>
+          <a:lstStyle/>
+          <a:p>
+            <a:pPr algn="ctr">
+              <a:spcAft>
+                <a:spcPts val="600"/>
+              </a:spcAft>
+            </a:pPr>
+            <a:r>
+              <a:rPr sz="1200" dirty="0">
+                <a:solidFill>
+                  <a:srgbClr val="0E2238"/>
+                </a:solidFill>
+                <a:latin typeface="Segoe UI Semibold"/>
+              </a:rPr>
+              <a:t>deadline</a:t>
+            </a:r>
+          </a:p>
+        </p:txBody>
+      </p:sp>
+      <p:sp>
+        <p:nvSpPr>
+          <p:cNvPr id="33" name="TextBox 32"/>
+          <p:cNvSpPr txBox="1"/>
+          <p:nvPr/>
+        </p:nvSpPr>
+        <p:spPr>
+          <a:xfrm>
+            <a:off x="1572767" y="4526281"/>
+            <a:ext cx="5029200" cy="274320"/>
+          </a:xfrm>
+          <a:prstGeom prst="rect">
+            <a:avLst/>
+          </a:prstGeom>
+          <a:noFill/>
+        </p:spPr>
+        <p:txBody>
+          <a:bodyPr wrap="square" lIns="0" tIns="0" rIns="0" bIns="0" anchor="t">
+            <a:spAutoFit/>
+          </a:bodyPr>
+          <a:lstStyle/>
+          <a:p>
+            <a:pPr algn="r">
+              <a:spcAft>
+                <a:spcPts val="600"/>
+              </a:spcAft>
+            </a:pPr>
+            <a:r>
+              <a:rPr sz="1200" dirty="0">
+                <a:solidFill>
+                  <a:srgbClr val="56677A"/>
+                </a:solidFill>
+                <a:latin typeface="Segoe UI"/>
+              </a:rPr>
+              <a:t>time  →</a:t>
+            </a:r>
+          </a:p>
+        </p:txBody>
+      </p:sp>
+      <p:sp>
+        <p:nvSpPr>
+          <p:cNvPr id="34" name="TextBox 33"/>
+          <p:cNvSpPr txBox="1"/>
+          <p:nvPr/>
+        </p:nvSpPr>
+        <p:spPr>
+          <a:xfrm>
+            <a:off x="868680" y="4747952"/>
+            <a:ext cx="5129784" cy="200055"/>
+          </a:xfrm>
+          <a:prstGeom prst="rect">
+            <a:avLst/>
+          </a:prstGeom>
+          <a:noFill/>
+        </p:spPr>
+        <p:txBody>
+          <a:bodyPr wrap="square" lIns="0" tIns="0" rIns="0" bIns="0" anchor="t">
+            <a:spAutoFit/>
+          </a:bodyPr>
+          <a:lstStyle/>
+          <a:p>
+            <a:pPr>
+              <a:spcAft>
+                <a:spcPts val="600"/>
+              </a:spcAft>
+            </a:pPr>
+            <a:r>
+              <a:rPr sz="1300" dirty="0">
+                <a:solidFill>
+                  <a:srgbClr val="56677A"/>
+                </a:solidFill>
+                <a:latin typeface="Segoe UI"/>
+              </a:rPr>
+              <a:t>A schedule: each block is a job on a machine. Orange jobs finish late.</a:t>
+            </a:r>
+          </a:p>
+        </p:txBody>
+      </p:sp>
+      <p:sp>
+        <p:nvSpPr>
+          <p:cNvPr id="35" name="TextBox 34"/>
+          <p:cNvSpPr txBox="1"/>
+          <p:nvPr/>
+        </p:nvSpPr>
+        <p:spPr>
+          <a:xfrm>
+            <a:off x="7406640" y="1784927"/>
+            <a:ext cx="4114800" cy="685800"/>
+          </a:xfrm>
+          <a:prstGeom prst="rect">
+            <a:avLst/>
+          </a:prstGeom>
+          <a:noFill/>
+        </p:spPr>
+        <p:txBody>
+          <a:bodyPr wrap="square" lIns="0" tIns="0" rIns="0" bIns="0" anchor="t">
+            <a:spAutoFit/>
+          </a:bodyPr>
+          <a:lstStyle/>
+          <a:p>
+            <a:pPr>
+              <a:spcAft>
+                <a:spcPts val="600"/>
+              </a:spcAft>
+            </a:pPr>
+            <a:r>
+              <a:rPr sz="3800">
+                <a:solidFill>
+                  <a:srgbClr val="2A6FD1"/>
+                </a:solidFill>
+                <a:latin typeface="Segoe UI Semibold"/>
+              </a:rPr>
+              <a:t>94%</a:t>
+            </a:r>
+          </a:p>
+        </p:txBody>
+      </p:sp>
+      <p:sp>
+        <p:nvSpPr>
+          <p:cNvPr id="36" name="TextBox 35"/>
+          <p:cNvSpPr txBox="1"/>
+          <p:nvPr/>
+        </p:nvSpPr>
+        <p:spPr>
+          <a:xfrm>
+            <a:off x="7406640" y="2498159"/>
+            <a:ext cx="4114800" cy="640080"/>
+          </a:xfrm>
+          <a:prstGeom prst="rect">
+            <a:avLst/>
+          </a:prstGeom>
+          <a:noFill/>
+        </p:spPr>
+        <p:txBody>
+          <a:bodyPr wrap="square" lIns="0" tIns="0" rIns="0" bIns="0" anchor="t">
+            <a:spAutoFit/>
+          </a:bodyPr>
+          <a:lstStyle/>
+          <a:p>
+            <a:pPr>
+              <a:spcAft>
+                <a:spcPts val="600"/>
+              </a:spcAft>
+            </a:pPr>
+            <a:r>
+              <a:rPr sz="1400">
+                <a:solidFill>
+                  <a:srgbClr val="56677A"/>
+                </a:solidFill>
+                <a:latin typeface="Segoe UI"/>
+              </a:rPr>
+              <a:t>of enterprises already use cloud services [1]</a:t>
+            </a:r>
+          </a:p>
+        </p:txBody>
+      </p:sp>
+      <p:sp>
+        <p:nvSpPr>
+          <p:cNvPr id="37" name="TextBox 36"/>
+          <p:cNvSpPr txBox="1"/>
+          <p:nvPr/>
+        </p:nvSpPr>
+        <p:spPr>
+          <a:xfrm>
+            <a:off x="7406640" y="2882207"/>
+            <a:ext cx="4114800" cy="685800"/>
+          </a:xfrm>
+          <a:prstGeom prst="rect">
+            <a:avLst/>
+          </a:prstGeom>
+          <a:noFill/>
+        </p:spPr>
+        <p:txBody>
+          <a:bodyPr wrap="square" lIns="0" tIns="0" rIns="0" bIns="0" anchor="t">
+            <a:spAutoFit/>
+          </a:bodyPr>
+          <a:lstStyle/>
+          <a:p>
+            <a:pPr>
+              <a:spcAft>
+                <a:spcPts val="600"/>
+              </a:spcAft>
+            </a:pPr>
+            <a:r>
+              <a:rPr sz="3800">
+                <a:solidFill>
+                  <a:srgbClr val="E0702A"/>
+                </a:solidFill>
+                <a:latin typeface="Segoe UI Semibold"/>
+              </a:rPr>
+              <a:t>$8,000 / min</a:t>
+            </a:r>
+          </a:p>
+        </p:txBody>
+      </p:sp>
+      <p:sp>
+        <p:nvSpPr>
+          <p:cNvPr id="38" name="TextBox 37"/>
+          <p:cNvSpPr txBox="1"/>
+          <p:nvPr/>
+        </p:nvSpPr>
+        <p:spPr>
+          <a:xfrm>
+            <a:off x="7406640" y="3595439"/>
+            <a:ext cx="4114800" cy="640080"/>
+          </a:xfrm>
+          <a:prstGeom prst="rect">
+            <a:avLst/>
+          </a:prstGeom>
+          <a:noFill/>
+        </p:spPr>
+        <p:txBody>
+          <a:bodyPr wrap="square" lIns="0" tIns="0" rIns="0" bIns="0" anchor="t">
+            <a:spAutoFit/>
+          </a:bodyPr>
+          <a:lstStyle/>
+          <a:p>
+            <a:pPr>
+              <a:spcAft>
+                <a:spcPts val="600"/>
+              </a:spcAft>
+            </a:pPr>
+            <a:r>
+              <a:rPr sz="1400">
+                <a:solidFill>
+                  <a:srgbClr val="56677A"/>
+                </a:solidFill>
+                <a:latin typeface="Segoe UI"/>
+              </a:rPr>
+              <a:t>average cost of cloud downtime (AUD) [1]</a:t>
+            </a:r>
+          </a:p>
+        </p:txBody>
+      </p:sp>
+      <p:sp>
+        <p:nvSpPr>
+          <p:cNvPr id="39" name="TextBox 38"/>
+          <p:cNvSpPr txBox="1"/>
+          <p:nvPr/>
+        </p:nvSpPr>
+        <p:spPr>
+          <a:xfrm>
+            <a:off x="7406640" y="3979487"/>
+            <a:ext cx="4114800" cy="685800"/>
+          </a:xfrm>
+          <a:prstGeom prst="rect">
+            <a:avLst/>
+          </a:prstGeom>
+          <a:noFill/>
+        </p:spPr>
+        <p:txBody>
+          <a:bodyPr wrap="square" lIns="0" tIns="0" rIns="0" bIns="0" anchor="t">
+            <a:spAutoFit/>
+          </a:bodyPr>
+          <a:lstStyle/>
+          <a:p>
+            <a:pPr>
+              <a:spcAft>
+                <a:spcPts val="600"/>
+              </a:spcAft>
+            </a:pPr>
+            <a:r>
+              <a:rPr sz="3800">
+                <a:solidFill>
+                  <a:srgbClr val="2A6FD1"/>
+                </a:solidFill>
+                <a:latin typeface="Segoe UI Semibold"/>
+              </a:rPr>
+              <a:t>$1.7 trillion</a:t>
+            </a:r>
+          </a:p>
+        </p:txBody>
+      </p:sp>
+      <p:sp>
+        <p:nvSpPr>
+          <p:cNvPr id="40" name="TextBox 39"/>
+          <p:cNvSpPr txBox="1"/>
+          <p:nvPr/>
+        </p:nvSpPr>
+        <p:spPr>
+          <a:xfrm>
+            <a:off x="7406640" y="4692719"/>
+            <a:ext cx="4114800" cy="640080"/>
+          </a:xfrm>
+          <a:prstGeom prst="rect">
+            <a:avLst/>
+          </a:prstGeom>
+          <a:noFill/>
+        </p:spPr>
+        <p:txBody>
+          <a:bodyPr wrap="square" lIns="0" tIns="0" rIns="0" bIns="0" anchor="t">
+            <a:spAutoFit/>
+          </a:bodyPr>
+          <a:lstStyle/>
+          <a:p>
+            <a:pPr>
+              <a:spcAft>
+                <a:spcPts val="600"/>
+              </a:spcAft>
+            </a:pPr>
+            <a:r>
+              <a:rPr sz="1400">
+                <a:solidFill>
+                  <a:srgbClr val="56677A"/>
+                </a:solidFill>
+                <a:latin typeface="Segoe UI"/>
+              </a:rPr>
+              <a:t>expected global cloud market by 2033 (AUD) [1]</a:t>
+            </a:r>
+          </a:p>
+        </p:txBody>
+      </p:sp>
+      <p:sp>
+        <p:nvSpPr>
+          <p:cNvPr id="41" name="Rounded Rectangle 40"/>
+          <p:cNvSpPr/>
+          <p:nvPr/>
+        </p:nvSpPr>
+        <p:spPr>
+          <a:xfrm>
+            <a:off x="640080" y="5322356"/>
+            <a:ext cx="10637520" cy="984328"/>
+          </a:xfrm>
+          <a:prstGeom prst="roundRect">
+            <a:avLst>
+              <a:gd name="adj" fmla="val 4000"/>
+            </a:avLst>
+          </a:prstGeom>
+          <a:solidFill>
+            <a:srgbClr val="EEF4FC"/>
+          </a:solidFill>
+          <a:ln w="15875">
+            <a:solidFill>
+              <a:srgbClr val="EEF4FC"/>
+            </a:solidFill>
+          </a:ln>
+          <a:effectLst/>
+        </p:spPr>
+        <p:style>
+          <a:lnRef idx="1">
+            <a:schemeClr val="accent1"/>
+          </a:lnRef>
+          <a:fillRef idx="3">
+            <a:schemeClr val="accent1"/>
+          </a:fillRef>
+          <a:effectRef idx="2">
+            <a:schemeClr val="accent1"/>
+          </a:effectRef>
+          <a:fontRef idx="minor">
+            <a:schemeClr val="lt1"/>
+          </a:fontRef>
+        </p:style>
+        <p:txBody>
+          <a:bodyPr rtlCol="0" anchor="ctr"/>
+          <a:lstStyle/>
+          <a:p>
+            <a:pPr algn="ctr"/>
+            <a:endParaRPr dirty="0"/>
+          </a:p>
+        </p:txBody>
+      </p:sp>
+      <p:sp>
+        <p:nvSpPr>
+          <p:cNvPr id="42" name="TextBox 41"/>
+          <p:cNvSpPr txBox="1"/>
+          <p:nvPr/>
+        </p:nvSpPr>
+        <p:spPr>
+          <a:xfrm>
+            <a:off x="744714" y="5377723"/>
+            <a:ext cx="10424160" cy="913070"/>
+          </a:xfrm>
+          <a:prstGeom prst="rect">
+            <a:avLst/>
+          </a:prstGeom>
+          <a:noFill/>
+        </p:spPr>
+        <p:txBody>
+          <a:bodyPr wrap="square" lIns="0" tIns="0" rIns="0" bIns="0" anchor="t">
+            <a:spAutoFit/>
+          </a:bodyPr>
+          <a:lstStyle/>
+          <a:p>
+            <a:pPr>
+              <a:spcAft>
+                <a:spcPts val="400"/>
+              </a:spcAft>
+            </a:pPr>
+            <a:r>
+              <a:rPr lang="en-AU" sz="1600" dirty="0">
+                <a:solidFill>
+                  <a:srgbClr val="56677A"/>
+                </a:solidFill>
+                <a:latin typeface="Segoe UI"/>
+              </a:rPr>
+              <a:t>Efficient allocation of cloud resources is a significant issue </a:t>
+            </a:r>
+            <a:endParaRPr sz="1600" dirty="0">
+              <a:solidFill>
+                <a:srgbClr val="56677A"/>
+              </a:solidFill>
+              <a:latin typeface="Segoe UI"/>
+            </a:endParaRPr>
+          </a:p>
+          <a:p>
+            <a:pPr>
+              <a:spcAft>
+                <a:spcPts val="400"/>
+              </a:spcAft>
+            </a:pPr>
+            <a:r>
+              <a:rPr sz="2000" dirty="0">
+                <a:solidFill>
+                  <a:srgbClr val="0E2238"/>
+                </a:solidFill>
+                <a:latin typeface="Segoe UI Semibold"/>
+              </a:rPr>
+              <a:t>Our question: can reinforcement learning schedule better </a:t>
+            </a:r>
+            <a:r>
+              <a:rPr lang="en-AU" sz="2000" dirty="0">
+                <a:solidFill>
+                  <a:srgbClr val="0E2238"/>
+                </a:solidFill>
+                <a:latin typeface="Segoe UI Semibold"/>
+              </a:rPr>
+              <a:t>than classical heuristic and dispatching rules, and under what conditions?</a:t>
+            </a:r>
+            <a:endParaRPr sz="2000" dirty="0">
+              <a:solidFill>
+                <a:srgbClr val="0E2238"/>
+              </a:solidFill>
+              <a:latin typeface="Segoe UI Semibold"/>
+            </a:endParaRPr>
+          </a:p>
+        </p:txBody>
+      </p:sp>
+      <p:sp>
+        <p:nvSpPr>
+          <p:cNvPr id="43" name="TextBox 42"/>
+          <p:cNvSpPr txBox="1"/>
+          <p:nvPr/>
+        </p:nvSpPr>
+        <p:spPr>
+          <a:xfrm>
+            <a:off x="640080" y="6659508"/>
+            <a:ext cx="10058400" cy="201168"/>
+          </a:xfrm>
+          <a:prstGeom prst="rect">
+            <a:avLst/>
+          </a:prstGeom>
+          <a:noFill/>
+        </p:spPr>
+        <p:txBody>
+          <a:bodyPr wrap="square" lIns="0" tIns="0" rIns="0" bIns="0" anchor="t">
+            <a:spAutoFit/>
+          </a:bodyPr>
+          <a:lstStyle/>
+          <a:p>
+            <a:pPr>
+              <a:spcAft>
+                <a:spcPts val="600"/>
+              </a:spcAft>
+            </a:pPr>
+            <a:r>
+              <a:rPr sz="900" dirty="0">
+                <a:solidFill>
+                  <a:srgbClr val="56677A"/>
+                </a:solidFill>
+                <a:latin typeface="Segoe UI"/>
+              </a:rPr>
+              <a:t>[1] </a:t>
+            </a:r>
+            <a:r>
+              <a:rPr sz="900" dirty="0" err="1">
+                <a:solidFill>
+                  <a:srgbClr val="56677A"/>
+                </a:solidFill>
+                <a:latin typeface="Segoe UI"/>
+              </a:rPr>
+              <a:t>DigitalDefynd</a:t>
+            </a:r>
+            <a:r>
+              <a:rPr sz="900" dirty="0">
+                <a:solidFill>
+                  <a:srgbClr val="56677A"/>
+                </a:solidFill>
+                <a:latin typeface="Segoe UI"/>
+              </a:rPr>
+              <a:t>, “30 Surprising Cloud Computing Facts &amp; Statistics,” 2026.</a:t>
+            </a:r>
+          </a:p>
+        </p:txBody>
+      </p:sp>
+    </p:spTree>
+  </p:cSld>
+  <p:clrMapOvr>
+    <a:masterClrMapping/>
+  </p:clrMapOvr>
+</p:sld>
+</file>
+
+<file path=ppt/slides/slide2.xml><?xml version="1.0" encoding="utf-8"?>
+<p:sld xmlns:a="http://schemas.openxmlformats.org/drawingml/2006/main" xmlns:r="http://schemas.openxmlformats.org/officeDocument/2006/relationships" xmlns:p="http://schemas.openxmlformats.org/presentationml/2006/main">
   <p:cSld>
     <p:bg>
       <p:bgPr>
@@ -3728,7 +5444,14 @@
         <p:cNvGrpSpPr/>
         <p:nvPr/>
       </p:nvGrpSpPr>
-      <p:grpSpPr/>
+      <p:grpSpPr>
+        <a:xfrm>
+          <a:off x="0" y="0"/>
+          <a:ext cx="0" cy="0"/>
+          <a:chOff x="0" y="0"/>
+          <a:chExt cx="0" cy="0"/>
+        </a:xfrm>
+      </p:grpSpPr>
       <p:sp>
         <p:nvSpPr>
           <p:cNvPr id="2" name="TextBox 1"/>
@@ -3746,7 +5469,7 @@
           <a:noFill/>
         </p:spPr>
         <p:txBody>
-          <a:bodyPr wrap="square" anchor="t" lIns="0" rIns="0" tIns="0" bIns="0">
+          <a:bodyPr wrap="square" lIns="0" tIns="0" rIns="0" bIns="0" anchor="t">
             <a:spAutoFit/>
           </a:bodyPr>
           <a:lstStyle/>
@@ -3757,13 +5480,13 @@
               </a:spcAft>
             </a:pPr>
             <a:r>
-              <a:rPr sz="1200">
+              <a:rPr sz="1200" dirty="0">
                 <a:solidFill>
                   <a:srgbClr val="2A6FD1"/>
                 </a:solidFill>
                 <a:latin typeface="Segoe UI Semibold"/>
               </a:rPr>
-              <a:t>THE PROBLEM</a:t>
+              <a:t>THE METHOD</a:t>
             </a:r>
           </a:p>
         </p:txBody>
@@ -3785,7 +5508,7 @@
           <a:noFill/>
         </p:spPr>
         <p:txBody>
-          <a:bodyPr wrap="square" anchor="t" lIns="0" rIns="0" tIns="0" bIns="0">
+          <a:bodyPr wrap="square" lIns="0" tIns="0" rIns="0" bIns="0" anchor="t">
             <a:spAutoFit/>
           </a:bodyPr>
           <a:lstStyle/>
@@ -3796,13 +5519,13 @@
               </a:spcAft>
             </a:pPr>
             <a:r>
-              <a:rPr sz="3000">
+              <a:rPr sz="3000" dirty="0">
                 <a:solidFill>
                   <a:srgbClr val="0E2238"/>
                 </a:solidFill>
                 <a:latin typeface="Segoe UI Semibold"/>
               </a:rPr>
-              <a:t>Every cloud job is a decision: what runs next, and where?</a:t>
+              <a:t>The scheduler is a neural network that learns from reward</a:t>
             </a:r>
           </a:p>
         </p:txBody>
@@ -3824,7 +5547,7 @@
           <a:noFill/>
         </p:spPr>
         <p:txBody>
-          <a:bodyPr wrap="square" anchor="t" lIns="0" rIns="0" tIns="0" bIns="0">
+          <a:bodyPr wrap="square" lIns="0" tIns="0" rIns="0" bIns="0" anchor="t">
             <a:spAutoFit/>
           </a:bodyPr>
           <a:lstStyle/>
@@ -3863,7 +5586,7 @@
           <a:noFill/>
         </p:spPr>
         <p:txBody>
-          <a:bodyPr wrap="square" anchor="t" lIns="0" rIns="0" tIns="0" bIns="0">
+          <a:bodyPr wrap="square" lIns="0" tIns="0" rIns="0" bIns="0" anchor="t">
             <a:spAutoFit/>
           </a:bodyPr>
           <a:lstStyle/>
@@ -3880,7 +5603,7 @@
                 </a:solidFill>
                 <a:latin typeface="Segoe UI"/>
               </a:rPr>
-              <a:t>1 / 4</a:t>
+              <a:t>2 / 4</a:t>
             </a:r>
           </a:p>
         </p:txBody>
@@ -3894,1534 +5617,7 @@
         <p:spPr>
           <a:xfrm>
             <a:off x="640080" y="1600200"/>
-            <a:ext cx="6309360" cy="3337560"/>
-          </a:xfrm>
-          <a:prstGeom prst="roundRect">
-            <a:avLst>
-              <a:gd name="adj" fmla="val 4000"/>
-            </a:avLst>
-          </a:prstGeom>
-          <a:solidFill>
-            <a:srgbClr val="EEF4FC"/>
-          </a:solidFill>
-          <a:ln w="15875">
-            <a:solidFill>
-              <a:srgbClr val="CBD9EE"/>
-            </a:solidFill>
-          </a:ln>
-          <a:effectLst/>
-        </p:spPr>
-        <p:style>
-          <a:lnRef idx="1">
-            <a:schemeClr val="accent1"/>
-          </a:lnRef>
-          <a:fillRef idx="3">
-            <a:schemeClr val="accent1"/>
-          </a:fillRef>
-          <a:effectRef idx="2">
-            <a:schemeClr val="accent1"/>
-          </a:effectRef>
-          <a:fontRef idx="minor">
-            <a:schemeClr val="lt1"/>
-          </a:fontRef>
-        </p:style>
-        <p:txBody>
-          <a:bodyPr rtlCol="0" anchor="ctr"/>
-          <a:lstStyle/>
-          <a:p>
-            <a:pPr algn="ctr"/>
-          </a:p>
-        </p:txBody>
-      </p:sp>
-      <p:sp>
-        <p:nvSpPr>
-          <p:cNvPr id="7" name="TextBox 6"/>
-          <p:cNvSpPr txBox="1"/>
-          <p:nvPr/>
-        </p:nvSpPr>
-        <p:spPr>
-          <a:xfrm>
-            <a:off x="868680" y="2057400"/>
-            <a:ext cx="640080" cy="274320"/>
-          </a:xfrm>
-          <a:prstGeom prst="rect">
-            <a:avLst/>
-          </a:prstGeom>
-          <a:noFill/>
-        </p:spPr>
-        <p:txBody>
-          <a:bodyPr wrap="square" anchor="t" lIns="0" rIns="0" tIns="0" bIns="0">
-            <a:spAutoFit/>
-          </a:bodyPr>
-          <a:lstStyle/>
-          <a:p>
-            <a:pPr>
-              <a:spcAft>
-                <a:spcPts val="600"/>
-              </a:spcAft>
-            </a:pPr>
-            <a:r>
-              <a:rPr sz="1300">
-                <a:solidFill>
-                  <a:srgbClr val="56677A"/>
-                </a:solidFill>
-                <a:latin typeface="Segoe UI Semibold"/>
-              </a:rPr>
-              <a:t>M1</a:t>
-            </a:r>
-          </a:p>
-        </p:txBody>
-      </p:sp>
-      <p:sp>
-        <p:nvSpPr>
-          <p:cNvPr id="8" name="Rounded Rectangle 7"/>
-          <p:cNvSpPr/>
-          <p:nvPr/>
-        </p:nvSpPr>
-        <p:spPr>
-          <a:xfrm>
-            <a:off x="1600200" y="1965960"/>
-            <a:ext cx="5029200" cy="457200"/>
-          </a:xfrm>
-          <a:prstGeom prst="roundRect">
-            <a:avLst>
-              <a:gd name="adj" fmla="val 20000"/>
-            </a:avLst>
-          </a:prstGeom>
-          <a:solidFill>
-            <a:srgbClr val="FFFFFF"/>
-          </a:solidFill>
-          <a:ln w="12700">
-            <a:solidFill>
-              <a:srgbClr val="CBD9EE"/>
-            </a:solidFill>
-          </a:ln>
-          <a:effectLst/>
-        </p:spPr>
-        <p:style>
-          <a:lnRef idx="1">
-            <a:schemeClr val="accent1"/>
-          </a:lnRef>
-          <a:fillRef idx="3">
-            <a:schemeClr val="accent1"/>
-          </a:fillRef>
-          <a:effectRef idx="2">
-            <a:schemeClr val="accent1"/>
-          </a:effectRef>
-          <a:fontRef idx="minor">
-            <a:schemeClr val="lt1"/>
-          </a:fontRef>
-        </p:style>
-        <p:txBody>
-          <a:bodyPr rtlCol="0" anchor="ctr"/>
-          <a:lstStyle/>
-          <a:p>
-            <a:pPr algn="ctr"/>
-          </a:p>
-        </p:txBody>
-      </p:sp>
-      <p:sp>
-        <p:nvSpPr>
-          <p:cNvPr id="9" name="Rounded Rectangle 8"/>
-          <p:cNvSpPr/>
-          <p:nvPr/>
-        </p:nvSpPr>
-        <p:spPr>
-          <a:xfrm>
-            <a:off x="1627632" y="2020824"/>
-            <a:ext cx="850392" cy="347472"/>
-          </a:xfrm>
-          <a:prstGeom prst="roundRect">
-            <a:avLst>
-              <a:gd name="adj" fmla="val 25000"/>
-            </a:avLst>
-          </a:prstGeom>
-          <a:solidFill>
-            <a:srgbClr val="2A6FD1"/>
-          </a:solidFill>
-          <a:ln>
-            <a:noFill/>
-          </a:ln>
-          <a:effectLst/>
-        </p:spPr>
-        <p:style>
-          <a:lnRef idx="1">
-            <a:schemeClr val="accent1"/>
-          </a:lnRef>
-          <a:fillRef idx="3">
-            <a:schemeClr val="accent1"/>
-          </a:fillRef>
-          <a:effectRef idx="2">
-            <a:schemeClr val="accent1"/>
-          </a:effectRef>
-          <a:fontRef idx="minor">
-            <a:schemeClr val="lt1"/>
-          </a:fontRef>
-        </p:style>
-        <p:txBody>
-          <a:bodyPr rtlCol="0" anchor="ctr"/>
-          <a:lstStyle/>
-          <a:p>
-            <a:pPr algn="ctr"/>
-          </a:p>
-        </p:txBody>
-      </p:sp>
-      <p:sp>
-        <p:nvSpPr>
-          <p:cNvPr id="10" name="Rounded Rectangle 9"/>
-          <p:cNvSpPr/>
-          <p:nvPr/>
-        </p:nvSpPr>
-        <p:spPr>
-          <a:xfrm>
-            <a:off x="2633472" y="2020824"/>
-            <a:ext cx="1051560" cy="347472"/>
-          </a:xfrm>
-          <a:prstGeom prst="roundRect">
-            <a:avLst>
-              <a:gd name="adj" fmla="val 25000"/>
-            </a:avLst>
-          </a:prstGeom>
-          <a:solidFill>
-            <a:srgbClr val="2A6FD1"/>
-          </a:solidFill>
-          <a:ln>
-            <a:noFill/>
-          </a:ln>
-          <a:effectLst/>
-        </p:spPr>
-        <p:style>
-          <a:lnRef idx="1">
-            <a:schemeClr val="accent1"/>
-          </a:lnRef>
-          <a:fillRef idx="3">
-            <a:schemeClr val="accent1"/>
-          </a:fillRef>
-          <a:effectRef idx="2">
-            <a:schemeClr val="accent1"/>
-          </a:effectRef>
-          <a:fontRef idx="minor">
-            <a:schemeClr val="lt1"/>
-          </a:fontRef>
-        </p:style>
-        <p:txBody>
-          <a:bodyPr rtlCol="0" anchor="ctr"/>
-          <a:lstStyle/>
-          <a:p>
-            <a:pPr algn="ctr"/>
-          </a:p>
-        </p:txBody>
-      </p:sp>
-      <p:sp>
-        <p:nvSpPr>
-          <p:cNvPr id="11" name="Rounded Rectangle 10"/>
-          <p:cNvSpPr/>
-          <p:nvPr/>
-        </p:nvSpPr>
-        <p:spPr>
-          <a:xfrm>
-            <a:off x="3840480" y="2020824"/>
-            <a:ext cx="950976" cy="347472"/>
-          </a:xfrm>
-          <a:prstGeom prst="roundRect">
-            <a:avLst>
-              <a:gd name="adj" fmla="val 25000"/>
-            </a:avLst>
-          </a:prstGeom>
-          <a:solidFill>
-            <a:srgbClr val="2A6FD1"/>
-          </a:solidFill>
-          <a:ln>
-            <a:noFill/>
-          </a:ln>
-          <a:effectLst/>
-        </p:spPr>
-        <p:style>
-          <a:lnRef idx="1">
-            <a:schemeClr val="accent1"/>
-          </a:lnRef>
-          <a:fillRef idx="3">
-            <a:schemeClr val="accent1"/>
-          </a:fillRef>
-          <a:effectRef idx="2">
-            <a:schemeClr val="accent1"/>
-          </a:effectRef>
-          <a:fontRef idx="minor">
-            <a:schemeClr val="lt1"/>
-          </a:fontRef>
-        </p:style>
-        <p:txBody>
-          <a:bodyPr rtlCol="0" anchor="ctr"/>
-          <a:lstStyle/>
-          <a:p>
-            <a:pPr algn="ctr"/>
-          </a:p>
-        </p:txBody>
-      </p:sp>
-      <p:sp>
-        <p:nvSpPr>
-          <p:cNvPr id="12" name="Rounded Rectangle 11"/>
-          <p:cNvSpPr/>
-          <p:nvPr/>
-        </p:nvSpPr>
-        <p:spPr>
-          <a:xfrm>
-            <a:off x="4946904" y="2020824"/>
-            <a:ext cx="1051560" cy="347472"/>
-          </a:xfrm>
-          <a:prstGeom prst="roundRect">
-            <a:avLst>
-              <a:gd name="adj" fmla="val 25000"/>
-            </a:avLst>
-          </a:prstGeom>
-          <a:solidFill>
-            <a:srgbClr val="E0702A"/>
-          </a:solidFill>
-          <a:ln>
-            <a:noFill/>
-          </a:ln>
-          <a:effectLst/>
-        </p:spPr>
-        <p:style>
-          <a:lnRef idx="1">
-            <a:schemeClr val="accent1"/>
-          </a:lnRef>
-          <a:fillRef idx="3">
-            <a:schemeClr val="accent1"/>
-          </a:fillRef>
-          <a:effectRef idx="2">
-            <a:schemeClr val="accent1"/>
-          </a:effectRef>
-          <a:fontRef idx="minor">
-            <a:schemeClr val="lt1"/>
-          </a:fontRef>
-        </p:style>
-        <p:txBody>
-          <a:bodyPr rtlCol="0" anchor="ctr"/>
-          <a:lstStyle/>
-          <a:p>
-            <a:pPr algn="ctr"/>
-          </a:p>
-        </p:txBody>
-      </p:sp>
-      <p:sp>
-        <p:nvSpPr>
-          <p:cNvPr id="13" name="TextBox 12"/>
-          <p:cNvSpPr txBox="1"/>
-          <p:nvPr/>
-        </p:nvSpPr>
-        <p:spPr>
-          <a:xfrm>
-            <a:off x="868680" y="2679192"/>
-            <a:ext cx="640080" cy="274320"/>
-          </a:xfrm>
-          <a:prstGeom prst="rect">
-            <a:avLst/>
-          </a:prstGeom>
-          <a:noFill/>
-        </p:spPr>
-        <p:txBody>
-          <a:bodyPr wrap="square" anchor="t" lIns="0" rIns="0" tIns="0" bIns="0">
-            <a:spAutoFit/>
-          </a:bodyPr>
-          <a:lstStyle/>
-          <a:p>
-            <a:pPr>
-              <a:spcAft>
-                <a:spcPts val="600"/>
-              </a:spcAft>
-            </a:pPr>
-            <a:r>
-              <a:rPr sz="1300">
-                <a:solidFill>
-                  <a:srgbClr val="56677A"/>
-                </a:solidFill>
-                <a:latin typeface="Segoe UI Semibold"/>
-              </a:rPr>
-              <a:t>M2</a:t>
-            </a:r>
-          </a:p>
-        </p:txBody>
-      </p:sp>
-      <p:sp>
-        <p:nvSpPr>
-          <p:cNvPr id="14" name="Rounded Rectangle 13"/>
-          <p:cNvSpPr/>
-          <p:nvPr/>
-        </p:nvSpPr>
-        <p:spPr>
-          <a:xfrm>
-            <a:off x="1600200" y="2587752"/>
-            <a:ext cx="5029200" cy="457200"/>
-          </a:xfrm>
-          <a:prstGeom prst="roundRect">
-            <a:avLst>
-              <a:gd name="adj" fmla="val 20000"/>
-            </a:avLst>
-          </a:prstGeom>
-          <a:solidFill>
-            <a:srgbClr val="FFFFFF"/>
-          </a:solidFill>
-          <a:ln w="12700">
-            <a:solidFill>
-              <a:srgbClr val="CBD9EE"/>
-            </a:solidFill>
-          </a:ln>
-          <a:effectLst/>
-        </p:spPr>
-        <p:style>
-          <a:lnRef idx="1">
-            <a:schemeClr val="accent1"/>
-          </a:lnRef>
-          <a:fillRef idx="3">
-            <a:schemeClr val="accent1"/>
-          </a:fillRef>
-          <a:effectRef idx="2">
-            <a:schemeClr val="accent1"/>
-          </a:effectRef>
-          <a:fontRef idx="minor">
-            <a:schemeClr val="lt1"/>
-          </a:fontRef>
-        </p:style>
-        <p:txBody>
-          <a:bodyPr rtlCol="0" anchor="ctr"/>
-          <a:lstStyle/>
-          <a:p>
-            <a:pPr algn="ctr"/>
-          </a:p>
-        </p:txBody>
-      </p:sp>
-      <p:sp>
-        <p:nvSpPr>
-          <p:cNvPr id="15" name="Rounded Rectangle 14"/>
-          <p:cNvSpPr/>
-          <p:nvPr/>
-        </p:nvSpPr>
-        <p:spPr>
-          <a:xfrm>
-            <a:off x="1627632" y="2642616"/>
-            <a:ext cx="1453895" cy="347472"/>
-          </a:xfrm>
-          <a:prstGeom prst="roundRect">
-            <a:avLst>
-              <a:gd name="adj" fmla="val 25000"/>
-            </a:avLst>
-          </a:prstGeom>
-          <a:solidFill>
-            <a:srgbClr val="2A6FD1"/>
-          </a:solidFill>
-          <a:ln>
-            <a:noFill/>
-          </a:ln>
-          <a:effectLst/>
-        </p:spPr>
-        <p:style>
-          <a:lnRef idx="1">
-            <a:schemeClr val="accent1"/>
-          </a:lnRef>
-          <a:fillRef idx="3">
-            <a:schemeClr val="accent1"/>
-          </a:fillRef>
-          <a:effectRef idx="2">
-            <a:schemeClr val="accent1"/>
-          </a:effectRef>
-          <a:fontRef idx="minor">
-            <a:schemeClr val="lt1"/>
-          </a:fontRef>
-        </p:style>
-        <p:txBody>
-          <a:bodyPr rtlCol="0" anchor="ctr"/>
-          <a:lstStyle/>
-          <a:p>
-            <a:pPr algn="ctr"/>
-          </a:p>
-        </p:txBody>
-      </p:sp>
-      <p:sp>
-        <p:nvSpPr>
-          <p:cNvPr id="16" name="Rounded Rectangle 15"/>
-          <p:cNvSpPr/>
-          <p:nvPr/>
-        </p:nvSpPr>
-        <p:spPr>
-          <a:xfrm>
-            <a:off x="3236975" y="2642616"/>
-            <a:ext cx="850392" cy="347472"/>
-          </a:xfrm>
-          <a:prstGeom prst="roundRect">
-            <a:avLst>
-              <a:gd name="adj" fmla="val 25000"/>
-            </a:avLst>
-          </a:prstGeom>
-          <a:solidFill>
-            <a:srgbClr val="2A6FD1"/>
-          </a:solidFill>
-          <a:ln>
-            <a:noFill/>
-          </a:ln>
-          <a:effectLst/>
-        </p:spPr>
-        <p:style>
-          <a:lnRef idx="1">
-            <a:schemeClr val="accent1"/>
-          </a:lnRef>
-          <a:fillRef idx="3">
-            <a:schemeClr val="accent1"/>
-          </a:fillRef>
-          <a:effectRef idx="2">
-            <a:schemeClr val="accent1"/>
-          </a:effectRef>
-          <a:fontRef idx="minor">
-            <a:schemeClr val="lt1"/>
-          </a:fontRef>
-        </p:style>
-        <p:txBody>
-          <a:bodyPr rtlCol="0" anchor="ctr"/>
-          <a:lstStyle/>
-          <a:p>
-            <a:pPr algn="ctr"/>
-          </a:p>
-        </p:txBody>
-      </p:sp>
-      <p:sp>
-        <p:nvSpPr>
-          <p:cNvPr id="17" name="Rounded Rectangle 16"/>
-          <p:cNvSpPr/>
-          <p:nvPr/>
-        </p:nvSpPr>
-        <p:spPr>
-          <a:xfrm>
-            <a:off x="4242816" y="2642616"/>
-            <a:ext cx="1152143" cy="347472"/>
-          </a:xfrm>
-          <a:prstGeom prst="roundRect">
-            <a:avLst>
-              <a:gd name="adj" fmla="val 25000"/>
-            </a:avLst>
-          </a:prstGeom>
-          <a:solidFill>
-            <a:srgbClr val="2A6FD1"/>
-          </a:solidFill>
-          <a:ln>
-            <a:noFill/>
-          </a:ln>
-          <a:effectLst/>
-        </p:spPr>
-        <p:style>
-          <a:lnRef idx="1">
-            <a:schemeClr val="accent1"/>
-          </a:lnRef>
-          <a:fillRef idx="3">
-            <a:schemeClr val="accent1"/>
-          </a:fillRef>
-          <a:effectRef idx="2">
-            <a:schemeClr val="accent1"/>
-          </a:effectRef>
-          <a:fontRef idx="minor">
-            <a:schemeClr val="lt1"/>
-          </a:fontRef>
-        </p:style>
-        <p:txBody>
-          <a:bodyPr rtlCol="0" anchor="ctr"/>
-          <a:lstStyle/>
-          <a:p>
-            <a:pPr algn="ctr"/>
-          </a:p>
-        </p:txBody>
-      </p:sp>
-      <p:sp>
-        <p:nvSpPr>
-          <p:cNvPr id="18" name="Rounded Rectangle 17"/>
-          <p:cNvSpPr/>
-          <p:nvPr/>
-        </p:nvSpPr>
-        <p:spPr>
-          <a:xfrm>
-            <a:off x="5550408" y="2642616"/>
-            <a:ext cx="649224" cy="347472"/>
-          </a:xfrm>
-          <a:prstGeom prst="roundRect">
-            <a:avLst>
-              <a:gd name="adj" fmla="val 25000"/>
-            </a:avLst>
-          </a:prstGeom>
-          <a:solidFill>
-            <a:srgbClr val="E0702A"/>
-          </a:solidFill>
-          <a:ln>
-            <a:noFill/>
-          </a:ln>
-          <a:effectLst/>
-        </p:spPr>
-        <p:style>
-          <a:lnRef idx="1">
-            <a:schemeClr val="accent1"/>
-          </a:lnRef>
-          <a:fillRef idx="3">
-            <a:schemeClr val="accent1"/>
-          </a:fillRef>
-          <a:effectRef idx="2">
-            <a:schemeClr val="accent1"/>
-          </a:effectRef>
-          <a:fontRef idx="minor">
-            <a:schemeClr val="lt1"/>
-          </a:fontRef>
-        </p:style>
-        <p:txBody>
-          <a:bodyPr rtlCol="0" anchor="ctr"/>
-          <a:lstStyle/>
-          <a:p>
-            <a:pPr algn="ctr"/>
-          </a:p>
-        </p:txBody>
-      </p:sp>
-      <p:sp>
-        <p:nvSpPr>
-          <p:cNvPr id="19" name="TextBox 18"/>
-          <p:cNvSpPr txBox="1"/>
-          <p:nvPr/>
-        </p:nvSpPr>
-        <p:spPr>
-          <a:xfrm>
-            <a:off x="868680" y="3300984"/>
-            <a:ext cx="640080" cy="274320"/>
-          </a:xfrm>
-          <a:prstGeom prst="rect">
-            <a:avLst/>
-          </a:prstGeom>
-          <a:noFill/>
-        </p:spPr>
-        <p:txBody>
-          <a:bodyPr wrap="square" anchor="t" lIns="0" rIns="0" tIns="0" bIns="0">
-            <a:spAutoFit/>
-          </a:bodyPr>
-          <a:lstStyle/>
-          <a:p>
-            <a:pPr>
-              <a:spcAft>
-                <a:spcPts val="600"/>
-              </a:spcAft>
-            </a:pPr>
-            <a:r>
-              <a:rPr sz="1300">
-                <a:solidFill>
-                  <a:srgbClr val="56677A"/>
-                </a:solidFill>
-                <a:latin typeface="Segoe UI Semibold"/>
-              </a:rPr>
-              <a:t>M3</a:t>
-            </a:r>
-          </a:p>
-        </p:txBody>
-      </p:sp>
-      <p:sp>
-        <p:nvSpPr>
-          <p:cNvPr id="20" name="Rounded Rectangle 19"/>
-          <p:cNvSpPr/>
-          <p:nvPr/>
-        </p:nvSpPr>
-        <p:spPr>
-          <a:xfrm>
-            <a:off x="1600200" y="3209544"/>
-            <a:ext cx="5029200" cy="457200"/>
-          </a:xfrm>
-          <a:prstGeom prst="roundRect">
-            <a:avLst>
-              <a:gd name="adj" fmla="val 20000"/>
-            </a:avLst>
-          </a:prstGeom>
-          <a:solidFill>
-            <a:srgbClr val="FFFFFF"/>
-          </a:solidFill>
-          <a:ln w="12700">
-            <a:solidFill>
-              <a:srgbClr val="CBD9EE"/>
-            </a:solidFill>
-          </a:ln>
-          <a:effectLst/>
-        </p:spPr>
-        <p:style>
-          <a:lnRef idx="1">
-            <a:schemeClr val="accent1"/>
-          </a:lnRef>
-          <a:fillRef idx="3">
-            <a:schemeClr val="accent1"/>
-          </a:fillRef>
-          <a:effectRef idx="2">
-            <a:schemeClr val="accent1"/>
-          </a:effectRef>
-          <a:fontRef idx="minor">
-            <a:schemeClr val="lt1"/>
-          </a:fontRef>
-        </p:style>
-        <p:txBody>
-          <a:bodyPr rtlCol="0" anchor="ctr"/>
-          <a:lstStyle/>
-          <a:p>
-            <a:pPr algn="ctr"/>
-          </a:p>
-        </p:txBody>
-      </p:sp>
-      <p:sp>
-        <p:nvSpPr>
-          <p:cNvPr id="21" name="Rounded Rectangle 20"/>
-          <p:cNvSpPr/>
-          <p:nvPr/>
-        </p:nvSpPr>
-        <p:spPr>
-          <a:xfrm>
-            <a:off x="1627632" y="3264408"/>
-            <a:ext cx="649224" cy="347472"/>
-          </a:xfrm>
-          <a:prstGeom prst="roundRect">
-            <a:avLst>
-              <a:gd name="adj" fmla="val 25000"/>
-            </a:avLst>
-          </a:prstGeom>
-          <a:solidFill>
-            <a:srgbClr val="2A6FD1"/>
-          </a:solidFill>
-          <a:ln>
-            <a:noFill/>
-          </a:ln>
-          <a:effectLst/>
-        </p:spPr>
-        <p:style>
-          <a:lnRef idx="1">
-            <a:schemeClr val="accent1"/>
-          </a:lnRef>
-          <a:fillRef idx="3">
-            <a:schemeClr val="accent1"/>
-          </a:fillRef>
-          <a:effectRef idx="2">
-            <a:schemeClr val="accent1"/>
-          </a:effectRef>
-          <a:fontRef idx="minor">
-            <a:schemeClr val="lt1"/>
-          </a:fontRef>
-        </p:style>
-        <p:txBody>
-          <a:bodyPr rtlCol="0" anchor="ctr"/>
-          <a:lstStyle/>
-          <a:p>
-            <a:pPr algn="ctr"/>
-          </a:p>
-        </p:txBody>
-      </p:sp>
-      <p:sp>
-        <p:nvSpPr>
-          <p:cNvPr id="22" name="Rounded Rectangle 21"/>
-          <p:cNvSpPr/>
-          <p:nvPr/>
-        </p:nvSpPr>
-        <p:spPr>
-          <a:xfrm>
-            <a:off x="2432303" y="3264408"/>
-            <a:ext cx="1453895" cy="347472"/>
-          </a:xfrm>
-          <a:prstGeom prst="roundRect">
-            <a:avLst>
-              <a:gd name="adj" fmla="val 25000"/>
-            </a:avLst>
-          </a:prstGeom>
-          <a:solidFill>
-            <a:srgbClr val="2A6FD1"/>
-          </a:solidFill>
-          <a:ln>
-            <a:noFill/>
-          </a:ln>
-          <a:effectLst/>
-        </p:spPr>
-        <p:style>
-          <a:lnRef idx="1">
-            <a:schemeClr val="accent1"/>
-          </a:lnRef>
-          <a:fillRef idx="3">
-            <a:schemeClr val="accent1"/>
-          </a:fillRef>
-          <a:effectRef idx="2">
-            <a:schemeClr val="accent1"/>
-          </a:effectRef>
-          <a:fontRef idx="minor">
-            <a:schemeClr val="lt1"/>
-          </a:fontRef>
-        </p:style>
-        <p:txBody>
-          <a:bodyPr rtlCol="0" anchor="ctr"/>
-          <a:lstStyle/>
-          <a:p>
-            <a:pPr algn="ctr"/>
-          </a:p>
-        </p:txBody>
-      </p:sp>
-      <p:sp>
-        <p:nvSpPr>
-          <p:cNvPr id="23" name="Rounded Rectangle 22"/>
-          <p:cNvSpPr/>
-          <p:nvPr/>
-        </p:nvSpPr>
-        <p:spPr>
-          <a:xfrm>
-            <a:off x="4041648" y="3264408"/>
-            <a:ext cx="950976" cy="347472"/>
-          </a:xfrm>
-          <a:prstGeom prst="roundRect">
-            <a:avLst>
-              <a:gd name="adj" fmla="val 25000"/>
-            </a:avLst>
-          </a:prstGeom>
-          <a:solidFill>
-            <a:srgbClr val="2A6FD1"/>
-          </a:solidFill>
-          <a:ln>
-            <a:noFill/>
-          </a:ln>
-          <a:effectLst/>
-        </p:spPr>
-        <p:style>
-          <a:lnRef idx="1">
-            <a:schemeClr val="accent1"/>
-          </a:lnRef>
-          <a:fillRef idx="3">
-            <a:schemeClr val="accent1"/>
-          </a:fillRef>
-          <a:effectRef idx="2">
-            <a:schemeClr val="accent1"/>
-          </a:effectRef>
-          <a:fontRef idx="minor">
-            <a:schemeClr val="lt1"/>
-          </a:fontRef>
-        </p:style>
-        <p:txBody>
-          <a:bodyPr rtlCol="0" anchor="ctr"/>
-          <a:lstStyle/>
-          <a:p>
-            <a:pPr algn="ctr"/>
-          </a:p>
-        </p:txBody>
-      </p:sp>
-      <p:sp>
-        <p:nvSpPr>
-          <p:cNvPr id="24" name="Rounded Rectangle 23"/>
-          <p:cNvSpPr/>
-          <p:nvPr/>
-        </p:nvSpPr>
-        <p:spPr>
-          <a:xfrm>
-            <a:off x="5148072" y="3264408"/>
-            <a:ext cx="950976" cy="347472"/>
-          </a:xfrm>
-          <a:prstGeom prst="roundRect">
-            <a:avLst>
-              <a:gd name="adj" fmla="val 25000"/>
-            </a:avLst>
-          </a:prstGeom>
-          <a:solidFill>
-            <a:srgbClr val="E0702A"/>
-          </a:solidFill>
-          <a:ln>
-            <a:noFill/>
-          </a:ln>
-          <a:effectLst/>
-        </p:spPr>
-        <p:style>
-          <a:lnRef idx="1">
-            <a:schemeClr val="accent1"/>
-          </a:lnRef>
-          <a:fillRef idx="3">
-            <a:schemeClr val="accent1"/>
-          </a:fillRef>
-          <a:effectRef idx="2">
-            <a:schemeClr val="accent1"/>
-          </a:effectRef>
-          <a:fontRef idx="minor">
-            <a:schemeClr val="lt1"/>
-          </a:fontRef>
-        </p:style>
-        <p:txBody>
-          <a:bodyPr rtlCol="0" anchor="ctr"/>
-          <a:lstStyle/>
-          <a:p>
-            <a:pPr algn="ctr"/>
-          </a:p>
-        </p:txBody>
-      </p:sp>
-      <p:sp>
-        <p:nvSpPr>
-          <p:cNvPr id="25" name="TextBox 24"/>
-          <p:cNvSpPr txBox="1"/>
-          <p:nvPr/>
-        </p:nvSpPr>
-        <p:spPr>
-          <a:xfrm>
-            <a:off x="868680" y="3922775"/>
-            <a:ext cx="640080" cy="274320"/>
-          </a:xfrm>
-          <a:prstGeom prst="rect">
-            <a:avLst/>
-          </a:prstGeom>
-          <a:noFill/>
-        </p:spPr>
-        <p:txBody>
-          <a:bodyPr wrap="square" anchor="t" lIns="0" rIns="0" tIns="0" bIns="0">
-            <a:spAutoFit/>
-          </a:bodyPr>
-          <a:lstStyle/>
-          <a:p>
-            <a:pPr>
-              <a:spcAft>
-                <a:spcPts val="600"/>
-              </a:spcAft>
-            </a:pPr>
-            <a:r>
-              <a:rPr sz="1300">
-                <a:solidFill>
-                  <a:srgbClr val="56677A"/>
-                </a:solidFill>
-                <a:latin typeface="Segoe UI Semibold"/>
-              </a:rPr>
-              <a:t>M4</a:t>
-            </a:r>
-          </a:p>
-        </p:txBody>
-      </p:sp>
-      <p:sp>
-        <p:nvSpPr>
-          <p:cNvPr id="26" name="Rounded Rectangle 25"/>
-          <p:cNvSpPr/>
-          <p:nvPr/>
-        </p:nvSpPr>
-        <p:spPr>
-          <a:xfrm>
-            <a:off x="1600200" y="3831335"/>
-            <a:ext cx="5029200" cy="457200"/>
-          </a:xfrm>
-          <a:prstGeom prst="roundRect">
-            <a:avLst>
-              <a:gd name="adj" fmla="val 20000"/>
-            </a:avLst>
-          </a:prstGeom>
-          <a:solidFill>
-            <a:srgbClr val="FFFFFF"/>
-          </a:solidFill>
-          <a:ln w="12700">
-            <a:solidFill>
-              <a:srgbClr val="CBD9EE"/>
-            </a:solidFill>
-          </a:ln>
-          <a:effectLst/>
-        </p:spPr>
-        <p:style>
-          <a:lnRef idx="1">
-            <a:schemeClr val="accent1"/>
-          </a:lnRef>
-          <a:fillRef idx="3">
-            <a:schemeClr val="accent1"/>
-          </a:fillRef>
-          <a:effectRef idx="2">
-            <a:schemeClr val="accent1"/>
-          </a:effectRef>
-          <a:fontRef idx="minor">
-            <a:schemeClr val="lt1"/>
-          </a:fontRef>
-        </p:style>
-        <p:txBody>
-          <a:bodyPr rtlCol="0" anchor="ctr"/>
-          <a:lstStyle/>
-          <a:p>
-            <a:pPr algn="ctr"/>
-          </a:p>
-        </p:txBody>
-      </p:sp>
-      <p:sp>
-        <p:nvSpPr>
-          <p:cNvPr id="27" name="Rounded Rectangle 26"/>
-          <p:cNvSpPr/>
-          <p:nvPr/>
-        </p:nvSpPr>
-        <p:spPr>
-          <a:xfrm>
-            <a:off x="1627632" y="3886199"/>
-            <a:ext cx="1152143" cy="347472"/>
-          </a:xfrm>
-          <a:prstGeom prst="roundRect">
-            <a:avLst>
-              <a:gd name="adj" fmla="val 25000"/>
-            </a:avLst>
-          </a:prstGeom>
-          <a:solidFill>
-            <a:srgbClr val="2A6FD1"/>
-          </a:solidFill>
-          <a:ln>
-            <a:noFill/>
-          </a:ln>
-          <a:effectLst/>
-        </p:spPr>
-        <p:style>
-          <a:lnRef idx="1">
-            <a:schemeClr val="accent1"/>
-          </a:lnRef>
-          <a:fillRef idx="3">
-            <a:schemeClr val="accent1"/>
-          </a:fillRef>
-          <a:effectRef idx="2">
-            <a:schemeClr val="accent1"/>
-          </a:effectRef>
-          <a:fontRef idx="minor">
-            <a:schemeClr val="lt1"/>
-          </a:fontRef>
-        </p:style>
-        <p:txBody>
-          <a:bodyPr rtlCol="0" anchor="ctr"/>
-          <a:lstStyle/>
-          <a:p>
-            <a:pPr algn="ctr"/>
-          </a:p>
-        </p:txBody>
-      </p:sp>
-      <p:sp>
-        <p:nvSpPr>
-          <p:cNvPr id="28" name="Rounded Rectangle 27"/>
-          <p:cNvSpPr/>
-          <p:nvPr/>
-        </p:nvSpPr>
-        <p:spPr>
-          <a:xfrm>
-            <a:off x="2935224" y="3886199"/>
-            <a:ext cx="749808" cy="347472"/>
-          </a:xfrm>
-          <a:prstGeom prst="roundRect">
-            <a:avLst>
-              <a:gd name="adj" fmla="val 25000"/>
-            </a:avLst>
-          </a:prstGeom>
-          <a:solidFill>
-            <a:srgbClr val="2A6FD1"/>
-          </a:solidFill>
-          <a:ln>
-            <a:noFill/>
-          </a:ln>
-          <a:effectLst/>
-        </p:spPr>
-        <p:style>
-          <a:lnRef idx="1">
-            <a:schemeClr val="accent1"/>
-          </a:lnRef>
-          <a:fillRef idx="3">
-            <a:schemeClr val="accent1"/>
-          </a:fillRef>
-          <a:effectRef idx="2">
-            <a:schemeClr val="accent1"/>
-          </a:effectRef>
-          <a:fontRef idx="minor">
-            <a:schemeClr val="lt1"/>
-          </a:fontRef>
-        </p:style>
-        <p:txBody>
-          <a:bodyPr rtlCol="0" anchor="ctr"/>
-          <a:lstStyle/>
-          <a:p>
-            <a:pPr algn="ctr"/>
-          </a:p>
-        </p:txBody>
-      </p:sp>
-      <p:sp>
-        <p:nvSpPr>
-          <p:cNvPr id="29" name="Rounded Rectangle 28"/>
-          <p:cNvSpPr/>
-          <p:nvPr/>
-        </p:nvSpPr>
-        <p:spPr>
-          <a:xfrm>
-            <a:off x="3840480" y="3886199"/>
-            <a:ext cx="1453895" cy="347472"/>
-          </a:xfrm>
-          <a:prstGeom prst="roundRect">
-            <a:avLst>
-              <a:gd name="adj" fmla="val 25000"/>
-            </a:avLst>
-          </a:prstGeom>
-          <a:solidFill>
-            <a:srgbClr val="2A6FD1"/>
-          </a:solidFill>
-          <a:ln>
-            <a:noFill/>
-          </a:ln>
-          <a:effectLst/>
-        </p:spPr>
-        <p:style>
-          <a:lnRef idx="1">
-            <a:schemeClr val="accent1"/>
-          </a:lnRef>
-          <a:fillRef idx="3">
-            <a:schemeClr val="accent1"/>
-          </a:fillRef>
-          <a:effectRef idx="2">
-            <a:schemeClr val="accent1"/>
-          </a:effectRef>
-          <a:fontRef idx="minor">
-            <a:schemeClr val="lt1"/>
-          </a:fontRef>
-        </p:style>
-        <p:txBody>
-          <a:bodyPr rtlCol="0" anchor="ctr"/>
-          <a:lstStyle/>
-          <a:p>
-            <a:pPr algn="ctr"/>
-          </a:p>
-        </p:txBody>
-      </p:sp>
-      <p:sp>
-        <p:nvSpPr>
-          <p:cNvPr id="30" name="Rounded Rectangle 29"/>
-          <p:cNvSpPr/>
-          <p:nvPr/>
-        </p:nvSpPr>
-        <p:spPr>
-          <a:xfrm>
-            <a:off x="5449824" y="3886199"/>
-            <a:ext cx="850392" cy="347472"/>
-          </a:xfrm>
-          <a:prstGeom prst="roundRect">
-            <a:avLst>
-              <a:gd name="adj" fmla="val 25000"/>
-            </a:avLst>
-          </a:prstGeom>
-          <a:solidFill>
-            <a:srgbClr val="E0702A"/>
-          </a:solidFill>
-          <a:ln>
-            <a:noFill/>
-          </a:ln>
-          <a:effectLst/>
-        </p:spPr>
-        <p:style>
-          <a:lnRef idx="1">
-            <a:schemeClr val="accent1"/>
-          </a:lnRef>
-          <a:fillRef idx="3">
-            <a:schemeClr val="accent1"/>
-          </a:fillRef>
-          <a:effectRef idx="2">
-            <a:schemeClr val="accent1"/>
-          </a:effectRef>
-          <a:fontRef idx="minor">
-            <a:schemeClr val="lt1"/>
-          </a:fontRef>
-        </p:style>
-        <p:txBody>
-          <a:bodyPr rtlCol="0" anchor="ctr"/>
-          <a:lstStyle/>
-          <a:p>
-            <a:pPr algn="ctr"/>
-          </a:p>
-        </p:txBody>
-      </p:sp>
-      <p:sp>
-        <p:nvSpPr>
-          <p:cNvPr id="31" name="Rectangle 30"/>
-          <p:cNvSpPr/>
-          <p:nvPr/>
-        </p:nvSpPr>
-        <p:spPr>
-          <a:xfrm>
-            <a:off x="5522976" y="1801368"/>
-            <a:ext cx="32004" cy="2532888"/>
-          </a:xfrm>
-          <a:prstGeom prst="rect">
-            <a:avLst/>
-          </a:prstGeom>
-          <a:solidFill>
-            <a:srgbClr val="0E2238"/>
-          </a:solidFill>
-          <a:ln>
-            <a:noFill/>
-          </a:ln>
-          <a:effectLst/>
-        </p:spPr>
-        <p:style>
-          <a:lnRef idx="1">
-            <a:schemeClr val="accent1"/>
-          </a:lnRef>
-          <a:fillRef idx="3">
-            <a:schemeClr val="accent1"/>
-          </a:fillRef>
-          <a:effectRef idx="2">
-            <a:schemeClr val="accent1"/>
-          </a:effectRef>
-          <a:fontRef idx="minor">
-            <a:schemeClr val="lt1"/>
-          </a:fontRef>
-        </p:style>
-        <p:txBody>
-          <a:bodyPr rtlCol="0" anchor="ctr"/>
-          <a:lstStyle/>
-          <a:p>
-            <a:pPr algn="ctr"/>
-          </a:p>
-        </p:txBody>
-      </p:sp>
-      <p:sp>
-        <p:nvSpPr>
-          <p:cNvPr id="32" name="TextBox 31"/>
-          <p:cNvSpPr txBox="1"/>
-          <p:nvPr/>
-        </p:nvSpPr>
-        <p:spPr>
-          <a:xfrm>
-            <a:off x="5065776" y="1554480"/>
-            <a:ext cx="1097280" cy="274320"/>
-          </a:xfrm>
-          <a:prstGeom prst="rect">
-            <a:avLst/>
-          </a:prstGeom>
-          <a:noFill/>
-        </p:spPr>
-        <p:txBody>
-          <a:bodyPr wrap="square" anchor="t" lIns="0" rIns="0" tIns="0" bIns="0">
-            <a:spAutoFit/>
-          </a:bodyPr>
-          <a:lstStyle/>
-          <a:p>
-            <a:pPr algn="ctr">
-              <a:spcAft>
-                <a:spcPts val="600"/>
-              </a:spcAft>
-            </a:pPr>
-            <a:r>
-              <a:rPr sz="1200">
-                <a:solidFill>
-                  <a:srgbClr val="0E2238"/>
-                </a:solidFill>
-                <a:latin typeface="Segoe UI Semibold"/>
-              </a:rPr>
-              <a:t>deadline</a:t>
-            </a:r>
-          </a:p>
-        </p:txBody>
-      </p:sp>
-      <p:sp>
-        <p:nvSpPr>
-          <p:cNvPr id="33" name="TextBox 32"/>
-          <p:cNvSpPr txBox="1"/>
-          <p:nvPr/>
-        </p:nvSpPr>
-        <p:spPr>
-          <a:xfrm>
-            <a:off x="1600200" y="4507992"/>
-            <a:ext cx="5029200" cy="274320"/>
-          </a:xfrm>
-          <a:prstGeom prst="rect">
-            <a:avLst/>
-          </a:prstGeom>
-          <a:noFill/>
-        </p:spPr>
-        <p:txBody>
-          <a:bodyPr wrap="square" anchor="t" lIns="0" rIns="0" tIns="0" bIns="0">
-            <a:spAutoFit/>
-          </a:bodyPr>
-          <a:lstStyle/>
-          <a:p>
-            <a:pPr algn="r">
-              <a:spcAft>
-                <a:spcPts val="600"/>
-              </a:spcAft>
-            </a:pPr>
-            <a:r>
-              <a:rPr sz="1200">
-                <a:solidFill>
-                  <a:srgbClr val="56677A"/>
-                </a:solidFill>
-                <a:latin typeface="Segoe UI"/>
-              </a:rPr>
-              <a:t>time  →</a:t>
-            </a:r>
-          </a:p>
-        </p:txBody>
-      </p:sp>
-      <p:sp>
-        <p:nvSpPr>
-          <p:cNvPr id="34" name="TextBox 33"/>
-          <p:cNvSpPr txBox="1"/>
-          <p:nvPr/>
-        </p:nvSpPr>
-        <p:spPr>
-          <a:xfrm>
-            <a:off x="868680" y="4526280"/>
-            <a:ext cx="5852160" cy="365760"/>
-          </a:xfrm>
-          <a:prstGeom prst="rect">
-            <a:avLst/>
-          </a:prstGeom>
-          <a:noFill/>
-        </p:spPr>
-        <p:txBody>
-          <a:bodyPr wrap="square" anchor="t" lIns="0" rIns="0" tIns="0" bIns="0">
-            <a:spAutoFit/>
-          </a:bodyPr>
-          <a:lstStyle/>
-          <a:p>
-            <a:pPr>
-              <a:spcAft>
-                <a:spcPts val="600"/>
-              </a:spcAft>
-            </a:pPr>
-            <a:r>
-              <a:rPr sz="1300">
-                <a:solidFill>
-                  <a:srgbClr val="56677A"/>
-                </a:solidFill>
-                <a:latin typeface="Segoe UI"/>
-              </a:rPr>
-              <a:t>A schedule: each block is a job on a machine. Orange jobs finish late.</a:t>
-            </a:r>
-          </a:p>
-        </p:txBody>
-      </p:sp>
-      <p:sp>
-        <p:nvSpPr>
-          <p:cNvPr id="35" name="TextBox 34"/>
-          <p:cNvSpPr txBox="1"/>
-          <p:nvPr/>
-        </p:nvSpPr>
-        <p:spPr>
-          <a:xfrm>
-            <a:off x="7406640" y="1600200"/>
-            <a:ext cx="4114800" cy="685800"/>
-          </a:xfrm>
-          <a:prstGeom prst="rect">
-            <a:avLst/>
-          </a:prstGeom>
-          <a:noFill/>
-        </p:spPr>
-        <p:txBody>
-          <a:bodyPr wrap="square" anchor="t" lIns="0" rIns="0" tIns="0" bIns="0">
-            <a:spAutoFit/>
-          </a:bodyPr>
-          <a:lstStyle/>
-          <a:p>
-            <a:pPr>
-              <a:spcAft>
-                <a:spcPts val="600"/>
-              </a:spcAft>
-            </a:pPr>
-            <a:r>
-              <a:rPr sz="3800">
-                <a:solidFill>
-                  <a:srgbClr val="2A6FD1"/>
-                </a:solidFill>
-                <a:latin typeface="Segoe UI Semibold"/>
-              </a:rPr>
-              <a:t>94%</a:t>
-            </a:r>
-          </a:p>
-        </p:txBody>
-      </p:sp>
-      <p:sp>
-        <p:nvSpPr>
-          <p:cNvPr id="36" name="TextBox 35"/>
-          <p:cNvSpPr txBox="1"/>
-          <p:nvPr/>
-        </p:nvSpPr>
-        <p:spPr>
-          <a:xfrm>
-            <a:off x="7406640" y="2313432"/>
-            <a:ext cx="4114800" cy="640080"/>
-          </a:xfrm>
-          <a:prstGeom prst="rect">
-            <a:avLst/>
-          </a:prstGeom>
-          <a:noFill/>
-        </p:spPr>
-        <p:txBody>
-          <a:bodyPr wrap="square" anchor="t" lIns="0" rIns="0" tIns="0" bIns="0">
-            <a:spAutoFit/>
-          </a:bodyPr>
-          <a:lstStyle/>
-          <a:p>
-            <a:pPr>
-              <a:spcAft>
-                <a:spcPts val="600"/>
-              </a:spcAft>
-            </a:pPr>
-            <a:r>
-              <a:rPr sz="1400">
-                <a:solidFill>
-                  <a:srgbClr val="56677A"/>
-                </a:solidFill>
-                <a:latin typeface="Segoe UI"/>
-              </a:rPr>
-              <a:t>of enterprises already use cloud services [1]</a:t>
-            </a:r>
-          </a:p>
-        </p:txBody>
-      </p:sp>
-      <p:sp>
-        <p:nvSpPr>
-          <p:cNvPr id="37" name="TextBox 36"/>
-          <p:cNvSpPr txBox="1"/>
-          <p:nvPr/>
-        </p:nvSpPr>
-        <p:spPr>
-          <a:xfrm>
-            <a:off x="7406640" y="2697480"/>
-            <a:ext cx="4114800" cy="685800"/>
-          </a:xfrm>
-          <a:prstGeom prst="rect">
-            <a:avLst/>
-          </a:prstGeom>
-          <a:noFill/>
-        </p:spPr>
-        <p:txBody>
-          <a:bodyPr wrap="square" anchor="t" lIns="0" rIns="0" tIns="0" bIns="0">
-            <a:spAutoFit/>
-          </a:bodyPr>
-          <a:lstStyle/>
-          <a:p>
-            <a:pPr>
-              <a:spcAft>
-                <a:spcPts val="600"/>
-              </a:spcAft>
-            </a:pPr>
-            <a:r>
-              <a:rPr sz="3800">
-                <a:solidFill>
-                  <a:srgbClr val="E0702A"/>
-                </a:solidFill>
-                <a:latin typeface="Segoe UI Semibold"/>
-              </a:rPr>
-              <a:t>$8,000 / min</a:t>
-            </a:r>
-          </a:p>
-        </p:txBody>
-      </p:sp>
-      <p:sp>
-        <p:nvSpPr>
-          <p:cNvPr id="38" name="TextBox 37"/>
-          <p:cNvSpPr txBox="1"/>
-          <p:nvPr/>
-        </p:nvSpPr>
-        <p:spPr>
-          <a:xfrm>
-            <a:off x="7406640" y="3410712"/>
-            <a:ext cx="4114800" cy="640080"/>
-          </a:xfrm>
-          <a:prstGeom prst="rect">
-            <a:avLst/>
-          </a:prstGeom>
-          <a:noFill/>
-        </p:spPr>
-        <p:txBody>
-          <a:bodyPr wrap="square" anchor="t" lIns="0" rIns="0" tIns="0" bIns="0">
-            <a:spAutoFit/>
-          </a:bodyPr>
-          <a:lstStyle/>
-          <a:p>
-            <a:pPr>
-              <a:spcAft>
-                <a:spcPts val="600"/>
-              </a:spcAft>
-            </a:pPr>
-            <a:r>
-              <a:rPr sz="1400">
-                <a:solidFill>
-                  <a:srgbClr val="56677A"/>
-                </a:solidFill>
-                <a:latin typeface="Segoe UI"/>
-              </a:rPr>
-              <a:t>average cost of cloud downtime (AUD) [1]</a:t>
-            </a:r>
-          </a:p>
-        </p:txBody>
-      </p:sp>
-      <p:sp>
-        <p:nvSpPr>
-          <p:cNvPr id="39" name="TextBox 38"/>
-          <p:cNvSpPr txBox="1"/>
-          <p:nvPr/>
-        </p:nvSpPr>
-        <p:spPr>
-          <a:xfrm>
-            <a:off x="7406640" y="3794760"/>
-            <a:ext cx="4114800" cy="685800"/>
-          </a:xfrm>
-          <a:prstGeom prst="rect">
-            <a:avLst/>
-          </a:prstGeom>
-          <a:noFill/>
-        </p:spPr>
-        <p:txBody>
-          <a:bodyPr wrap="square" anchor="t" lIns="0" rIns="0" tIns="0" bIns="0">
-            <a:spAutoFit/>
-          </a:bodyPr>
-          <a:lstStyle/>
-          <a:p>
-            <a:pPr>
-              <a:spcAft>
-                <a:spcPts val="600"/>
-              </a:spcAft>
-            </a:pPr>
-            <a:r>
-              <a:rPr sz="3800">
-                <a:solidFill>
-                  <a:srgbClr val="2A6FD1"/>
-                </a:solidFill>
-                <a:latin typeface="Segoe UI Semibold"/>
-              </a:rPr>
-              <a:t>$1.7 trillion</a:t>
-            </a:r>
-          </a:p>
-        </p:txBody>
-      </p:sp>
-      <p:sp>
-        <p:nvSpPr>
-          <p:cNvPr id="40" name="TextBox 39"/>
-          <p:cNvSpPr txBox="1"/>
-          <p:nvPr/>
-        </p:nvSpPr>
-        <p:spPr>
-          <a:xfrm>
-            <a:off x="7406640" y="4507992"/>
-            <a:ext cx="4114800" cy="640080"/>
-          </a:xfrm>
-          <a:prstGeom prst="rect">
-            <a:avLst/>
-          </a:prstGeom>
-          <a:noFill/>
-        </p:spPr>
-        <p:txBody>
-          <a:bodyPr wrap="square" anchor="t" lIns="0" rIns="0" tIns="0" bIns="0">
-            <a:spAutoFit/>
-          </a:bodyPr>
-          <a:lstStyle/>
-          <a:p>
-            <a:pPr>
-              <a:spcAft>
-                <a:spcPts val="600"/>
-              </a:spcAft>
-            </a:pPr>
-            <a:r>
-              <a:rPr sz="1400">
-                <a:solidFill>
-                  <a:srgbClr val="56677A"/>
-                </a:solidFill>
-                <a:latin typeface="Segoe UI"/>
-              </a:rPr>
-              <a:t>expected global cloud market by 2033 (AUD) [1]</a:t>
-            </a:r>
-          </a:p>
-        </p:txBody>
-      </p:sp>
-      <p:sp>
-        <p:nvSpPr>
-          <p:cNvPr id="41" name="Rounded Rectangle 40"/>
-          <p:cNvSpPr/>
-          <p:nvPr/>
-        </p:nvSpPr>
-        <p:spPr>
-          <a:xfrm>
-            <a:off x="640080" y="5166360"/>
-            <a:ext cx="10927080" cy="1051560"/>
+            <a:ext cx="6766560" cy="3246120"/>
           </a:xfrm>
           <a:prstGeom prst="roundRect">
             <a:avLst>
@@ -5457,19 +5653,240 @@
           <a:lstStyle/>
           <a:p>
             <a:pPr algn="ctr"/>
-          </a:p>
-        </p:txBody>
-      </p:sp>
-      <p:sp>
-        <p:nvSpPr>
-          <p:cNvPr id="42" name="TextBox 41"/>
+            <a:endParaRPr/>
+          </a:p>
+        </p:txBody>
+      </p:sp>
+      <p:sp>
+        <p:nvSpPr>
+          <p:cNvPr id="7" name="Rounded Rectangle 6"/>
+          <p:cNvSpPr/>
+          <p:nvPr/>
+        </p:nvSpPr>
+        <p:spPr>
+          <a:xfrm>
+            <a:off x="868680" y="2103120"/>
+            <a:ext cx="2286000" cy="1554480"/>
+          </a:xfrm>
+          <a:prstGeom prst="roundRect">
+            <a:avLst>
+              <a:gd name="adj" fmla="val 12000"/>
+            </a:avLst>
+          </a:prstGeom>
+          <a:solidFill>
+            <a:srgbClr val="2A6FD1"/>
+          </a:solidFill>
+          <a:ln>
+            <a:noFill/>
+          </a:ln>
+          <a:effectLst/>
+        </p:spPr>
+        <p:style>
+          <a:lnRef idx="1">
+            <a:schemeClr val="accent1"/>
+          </a:lnRef>
+          <a:fillRef idx="3">
+            <a:schemeClr val="accent1"/>
+          </a:fillRef>
+          <a:effectRef idx="2">
+            <a:schemeClr val="accent1"/>
+          </a:effectRef>
+          <a:fontRef idx="minor">
+            <a:schemeClr val="lt1"/>
+          </a:fontRef>
+        </p:style>
+        <p:txBody>
+          <a:bodyPr wrap="square" lIns="73152" rIns="73152" rtlCol="0" anchor="ctr"/>
+          <a:lstStyle/>
+          <a:p>
+            <a:pPr algn="ctr"/>
+            <a:r>
+              <a:rPr sz="1800">
+                <a:solidFill>
+                  <a:srgbClr val="FFFFFF"/>
+                </a:solidFill>
+                <a:latin typeface="Segoe UI Semibold"/>
+              </a:rPr>
+              <a:t>Agent</a:t>
+            </a:r>
+            <a:br/>
+            <a:r>
+              <a:rPr sz="1800">
+                <a:solidFill>
+                  <a:srgbClr val="FFFFFF"/>
+                </a:solidFill>
+                <a:latin typeface="Segoe UI Semibold"/>
+              </a:rPr>
+              <a:t>neural network</a:t>
+            </a:r>
+          </a:p>
+        </p:txBody>
+      </p:sp>
+      <p:sp>
+        <p:nvSpPr>
+          <p:cNvPr id="8" name="Rounded Rectangle 7"/>
+          <p:cNvSpPr/>
+          <p:nvPr/>
+        </p:nvSpPr>
+        <p:spPr>
+          <a:xfrm>
+            <a:off x="4892040" y="2103120"/>
+            <a:ext cx="2286000" cy="1554480"/>
+          </a:xfrm>
+          <a:prstGeom prst="roundRect">
+            <a:avLst>
+              <a:gd name="adj" fmla="val 12000"/>
+            </a:avLst>
+          </a:prstGeom>
+          <a:solidFill>
+            <a:srgbClr val="0E2238"/>
+          </a:solidFill>
+          <a:ln>
+            <a:noFill/>
+          </a:ln>
+          <a:effectLst/>
+        </p:spPr>
+        <p:style>
+          <a:lnRef idx="1">
+            <a:schemeClr val="accent1"/>
+          </a:lnRef>
+          <a:fillRef idx="3">
+            <a:schemeClr val="accent1"/>
+          </a:fillRef>
+          <a:effectRef idx="2">
+            <a:schemeClr val="accent1"/>
+          </a:effectRef>
+          <a:fontRef idx="minor">
+            <a:schemeClr val="lt1"/>
+          </a:fontRef>
+        </p:style>
+        <p:txBody>
+          <a:bodyPr wrap="square" lIns="73152" rIns="73152" rtlCol="0" anchor="ctr"/>
+          <a:lstStyle/>
+          <a:p>
+            <a:pPr algn="ctr"/>
+            <a:r>
+              <a:rPr sz="1800">
+                <a:solidFill>
+                  <a:srgbClr val="FFFFFF"/>
+                </a:solidFill>
+                <a:latin typeface="Segoe UI Semibold"/>
+              </a:rPr>
+              <a:t>Environment</a:t>
+            </a:r>
+            <a:br/>
+            <a:r>
+              <a:rPr sz="1800">
+                <a:solidFill>
+                  <a:srgbClr val="FFFFFF"/>
+                </a:solidFill>
+                <a:latin typeface="Segoe UI Semibold"/>
+              </a:rPr>
+              <a:t>10 machines + jobs</a:t>
+            </a:r>
+          </a:p>
+        </p:txBody>
+      </p:sp>
+      <p:sp>
+        <p:nvSpPr>
+          <p:cNvPr id="9" name="Right Arrow 8"/>
+          <p:cNvSpPr/>
+          <p:nvPr/>
+        </p:nvSpPr>
+        <p:spPr>
+          <a:xfrm>
+            <a:off x="3246120" y="2148840"/>
+            <a:ext cx="1554480" cy="502920"/>
+          </a:xfrm>
+          <a:prstGeom prst="rightArrow">
+            <a:avLst/>
+          </a:prstGeom>
+          <a:solidFill>
+            <a:srgbClr val="CBD9EE"/>
+          </a:solidFill>
+          <a:ln>
+            <a:noFill/>
+          </a:ln>
+          <a:effectLst/>
+        </p:spPr>
+        <p:style>
+          <a:lnRef idx="1">
+            <a:schemeClr val="accent1"/>
+          </a:lnRef>
+          <a:fillRef idx="3">
+            <a:schemeClr val="accent1"/>
+          </a:fillRef>
+          <a:effectRef idx="2">
+            <a:schemeClr val="accent1"/>
+          </a:effectRef>
+          <a:fontRef idx="minor">
+            <a:schemeClr val="lt1"/>
+          </a:fontRef>
+        </p:style>
+        <p:txBody>
+          <a:bodyPr rtlCol="0" anchor="ctr"/>
+          <a:lstStyle/>
+          <a:p>
+            <a:pPr algn="ctr"/>
+            <a:endParaRPr/>
+          </a:p>
+        </p:txBody>
+      </p:sp>
+      <p:sp>
+        <p:nvSpPr>
+          <p:cNvPr id="10" name="Left Arrow 9"/>
+          <p:cNvSpPr/>
+          <p:nvPr/>
+        </p:nvSpPr>
+        <p:spPr>
+          <a:xfrm>
+            <a:off x="3246120" y="3108960"/>
+            <a:ext cx="1554480" cy="502920"/>
+          </a:xfrm>
+          <a:prstGeom prst="leftArrow">
+            <a:avLst/>
+          </a:prstGeom>
+          <a:solidFill>
+            <a:srgbClr val="CBD9EE"/>
+          </a:solidFill>
+          <a:ln>
+            <a:noFill/>
+          </a:ln>
+          <a:effectLst/>
+        </p:spPr>
+        <p:style>
+          <a:lnRef idx="1">
+            <a:schemeClr val="accent1"/>
+          </a:lnRef>
+          <a:fillRef idx="3">
+            <a:schemeClr val="accent1"/>
+          </a:fillRef>
+          <a:effectRef idx="2">
+            <a:schemeClr val="accent1"/>
+          </a:effectRef>
+          <a:fontRef idx="minor">
+            <a:schemeClr val="lt1"/>
+          </a:fontRef>
+        </p:style>
+        <p:txBody>
+          <a:bodyPr rtlCol="0" anchor="ctr"/>
+          <a:lstStyle/>
+          <a:p>
+            <a:pPr algn="ctr"/>
+            <a:endParaRPr/>
+          </a:p>
+        </p:txBody>
+      </p:sp>
+      <p:sp>
+        <p:nvSpPr>
+          <p:cNvPr id="11" name="TextBox 10"/>
           <p:cNvSpPr txBox="1"/>
           <p:nvPr/>
         </p:nvSpPr>
         <p:spPr>
           <a:xfrm>
-            <a:off x="914400" y="5321808"/>
-            <a:ext cx="10424160" cy="822960"/>
+            <a:off x="3017520" y="2697480"/>
+            <a:ext cx="2011680" cy="274320"/>
           </a:xfrm>
           <a:prstGeom prst="rect">
             <a:avLst/>
@@ -5477,54 +5894,77 @@
           <a:noFill/>
         </p:spPr>
         <p:txBody>
-          <a:bodyPr wrap="square" anchor="t" lIns="0" rIns="0" tIns="0" bIns="0">
+          <a:bodyPr wrap="square" lIns="0" tIns="0" rIns="0" bIns="0" anchor="t">
             <a:spAutoFit/>
           </a:bodyPr>
           <a:lstStyle/>
           <a:p>
-            <a:pPr>
+            <a:pPr algn="ctr">
               <a:spcAft>
-                <a:spcPts val="400"/>
+                <a:spcPts val="600"/>
               </a:spcAft>
             </a:pPr>
             <a:r>
-              <a:rPr sz="1600">
-                <a:solidFill>
-                  <a:srgbClr val="56677A"/>
-                </a:solidFill>
-                <a:latin typeface="Segoe UI"/>
-              </a:rPr>
-              <a:t>Same decision, many fields: data centres, hospitals, factories, deliveries.</a:t>
-            </a:r>
-          </a:p>
-          <a:p>
-            <a:pPr>
+              <a:rPr sz="1300">
+                <a:solidFill>
+                  <a:srgbClr val="0E2238"/>
+                </a:solidFill>
+                <a:latin typeface="Segoe UI Semibold"/>
+              </a:rPr>
+              <a:t>action: start a job</a:t>
+            </a:r>
+          </a:p>
+        </p:txBody>
+      </p:sp>
+      <p:sp>
+        <p:nvSpPr>
+          <p:cNvPr id="12" name="TextBox 11"/>
+          <p:cNvSpPr txBox="1"/>
+          <p:nvPr/>
+        </p:nvSpPr>
+        <p:spPr>
+          <a:xfrm>
+            <a:off x="3017520" y="3639312"/>
+            <a:ext cx="2011680" cy="274320"/>
+          </a:xfrm>
+          <a:prstGeom prst="rect">
+            <a:avLst/>
+          </a:prstGeom>
+          <a:noFill/>
+        </p:spPr>
+        <p:txBody>
+          <a:bodyPr wrap="square" lIns="0" tIns="0" rIns="0" bIns="0" anchor="t">
+            <a:spAutoFit/>
+          </a:bodyPr>
+          <a:lstStyle/>
+          <a:p>
+            <a:pPr algn="ctr">
               <a:spcAft>
-                <a:spcPts val="400"/>
+                <a:spcPts val="600"/>
               </a:spcAft>
             </a:pPr>
             <a:r>
-              <a:rPr sz="2000">
+              <a:rPr sz="1300">
                 <a:solidFill>
                   <a:srgbClr val="0E2238"/>
                 </a:solidFill>
                 <a:latin typeface="Segoe UI Semibold"/>
               </a:rPr>
-              <a:t>Our question: can reinforcement learning schedule better than the best hand-made rule?</a:t>
-            </a:r>
-          </a:p>
-        </p:txBody>
-      </p:sp>
-      <p:sp>
-        <p:nvSpPr>
-          <p:cNvPr id="43" name="TextBox 42"/>
+              <a:t>new state + reward</a:t>
+            </a:r>
+          </a:p>
+        </p:txBody>
+      </p:sp>
+      <p:sp>
+        <p:nvSpPr>
+          <p:cNvPr id="13" name="TextBox 12"/>
           <p:cNvSpPr txBox="1"/>
           <p:nvPr/>
         </p:nvSpPr>
         <p:spPr>
           <a:xfrm>
-            <a:off x="640080" y="6236208"/>
-            <a:ext cx="10058400" cy="201168"/>
+            <a:off x="868680" y="4069080"/>
+            <a:ext cx="2103120" cy="274320"/>
           </a:xfrm>
           <a:prstGeom prst="rect">
             <a:avLst/>
@@ -5532,7 +5972,7 @@
           <a:noFill/>
         </p:spPr>
         <p:txBody>
-          <a:bodyPr wrap="square" anchor="t" lIns="0" rIns="0" tIns="0" bIns="0">
+          <a:bodyPr wrap="square" lIns="0" tIns="0" rIns="0" bIns="0" anchor="t">
             <a:spAutoFit/>
           </a:bodyPr>
           <a:lstStyle/>
@@ -5543,13 +5983,700 @@
               </a:spcAft>
             </a:pPr>
             <a:r>
-              <a:rPr sz="900">
+              <a:rPr sz="1500">
+                <a:solidFill>
+                  <a:srgbClr val="2A6FD1"/>
+                </a:solidFill>
+                <a:latin typeface="Segoe UI Semibold"/>
+              </a:rPr>
+              <a:t>State</a:t>
+            </a:r>
+          </a:p>
+        </p:txBody>
+      </p:sp>
+      <p:sp>
+        <p:nvSpPr>
+          <p:cNvPr id="14" name="TextBox 13"/>
+          <p:cNvSpPr txBox="1"/>
+          <p:nvPr/>
+        </p:nvSpPr>
+        <p:spPr>
+          <a:xfrm>
+            <a:off x="868680" y="4370832"/>
+            <a:ext cx="2057400" cy="548640"/>
+          </a:xfrm>
+          <a:prstGeom prst="rect">
+            <a:avLst/>
+          </a:prstGeom>
+          <a:noFill/>
+        </p:spPr>
+        <p:txBody>
+          <a:bodyPr wrap="square" lIns="0" tIns="0" rIns="0" bIns="0" anchor="t">
+            <a:spAutoFit/>
+          </a:bodyPr>
+          <a:lstStyle/>
+          <a:p>
+            <a:pPr>
+              <a:spcAft>
+                <a:spcPts val="600"/>
+              </a:spcAft>
+            </a:pPr>
+            <a:r>
+              <a:rPr sz="1300">
                 <a:solidFill>
                   <a:srgbClr val="56677A"/>
                 </a:solidFill>
                 <a:latin typeface="Segoe UI"/>
               </a:rPr>
-              <a:t>[1] DigitalDefynd, “30 Surprising Cloud Computing Facts &amp; Statistics,” 2026.</a:t>
+              <a:t>waiting jobs, deadlines, machine loads</a:t>
+            </a:r>
+          </a:p>
+        </p:txBody>
+      </p:sp>
+      <p:sp>
+        <p:nvSpPr>
+          <p:cNvPr id="15" name="TextBox 14"/>
+          <p:cNvSpPr txBox="1"/>
+          <p:nvPr/>
+        </p:nvSpPr>
+        <p:spPr>
+          <a:xfrm>
+            <a:off x="3063239" y="4069080"/>
+            <a:ext cx="2103120" cy="274320"/>
+          </a:xfrm>
+          <a:prstGeom prst="rect">
+            <a:avLst/>
+          </a:prstGeom>
+          <a:noFill/>
+        </p:spPr>
+        <p:txBody>
+          <a:bodyPr wrap="square" lIns="0" tIns="0" rIns="0" bIns="0" anchor="t">
+            <a:spAutoFit/>
+          </a:bodyPr>
+          <a:lstStyle/>
+          <a:p>
+            <a:pPr>
+              <a:spcAft>
+                <a:spcPts val="600"/>
+              </a:spcAft>
+            </a:pPr>
+            <a:r>
+              <a:rPr sz="1500">
+                <a:solidFill>
+                  <a:srgbClr val="2A6FD1"/>
+                </a:solidFill>
+                <a:latin typeface="Segoe UI Semibold"/>
+              </a:rPr>
+              <a:t>Action</a:t>
+            </a:r>
+          </a:p>
+        </p:txBody>
+      </p:sp>
+      <p:sp>
+        <p:nvSpPr>
+          <p:cNvPr id="16" name="TextBox 15"/>
+          <p:cNvSpPr txBox="1"/>
+          <p:nvPr/>
+        </p:nvSpPr>
+        <p:spPr>
+          <a:xfrm>
+            <a:off x="3063239" y="4370832"/>
+            <a:ext cx="2057400" cy="548640"/>
+          </a:xfrm>
+          <a:prstGeom prst="rect">
+            <a:avLst/>
+          </a:prstGeom>
+          <a:noFill/>
+        </p:spPr>
+        <p:txBody>
+          <a:bodyPr wrap="square" lIns="0" tIns="0" rIns="0" bIns="0" anchor="t">
+            <a:spAutoFit/>
+          </a:bodyPr>
+          <a:lstStyle/>
+          <a:p>
+            <a:pPr>
+              <a:spcAft>
+                <a:spcPts val="600"/>
+              </a:spcAft>
+            </a:pPr>
+            <a:r>
+              <a:rPr sz="1300">
+                <a:solidFill>
+                  <a:srgbClr val="56677A"/>
+                </a:solidFill>
+                <a:latin typeface="Segoe UI"/>
+              </a:rPr>
+              <a:t>which job to start next (or wait)</a:t>
+            </a:r>
+          </a:p>
+        </p:txBody>
+      </p:sp>
+      <p:sp>
+        <p:nvSpPr>
+          <p:cNvPr id="17" name="TextBox 16"/>
+          <p:cNvSpPr txBox="1"/>
+          <p:nvPr/>
+        </p:nvSpPr>
+        <p:spPr>
+          <a:xfrm>
+            <a:off x="5257800" y="4069080"/>
+            <a:ext cx="2103120" cy="274320"/>
+          </a:xfrm>
+          <a:prstGeom prst="rect">
+            <a:avLst/>
+          </a:prstGeom>
+          <a:noFill/>
+        </p:spPr>
+        <p:txBody>
+          <a:bodyPr wrap="square" lIns="0" tIns="0" rIns="0" bIns="0" anchor="t">
+            <a:spAutoFit/>
+          </a:bodyPr>
+          <a:lstStyle/>
+          <a:p>
+            <a:pPr>
+              <a:spcAft>
+                <a:spcPts val="600"/>
+              </a:spcAft>
+            </a:pPr>
+            <a:r>
+              <a:rPr sz="1500">
+                <a:solidFill>
+                  <a:srgbClr val="2A6FD1"/>
+                </a:solidFill>
+                <a:latin typeface="Segoe UI Semibold"/>
+              </a:rPr>
+              <a:t>Reward</a:t>
+            </a:r>
+          </a:p>
+        </p:txBody>
+      </p:sp>
+      <p:sp>
+        <p:nvSpPr>
+          <p:cNvPr id="18" name="TextBox 17"/>
+          <p:cNvSpPr txBox="1"/>
+          <p:nvPr/>
+        </p:nvSpPr>
+        <p:spPr>
+          <a:xfrm>
+            <a:off x="5257800" y="4370832"/>
+            <a:ext cx="2057400" cy="548640"/>
+          </a:xfrm>
+          <a:prstGeom prst="rect">
+            <a:avLst/>
+          </a:prstGeom>
+          <a:noFill/>
+        </p:spPr>
+        <p:txBody>
+          <a:bodyPr wrap="square" lIns="0" tIns="0" rIns="0" bIns="0" anchor="t">
+            <a:spAutoFit/>
+          </a:bodyPr>
+          <a:lstStyle/>
+          <a:p>
+            <a:pPr>
+              <a:spcAft>
+                <a:spcPts val="600"/>
+              </a:spcAft>
+            </a:pPr>
+            <a:r>
+              <a:rPr sz="1300">
+                <a:solidFill>
+                  <a:srgbClr val="56677A"/>
+                </a:solidFill>
+                <a:latin typeface="Segoe UI"/>
+              </a:rPr>
+              <a:t>minus the lateness cost</a:t>
+            </a:r>
+          </a:p>
+        </p:txBody>
+      </p:sp>
+      <p:sp>
+        <p:nvSpPr>
+          <p:cNvPr id="19" name="Rounded Rectangle 18"/>
+          <p:cNvSpPr/>
+          <p:nvPr/>
+        </p:nvSpPr>
+        <p:spPr>
+          <a:xfrm>
+            <a:off x="7680960" y="1600200"/>
+            <a:ext cx="3886200" cy="1600200"/>
+          </a:xfrm>
+          <a:prstGeom prst="roundRect">
+            <a:avLst>
+              <a:gd name="adj" fmla="val 4000"/>
+            </a:avLst>
+          </a:prstGeom>
+          <a:solidFill>
+            <a:srgbClr val="FFFFFF"/>
+          </a:solidFill>
+          <a:ln w="15875">
+            <a:solidFill>
+              <a:srgbClr val="CBD9EE"/>
+            </a:solidFill>
+          </a:ln>
+          <a:effectLst/>
+        </p:spPr>
+        <p:style>
+          <a:lnRef idx="1">
+            <a:schemeClr val="accent1"/>
+          </a:lnRef>
+          <a:fillRef idx="3">
+            <a:schemeClr val="accent1"/>
+          </a:fillRef>
+          <a:effectRef idx="2">
+            <a:schemeClr val="accent1"/>
+          </a:effectRef>
+          <a:fontRef idx="minor">
+            <a:schemeClr val="lt1"/>
+          </a:fontRef>
+        </p:style>
+        <p:txBody>
+          <a:bodyPr rtlCol="0" anchor="ctr"/>
+          <a:lstStyle/>
+          <a:p>
+            <a:pPr algn="ctr"/>
+            <a:endParaRPr/>
+          </a:p>
+        </p:txBody>
+      </p:sp>
+      <p:sp>
+        <p:nvSpPr>
+          <p:cNvPr id="20" name="TextBox 19"/>
+          <p:cNvSpPr txBox="1"/>
+          <p:nvPr/>
+        </p:nvSpPr>
+        <p:spPr>
+          <a:xfrm>
+            <a:off x="7909560" y="1737360"/>
+            <a:ext cx="3383280" cy="274320"/>
+          </a:xfrm>
+          <a:prstGeom prst="rect">
+            <a:avLst/>
+          </a:prstGeom>
+          <a:noFill/>
+        </p:spPr>
+        <p:txBody>
+          <a:bodyPr wrap="square" lIns="0" tIns="0" rIns="0" bIns="0" anchor="t">
+            <a:spAutoFit/>
+          </a:bodyPr>
+          <a:lstStyle/>
+          <a:p>
+            <a:pPr>
+              <a:spcAft>
+                <a:spcPts val="600"/>
+              </a:spcAft>
+            </a:pPr>
+            <a:r>
+              <a:rPr sz="1100">
+                <a:solidFill>
+                  <a:srgbClr val="2A6FD1"/>
+                </a:solidFill>
+                <a:latin typeface="Segoe UI Semibold"/>
+              </a:rPr>
+              <a:t>WHAT IT TRIES TO MINIMISE</a:t>
+            </a:r>
+          </a:p>
+        </p:txBody>
+      </p:sp>
+      <p:sp>
+        <p:nvSpPr>
+          <p:cNvPr id="21" name="TextBox 20"/>
+          <p:cNvSpPr txBox="1"/>
+          <p:nvPr/>
+        </p:nvSpPr>
+        <p:spPr>
+          <a:xfrm>
+            <a:off x="7955279" y="2011680"/>
+            <a:ext cx="3383280" cy="457200"/>
+          </a:xfrm>
+          <a:prstGeom prst="rect">
+            <a:avLst/>
+          </a:prstGeom>
+          <a:noFill/>
+        </p:spPr>
+        <p:txBody>
+          <a:bodyPr wrap="square" lIns="0" tIns="0" rIns="0" bIns="0" anchor="t">
+            <a:spAutoFit/>
+          </a:bodyPr>
+          <a:lstStyle/>
+          <a:p>
+            <a:pPr>
+              <a:spcAft>
+                <a:spcPts val="600"/>
+              </a:spcAft>
+            </a:pPr>
+            <a:r>
+              <a:rPr sz="2400">
+                <a:solidFill>
+                  <a:srgbClr val="0E2238"/>
+                </a:solidFill>
+                <a:latin typeface="Segoe UI Semibold"/>
+              </a:rPr>
+              <a:t>J = Σ w × (lateness)²</a:t>
+            </a:r>
+          </a:p>
+        </p:txBody>
+      </p:sp>
+      <p:sp>
+        <p:nvSpPr>
+          <p:cNvPr id="22" name="TextBox 21"/>
+          <p:cNvSpPr txBox="1"/>
+          <p:nvPr/>
+        </p:nvSpPr>
+        <p:spPr>
+          <a:xfrm>
+            <a:off x="7955279" y="2606040"/>
+            <a:ext cx="3383280" cy="548640"/>
+          </a:xfrm>
+          <a:prstGeom prst="rect">
+            <a:avLst/>
+          </a:prstGeom>
+          <a:noFill/>
+        </p:spPr>
+        <p:txBody>
+          <a:bodyPr wrap="square" lIns="0" tIns="0" rIns="0" bIns="0" anchor="t">
+            <a:spAutoFit/>
+          </a:bodyPr>
+          <a:lstStyle/>
+          <a:p>
+            <a:pPr>
+              <a:spcAft>
+                <a:spcPts val="600"/>
+              </a:spcAft>
+            </a:pPr>
+            <a:r>
+              <a:rPr sz="1200">
+                <a:solidFill>
+                  <a:srgbClr val="56677A"/>
+                </a:solidFill>
+                <a:latin typeface="Segoe UI"/>
+              </a:rPr>
+              <a:t>Late jobs hurt more the later they are; important jobs count more. Optional terms: late jobs, energy.</a:t>
+            </a:r>
+          </a:p>
+        </p:txBody>
+      </p:sp>
+      <p:sp>
+        <p:nvSpPr>
+          <p:cNvPr id="23" name="Rounded Rectangle 22"/>
+          <p:cNvSpPr/>
+          <p:nvPr/>
+        </p:nvSpPr>
+        <p:spPr>
+          <a:xfrm>
+            <a:off x="7680960" y="3337560"/>
+            <a:ext cx="3886200" cy="1508760"/>
+          </a:xfrm>
+          <a:prstGeom prst="roundRect">
+            <a:avLst>
+              <a:gd name="adj" fmla="val 4000"/>
+            </a:avLst>
+          </a:prstGeom>
+          <a:solidFill>
+            <a:srgbClr val="EEF4FC"/>
+          </a:solidFill>
+          <a:ln w="15875">
+            <a:solidFill>
+              <a:srgbClr val="EEF4FC"/>
+            </a:solidFill>
+          </a:ln>
+          <a:effectLst/>
+        </p:spPr>
+        <p:style>
+          <a:lnRef idx="1">
+            <a:schemeClr val="accent1"/>
+          </a:lnRef>
+          <a:fillRef idx="3">
+            <a:schemeClr val="accent1"/>
+          </a:fillRef>
+          <a:effectRef idx="2">
+            <a:schemeClr val="accent1"/>
+          </a:effectRef>
+          <a:fontRef idx="minor">
+            <a:schemeClr val="lt1"/>
+          </a:fontRef>
+        </p:style>
+        <p:txBody>
+          <a:bodyPr rtlCol="0" anchor="ctr"/>
+          <a:lstStyle/>
+          <a:p>
+            <a:pPr algn="ctr"/>
+            <a:endParaRPr/>
+          </a:p>
+        </p:txBody>
+      </p:sp>
+      <p:sp>
+        <p:nvSpPr>
+          <p:cNvPr id="24" name="TextBox 23"/>
+          <p:cNvSpPr txBox="1"/>
+          <p:nvPr/>
+        </p:nvSpPr>
+        <p:spPr>
+          <a:xfrm>
+            <a:off x="7955279" y="3474720"/>
+            <a:ext cx="3383280" cy="274320"/>
+          </a:xfrm>
+          <a:prstGeom prst="rect">
+            <a:avLst/>
+          </a:prstGeom>
+          <a:noFill/>
+        </p:spPr>
+        <p:txBody>
+          <a:bodyPr wrap="square" lIns="0" tIns="0" rIns="0" bIns="0" anchor="t">
+            <a:spAutoFit/>
+          </a:bodyPr>
+          <a:lstStyle/>
+          <a:p>
+            <a:pPr>
+              <a:spcAft>
+                <a:spcPts val="600"/>
+              </a:spcAft>
+            </a:pPr>
+            <a:r>
+              <a:rPr sz="1100">
+                <a:solidFill>
+                  <a:srgbClr val="2A6FD1"/>
+                </a:solidFill>
+                <a:latin typeface="Segoe UI Semibold"/>
+              </a:rPr>
+              <a:t>THREE KINDS OF SCHEDULER</a:t>
+            </a:r>
+          </a:p>
+        </p:txBody>
+      </p:sp>
+      <p:sp>
+        <p:nvSpPr>
+          <p:cNvPr id="25" name="TextBox 24"/>
+          <p:cNvSpPr txBox="1"/>
+          <p:nvPr/>
+        </p:nvSpPr>
+        <p:spPr>
+          <a:xfrm>
+            <a:off x="7955279" y="3749039"/>
+            <a:ext cx="3429000" cy="1097280"/>
+          </a:xfrm>
+          <a:prstGeom prst="rect">
+            <a:avLst/>
+          </a:prstGeom>
+          <a:noFill/>
+        </p:spPr>
+        <p:txBody>
+          <a:bodyPr wrap="square" lIns="0" tIns="0" rIns="0" bIns="0" anchor="t">
+            <a:spAutoFit/>
+          </a:bodyPr>
+          <a:lstStyle/>
+          <a:p>
+            <a:pPr>
+              <a:spcAft>
+                <a:spcPts val="300"/>
+              </a:spcAft>
+            </a:pPr>
+            <a:r>
+              <a:rPr sz="1400">
+                <a:solidFill>
+                  <a:srgbClr val="0E2238"/>
+                </a:solidFill>
+                <a:latin typeface="Segoe UI"/>
+              </a:rPr>
+              <a:t>Classic rules, made by hand</a:t>
+            </a:r>
+          </a:p>
+          <a:p>
+            <a:pPr>
+              <a:spcAft>
+                <a:spcPts val="300"/>
+              </a:spcAft>
+            </a:pPr>
+            <a:r>
+              <a:rPr sz="1400">
+                <a:solidFill>
+                  <a:srgbClr val="0E2238"/>
+                </a:solidFill>
+                <a:latin typeface="Segoe UI"/>
+              </a:rPr>
+              <a:t>AI that learns on its own</a:t>
+            </a:r>
+          </a:p>
+          <a:p>
+            <a:pPr>
+              <a:spcAft>
+                <a:spcPts val="300"/>
+              </a:spcAft>
+            </a:pPr>
+            <a:r>
+              <a:rPr sz="1400">
+                <a:solidFill>
+                  <a:srgbClr val="0E2238"/>
+                </a:solidFill>
+                <a:latin typeface="Segoe UI"/>
+              </a:rPr>
+              <a:t>AI that first copies a rule</a:t>
+            </a:r>
+          </a:p>
+        </p:txBody>
+      </p:sp>
+      <p:sp>
+        <p:nvSpPr>
+          <p:cNvPr id="26" name="Rounded Rectangle 25"/>
+          <p:cNvSpPr/>
+          <p:nvPr/>
+        </p:nvSpPr>
+        <p:spPr>
+          <a:xfrm>
+            <a:off x="640080" y="5074920"/>
+            <a:ext cx="10927080" cy="1143000"/>
+          </a:xfrm>
+          <a:prstGeom prst="roundRect">
+            <a:avLst>
+              <a:gd name="adj" fmla="val 4000"/>
+            </a:avLst>
+          </a:prstGeom>
+          <a:solidFill>
+            <a:srgbClr val="FFFFFF"/>
+          </a:solidFill>
+          <a:ln w="15875">
+            <a:solidFill>
+              <a:srgbClr val="CBD9EE"/>
+            </a:solidFill>
+          </a:ln>
+          <a:effectLst/>
+        </p:spPr>
+        <p:style>
+          <a:lnRef idx="1">
+            <a:schemeClr val="accent1"/>
+          </a:lnRef>
+          <a:fillRef idx="3">
+            <a:schemeClr val="accent1"/>
+          </a:fillRef>
+          <a:effectRef idx="2">
+            <a:schemeClr val="accent1"/>
+          </a:effectRef>
+          <a:fontRef idx="minor">
+            <a:schemeClr val="lt1"/>
+          </a:fontRef>
+        </p:style>
+        <p:txBody>
+          <a:bodyPr rtlCol="0" anchor="ctr"/>
+          <a:lstStyle/>
+          <a:p>
+            <a:pPr algn="ctr"/>
+            <a:endParaRPr/>
+          </a:p>
+        </p:txBody>
+      </p:sp>
+      <p:sp>
+        <p:nvSpPr>
+          <p:cNvPr id="27" name="TextBox 26"/>
+          <p:cNvSpPr txBox="1"/>
+          <p:nvPr/>
+        </p:nvSpPr>
+        <p:spPr>
+          <a:xfrm>
+            <a:off x="914400" y="5303520"/>
+            <a:ext cx="6400800" cy="592470"/>
+          </a:xfrm>
+          <a:prstGeom prst="rect">
+            <a:avLst/>
+          </a:prstGeom>
+          <a:noFill/>
+        </p:spPr>
+        <p:txBody>
+          <a:bodyPr wrap="square" lIns="0" tIns="0" rIns="0" bIns="0" anchor="t">
+            <a:spAutoFit/>
+          </a:bodyPr>
+          <a:lstStyle/>
+          <a:p>
+            <a:pPr>
+              <a:spcAft>
+                <a:spcPts val="300"/>
+              </a:spcAft>
+            </a:pPr>
+            <a:r>
+              <a:rPr sz="2200" dirty="0">
+                <a:solidFill>
+                  <a:srgbClr val="0E2238"/>
+                </a:solidFill>
+                <a:latin typeface="Segoe UI Semibold"/>
+              </a:rPr>
+              <a:t>Watch it learn</a:t>
+            </a:r>
+          </a:p>
+          <a:p>
+            <a:pPr>
+              <a:spcAft>
+                <a:spcPts val="300"/>
+              </a:spcAft>
+            </a:pPr>
+            <a:r>
+              <a:rPr lang="en-AU" sz="1400" dirty="0">
+                <a:solidFill>
+                  <a:srgbClr val="56677A"/>
+                </a:solidFill>
+                <a:latin typeface="Segoe UI"/>
+              </a:rPr>
+              <a:t>Train a tiny scheduler yourself and see how it learns</a:t>
+            </a:r>
+            <a:endParaRPr sz="1400" dirty="0">
+              <a:solidFill>
+                <a:srgbClr val="56677A"/>
+              </a:solidFill>
+              <a:latin typeface="Segoe UI"/>
+            </a:endParaRPr>
+          </a:p>
+        </p:txBody>
+      </p:sp>
+      <p:sp>
+        <p:nvSpPr>
+          <p:cNvPr id="28" name="Rounded Rectangle 27">
+            <a:hlinkClick r:id="rId3"/>
+          </p:cNvPr>
+          <p:cNvSpPr/>
+          <p:nvPr/>
+        </p:nvSpPr>
+        <p:spPr>
+          <a:xfrm>
+            <a:off x="7680960" y="5285232"/>
+            <a:ext cx="3611880" cy="731520"/>
+          </a:xfrm>
+          <a:prstGeom prst="roundRect">
+            <a:avLst>
+              <a:gd name="adj" fmla="val 30000"/>
+            </a:avLst>
+          </a:prstGeom>
+          <a:solidFill>
+            <a:srgbClr val="2A6FD1"/>
+          </a:solidFill>
+          <a:ln>
+            <a:noFill/>
+          </a:ln>
+          <a:effectLst/>
+        </p:spPr>
+        <p:style>
+          <a:lnRef idx="1">
+            <a:schemeClr val="accent1"/>
+          </a:lnRef>
+          <a:fillRef idx="3">
+            <a:schemeClr val="accent1"/>
+          </a:fillRef>
+          <a:effectRef idx="2">
+            <a:schemeClr val="accent1"/>
+          </a:effectRef>
+          <a:fontRef idx="minor">
+            <a:schemeClr val="lt1"/>
+          </a:fontRef>
+        </p:style>
+        <p:txBody>
+          <a:bodyPr wrap="square" lIns="73152" rIns="73152" rtlCol="0" anchor="ctr"/>
+          <a:lstStyle/>
+          <a:p>
+            <a:pPr algn="ctr"/>
+            <a:r>
+              <a:rPr sz="1700" dirty="0">
+                <a:solidFill>
+                  <a:srgbClr val="FFFFFF"/>
+                </a:solidFill>
+                <a:latin typeface="Segoe UI Semibold"/>
+              </a:rPr>
+              <a:t>Interactive demo →</a:t>
             </a:r>
           </a:p>
         </p:txBody>
@@ -5562,8 +6689,8 @@
 </p:sld>
 </file>
 
-<file path=ppt/slides/slide2.xml><?xml version="1.0" encoding="utf-8"?>
-<p:sld xmlns:a="http://schemas.openxmlformats.org/drawingml/2006/main" xmlns:p="http://schemas.openxmlformats.org/presentationml/2006/main" xmlns:r="http://schemas.openxmlformats.org/officeDocument/2006/relationships">
+<file path=ppt/slides/slide3.xml><?xml version="1.0" encoding="utf-8"?>
+<p:sld xmlns:a="http://schemas.openxmlformats.org/drawingml/2006/main" xmlns:r="http://schemas.openxmlformats.org/officeDocument/2006/relationships" xmlns:p="http://schemas.openxmlformats.org/presentationml/2006/main">
   <p:cSld>
     <p:bg>
       <p:bgPr>
@@ -5579,7 +6706,14 @@
         <p:cNvGrpSpPr/>
         <p:nvPr/>
       </p:nvGrpSpPr>
-      <p:grpSpPr/>
+      <p:grpSpPr>
+        <a:xfrm>
+          <a:off x="0" y="0"/>
+          <a:ext cx="0" cy="0"/>
+          <a:chOff x="0" y="0"/>
+          <a:chExt cx="0" cy="0"/>
+        </a:xfrm>
+      </p:grpSpPr>
       <p:sp>
         <p:nvSpPr>
           <p:cNvPr id="2" name="TextBox 1"/>
@@ -5597,7 +6731,7 @@
           <a:noFill/>
         </p:spPr>
         <p:txBody>
-          <a:bodyPr wrap="square" anchor="t" lIns="0" rIns="0" tIns="0" bIns="0">
+          <a:bodyPr wrap="square" lIns="0" tIns="0" rIns="0" bIns="0" anchor="t">
             <a:spAutoFit/>
           </a:bodyPr>
           <a:lstStyle/>
@@ -5614,7 +6748,7 @@
                 </a:solidFill>
                 <a:latin typeface="Segoe UI Semibold"/>
               </a:rPr>
-              <a:t>THE METHOD</a:t>
+              <a:t>WHAT WE FOUND</a:t>
             </a:r>
           </a:p>
         </p:txBody>
@@ -5636,7 +6770,7 @@
           <a:noFill/>
         </p:spPr>
         <p:txBody>
-          <a:bodyPr wrap="square" anchor="t" lIns="0" rIns="0" tIns="0" bIns="0">
+          <a:bodyPr wrap="square" lIns="0" tIns="0" rIns="0" bIns="0" anchor="t">
             <a:spAutoFit/>
           </a:bodyPr>
           <a:lstStyle/>
@@ -5653,7 +6787,7 @@
                 </a:solidFill>
                 <a:latin typeface="Segoe UI Semibold"/>
               </a:rPr>
-              <a:t>The scheduler is a neural network that learns from reward</a:t>
+              <a:t>The AI learned to match the best rules, but did not beat them</a:t>
             </a:r>
           </a:p>
         </p:txBody>
@@ -5675,7 +6809,7 @@
           <a:noFill/>
         </p:spPr>
         <p:txBody>
-          <a:bodyPr wrap="square" anchor="t" lIns="0" rIns="0" tIns="0" bIns="0">
+          <a:bodyPr wrap="square" lIns="0" tIns="0" rIns="0" bIns="0" anchor="t">
             <a:spAutoFit/>
           </a:bodyPr>
           <a:lstStyle/>
@@ -5714,7 +6848,7 @@
           <a:noFill/>
         </p:spPr>
         <p:txBody>
-          <a:bodyPr wrap="square" anchor="t" lIns="0" rIns="0" tIns="0" bIns="0">
+          <a:bodyPr wrap="square" lIns="0" tIns="0" rIns="0" bIns="0" anchor="t">
             <a:spAutoFit/>
           </a:bodyPr>
           <a:lstStyle/>
@@ -5731,7 +6865,7 @@
                 </a:solidFill>
                 <a:latin typeface="Segoe UI"/>
               </a:rPr>
-              <a:t>2 / 4</a:t>
+              <a:t>3 / 4</a:t>
             </a:r>
           </a:p>
         </p:txBody>
@@ -5745,585 +6879,7 @@
         <p:spPr>
           <a:xfrm>
             <a:off x="640080" y="1600200"/>
-            <a:ext cx="6766560" cy="3246120"/>
-          </a:xfrm>
-          <a:prstGeom prst="roundRect">
-            <a:avLst>
-              <a:gd name="adj" fmla="val 4000"/>
-            </a:avLst>
-          </a:prstGeom>
-          <a:solidFill>
-            <a:srgbClr val="EEF4FC"/>
-          </a:solidFill>
-          <a:ln w="15875">
-            <a:solidFill>
-              <a:srgbClr val="EEF4FC"/>
-            </a:solidFill>
-          </a:ln>
-          <a:effectLst/>
-        </p:spPr>
-        <p:style>
-          <a:lnRef idx="1">
-            <a:schemeClr val="accent1"/>
-          </a:lnRef>
-          <a:fillRef idx="3">
-            <a:schemeClr val="accent1"/>
-          </a:fillRef>
-          <a:effectRef idx="2">
-            <a:schemeClr val="accent1"/>
-          </a:effectRef>
-          <a:fontRef idx="minor">
-            <a:schemeClr val="lt1"/>
-          </a:fontRef>
-        </p:style>
-        <p:txBody>
-          <a:bodyPr rtlCol="0" anchor="ctr"/>
-          <a:lstStyle/>
-          <a:p>
-            <a:pPr algn="ctr"/>
-          </a:p>
-        </p:txBody>
-      </p:sp>
-      <p:sp>
-        <p:nvSpPr>
-          <p:cNvPr id="7" name="Rounded Rectangle 6"/>
-          <p:cNvSpPr/>
-          <p:nvPr/>
-        </p:nvSpPr>
-        <p:spPr>
-          <a:xfrm>
-            <a:off x="868680" y="2103120"/>
-            <a:ext cx="2286000" cy="1554480"/>
-          </a:xfrm>
-          <a:prstGeom prst="roundRect">
-            <a:avLst>
-              <a:gd name="adj" fmla="val 12000"/>
-            </a:avLst>
-          </a:prstGeom>
-          <a:solidFill>
-            <a:srgbClr val="2A6FD1"/>
-          </a:solidFill>
-          <a:ln>
-            <a:noFill/>
-          </a:ln>
-          <a:effectLst/>
-        </p:spPr>
-        <p:style>
-          <a:lnRef idx="1">
-            <a:schemeClr val="accent1"/>
-          </a:lnRef>
-          <a:fillRef idx="3">
-            <a:schemeClr val="accent1"/>
-          </a:fillRef>
-          <a:effectRef idx="2">
-            <a:schemeClr val="accent1"/>
-          </a:effectRef>
-          <a:fontRef idx="minor">
-            <a:schemeClr val="lt1"/>
-          </a:fontRef>
-        </p:style>
-        <p:txBody>
-          <a:bodyPr rtlCol="0" anchor="ctr" wrap="square" lIns="73152" rIns="73152"/>
-          <a:lstStyle/>
-          <a:p>
-            <a:pPr algn="ctr"/>
-            <a:r>
-              <a:rPr sz="1800">
-                <a:solidFill>
-                  <a:srgbClr val="FFFFFF"/>
-                </a:solidFill>
-                <a:latin typeface="Segoe UI Semibold"/>
-              </a:rPr>
-              <a:t>Agent</a:t>
-            </a:r>
-            <a:br/>
-            <a:r>
-              <a:rPr sz="1800">
-                <a:solidFill>
-                  <a:srgbClr val="FFFFFF"/>
-                </a:solidFill>
-                <a:latin typeface="Segoe UI Semibold"/>
-              </a:rPr>
-              <a:t>neural network</a:t>
-            </a:r>
-          </a:p>
-        </p:txBody>
-      </p:sp>
-      <p:sp>
-        <p:nvSpPr>
-          <p:cNvPr id="8" name="Rounded Rectangle 7"/>
-          <p:cNvSpPr/>
-          <p:nvPr/>
-        </p:nvSpPr>
-        <p:spPr>
-          <a:xfrm>
-            <a:off x="4892040" y="2103120"/>
-            <a:ext cx="2286000" cy="1554480"/>
-          </a:xfrm>
-          <a:prstGeom prst="roundRect">
-            <a:avLst>
-              <a:gd name="adj" fmla="val 12000"/>
-            </a:avLst>
-          </a:prstGeom>
-          <a:solidFill>
-            <a:srgbClr val="0E2238"/>
-          </a:solidFill>
-          <a:ln>
-            <a:noFill/>
-          </a:ln>
-          <a:effectLst/>
-        </p:spPr>
-        <p:style>
-          <a:lnRef idx="1">
-            <a:schemeClr val="accent1"/>
-          </a:lnRef>
-          <a:fillRef idx="3">
-            <a:schemeClr val="accent1"/>
-          </a:fillRef>
-          <a:effectRef idx="2">
-            <a:schemeClr val="accent1"/>
-          </a:effectRef>
-          <a:fontRef idx="minor">
-            <a:schemeClr val="lt1"/>
-          </a:fontRef>
-        </p:style>
-        <p:txBody>
-          <a:bodyPr rtlCol="0" anchor="ctr" wrap="square" lIns="73152" rIns="73152"/>
-          <a:lstStyle/>
-          <a:p>
-            <a:pPr algn="ctr"/>
-            <a:r>
-              <a:rPr sz="1800">
-                <a:solidFill>
-                  <a:srgbClr val="FFFFFF"/>
-                </a:solidFill>
-                <a:latin typeface="Segoe UI Semibold"/>
-              </a:rPr>
-              <a:t>Environment</a:t>
-            </a:r>
-            <a:br/>
-            <a:r>
-              <a:rPr sz="1800">
-                <a:solidFill>
-                  <a:srgbClr val="FFFFFF"/>
-                </a:solidFill>
-                <a:latin typeface="Segoe UI Semibold"/>
-              </a:rPr>
-              <a:t>10 machines + jobs</a:t>
-            </a:r>
-          </a:p>
-        </p:txBody>
-      </p:sp>
-      <p:sp>
-        <p:nvSpPr>
-          <p:cNvPr id="9" name="Right Arrow 8"/>
-          <p:cNvSpPr/>
-          <p:nvPr/>
-        </p:nvSpPr>
-        <p:spPr>
-          <a:xfrm>
-            <a:off x="3246120" y="2148840"/>
-            <a:ext cx="1554480" cy="502920"/>
-          </a:xfrm>
-          <a:prstGeom prst="rightArrow">
-            <a:avLst/>
-          </a:prstGeom>
-          <a:solidFill>
-            <a:srgbClr val="CBD9EE"/>
-          </a:solidFill>
-          <a:ln>
-            <a:noFill/>
-          </a:ln>
-          <a:effectLst/>
-        </p:spPr>
-        <p:style>
-          <a:lnRef idx="1">
-            <a:schemeClr val="accent1"/>
-          </a:lnRef>
-          <a:fillRef idx="3">
-            <a:schemeClr val="accent1"/>
-          </a:fillRef>
-          <a:effectRef idx="2">
-            <a:schemeClr val="accent1"/>
-          </a:effectRef>
-          <a:fontRef idx="minor">
-            <a:schemeClr val="lt1"/>
-          </a:fontRef>
-        </p:style>
-        <p:txBody>
-          <a:bodyPr rtlCol="0" anchor="ctr"/>
-          <a:lstStyle/>
-          <a:p>
-            <a:pPr algn="ctr"/>
-          </a:p>
-        </p:txBody>
-      </p:sp>
-      <p:sp>
-        <p:nvSpPr>
-          <p:cNvPr id="10" name="Left Arrow 9"/>
-          <p:cNvSpPr/>
-          <p:nvPr/>
-        </p:nvSpPr>
-        <p:spPr>
-          <a:xfrm>
-            <a:off x="3246120" y="3108960"/>
-            <a:ext cx="1554480" cy="502920"/>
-          </a:xfrm>
-          <a:prstGeom prst="leftArrow">
-            <a:avLst/>
-          </a:prstGeom>
-          <a:solidFill>
-            <a:srgbClr val="CBD9EE"/>
-          </a:solidFill>
-          <a:ln>
-            <a:noFill/>
-          </a:ln>
-          <a:effectLst/>
-        </p:spPr>
-        <p:style>
-          <a:lnRef idx="1">
-            <a:schemeClr val="accent1"/>
-          </a:lnRef>
-          <a:fillRef idx="3">
-            <a:schemeClr val="accent1"/>
-          </a:fillRef>
-          <a:effectRef idx="2">
-            <a:schemeClr val="accent1"/>
-          </a:effectRef>
-          <a:fontRef idx="minor">
-            <a:schemeClr val="lt1"/>
-          </a:fontRef>
-        </p:style>
-        <p:txBody>
-          <a:bodyPr rtlCol="0" anchor="ctr"/>
-          <a:lstStyle/>
-          <a:p>
-            <a:pPr algn="ctr"/>
-          </a:p>
-        </p:txBody>
-      </p:sp>
-      <p:sp>
-        <p:nvSpPr>
-          <p:cNvPr id="11" name="TextBox 10"/>
-          <p:cNvSpPr txBox="1"/>
-          <p:nvPr/>
-        </p:nvSpPr>
-        <p:spPr>
-          <a:xfrm>
-            <a:off x="3017520" y="2697480"/>
-            <a:ext cx="2011680" cy="274320"/>
-          </a:xfrm>
-          <a:prstGeom prst="rect">
-            <a:avLst/>
-          </a:prstGeom>
-          <a:noFill/>
-        </p:spPr>
-        <p:txBody>
-          <a:bodyPr wrap="square" anchor="t" lIns="0" rIns="0" tIns="0" bIns="0">
-            <a:spAutoFit/>
-          </a:bodyPr>
-          <a:lstStyle/>
-          <a:p>
-            <a:pPr algn="ctr">
-              <a:spcAft>
-                <a:spcPts val="600"/>
-              </a:spcAft>
-            </a:pPr>
-            <a:r>
-              <a:rPr sz="1300">
-                <a:solidFill>
-                  <a:srgbClr val="0E2238"/>
-                </a:solidFill>
-                <a:latin typeface="Segoe UI Semibold"/>
-              </a:rPr>
-              <a:t>action: start a job</a:t>
-            </a:r>
-          </a:p>
-        </p:txBody>
-      </p:sp>
-      <p:sp>
-        <p:nvSpPr>
-          <p:cNvPr id="12" name="TextBox 11"/>
-          <p:cNvSpPr txBox="1"/>
-          <p:nvPr/>
-        </p:nvSpPr>
-        <p:spPr>
-          <a:xfrm>
-            <a:off x="3017520" y="3639312"/>
-            <a:ext cx="2011680" cy="274320"/>
-          </a:xfrm>
-          <a:prstGeom prst="rect">
-            <a:avLst/>
-          </a:prstGeom>
-          <a:noFill/>
-        </p:spPr>
-        <p:txBody>
-          <a:bodyPr wrap="square" anchor="t" lIns="0" rIns="0" tIns="0" bIns="0">
-            <a:spAutoFit/>
-          </a:bodyPr>
-          <a:lstStyle/>
-          <a:p>
-            <a:pPr algn="ctr">
-              <a:spcAft>
-                <a:spcPts val="600"/>
-              </a:spcAft>
-            </a:pPr>
-            <a:r>
-              <a:rPr sz="1300">
-                <a:solidFill>
-                  <a:srgbClr val="0E2238"/>
-                </a:solidFill>
-                <a:latin typeface="Segoe UI Semibold"/>
-              </a:rPr>
-              <a:t>new state + reward</a:t>
-            </a:r>
-          </a:p>
-        </p:txBody>
-      </p:sp>
-      <p:sp>
-        <p:nvSpPr>
-          <p:cNvPr id="13" name="TextBox 12"/>
-          <p:cNvSpPr txBox="1"/>
-          <p:nvPr/>
-        </p:nvSpPr>
-        <p:spPr>
-          <a:xfrm>
-            <a:off x="868680" y="4069080"/>
-            <a:ext cx="2103120" cy="274320"/>
-          </a:xfrm>
-          <a:prstGeom prst="rect">
-            <a:avLst/>
-          </a:prstGeom>
-          <a:noFill/>
-        </p:spPr>
-        <p:txBody>
-          <a:bodyPr wrap="square" anchor="t" lIns="0" rIns="0" tIns="0" bIns="0">
-            <a:spAutoFit/>
-          </a:bodyPr>
-          <a:lstStyle/>
-          <a:p>
-            <a:pPr>
-              <a:spcAft>
-                <a:spcPts val="600"/>
-              </a:spcAft>
-            </a:pPr>
-            <a:r>
-              <a:rPr sz="1500">
-                <a:solidFill>
-                  <a:srgbClr val="2A6FD1"/>
-                </a:solidFill>
-                <a:latin typeface="Segoe UI Semibold"/>
-              </a:rPr>
-              <a:t>State</a:t>
-            </a:r>
-          </a:p>
-        </p:txBody>
-      </p:sp>
-      <p:sp>
-        <p:nvSpPr>
-          <p:cNvPr id="14" name="TextBox 13"/>
-          <p:cNvSpPr txBox="1"/>
-          <p:nvPr/>
-        </p:nvSpPr>
-        <p:spPr>
-          <a:xfrm>
-            <a:off x="868680" y="4370832"/>
-            <a:ext cx="2057400" cy="548640"/>
-          </a:xfrm>
-          <a:prstGeom prst="rect">
-            <a:avLst/>
-          </a:prstGeom>
-          <a:noFill/>
-        </p:spPr>
-        <p:txBody>
-          <a:bodyPr wrap="square" anchor="t" lIns="0" rIns="0" tIns="0" bIns="0">
-            <a:spAutoFit/>
-          </a:bodyPr>
-          <a:lstStyle/>
-          <a:p>
-            <a:pPr>
-              <a:spcAft>
-                <a:spcPts val="600"/>
-              </a:spcAft>
-            </a:pPr>
-            <a:r>
-              <a:rPr sz="1300">
-                <a:solidFill>
-                  <a:srgbClr val="56677A"/>
-                </a:solidFill>
-                <a:latin typeface="Segoe UI"/>
-              </a:rPr>
-              <a:t>waiting jobs, deadlines, machine loads</a:t>
-            </a:r>
-          </a:p>
-        </p:txBody>
-      </p:sp>
-      <p:sp>
-        <p:nvSpPr>
-          <p:cNvPr id="15" name="TextBox 14"/>
-          <p:cNvSpPr txBox="1"/>
-          <p:nvPr/>
-        </p:nvSpPr>
-        <p:spPr>
-          <a:xfrm>
-            <a:off x="3063239" y="4069080"/>
-            <a:ext cx="2103120" cy="274320"/>
-          </a:xfrm>
-          <a:prstGeom prst="rect">
-            <a:avLst/>
-          </a:prstGeom>
-          <a:noFill/>
-        </p:spPr>
-        <p:txBody>
-          <a:bodyPr wrap="square" anchor="t" lIns="0" rIns="0" tIns="0" bIns="0">
-            <a:spAutoFit/>
-          </a:bodyPr>
-          <a:lstStyle/>
-          <a:p>
-            <a:pPr>
-              <a:spcAft>
-                <a:spcPts val="600"/>
-              </a:spcAft>
-            </a:pPr>
-            <a:r>
-              <a:rPr sz="1500">
-                <a:solidFill>
-                  <a:srgbClr val="2A6FD1"/>
-                </a:solidFill>
-                <a:latin typeface="Segoe UI Semibold"/>
-              </a:rPr>
-              <a:t>Action</a:t>
-            </a:r>
-          </a:p>
-        </p:txBody>
-      </p:sp>
-      <p:sp>
-        <p:nvSpPr>
-          <p:cNvPr id="16" name="TextBox 15"/>
-          <p:cNvSpPr txBox="1"/>
-          <p:nvPr/>
-        </p:nvSpPr>
-        <p:spPr>
-          <a:xfrm>
-            <a:off x="3063239" y="4370832"/>
-            <a:ext cx="2057400" cy="548640"/>
-          </a:xfrm>
-          <a:prstGeom prst="rect">
-            <a:avLst/>
-          </a:prstGeom>
-          <a:noFill/>
-        </p:spPr>
-        <p:txBody>
-          <a:bodyPr wrap="square" anchor="t" lIns="0" rIns="0" tIns="0" bIns="0">
-            <a:spAutoFit/>
-          </a:bodyPr>
-          <a:lstStyle/>
-          <a:p>
-            <a:pPr>
-              <a:spcAft>
-                <a:spcPts val="600"/>
-              </a:spcAft>
-            </a:pPr>
-            <a:r>
-              <a:rPr sz="1300">
-                <a:solidFill>
-                  <a:srgbClr val="56677A"/>
-                </a:solidFill>
-                <a:latin typeface="Segoe UI"/>
-              </a:rPr>
-              <a:t>which job to start next (or wait)</a:t>
-            </a:r>
-          </a:p>
-        </p:txBody>
-      </p:sp>
-      <p:sp>
-        <p:nvSpPr>
-          <p:cNvPr id="17" name="TextBox 16"/>
-          <p:cNvSpPr txBox="1"/>
-          <p:nvPr/>
-        </p:nvSpPr>
-        <p:spPr>
-          <a:xfrm>
-            <a:off x="5257800" y="4069080"/>
-            <a:ext cx="2103120" cy="274320"/>
-          </a:xfrm>
-          <a:prstGeom prst="rect">
-            <a:avLst/>
-          </a:prstGeom>
-          <a:noFill/>
-        </p:spPr>
-        <p:txBody>
-          <a:bodyPr wrap="square" anchor="t" lIns="0" rIns="0" tIns="0" bIns="0">
-            <a:spAutoFit/>
-          </a:bodyPr>
-          <a:lstStyle/>
-          <a:p>
-            <a:pPr>
-              <a:spcAft>
-                <a:spcPts val="600"/>
-              </a:spcAft>
-            </a:pPr>
-            <a:r>
-              <a:rPr sz="1500">
-                <a:solidFill>
-                  <a:srgbClr val="2A6FD1"/>
-                </a:solidFill>
-                <a:latin typeface="Segoe UI Semibold"/>
-              </a:rPr>
-              <a:t>Reward</a:t>
-            </a:r>
-          </a:p>
-        </p:txBody>
-      </p:sp>
-      <p:sp>
-        <p:nvSpPr>
-          <p:cNvPr id="18" name="TextBox 17"/>
-          <p:cNvSpPr txBox="1"/>
-          <p:nvPr/>
-        </p:nvSpPr>
-        <p:spPr>
-          <a:xfrm>
-            <a:off x="5257800" y="4370832"/>
-            <a:ext cx="2057400" cy="548640"/>
-          </a:xfrm>
-          <a:prstGeom prst="rect">
-            <a:avLst/>
-          </a:prstGeom>
-          <a:noFill/>
-        </p:spPr>
-        <p:txBody>
-          <a:bodyPr wrap="square" anchor="t" lIns="0" rIns="0" tIns="0" bIns="0">
-            <a:spAutoFit/>
-          </a:bodyPr>
-          <a:lstStyle/>
-          <a:p>
-            <a:pPr>
-              <a:spcAft>
-                <a:spcPts val="600"/>
-              </a:spcAft>
-            </a:pPr>
-            <a:r>
-              <a:rPr sz="1300">
-                <a:solidFill>
-                  <a:srgbClr val="56677A"/>
-                </a:solidFill>
-                <a:latin typeface="Segoe UI"/>
-              </a:rPr>
-              <a:t>minus the lateness cost</a:t>
-            </a:r>
-          </a:p>
-        </p:txBody>
-      </p:sp>
-      <p:sp>
-        <p:nvSpPr>
-          <p:cNvPr id="19" name="Rounded Rectangle 18"/>
-          <p:cNvSpPr/>
-          <p:nvPr/>
-        </p:nvSpPr>
-        <p:spPr>
-          <a:xfrm>
-            <a:off x="7680960" y="1600200"/>
-            <a:ext cx="3886200" cy="1600200"/>
+            <a:ext cx="5349240" cy="3611880"/>
           </a:xfrm>
           <a:prstGeom prst="roundRect">
             <a:avLst>
@@ -6359,19 +6915,20 @@
           <a:lstStyle/>
           <a:p>
             <a:pPr algn="ctr"/>
-          </a:p>
-        </p:txBody>
-      </p:sp>
-      <p:sp>
-        <p:nvSpPr>
-          <p:cNvPr id="20" name="TextBox 19"/>
+            <a:endParaRPr/>
+          </a:p>
+        </p:txBody>
+      </p:sp>
+      <p:sp>
+        <p:nvSpPr>
+          <p:cNvPr id="7" name="TextBox 6"/>
           <p:cNvSpPr txBox="1"/>
           <p:nvPr/>
         </p:nvSpPr>
         <p:spPr>
           <a:xfrm>
-            <a:off x="7955279" y="1737360"/>
-            <a:ext cx="3383280" cy="274320"/>
+            <a:off x="868680" y="1719072"/>
+            <a:ext cx="4937760" cy="274320"/>
           </a:xfrm>
           <a:prstGeom prst="rect">
             <a:avLst/>
@@ -6379,7 +6936,7 @@
           <a:noFill/>
         </p:spPr>
         <p:txBody>
-          <a:bodyPr wrap="square" anchor="t" lIns="0" rIns="0" tIns="0" bIns="0">
+          <a:bodyPr wrap="square" lIns="0" tIns="0" rIns="0" bIns="0" anchor="t">
             <a:spAutoFit/>
           </a:bodyPr>
           <a:lstStyle/>
@@ -6390,263 +6947,51 @@
               </a:spcAft>
             </a:pPr>
             <a:r>
-              <a:rPr sz="1100">
-                <a:solidFill>
-                  <a:srgbClr val="2A6FD1"/>
+              <a:rPr sz="1300">
+                <a:solidFill>
+                  <a:srgbClr val="0E2238"/>
                 </a:solidFill>
                 <a:latin typeface="Segoe UI Semibold"/>
               </a:rPr>
-              <a:t>WHAT IT TRIES TO MINIMISE</a:t>
-            </a:r>
-          </a:p>
-        </p:txBody>
-      </p:sp>
-      <p:sp>
-        <p:nvSpPr>
-          <p:cNvPr id="21" name="TextBox 20"/>
-          <p:cNvSpPr txBox="1"/>
-          <p:nvPr/>
-        </p:nvSpPr>
-        <p:spPr>
-          <a:xfrm>
-            <a:off x="7955279" y="2011680"/>
-            <a:ext cx="3383280" cy="457200"/>
+              <a:t>Busy machines: cost on 50 fresh test cases</a:t>
+            </a:r>
+          </a:p>
+        </p:txBody>
+      </p:sp>
+      <p:pic>
+        <p:nvPicPr>
+          <p:cNvPr id="8" name="Picture 7" descr="final_chart1.png"/>
+          <p:cNvPicPr>
+            <a:picLocks noChangeAspect="1"/>
+          </p:cNvPicPr>
+          <p:nvPr/>
+        </p:nvPicPr>
+        <p:blipFill>
+          <a:blip r:embed="rId3"/>
+          <a:stretch>
+            <a:fillRect/>
+          </a:stretch>
+        </p:blipFill>
+        <p:spPr>
+          <a:xfrm>
+            <a:off x="822959" y="2029968"/>
+            <a:ext cx="4983480" cy="3180429"/>
           </a:xfrm>
           <a:prstGeom prst="rect">
             <a:avLst/>
           </a:prstGeom>
-          <a:noFill/>
-        </p:spPr>
-        <p:txBody>
-          <a:bodyPr wrap="square" anchor="t" lIns="0" rIns="0" tIns="0" bIns="0">
-            <a:spAutoFit/>
-          </a:bodyPr>
-          <a:lstStyle/>
-          <a:p>
-            <a:pPr>
-              <a:spcAft>
-                <a:spcPts val="600"/>
-              </a:spcAft>
-            </a:pPr>
-            <a:r>
-              <a:rPr sz="2400">
-                <a:solidFill>
-                  <a:srgbClr val="0E2238"/>
-                </a:solidFill>
-                <a:latin typeface="Segoe UI Semibold"/>
-              </a:rPr>
-              <a:t>J = Σ w × (lateness)²</a:t>
-            </a:r>
-          </a:p>
-        </p:txBody>
-      </p:sp>
-      <p:sp>
-        <p:nvSpPr>
-          <p:cNvPr id="22" name="TextBox 21"/>
-          <p:cNvSpPr txBox="1"/>
-          <p:nvPr/>
-        </p:nvSpPr>
-        <p:spPr>
-          <a:xfrm>
-            <a:off x="7955279" y="2606040"/>
-            <a:ext cx="3383280" cy="548640"/>
-          </a:xfrm>
-          <a:prstGeom prst="rect">
-            <a:avLst/>
-          </a:prstGeom>
-          <a:noFill/>
-        </p:spPr>
-        <p:txBody>
-          <a:bodyPr wrap="square" anchor="t" lIns="0" rIns="0" tIns="0" bIns="0">
-            <a:spAutoFit/>
-          </a:bodyPr>
-          <a:lstStyle/>
-          <a:p>
-            <a:pPr>
-              <a:spcAft>
-                <a:spcPts val="600"/>
-              </a:spcAft>
-            </a:pPr>
-            <a:r>
-              <a:rPr sz="1200">
-                <a:solidFill>
-                  <a:srgbClr val="56677A"/>
-                </a:solidFill>
-                <a:latin typeface="Segoe UI"/>
-              </a:rPr>
-              <a:t>Late jobs hurt more the later they are; important jobs count more. Optional terms: late jobs, energy.</a:t>
-            </a:r>
-          </a:p>
-        </p:txBody>
-      </p:sp>
-      <p:sp>
-        <p:nvSpPr>
-          <p:cNvPr id="23" name="Rounded Rectangle 22"/>
+        </p:spPr>
+      </p:pic>
+      <p:sp>
+        <p:nvSpPr>
+          <p:cNvPr id="9" name="Rounded Rectangle 8"/>
           <p:cNvSpPr/>
           <p:nvPr/>
         </p:nvSpPr>
         <p:spPr>
           <a:xfrm>
-            <a:off x="7680960" y="3337560"/>
-            <a:ext cx="3886200" cy="1508760"/>
-          </a:xfrm>
-          <a:prstGeom prst="roundRect">
-            <a:avLst>
-              <a:gd name="adj" fmla="val 4000"/>
-            </a:avLst>
-          </a:prstGeom>
-          <a:solidFill>
-            <a:srgbClr val="EEF4FC"/>
-          </a:solidFill>
-          <a:ln w="15875">
-            <a:solidFill>
-              <a:srgbClr val="EEF4FC"/>
-            </a:solidFill>
-          </a:ln>
-          <a:effectLst/>
-        </p:spPr>
-        <p:style>
-          <a:lnRef idx="1">
-            <a:schemeClr val="accent1"/>
-          </a:lnRef>
-          <a:fillRef idx="3">
-            <a:schemeClr val="accent1"/>
-          </a:fillRef>
-          <a:effectRef idx="2">
-            <a:schemeClr val="accent1"/>
-          </a:effectRef>
-          <a:fontRef idx="minor">
-            <a:schemeClr val="lt1"/>
-          </a:fontRef>
-        </p:style>
-        <p:txBody>
-          <a:bodyPr rtlCol="0" anchor="ctr"/>
-          <a:lstStyle/>
-          <a:p>
-            <a:pPr algn="ctr"/>
-          </a:p>
-        </p:txBody>
-      </p:sp>
-      <p:sp>
-        <p:nvSpPr>
-          <p:cNvPr id="24" name="TextBox 23"/>
-          <p:cNvSpPr txBox="1"/>
-          <p:nvPr/>
-        </p:nvSpPr>
-        <p:spPr>
-          <a:xfrm>
-            <a:off x="7955279" y="3474720"/>
-            <a:ext cx="3383280" cy="274320"/>
-          </a:xfrm>
-          <a:prstGeom prst="rect">
-            <a:avLst/>
-          </a:prstGeom>
-          <a:noFill/>
-        </p:spPr>
-        <p:txBody>
-          <a:bodyPr wrap="square" anchor="t" lIns="0" rIns="0" tIns="0" bIns="0">
-            <a:spAutoFit/>
-          </a:bodyPr>
-          <a:lstStyle/>
-          <a:p>
-            <a:pPr>
-              <a:spcAft>
-                <a:spcPts val="600"/>
-              </a:spcAft>
-            </a:pPr>
-            <a:r>
-              <a:rPr sz="1100">
-                <a:solidFill>
-                  <a:srgbClr val="2A6FD1"/>
-                </a:solidFill>
-                <a:latin typeface="Segoe UI Semibold"/>
-              </a:rPr>
-              <a:t>THREE KINDS OF SCHEDULER</a:t>
-            </a:r>
-          </a:p>
-        </p:txBody>
-      </p:sp>
-      <p:sp>
-        <p:nvSpPr>
-          <p:cNvPr id="25" name="TextBox 24"/>
-          <p:cNvSpPr txBox="1"/>
-          <p:nvPr/>
-        </p:nvSpPr>
-        <p:spPr>
-          <a:xfrm>
-            <a:off x="7955279" y="3749039"/>
-            <a:ext cx="3429000" cy="1097280"/>
-          </a:xfrm>
-          <a:prstGeom prst="rect">
-            <a:avLst/>
-          </a:prstGeom>
-          <a:noFill/>
-        </p:spPr>
-        <p:txBody>
-          <a:bodyPr wrap="square" anchor="t" lIns="0" rIns="0" tIns="0" bIns="0">
-            <a:spAutoFit/>
-          </a:bodyPr>
-          <a:lstStyle/>
-          <a:p>
-            <a:pPr>
-              <a:spcAft>
-                <a:spcPts val="300"/>
-              </a:spcAft>
-            </a:pPr>
-            <a:r>
-              <a:rPr sz="1400">
-                <a:solidFill>
-                  <a:srgbClr val="0E2238"/>
-                </a:solidFill>
-                <a:latin typeface="Segoe UI"/>
-              </a:rPr>
-              <a:t>Classic rules, made by hand</a:t>
-            </a:r>
-          </a:p>
-          <a:p>
-            <a:pPr>
-              <a:spcAft>
-                <a:spcPts val="300"/>
-              </a:spcAft>
-            </a:pPr>
-            <a:r>
-              <a:rPr sz="1400">
-                <a:solidFill>
-                  <a:srgbClr val="0E2238"/>
-                </a:solidFill>
-                <a:latin typeface="Segoe UI"/>
-              </a:rPr>
-              <a:t>AI that learns on its own</a:t>
-            </a:r>
-          </a:p>
-          <a:p>
-            <a:pPr>
-              <a:spcAft>
-                <a:spcPts val="300"/>
-              </a:spcAft>
-            </a:pPr>
-            <a:r>
-              <a:rPr sz="1400">
-                <a:solidFill>
-                  <a:srgbClr val="0E2238"/>
-                </a:solidFill>
-                <a:latin typeface="Segoe UI"/>
-              </a:rPr>
-              <a:t>AI that first copies a rule</a:t>
-            </a:r>
-          </a:p>
-        </p:txBody>
-      </p:sp>
-      <p:sp>
-        <p:nvSpPr>
-          <p:cNvPr id="26" name="Rounded Rectangle 25"/>
-          <p:cNvSpPr/>
-          <p:nvPr/>
-        </p:nvSpPr>
-        <p:spPr>
-          <a:xfrm>
-            <a:off x="640080" y="5074920"/>
-            <a:ext cx="10927080" cy="1143000"/>
+            <a:off x="6217920" y="1600200"/>
+            <a:ext cx="5349240" cy="3611880"/>
           </a:xfrm>
           <a:prstGeom prst="roundRect">
             <a:avLst>
@@ -6682,19 +7027,20 @@
           <a:lstStyle/>
           <a:p>
             <a:pPr algn="ctr"/>
-          </a:p>
-        </p:txBody>
-      </p:sp>
-      <p:sp>
-        <p:nvSpPr>
-          <p:cNvPr id="27" name="TextBox 26"/>
+            <a:endParaRPr/>
+          </a:p>
+        </p:txBody>
+      </p:sp>
+      <p:sp>
+        <p:nvSpPr>
+          <p:cNvPr id="10" name="TextBox 9"/>
           <p:cNvSpPr txBox="1"/>
           <p:nvPr/>
         </p:nvSpPr>
         <p:spPr>
           <a:xfrm>
-            <a:off x="914400" y="5303520"/>
-            <a:ext cx="6400800" cy="731520"/>
+            <a:off x="6446520" y="1719072"/>
+            <a:ext cx="4937760" cy="274320"/>
           </a:xfrm>
           <a:prstGeom prst="rect">
             <a:avLst/>
@@ -6702,7 +7048,70 @@
           <a:noFill/>
         </p:spPr>
         <p:txBody>
-          <a:bodyPr wrap="square" anchor="t" lIns="0" rIns="0" tIns="0" bIns="0">
+          <a:bodyPr wrap="square" lIns="0" tIns="0" rIns="0" bIns="0" anchor="t">
+            <a:spAutoFit/>
+          </a:bodyPr>
+          <a:lstStyle/>
+          <a:p>
+            <a:pPr>
+              <a:spcAft>
+                <a:spcPts val="600"/>
+              </a:spcAft>
+            </a:pPr>
+            <a:r>
+              <a:rPr sz="1300">
+                <a:solidFill>
+                  <a:srgbClr val="0E2238"/>
+                </a:solidFill>
+                <a:latin typeface="Segoe UI Semibold"/>
+              </a:rPr>
+              <a:t>Five scenarios: cost relative to the best rule</a:t>
+            </a:r>
+          </a:p>
+        </p:txBody>
+      </p:sp>
+      <p:pic>
+        <p:nvPicPr>
+          <p:cNvPr id="11" name="Picture 10" descr="final_chart2.png"/>
+          <p:cNvPicPr>
+            <a:picLocks noChangeAspect="1"/>
+          </p:cNvPicPr>
+          <p:nvPr/>
+        </p:nvPicPr>
+        <p:blipFill>
+          <a:blip r:embed="rId4"/>
+          <a:stretch>
+            <a:fillRect/>
+          </a:stretch>
+        </p:blipFill>
+        <p:spPr>
+          <a:xfrm>
+            <a:off x="6400800" y="2029968"/>
+            <a:ext cx="4983480" cy="3180429"/>
+          </a:xfrm>
+          <a:prstGeom prst="rect">
+            <a:avLst/>
+          </a:prstGeom>
+        </p:spPr>
+      </p:pic>
+      <p:sp>
+        <p:nvSpPr>
+          <p:cNvPr id="12" name="TextBox 11"/>
+          <p:cNvSpPr txBox="1"/>
+          <p:nvPr/>
+        </p:nvSpPr>
+        <p:spPr>
+          <a:xfrm>
+            <a:off x="640080" y="5349240"/>
+            <a:ext cx="7315200" cy="822960"/>
+          </a:xfrm>
+          <a:prstGeom prst="rect">
+            <a:avLst/>
+          </a:prstGeom>
+          <a:noFill/>
+        </p:spPr>
+        <p:txBody>
+          <a:bodyPr wrap="square" lIns="0" tIns="0" rIns="0" bIns="0" anchor="t">
             <a:spAutoFit/>
           </a:bodyPr>
           <a:lstStyle/>
@@ -6713,13 +7122,13 @@
               </a:spcAft>
             </a:pPr>
             <a:r>
-              <a:rPr sz="2200">
+              <a:rPr sz="1800">
                 <a:solidFill>
                   <a:srgbClr val="0E2238"/>
                 </a:solidFill>
                 <a:latin typeface="Segoe UI Semibold"/>
               </a:rPr>
-              <a:t>Watch it learn</a:t>
+              <a:t>No AI scheduler was significantly better than the best classic rule.</a:t>
             </a:r>
           </a:p>
           <a:p>
@@ -6729,29 +7138,29 @@
               </a:spcAft>
             </a:pPr>
             <a:r>
-              <a:rPr sz="1400">
+              <a:rPr sz="1200">
                 <a:solidFill>
                   <a:srgbClr val="56677A"/>
                 </a:solidFill>
                 <a:latin typeface="Segoe UI"/>
               </a:rPr>
-              <a:t>Train a tiny scheduler yourself and see its reward rise.</a:t>
-            </a:r>
-          </a:p>
-        </p:txBody>
-      </p:sp>
-      <p:sp>
-        <p:nvSpPr>
-          <p:cNvPr id="28" name="Rounded Rectangle 27">
-            <a:hlinkClick r:id="rId3"/>
+              <a:t>Exploratory results: 50 fresh test cases per scenario, 3 to 10 training runs per bar (dots).</a:t>
+            </a:r>
+          </a:p>
+        </p:txBody>
+      </p:sp>
+      <p:sp>
+        <p:nvSpPr>
+          <p:cNvPr id="13" name="Rounded Rectangle 12">
+            <a:hlinkClick r:id="rId5"/>
           </p:cNvPr>
           <p:cNvSpPr/>
           <p:nvPr/>
         </p:nvSpPr>
         <p:spPr>
           <a:xfrm>
-            <a:off x="7680960" y="5285232"/>
-            <a:ext cx="3611880" cy="731520"/>
+            <a:off x="8229600" y="5394960"/>
+            <a:ext cx="3337560" cy="731520"/>
           </a:xfrm>
           <a:prstGeom prst="roundRect">
             <a:avLst>
@@ -6781,18 +7190,18 @@
           </a:fontRef>
         </p:style>
         <p:txBody>
-          <a:bodyPr rtlCol="0" anchor="ctr" wrap="square" lIns="73152" rIns="73152"/>
+          <a:bodyPr wrap="square" lIns="73152" rIns="73152" rtlCol="0" anchor="ctr"/>
           <a:lstStyle/>
           <a:p>
             <a:pPr algn="ctr"/>
             <a:r>
-              <a:rPr sz="1700">
+              <a:rPr sz="1800">
                 <a:solidFill>
                   <a:srgbClr val="FFFFFF"/>
                 </a:solidFill>
                 <a:latin typeface="Segoe UI Semibold"/>
               </a:rPr>
-              <a:t>Interactive training demo →</a:t>
+              <a:t>Race the models →</a:t>
             </a:r>
           </a:p>
         </p:txBody>
@@ -6805,8 +7214,8 @@
 </p:sld>
 </file>
 
-<file path=ppt/slides/slide3.xml><?xml version="1.0" encoding="utf-8"?>
-<p:sld xmlns:a="http://schemas.openxmlformats.org/drawingml/2006/main" xmlns:p="http://schemas.openxmlformats.org/presentationml/2006/main" xmlns:r="http://schemas.openxmlformats.org/officeDocument/2006/relationships">
+<file path=ppt/slides/slide4.xml><?xml version="1.0" encoding="utf-8"?>
+<p:sld xmlns:a="http://schemas.openxmlformats.org/drawingml/2006/main" xmlns:r="http://schemas.openxmlformats.org/officeDocument/2006/relationships" xmlns:p="http://schemas.openxmlformats.org/presentationml/2006/main">
   <p:cSld>
     <p:bg>
       <p:bgPr>
@@ -6822,7 +7231,14 @@
         <p:cNvGrpSpPr/>
         <p:nvPr/>
       </p:nvGrpSpPr>
-      <p:grpSpPr/>
+      <p:grpSpPr>
+        <a:xfrm>
+          <a:off x="0" y="0"/>
+          <a:ext cx="0" cy="0"/>
+          <a:chOff x="0" y="0"/>
+          <a:chExt cx="0" cy="0"/>
+        </a:xfrm>
+      </p:grpSpPr>
       <p:sp>
         <p:nvSpPr>
           <p:cNvPr id="2" name="TextBox 1"/>
@@ -6840,7 +7256,7 @@
           <a:noFill/>
         </p:spPr>
         <p:txBody>
-          <a:bodyPr wrap="square" anchor="t" lIns="0" rIns="0" tIns="0" bIns="0">
+          <a:bodyPr wrap="square" lIns="0" tIns="0" rIns="0" bIns="0" anchor="t">
             <a:spAutoFit/>
           </a:bodyPr>
           <a:lstStyle/>
@@ -6857,7 +7273,7 @@
                 </a:solidFill>
                 <a:latin typeface="Segoe UI Semibold"/>
               </a:rPr>
-              <a:t>WHAT WE FOUND</a:t>
+              <a:t>WHAT I BUILT AND WHERE IT LEADS</a:t>
             </a:r>
           </a:p>
         </p:txBody>
@@ -6879,7 +7295,7 @@
           <a:noFill/>
         </p:spPr>
         <p:txBody>
-          <a:bodyPr wrap="square" anchor="t" lIns="0" rIns="0" tIns="0" bIns="0">
+          <a:bodyPr wrap="square" lIns="0" tIns="0" rIns="0" bIns="0" anchor="t">
             <a:spAutoFit/>
           </a:bodyPr>
           <a:lstStyle/>
@@ -6896,7 +7312,7 @@
                 </a:solidFill>
                 <a:latin typeface="Segoe UI Semibold"/>
               </a:rPr>
-              <a:t>The AI learned to match the best rules, but did not beat them</a:t>
+              <a:t>From following a plan to leading the next project</a:t>
             </a:r>
           </a:p>
         </p:txBody>
@@ -6918,7 +7334,7 @@
           <a:noFill/>
         </p:spPr>
         <p:txBody>
-          <a:bodyPr wrap="square" anchor="t" lIns="0" rIns="0" tIns="0" bIns="0">
+          <a:bodyPr wrap="square" lIns="0" tIns="0" rIns="0" bIns="0" anchor="t">
             <a:spAutoFit/>
           </a:bodyPr>
           <a:lstStyle/>
@@ -6957,7 +7373,7 @@
           <a:noFill/>
         </p:spPr>
         <p:txBody>
-          <a:bodyPr wrap="square" anchor="t" lIns="0" rIns="0" tIns="0" bIns="0">
+          <a:bodyPr wrap="square" lIns="0" tIns="0" rIns="0" bIns="0" anchor="t">
             <a:spAutoFit/>
           </a:bodyPr>
           <a:lstStyle/>
@@ -6974,7 +7390,7 @@
                 </a:solidFill>
                 <a:latin typeface="Segoe UI"/>
               </a:rPr>
-              <a:t>3 / 4</a:t>
+              <a:t>4 / 4</a:t>
             </a:r>
           </a:p>
         </p:txBody>
@@ -6988,7 +7404,7 @@
         <p:spPr>
           <a:xfrm>
             <a:off x="640080" y="1600200"/>
-            <a:ext cx="5349240" cy="3611880"/>
+            <a:ext cx="3520440" cy="3246120"/>
           </a:xfrm>
           <a:prstGeom prst="roundRect">
             <a:avLst>
@@ -7024,27 +7440,73 @@
           <a:lstStyle/>
           <a:p>
             <a:pPr algn="ctr"/>
-          </a:p>
-        </p:txBody>
-      </p:sp>
-      <p:sp>
-        <p:nvSpPr>
-          <p:cNvPr id="7" name="TextBox 6"/>
-          <p:cNvSpPr txBox="1"/>
-          <p:nvPr/>
-        </p:nvSpPr>
-        <p:spPr>
-          <a:xfrm>
-            <a:off x="868680" y="1719072"/>
-            <a:ext cx="4937760" cy="274320"/>
+            <a:endParaRPr/>
+          </a:p>
+        </p:txBody>
+      </p:sp>
+      <p:sp>
+        <p:nvSpPr>
+          <p:cNvPr id="7" name="Rectangle 6"/>
+          <p:cNvSpPr/>
+          <p:nvPr/>
+        </p:nvSpPr>
+        <p:spPr>
+          <a:xfrm>
+            <a:off x="914400" y="1600200"/>
+            <a:ext cx="822960" cy="64008"/>
           </a:xfrm>
           <a:prstGeom prst="rect">
             <a:avLst/>
           </a:prstGeom>
+          <a:solidFill>
+            <a:srgbClr val="2A6FD1"/>
+          </a:solidFill>
+          <a:ln>
+            <a:noFill/>
+          </a:ln>
+          <a:effectLst/>
+        </p:spPr>
+        <p:style>
+          <a:lnRef idx="1">
+            <a:schemeClr val="accent1"/>
+          </a:lnRef>
+          <a:fillRef idx="3">
+            <a:schemeClr val="accent1"/>
+          </a:fillRef>
+          <a:effectRef idx="2">
+            <a:schemeClr val="accent1"/>
+          </a:effectRef>
+          <a:fontRef idx="minor">
+            <a:schemeClr val="lt1"/>
+          </a:fontRef>
+        </p:style>
+        <p:txBody>
+          <a:bodyPr rtlCol="0" anchor="ctr"/>
+          <a:lstStyle/>
+          <a:p>
+            <a:pPr algn="ctr"/>
+            <a:endParaRPr/>
+          </a:p>
+        </p:txBody>
+      </p:sp>
+      <p:sp>
+        <p:nvSpPr>
+          <p:cNvPr id="8" name="TextBox 7"/>
+          <p:cNvSpPr txBox="1"/>
+          <p:nvPr/>
+        </p:nvSpPr>
+        <p:spPr>
+          <a:xfrm>
+            <a:off x="914400" y="1810512"/>
+            <a:ext cx="3017520" cy="365760"/>
+          </a:xfrm>
+          <a:prstGeom prst="rect">
+            <a:avLst/>
+          </a:prstGeom>
           <a:noFill/>
         </p:spPr>
         <p:txBody>
-          <a:bodyPr wrap="square" anchor="t" lIns="0" rIns="0" tIns="0" bIns="0">
+          <a:bodyPr wrap="square" lIns="0" tIns="0" rIns="0" bIns="0" anchor="t">
             <a:spAutoFit/>
           </a:bodyPr>
           <a:lstStyle/>
@@ -7055,51 +7517,178 @@
               </a:spcAft>
             </a:pPr>
             <a:r>
-              <a:rPr sz="1300">
+              <a:rPr sz="2000">
                 <a:solidFill>
                   <a:srgbClr val="0E2238"/>
                 </a:solidFill>
                 <a:latin typeface="Segoe UI Semibold"/>
               </a:rPr>
-              <a:t>Busy machines: cost on 50 fresh test cases</a:t>
-            </a:r>
-          </a:p>
-        </p:txBody>
-      </p:sp>
-      <p:pic>
-        <p:nvPicPr>
-          <p:cNvPr id="8" name="Picture 7" descr="final_chart1.png"/>
-          <p:cNvPicPr>
-            <a:picLocks noChangeAspect="1"/>
-          </p:cNvPicPr>
-          <p:nvPr/>
-        </p:nvPicPr>
-        <p:blipFill>
-          <a:blip r:embed="rId3"/>
-          <a:stretch>
-            <a:fillRect/>
-          </a:stretch>
-        </p:blipFill>
-        <p:spPr>
-          <a:xfrm>
-            <a:off x="822959" y="2029968"/>
-            <a:ext cx="4983480" cy="3180429"/>
+              <a:t>Skills built</a:t>
+            </a:r>
+          </a:p>
+        </p:txBody>
+      </p:sp>
+      <p:sp>
+        <p:nvSpPr>
+          <p:cNvPr id="9" name="TextBox 8"/>
+          <p:cNvSpPr txBox="1"/>
+          <p:nvPr/>
+        </p:nvSpPr>
+        <p:spPr>
+          <a:xfrm>
+            <a:off x="914400" y="2331720"/>
+            <a:ext cx="3017520" cy="2468880"/>
           </a:xfrm>
           <a:prstGeom prst="rect">
             <a:avLst/>
           </a:prstGeom>
-        </p:spPr>
-      </p:pic>
-      <p:sp>
-        <p:nvSpPr>
-          <p:cNvPr id="9" name="Rounded Rectangle 8"/>
+          <a:noFill/>
+        </p:spPr>
+        <p:txBody>
+          <a:bodyPr wrap="square" lIns="0" tIns="0" rIns="0" bIns="0" anchor="t">
+            <a:spAutoFit/>
+          </a:bodyPr>
+          <a:lstStyle/>
+          <a:p>
+            <a:pPr>
+              <a:spcAft>
+                <a:spcPts val="0"/>
+              </a:spcAft>
+            </a:pPr>
+            <a:r>
+              <a:rPr sz="1500">
+                <a:solidFill>
+                  <a:srgbClr val="0E2238"/>
+                </a:solidFill>
+                <a:latin typeface="Segoe UI Semibold"/>
+              </a:rPr>
+              <a:t>Modelling</a:t>
+            </a:r>
+          </a:p>
+          <a:p>
+            <a:pPr>
+              <a:spcAft>
+                <a:spcPts val="800"/>
+              </a:spcAft>
+            </a:pPr>
+            <a:r>
+              <a:rPr sz="1300">
+                <a:solidFill>
+                  <a:srgbClr val="56677A"/>
+                </a:solidFill>
+                <a:latin typeface="Segoe UI"/>
+              </a:rPr>
+              <a:t>a cloud problem turned into mathematics</a:t>
+            </a:r>
+          </a:p>
+          <a:p>
+            <a:pPr>
+              <a:spcAft>
+                <a:spcPts val="0"/>
+              </a:spcAft>
+            </a:pPr>
+            <a:r>
+              <a:rPr sz="1500">
+                <a:solidFill>
+                  <a:srgbClr val="0E2238"/>
+                </a:solidFill>
+                <a:latin typeface="Segoe UI Semibold"/>
+              </a:rPr>
+              <a:t>Machine learning</a:t>
+            </a:r>
+          </a:p>
+          <a:p>
+            <a:pPr>
+              <a:spcAft>
+                <a:spcPts val="800"/>
+              </a:spcAft>
+            </a:pPr>
+            <a:r>
+              <a:rPr sz="1300">
+                <a:solidFill>
+                  <a:srgbClr val="56677A"/>
+                </a:solidFill>
+                <a:latin typeface="Segoe UI"/>
+              </a:rPr>
+              <a:t>reinforcement and imitation learning</a:t>
+            </a:r>
+          </a:p>
+          <a:p>
+            <a:pPr>
+              <a:spcAft>
+                <a:spcPts val="0"/>
+              </a:spcAft>
+            </a:pPr>
+            <a:r>
+              <a:rPr sz="1500">
+                <a:solidFill>
+                  <a:srgbClr val="0E2238"/>
+                </a:solidFill>
+                <a:latin typeface="Segoe UI Semibold"/>
+              </a:rPr>
+              <a:t>Research rigour</a:t>
+            </a:r>
+          </a:p>
+          <a:p>
+            <a:pPr>
+              <a:spcAft>
+                <a:spcPts val="800"/>
+              </a:spcAft>
+            </a:pPr>
+            <a:r>
+              <a:rPr sz="1300">
+                <a:solidFill>
+                  <a:srgbClr val="56677A"/>
+                </a:solidFill>
+                <a:latin typeface="Segoe UI"/>
+              </a:rPr>
+              <a:t>fresh test data, honest reporting</a:t>
+            </a:r>
+          </a:p>
+          <a:p>
+            <a:pPr>
+              <a:spcAft>
+                <a:spcPts val="0"/>
+              </a:spcAft>
+            </a:pPr>
+            <a:r>
+              <a:rPr sz="1500">
+                <a:solidFill>
+                  <a:srgbClr val="0E2238"/>
+                </a:solidFill>
+                <a:latin typeface="Segoe UI Semibold"/>
+              </a:rPr>
+              <a:t>Communication</a:t>
+            </a:r>
+          </a:p>
+          <a:p>
+            <a:pPr>
+              <a:spcAft>
+                <a:spcPts val="800"/>
+              </a:spcAft>
+            </a:pPr>
+            <a:r>
+              <a:rPr sz="1300">
+                <a:solidFill>
+                  <a:srgbClr val="56677A"/>
+                </a:solidFill>
+                <a:latin typeface="Segoe UI"/>
+              </a:rPr>
+              <a:t>interactive tools for non-experts</a:t>
+            </a:r>
+          </a:p>
+        </p:txBody>
+      </p:sp>
+      <p:sp>
+        <p:nvSpPr>
+          <p:cNvPr id="10" name="Rounded Rectangle 9"/>
           <p:cNvSpPr/>
           <p:nvPr/>
         </p:nvSpPr>
         <p:spPr>
           <a:xfrm>
-            <a:off x="6217920" y="1600200"/>
-            <a:ext cx="5349240" cy="3611880"/>
+            <a:off x="4343400" y="1600200"/>
+            <a:ext cx="3520440" cy="3246120"/>
           </a:xfrm>
           <a:prstGeom prst="roundRect">
             <a:avLst>
@@ -7135,27 +7724,73 @@
           <a:lstStyle/>
           <a:p>
             <a:pPr algn="ctr"/>
-          </a:p>
-        </p:txBody>
-      </p:sp>
-      <p:sp>
-        <p:nvSpPr>
-          <p:cNvPr id="10" name="TextBox 9"/>
-          <p:cNvSpPr txBox="1"/>
-          <p:nvPr/>
-        </p:nvSpPr>
-        <p:spPr>
-          <a:xfrm>
-            <a:off x="6446520" y="1719072"/>
-            <a:ext cx="4937760" cy="274320"/>
+            <a:endParaRPr/>
+          </a:p>
+        </p:txBody>
+      </p:sp>
+      <p:sp>
+        <p:nvSpPr>
+          <p:cNvPr id="11" name="Rectangle 10"/>
+          <p:cNvSpPr/>
+          <p:nvPr/>
+        </p:nvSpPr>
+        <p:spPr>
+          <a:xfrm>
+            <a:off x="4617720" y="1600200"/>
+            <a:ext cx="822960" cy="64008"/>
           </a:xfrm>
           <a:prstGeom prst="rect">
             <a:avLst/>
           </a:prstGeom>
+          <a:solidFill>
+            <a:srgbClr val="E0702A"/>
+          </a:solidFill>
+          <a:ln>
+            <a:noFill/>
+          </a:ln>
+          <a:effectLst/>
+        </p:spPr>
+        <p:style>
+          <a:lnRef idx="1">
+            <a:schemeClr val="accent1"/>
+          </a:lnRef>
+          <a:fillRef idx="3">
+            <a:schemeClr val="accent1"/>
+          </a:fillRef>
+          <a:effectRef idx="2">
+            <a:schemeClr val="accent1"/>
+          </a:effectRef>
+          <a:fontRef idx="minor">
+            <a:schemeClr val="lt1"/>
+          </a:fontRef>
+        </p:style>
+        <p:txBody>
+          <a:bodyPr rtlCol="0" anchor="ctr"/>
+          <a:lstStyle/>
+          <a:p>
+            <a:pPr algn="ctr"/>
+            <a:endParaRPr/>
+          </a:p>
+        </p:txBody>
+      </p:sp>
+      <p:sp>
+        <p:nvSpPr>
+          <p:cNvPr id="12" name="TextBox 11"/>
+          <p:cNvSpPr txBox="1"/>
+          <p:nvPr/>
+        </p:nvSpPr>
+        <p:spPr>
+          <a:xfrm>
+            <a:off x="4617720" y="1810512"/>
+            <a:ext cx="3017520" cy="365760"/>
+          </a:xfrm>
+          <a:prstGeom prst="rect">
+            <a:avLst/>
+          </a:prstGeom>
           <a:noFill/>
         </p:spPr>
         <p:txBody>
-          <a:bodyPr wrap="square" anchor="t" lIns="0" rIns="0" tIns="0" bIns="0">
+          <a:bodyPr wrap="square" lIns="0" tIns="0" rIns="0" bIns="0" anchor="t">
             <a:spAutoFit/>
           </a:bodyPr>
           <a:lstStyle/>
@@ -7166,344 +7801,145 @@
               </a:spcAft>
             </a:pPr>
             <a:r>
-              <a:rPr sz="1300">
+              <a:rPr sz="2000">
                 <a:solidFill>
                   <a:srgbClr val="0E2238"/>
                 </a:solidFill>
                 <a:latin typeface="Segoe UI Semibold"/>
               </a:rPr>
-              <a:t>Five scenarios: cost relative to the best rule</a:t>
-            </a:r>
-          </a:p>
-        </p:txBody>
-      </p:sp>
-      <p:pic>
-        <p:nvPicPr>
-          <p:cNvPr id="11" name="Picture 10" descr="final_chart2.png"/>
-          <p:cNvPicPr>
-            <a:picLocks noChangeAspect="1"/>
-          </p:cNvPicPr>
-          <p:nvPr/>
-        </p:nvPicPr>
-        <p:blipFill>
-          <a:blip r:embed="rId4"/>
-          <a:stretch>
-            <a:fillRect/>
-          </a:stretch>
-        </p:blipFill>
-        <p:spPr>
-          <a:xfrm>
-            <a:off x="6400800" y="2029968"/>
-            <a:ext cx="4983480" cy="3180429"/>
+              <a:t>Where it leads</a:t>
+            </a:r>
+          </a:p>
+        </p:txBody>
+      </p:sp>
+      <p:sp>
+        <p:nvSpPr>
+          <p:cNvPr id="13" name="TextBox 12"/>
+          <p:cNvSpPr txBox="1"/>
+          <p:nvPr/>
+        </p:nvSpPr>
+        <p:spPr>
+          <a:xfrm>
+            <a:off x="4617720" y="2331720"/>
+            <a:ext cx="3017520" cy="2468880"/>
           </a:xfrm>
           <a:prstGeom prst="rect">
             <a:avLst/>
           </a:prstGeom>
-        </p:spPr>
-      </p:pic>
-      <p:sp>
-        <p:nvSpPr>
-          <p:cNvPr id="12" name="TextBox 11"/>
-          <p:cNvSpPr txBox="1"/>
-          <p:nvPr/>
-        </p:nvSpPr>
-        <p:spPr>
-          <a:xfrm>
-            <a:off x="640080" y="5349240"/>
-            <a:ext cx="7315200" cy="822960"/>
-          </a:xfrm>
-          <a:prstGeom prst="rect">
-            <a:avLst/>
-          </a:prstGeom>
           <a:noFill/>
         </p:spPr>
         <p:txBody>
-          <a:bodyPr wrap="square" anchor="t" lIns="0" rIns="0" tIns="0" bIns="0">
+          <a:bodyPr wrap="square" lIns="0" tIns="0" rIns="0" bIns="0" anchor="t">
             <a:spAutoFit/>
           </a:bodyPr>
           <a:lstStyle/>
           <a:p>
             <a:pPr>
               <a:spcAft>
-                <a:spcPts val="300"/>
+                <a:spcPts val="0"/>
               </a:spcAft>
             </a:pPr>
             <a:r>
-              <a:rPr sz="1800">
+              <a:rPr sz="1500">
                 <a:solidFill>
                   <a:srgbClr val="0E2238"/>
                 </a:solidFill>
                 <a:latin typeface="Segoe UI Semibold"/>
               </a:rPr>
-              <a:t>No AI scheduler was significantly better than the best classic rule.</a:t>
+              <a:t>My direction</a:t>
             </a:r>
           </a:p>
           <a:p>
             <a:pPr>
               <a:spcAft>
-                <a:spcPts val="300"/>
+                <a:spcPts val="800"/>
               </a:spcAft>
             </a:pPr>
             <a:r>
-              <a:rPr sz="1200">
+              <a:rPr sz="1300">
                 <a:solidFill>
                   <a:srgbClr val="56677A"/>
                 </a:solidFill>
                 <a:latin typeface="Segoe UI"/>
               </a:rPr>
-              <a:t>Exploratory results: 50 fresh test cases per scenario, 3 to 10 training runs per bar (dots).</a:t>
-            </a:r>
-          </a:p>
-        </p:txBody>
-      </p:sp>
-      <p:sp>
-        <p:nvSpPr>
-          <p:cNvPr id="13" name="Rounded Rectangle 12">
-            <a:hlinkClick r:id="rId5"/>
-          </p:cNvPr>
-          <p:cNvSpPr/>
-          <p:nvPr/>
-        </p:nvSpPr>
-        <p:spPr>
-          <a:xfrm>
-            <a:off x="8229600" y="5394960"/>
-            <a:ext cx="3337560" cy="731520"/>
-          </a:xfrm>
-          <a:prstGeom prst="roundRect">
-            <a:avLst>
-              <a:gd name="adj" fmla="val 30000"/>
-            </a:avLst>
-          </a:prstGeom>
-          <a:solidFill>
-            <a:srgbClr val="2A6FD1"/>
-          </a:solidFill>
-          <a:ln>
-            <a:noFill/>
-          </a:ln>
-          <a:effectLst/>
-        </p:spPr>
-        <p:style>
-          <a:lnRef idx="1">
-            <a:schemeClr val="accent1"/>
-          </a:lnRef>
-          <a:fillRef idx="3">
-            <a:schemeClr val="accent1"/>
-          </a:fillRef>
-          <a:effectRef idx="2">
-            <a:schemeClr val="accent1"/>
-          </a:effectRef>
-          <a:fontRef idx="minor">
-            <a:schemeClr val="lt1"/>
-          </a:fontRef>
-        </p:style>
-        <p:txBody>
-          <a:bodyPr rtlCol="0" anchor="ctr" wrap="square" lIns="73152" rIns="73152"/>
-          <a:lstStyle/>
-          <a:p>
-            <a:pPr algn="ctr"/>
-            <a:r>
-              <a:rPr sz="1800">
-                <a:solidFill>
-                  <a:srgbClr val="FFFFFF"/>
-                </a:solidFill>
-                <a:latin typeface="Segoe UI Semibold"/>
-              </a:rPr>
-              <a:t>Race the models →</a:t>
-            </a:r>
-          </a:p>
-        </p:txBody>
-      </p:sp>
-    </p:spTree>
-  </p:cSld>
-  <p:clrMapOvr>
-    <a:masterClrMapping/>
-  </p:clrMapOvr>
-</p:sld>
-</file>
-
-<file path=ppt/slides/slide4.xml><?xml version="1.0" encoding="utf-8"?>
-<p:sld xmlns:a="http://schemas.openxmlformats.org/drawingml/2006/main" xmlns:p="http://schemas.openxmlformats.org/presentationml/2006/main" xmlns:r="http://schemas.openxmlformats.org/officeDocument/2006/relationships">
-  <p:cSld>
-    <p:bg>
-      <p:bgPr>
-        <a:solidFill>
-          <a:srgbClr val="FFFFFF"/>
-        </a:solidFill>
-        <a:effectLst/>
-      </p:bgPr>
-    </p:bg>
-    <p:spTree>
-      <p:nvGrpSpPr>
-        <p:cNvPr id="1" name=""/>
-        <p:cNvGrpSpPr/>
-        <p:nvPr/>
-      </p:nvGrpSpPr>
-      <p:grpSpPr/>
-      <p:sp>
-        <p:nvSpPr>
-          <p:cNvPr id="2" name="TextBox 1"/>
-          <p:cNvSpPr txBox="1"/>
-          <p:nvPr/>
-        </p:nvSpPr>
-        <p:spPr>
-          <a:xfrm>
-            <a:off x="640080" y="365760"/>
-            <a:ext cx="8229600" cy="274320"/>
-          </a:xfrm>
-          <a:prstGeom prst="rect">
-            <a:avLst/>
-          </a:prstGeom>
-          <a:noFill/>
-        </p:spPr>
-        <p:txBody>
-          <a:bodyPr wrap="square" anchor="t" lIns="0" rIns="0" tIns="0" bIns="0">
-            <a:spAutoFit/>
-          </a:bodyPr>
-          <a:lstStyle/>
+              <a:t>machine learning and mathematical optimisation</a:t>
+            </a:r>
+          </a:p>
           <a:p>
             <a:pPr>
               <a:spcAft>
-                <a:spcPts val="600"/>
+                <a:spcPts val="0"/>
               </a:spcAft>
             </a:pPr>
             <a:r>
-              <a:rPr sz="1200">
-                <a:solidFill>
-                  <a:srgbClr val="2A6FD1"/>
+              <a:rPr sz="1500">
+                <a:solidFill>
+                  <a:srgbClr val="0E2238"/>
                 </a:solidFill>
                 <a:latin typeface="Segoe UI Semibold"/>
               </a:rPr>
-              <a:t>WHAT I BUILT AND WHERE IT LEADS</a:t>
-            </a:r>
-          </a:p>
-        </p:txBody>
-      </p:sp>
-      <p:sp>
-        <p:nvSpPr>
-          <p:cNvPr id="3" name="TextBox 2"/>
-          <p:cNvSpPr txBox="1"/>
-          <p:nvPr/>
-        </p:nvSpPr>
-        <p:spPr>
-          <a:xfrm>
-            <a:off x="640080" y="658368"/>
-            <a:ext cx="10881360" cy="914400"/>
-          </a:xfrm>
-          <a:prstGeom prst="rect">
-            <a:avLst/>
-          </a:prstGeom>
-          <a:noFill/>
-        </p:spPr>
-        <p:txBody>
-          <a:bodyPr wrap="square" anchor="t" lIns="0" rIns="0" tIns="0" bIns="0">
-            <a:spAutoFit/>
-          </a:bodyPr>
-          <a:lstStyle/>
+              <a:t>The thread</a:t>
+            </a:r>
+          </a:p>
           <a:p>
             <a:pPr>
               <a:spcAft>
-                <a:spcPts val="600"/>
+                <a:spcPts val="800"/>
               </a:spcAft>
             </a:pPr>
             <a:r>
-              <a:rPr sz="3000">
-                <a:solidFill>
-                  <a:srgbClr val="0E2238"/>
-                </a:solidFill>
-                <a:latin typeface="Segoe UI Semibold"/>
-              </a:rPr>
-              <a:t>From following a plan to leading the next project</a:t>
-            </a:r>
-          </a:p>
-        </p:txBody>
-      </p:sp>
-      <p:sp>
-        <p:nvSpPr>
-          <p:cNvPr id="4" name="TextBox 3"/>
-          <p:cNvSpPr txBox="1"/>
-          <p:nvPr/>
-        </p:nvSpPr>
-        <p:spPr>
-          <a:xfrm>
-            <a:off x="640080" y="6446520"/>
-            <a:ext cx="7315200" cy="274320"/>
-          </a:xfrm>
-          <a:prstGeom prst="rect">
-            <a:avLst/>
-          </a:prstGeom>
-          <a:noFill/>
-        </p:spPr>
-        <p:txBody>
-          <a:bodyPr wrap="square" anchor="t" lIns="0" rIns="0" tIns="0" bIns="0">
-            <a:spAutoFit/>
-          </a:bodyPr>
-          <a:lstStyle/>
+              <a:rPr sz="1300">
+                <a:solidFill>
+                  <a:srgbClr val="56677A"/>
+                </a:solidFill>
+                <a:latin typeface="Segoe UI"/>
+              </a:rPr>
+              <a:t>computation that makes hidden dynamics visible</a:t>
+            </a:r>
+          </a:p>
           <a:p>
             <a:pPr>
               <a:spcAft>
-                <a:spcPts val="600"/>
+                <a:spcPts val="0"/>
               </a:spcAft>
             </a:pPr>
             <a:r>
-              <a:rPr sz="1000">
-                <a:solidFill>
-                  <a:srgbClr val="56677A"/>
-                </a:solidFill>
-                <a:latin typeface="Segoe UI"/>
-              </a:rPr>
-              <a:t>Ethan Ty Riekert  |  Curtin University  |  Supervisors: Elham Mardaneh, Tony Mathew</a:t>
-            </a:r>
-          </a:p>
-        </p:txBody>
-      </p:sp>
-      <p:sp>
-        <p:nvSpPr>
-          <p:cNvPr id="5" name="TextBox 4"/>
-          <p:cNvSpPr txBox="1"/>
-          <p:nvPr/>
-        </p:nvSpPr>
-        <p:spPr>
-          <a:xfrm>
-            <a:off x="10332720" y="6446520"/>
-            <a:ext cx="1234440" cy="274320"/>
-          </a:xfrm>
-          <a:prstGeom prst="rect">
-            <a:avLst/>
-          </a:prstGeom>
-          <a:noFill/>
-        </p:spPr>
-        <p:txBody>
-          <a:bodyPr wrap="square" anchor="t" lIns="0" rIns="0" tIns="0" bIns="0">
-            <a:spAutoFit/>
-          </a:bodyPr>
-          <a:lstStyle/>
-          <a:p>
-            <a:pPr algn="r">
+              <a:rPr sz="1500">
+                <a:solidFill>
+                  <a:srgbClr val="0E2238"/>
+                </a:solidFill>
+                <a:latin typeface="Segoe UI Semibold"/>
+              </a:rPr>
+              <a:t>Audience</a:t>
+            </a:r>
+          </a:p>
+          <a:p>
+            <a:pPr>
               <a:spcAft>
-                <a:spcPts val="600"/>
+                <a:spcPts val="800"/>
               </a:spcAft>
             </a:pPr>
             <a:r>
-              <a:rPr sz="1000">
+              <a:rPr sz="1300">
                 <a:solidFill>
                   <a:srgbClr val="56677A"/>
                 </a:solidFill>
                 <a:latin typeface="Segoe UI"/>
               </a:rPr>
-              <a:t>4 / 4</a:t>
-            </a:r>
-          </a:p>
-        </p:txBody>
-      </p:sp>
-      <p:sp>
-        <p:nvSpPr>
-          <p:cNvPr id="6" name="Rounded Rectangle 5"/>
+              <a:t>from experts to curious visitors</a:t>
+            </a:r>
+          </a:p>
+        </p:txBody>
+      </p:sp>
+      <p:sp>
+        <p:nvSpPr>
+          <p:cNvPr id="14" name="Rounded Rectangle 13"/>
           <p:cNvSpPr/>
           <p:nvPr/>
         </p:nvSpPr>
         <p:spPr>
           <a:xfrm>
-            <a:off x="640080" y="1600200"/>
+            <a:off x="8046719" y="1600200"/>
             <a:ext cx="3520440" cy="3246120"/>
           </a:xfrm>
           <a:prstGeom prst="roundRect">
@@ -7540,18 +7976,19 @@
           <a:lstStyle/>
           <a:p>
             <a:pPr algn="ctr"/>
-          </a:p>
-        </p:txBody>
-      </p:sp>
-      <p:sp>
-        <p:nvSpPr>
-          <p:cNvPr id="7" name="Rectangle 6"/>
+            <a:endParaRPr/>
+          </a:p>
+        </p:txBody>
+      </p:sp>
+      <p:sp>
+        <p:nvSpPr>
+          <p:cNvPr id="15" name="Rectangle 14"/>
           <p:cNvSpPr/>
           <p:nvPr/>
         </p:nvSpPr>
         <p:spPr>
           <a:xfrm>
-            <a:off x="914400" y="1600200"/>
+            <a:off x="8321040" y="1600200"/>
             <a:ext cx="822960" cy="64008"/>
           </a:xfrm>
           <a:prstGeom prst="rect">
@@ -7584,18 +8021,19 @@
           <a:lstStyle/>
           <a:p>
             <a:pPr algn="ctr"/>
-          </a:p>
-        </p:txBody>
-      </p:sp>
-      <p:sp>
-        <p:nvSpPr>
-          <p:cNvPr id="8" name="TextBox 7"/>
+            <a:endParaRPr/>
+          </a:p>
+        </p:txBody>
+      </p:sp>
+      <p:sp>
+        <p:nvSpPr>
+          <p:cNvPr id="16" name="TextBox 15"/>
           <p:cNvSpPr txBox="1"/>
           <p:nvPr/>
         </p:nvSpPr>
         <p:spPr>
           <a:xfrm>
-            <a:off x="914400" y="1810512"/>
+            <a:off x="8321040" y="1810512"/>
             <a:ext cx="3017520" cy="365760"/>
           </a:xfrm>
           <a:prstGeom prst="rect">
@@ -7604,7 +8042,7 @@
           <a:noFill/>
         </p:spPr>
         <p:txBody>
-          <a:bodyPr wrap="square" anchor="t" lIns="0" rIns="0" tIns="0" bIns="0">
+          <a:bodyPr wrap="square" lIns="0" tIns="0" rIns="0" bIns="0" anchor="t">
             <a:spAutoFit/>
           </a:bodyPr>
           <a:lstStyle/>
@@ -7621,20 +8059,20 @@
                 </a:solidFill>
                 <a:latin typeface="Segoe UI Semibold"/>
               </a:rPr>
-              <a:t>Skills built</a:t>
-            </a:r>
-          </a:p>
-        </p:txBody>
-      </p:sp>
-      <p:sp>
-        <p:nvSpPr>
-          <p:cNvPr id="9" name="TextBox 8"/>
+              <a:t>What is next</a:t>
+            </a:r>
+          </a:p>
+        </p:txBody>
+      </p:sp>
+      <p:sp>
+        <p:nvSpPr>
+          <p:cNvPr id="17" name="TextBox 16"/>
           <p:cNvSpPr txBox="1"/>
           <p:nvPr/>
         </p:nvSpPr>
         <p:spPr>
           <a:xfrm>
-            <a:off x="914400" y="2331720"/>
+            <a:off x="8321040" y="2331720"/>
             <a:ext cx="3017520" cy="2468880"/>
           </a:xfrm>
           <a:prstGeom prst="rect">
@@ -7643,539 +8081,7 @@
           <a:noFill/>
         </p:spPr>
         <p:txBody>
-          <a:bodyPr wrap="square" anchor="t" lIns="0" rIns="0" tIns="0" bIns="0">
-            <a:spAutoFit/>
-          </a:bodyPr>
-          <a:lstStyle/>
-          <a:p>
-            <a:pPr>
-              <a:spcAft>
-                <a:spcPts val="0"/>
-              </a:spcAft>
-            </a:pPr>
-            <a:r>
-              <a:rPr sz="1500">
-                <a:solidFill>
-                  <a:srgbClr val="0E2238"/>
-                </a:solidFill>
-                <a:latin typeface="Segoe UI Semibold"/>
-              </a:rPr>
-              <a:t>Modelling</a:t>
-            </a:r>
-          </a:p>
-          <a:p>
-            <a:pPr>
-              <a:spcAft>
-                <a:spcPts val="800"/>
-              </a:spcAft>
-            </a:pPr>
-            <a:r>
-              <a:rPr sz="1300">
-                <a:solidFill>
-                  <a:srgbClr val="56677A"/>
-                </a:solidFill>
-                <a:latin typeface="Segoe UI"/>
-              </a:rPr>
-              <a:t>a cloud problem turned into mathematics</a:t>
-            </a:r>
-          </a:p>
-          <a:p>
-            <a:pPr>
-              <a:spcAft>
-                <a:spcPts val="0"/>
-              </a:spcAft>
-            </a:pPr>
-            <a:r>
-              <a:rPr sz="1500">
-                <a:solidFill>
-                  <a:srgbClr val="0E2238"/>
-                </a:solidFill>
-                <a:latin typeface="Segoe UI Semibold"/>
-              </a:rPr>
-              <a:t>Machine learning</a:t>
-            </a:r>
-          </a:p>
-          <a:p>
-            <a:pPr>
-              <a:spcAft>
-                <a:spcPts val="800"/>
-              </a:spcAft>
-            </a:pPr>
-            <a:r>
-              <a:rPr sz="1300">
-                <a:solidFill>
-                  <a:srgbClr val="56677A"/>
-                </a:solidFill>
-                <a:latin typeface="Segoe UI"/>
-              </a:rPr>
-              <a:t>reinforcement and imitation learning</a:t>
-            </a:r>
-          </a:p>
-          <a:p>
-            <a:pPr>
-              <a:spcAft>
-                <a:spcPts val="0"/>
-              </a:spcAft>
-            </a:pPr>
-            <a:r>
-              <a:rPr sz="1500">
-                <a:solidFill>
-                  <a:srgbClr val="0E2238"/>
-                </a:solidFill>
-                <a:latin typeface="Segoe UI Semibold"/>
-              </a:rPr>
-              <a:t>Research rigour</a:t>
-            </a:r>
-          </a:p>
-          <a:p>
-            <a:pPr>
-              <a:spcAft>
-                <a:spcPts val="800"/>
-              </a:spcAft>
-            </a:pPr>
-            <a:r>
-              <a:rPr sz="1300">
-                <a:solidFill>
-                  <a:srgbClr val="56677A"/>
-                </a:solidFill>
-                <a:latin typeface="Segoe UI"/>
-              </a:rPr>
-              <a:t>fresh test data, honest reporting</a:t>
-            </a:r>
-          </a:p>
-          <a:p>
-            <a:pPr>
-              <a:spcAft>
-                <a:spcPts val="0"/>
-              </a:spcAft>
-            </a:pPr>
-            <a:r>
-              <a:rPr sz="1500">
-                <a:solidFill>
-                  <a:srgbClr val="0E2238"/>
-                </a:solidFill>
-                <a:latin typeface="Segoe UI Semibold"/>
-              </a:rPr>
-              <a:t>Communication</a:t>
-            </a:r>
-          </a:p>
-          <a:p>
-            <a:pPr>
-              <a:spcAft>
-                <a:spcPts val="800"/>
-              </a:spcAft>
-            </a:pPr>
-            <a:r>
-              <a:rPr sz="1300">
-                <a:solidFill>
-                  <a:srgbClr val="56677A"/>
-                </a:solidFill>
-                <a:latin typeface="Segoe UI"/>
-              </a:rPr>
-              <a:t>interactive tools for non-experts</a:t>
-            </a:r>
-          </a:p>
-        </p:txBody>
-      </p:sp>
-      <p:sp>
-        <p:nvSpPr>
-          <p:cNvPr id="10" name="Rounded Rectangle 9"/>
-          <p:cNvSpPr/>
-          <p:nvPr/>
-        </p:nvSpPr>
-        <p:spPr>
-          <a:xfrm>
-            <a:off x="4343400" y="1600200"/>
-            <a:ext cx="3520440" cy="3246120"/>
-          </a:xfrm>
-          <a:prstGeom prst="roundRect">
-            <a:avLst>
-              <a:gd name="adj" fmla="val 4000"/>
-            </a:avLst>
-          </a:prstGeom>
-          <a:solidFill>
-            <a:srgbClr val="FFFFFF"/>
-          </a:solidFill>
-          <a:ln w="15875">
-            <a:solidFill>
-              <a:srgbClr val="CBD9EE"/>
-            </a:solidFill>
-          </a:ln>
-          <a:effectLst/>
-        </p:spPr>
-        <p:style>
-          <a:lnRef idx="1">
-            <a:schemeClr val="accent1"/>
-          </a:lnRef>
-          <a:fillRef idx="3">
-            <a:schemeClr val="accent1"/>
-          </a:fillRef>
-          <a:effectRef idx="2">
-            <a:schemeClr val="accent1"/>
-          </a:effectRef>
-          <a:fontRef idx="minor">
-            <a:schemeClr val="lt1"/>
-          </a:fontRef>
-        </p:style>
-        <p:txBody>
-          <a:bodyPr rtlCol="0" anchor="ctr"/>
-          <a:lstStyle/>
-          <a:p>
-            <a:pPr algn="ctr"/>
-          </a:p>
-        </p:txBody>
-      </p:sp>
-      <p:sp>
-        <p:nvSpPr>
-          <p:cNvPr id="11" name="Rectangle 10"/>
-          <p:cNvSpPr/>
-          <p:nvPr/>
-        </p:nvSpPr>
-        <p:spPr>
-          <a:xfrm>
-            <a:off x="4617720" y="1600200"/>
-            <a:ext cx="822960" cy="64008"/>
-          </a:xfrm>
-          <a:prstGeom prst="rect">
-            <a:avLst/>
-          </a:prstGeom>
-          <a:solidFill>
-            <a:srgbClr val="E0702A"/>
-          </a:solidFill>
-          <a:ln>
-            <a:noFill/>
-          </a:ln>
-          <a:effectLst/>
-        </p:spPr>
-        <p:style>
-          <a:lnRef idx="1">
-            <a:schemeClr val="accent1"/>
-          </a:lnRef>
-          <a:fillRef idx="3">
-            <a:schemeClr val="accent1"/>
-          </a:fillRef>
-          <a:effectRef idx="2">
-            <a:schemeClr val="accent1"/>
-          </a:effectRef>
-          <a:fontRef idx="minor">
-            <a:schemeClr val="lt1"/>
-          </a:fontRef>
-        </p:style>
-        <p:txBody>
-          <a:bodyPr rtlCol="0" anchor="ctr"/>
-          <a:lstStyle/>
-          <a:p>
-            <a:pPr algn="ctr"/>
-          </a:p>
-        </p:txBody>
-      </p:sp>
-      <p:sp>
-        <p:nvSpPr>
-          <p:cNvPr id="12" name="TextBox 11"/>
-          <p:cNvSpPr txBox="1"/>
-          <p:nvPr/>
-        </p:nvSpPr>
-        <p:spPr>
-          <a:xfrm>
-            <a:off x="4617720" y="1810512"/>
-            <a:ext cx="3017520" cy="365760"/>
-          </a:xfrm>
-          <a:prstGeom prst="rect">
-            <a:avLst/>
-          </a:prstGeom>
-          <a:noFill/>
-        </p:spPr>
-        <p:txBody>
-          <a:bodyPr wrap="square" anchor="t" lIns="0" rIns="0" tIns="0" bIns="0">
-            <a:spAutoFit/>
-          </a:bodyPr>
-          <a:lstStyle/>
-          <a:p>
-            <a:pPr>
-              <a:spcAft>
-                <a:spcPts val="600"/>
-              </a:spcAft>
-            </a:pPr>
-            <a:r>
-              <a:rPr sz="2000">
-                <a:solidFill>
-                  <a:srgbClr val="0E2238"/>
-                </a:solidFill>
-                <a:latin typeface="Segoe UI Semibold"/>
-              </a:rPr>
-              <a:t>Where it leads</a:t>
-            </a:r>
-          </a:p>
-        </p:txBody>
-      </p:sp>
-      <p:sp>
-        <p:nvSpPr>
-          <p:cNvPr id="13" name="TextBox 12"/>
-          <p:cNvSpPr txBox="1"/>
-          <p:nvPr/>
-        </p:nvSpPr>
-        <p:spPr>
-          <a:xfrm>
-            <a:off x="4617720" y="2331720"/>
-            <a:ext cx="3017520" cy="2468880"/>
-          </a:xfrm>
-          <a:prstGeom prst="rect">
-            <a:avLst/>
-          </a:prstGeom>
-          <a:noFill/>
-        </p:spPr>
-        <p:txBody>
-          <a:bodyPr wrap="square" anchor="t" lIns="0" rIns="0" tIns="0" bIns="0">
-            <a:spAutoFit/>
-          </a:bodyPr>
-          <a:lstStyle/>
-          <a:p>
-            <a:pPr>
-              <a:spcAft>
-                <a:spcPts val="0"/>
-              </a:spcAft>
-            </a:pPr>
-            <a:r>
-              <a:rPr sz="1500">
-                <a:solidFill>
-                  <a:srgbClr val="0E2238"/>
-                </a:solidFill>
-                <a:latin typeface="Segoe UI Semibold"/>
-              </a:rPr>
-              <a:t>My direction</a:t>
-            </a:r>
-          </a:p>
-          <a:p>
-            <a:pPr>
-              <a:spcAft>
-                <a:spcPts val="800"/>
-              </a:spcAft>
-            </a:pPr>
-            <a:r>
-              <a:rPr sz="1300">
-                <a:solidFill>
-                  <a:srgbClr val="56677A"/>
-                </a:solidFill>
-                <a:latin typeface="Segoe UI"/>
-              </a:rPr>
-              <a:t>machine learning and mathematical optimisation</a:t>
-            </a:r>
-          </a:p>
-          <a:p>
-            <a:pPr>
-              <a:spcAft>
-                <a:spcPts val="0"/>
-              </a:spcAft>
-            </a:pPr>
-            <a:r>
-              <a:rPr sz="1500">
-                <a:solidFill>
-                  <a:srgbClr val="0E2238"/>
-                </a:solidFill>
-                <a:latin typeface="Segoe UI Semibold"/>
-              </a:rPr>
-              <a:t>The thread</a:t>
-            </a:r>
-          </a:p>
-          <a:p>
-            <a:pPr>
-              <a:spcAft>
-                <a:spcPts val="800"/>
-              </a:spcAft>
-            </a:pPr>
-            <a:r>
-              <a:rPr sz="1300">
-                <a:solidFill>
-                  <a:srgbClr val="56677A"/>
-                </a:solidFill>
-                <a:latin typeface="Segoe UI"/>
-              </a:rPr>
-              <a:t>computation that makes hidden dynamics visible</a:t>
-            </a:r>
-          </a:p>
-          <a:p>
-            <a:pPr>
-              <a:spcAft>
-                <a:spcPts val="0"/>
-              </a:spcAft>
-            </a:pPr>
-            <a:r>
-              <a:rPr sz="1500">
-                <a:solidFill>
-                  <a:srgbClr val="0E2238"/>
-                </a:solidFill>
-                <a:latin typeface="Segoe UI Semibold"/>
-              </a:rPr>
-              <a:t>Audience</a:t>
-            </a:r>
-          </a:p>
-          <a:p>
-            <a:pPr>
-              <a:spcAft>
-                <a:spcPts val="800"/>
-              </a:spcAft>
-            </a:pPr>
-            <a:r>
-              <a:rPr sz="1300">
-                <a:solidFill>
-                  <a:srgbClr val="56677A"/>
-                </a:solidFill>
-                <a:latin typeface="Segoe UI"/>
-              </a:rPr>
-              <a:t>from experts to curious visitors</a:t>
-            </a:r>
-          </a:p>
-        </p:txBody>
-      </p:sp>
-      <p:sp>
-        <p:nvSpPr>
-          <p:cNvPr id="14" name="Rounded Rectangle 13"/>
-          <p:cNvSpPr/>
-          <p:nvPr/>
-        </p:nvSpPr>
-        <p:spPr>
-          <a:xfrm>
-            <a:off x="8046719" y="1600200"/>
-            <a:ext cx="3520440" cy="3246120"/>
-          </a:xfrm>
-          <a:prstGeom prst="roundRect">
-            <a:avLst>
-              <a:gd name="adj" fmla="val 4000"/>
-            </a:avLst>
-          </a:prstGeom>
-          <a:solidFill>
-            <a:srgbClr val="FFFFFF"/>
-          </a:solidFill>
-          <a:ln w="15875">
-            <a:solidFill>
-              <a:srgbClr val="CBD9EE"/>
-            </a:solidFill>
-          </a:ln>
-          <a:effectLst/>
-        </p:spPr>
-        <p:style>
-          <a:lnRef idx="1">
-            <a:schemeClr val="accent1"/>
-          </a:lnRef>
-          <a:fillRef idx="3">
-            <a:schemeClr val="accent1"/>
-          </a:fillRef>
-          <a:effectRef idx="2">
-            <a:schemeClr val="accent1"/>
-          </a:effectRef>
-          <a:fontRef idx="minor">
-            <a:schemeClr val="lt1"/>
-          </a:fontRef>
-        </p:style>
-        <p:txBody>
-          <a:bodyPr rtlCol="0" anchor="ctr"/>
-          <a:lstStyle/>
-          <a:p>
-            <a:pPr algn="ctr"/>
-          </a:p>
-        </p:txBody>
-      </p:sp>
-      <p:sp>
-        <p:nvSpPr>
-          <p:cNvPr id="15" name="Rectangle 14"/>
-          <p:cNvSpPr/>
-          <p:nvPr/>
-        </p:nvSpPr>
-        <p:spPr>
-          <a:xfrm>
-            <a:off x="8321040" y="1600200"/>
-            <a:ext cx="822960" cy="64008"/>
-          </a:xfrm>
-          <a:prstGeom prst="rect">
-            <a:avLst/>
-          </a:prstGeom>
-          <a:solidFill>
-            <a:srgbClr val="2A6FD1"/>
-          </a:solidFill>
-          <a:ln>
-            <a:noFill/>
-          </a:ln>
-          <a:effectLst/>
-        </p:spPr>
-        <p:style>
-          <a:lnRef idx="1">
-            <a:schemeClr val="accent1"/>
-          </a:lnRef>
-          <a:fillRef idx="3">
-            <a:schemeClr val="accent1"/>
-          </a:fillRef>
-          <a:effectRef idx="2">
-            <a:schemeClr val="accent1"/>
-          </a:effectRef>
-          <a:fontRef idx="minor">
-            <a:schemeClr val="lt1"/>
-          </a:fontRef>
-        </p:style>
-        <p:txBody>
-          <a:bodyPr rtlCol="0" anchor="ctr"/>
-          <a:lstStyle/>
-          <a:p>
-            <a:pPr algn="ctr"/>
-          </a:p>
-        </p:txBody>
-      </p:sp>
-      <p:sp>
-        <p:nvSpPr>
-          <p:cNvPr id="16" name="TextBox 15"/>
-          <p:cNvSpPr txBox="1"/>
-          <p:nvPr/>
-        </p:nvSpPr>
-        <p:spPr>
-          <a:xfrm>
-            <a:off x="8321040" y="1810512"/>
-            <a:ext cx="3017520" cy="365760"/>
-          </a:xfrm>
-          <a:prstGeom prst="rect">
-            <a:avLst/>
-          </a:prstGeom>
-          <a:noFill/>
-        </p:spPr>
-        <p:txBody>
-          <a:bodyPr wrap="square" anchor="t" lIns="0" rIns="0" tIns="0" bIns="0">
-            <a:spAutoFit/>
-          </a:bodyPr>
-          <a:lstStyle/>
-          <a:p>
-            <a:pPr>
-              <a:spcAft>
-                <a:spcPts val="600"/>
-              </a:spcAft>
-            </a:pPr>
-            <a:r>
-              <a:rPr sz="2000">
-                <a:solidFill>
-                  <a:srgbClr val="0E2238"/>
-                </a:solidFill>
-                <a:latin typeface="Segoe UI Semibold"/>
-              </a:rPr>
-              <a:t>What is next</a:t>
-            </a:r>
-          </a:p>
-        </p:txBody>
-      </p:sp>
-      <p:sp>
-        <p:nvSpPr>
-          <p:cNvPr id="17" name="TextBox 16"/>
-          <p:cNvSpPr txBox="1"/>
-          <p:nvPr/>
-        </p:nvSpPr>
-        <p:spPr>
-          <a:xfrm>
-            <a:off x="8321040" y="2331720"/>
-            <a:ext cx="3017520" cy="2468880"/>
-          </a:xfrm>
-          <a:prstGeom prst="rect">
-            <a:avLst/>
-          </a:prstGeom>
-          <a:noFill/>
-        </p:spPr>
-        <p:txBody>
-          <a:bodyPr wrap="square" anchor="t" lIns="0" rIns="0" tIns="0" bIns="0">
+          <a:bodyPr wrap="square" lIns="0" tIns="0" rIns="0" bIns="0" anchor="t">
             <a:spAutoFit/>
           </a:bodyPr>
           <a:lstStyle/>
@@ -8350,6 +8256,7 @@
           <a:lstStyle/>
           <a:p>
             <a:pPr algn="ctr"/>
+            <a:endParaRPr/>
           </a:p>
         </p:txBody>
       </p:sp>
@@ -8370,7 +8277,7 @@
           <a:noFill/>
         </p:spPr>
         <p:txBody>
-          <a:bodyPr wrap="square" anchor="t" lIns="0" rIns="0" tIns="0" bIns="0">
+          <a:bodyPr wrap="square" lIns="0" tIns="0" rIns="0" bIns="0" anchor="t">
             <a:spAutoFit/>
           </a:bodyPr>
           <a:lstStyle/>
@@ -8459,6 +8366,7 @@
           <a:lstStyle/>
           <a:p>
             <a:pPr algn="ctr"/>
+            <a:endParaRPr/>
           </a:p>
         </p:txBody>
       </p:sp>
@@ -8479,7 +8387,7 @@
           <a:noFill/>
         </p:spPr>
         <p:txBody>
-          <a:bodyPr wrap="square" anchor="t" lIns="0" rIns="0" tIns="0" bIns="0">
+          <a:bodyPr wrap="square" lIns="0" tIns="0" rIns="0" bIns="0" anchor="t">
             <a:spAutoFit/>
           </a:bodyPr>
           <a:lstStyle/>
@@ -8568,6 +8476,7 @@
           <a:lstStyle/>
           <a:p>
             <a:pPr algn="ctr"/>
+            <a:endParaRPr/>
           </a:p>
         </p:txBody>
       </p:sp>
@@ -8588,7 +8497,7 @@
           <a:noFill/>
         </p:spPr>
         <p:txBody>
-          <a:bodyPr wrap="square" anchor="t" lIns="0" rIns="0" tIns="0" bIns="0">
+          <a:bodyPr wrap="square" lIns="0" tIns="0" rIns="0" bIns="0" anchor="t">
             <a:spAutoFit/>
           </a:bodyPr>
           <a:lstStyle/>
@@ -8975,44 +8884,44 @@
         <a:sysClr val="window" lastClr="FFFFFF"/>
       </a:lt1>
       <a:dk2>
-        <a:srgbClr val="1F497D"/>
+        <a:srgbClr val="0E2841"/>
       </a:dk2>
       <a:lt2>
-        <a:srgbClr val="EEECE1"/>
+        <a:srgbClr val="E8E8E8"/>
       </a:lt2>
       <a:accent1>
-        <a:srgbClr val="4F81BD"/>
+        <a:srgbClr val="156082"/>
       </a:accent1>
       <a:accent2>
-        <a:srgbClr val="C0504D"/>
+        <a:srgbClr val="E97132"/>
       </a:accent2>
       <a:accent3>
-        <a:srgbClr val="9BBB59"/>
+        <a:srgbClr val="196B24"/>
       </a:accent3>
       <a:accent4>
-        <a:srgbClr val="8064A2"/>
+        <a:srgbClr val="0F9ED5"/>
       </a:accent4>
       <a:accent5>
-        <a:srgbClr val="4BACC6"/>
+        <a:srgbClr val="A02B93"/>
       </a:accent5>
       <a:accent6>
-        <a:srgbClr val="F79646"/>
+        <a:srgbClr val="4EA72E"/>
       </a:accent6>
       <a:hlink>
-        <a:srgbClr val="0000FF"/>
+        <a:srgbClr val="467886"/>
       </a:hlink>
       <a:folHlink>
-        <a:srgbClr val="800080"/>
+        <a:srgbClr val="96607D"/>
       </a:folHlink>
     </a:clrScheme>
     <a:fontScheme name="Office">
       <a:majorFont>
-        <a:latin typeface="Calibri"/>
+        <a:latin typeface="Aptos Display" panose="02110004020202020204"/>
         <a:ea typeface=""/>
         <a:cs typeface=""/>
-        <a:font script="Jpan" typeface="ＭＳ Ｐゴシック"/>
+        <a:font script="Jpan" typeface="游ゴシック Light"/>
         <a:font script="Hang" typeface="맑은 고딕"/>
-        <a:font script="Hans" typeface="宋体"/>
+        <a:font script="Hans" typeface="等线 Light"/>
         <a:font script="Hant" typeface="新細明體"/>
         <a:font script="Arab" typeface="Times New Roman"/>
         <a:font script="Hebr" typeface="Times New Roman"/>
@@ -9040,14 +8949,31 @@
         <a:font script="Viet" typeface="Times New Roman"/>
         <a:font script="Uigh" typeface="Microsoft Uighur"/>
         <a:font script="Geor" typeface="Sylfaen"/>
+        <a:font script="Armn" typeface="Arial"/>
+        <a:font script="Bugi" typeface="Leelawadee UI"/>
+        <a:font script="Bopo" typeface="Microsoft JhengHei"/>
+        <a:font script="Java" typeface="Javanese Text"/>
+        <a:font script="Lisu" typeface="Segoe UI"/>
+        <a:font script="Mymr" typeface="Myanmar Text"/>
+        <a:font script="Nkoo" typeface="Ebrima"/>
+        <a:font script="Olck" typeface="Nirmala UI"/>
+        <a:font script="Osma" typeface="Ebrima"/>
+        <a:font script="Phag" typeface="Phagspa"/>
+        <a:font script="Syrn" typeface="Estrangelo Edessa"/>
+        <a:font script="Syrj" typeface="Estrangelo Edessa"/>
+        <a:font script="Syre" typeface="Estrangelo Edessa"/>
+        <a:font script="Sora" typeface="Nirmala UI"/>
+        <a:font script="Tale" typeface="Microsoft Tai Le"/>
+        <a:font script="Talu" typeface="Microsoft New Tai Lue"/>
+        <a:font script="Tfng" typeface="Ebrima"/>
       </a:majorFont>
       <a:minorFont>
-        <a:latin typeface="Calibri"/>
+        <a:latin typeface="Aptos" panose="02110004020202020204"/>
         <a:ea typeface=""/>
         <a:cs typeface=""/>
-        <a:font script="Jpan" typeface="ＭＳ Ｐゴシック"/>
+        <a:font script="Jpan" typeface="游ゴシック"/>
         <a:font script="Hang" typeface="맑은 고딕"/>
-        <a:font script="Hans" typeface="宋体"/>
+        <a:font script="Hans" typeface="等线"/>
         <a:font script="Hant" typeface="新細明體"/>
         <a:font script="Arab" typeface="Arial"/>
         <a:font script="Hebr" typeface="Arial"/>
@@ -9075,6 +9001,23 @@
         <a:font script="Viet" typeface="Arial"/>
         <a:font script="Uigh" typeface="Microsoft Uighur"/>
         <a:font script="Geor" typeface="Sylfaen"/>
+        <a:font script="Armn" typeface="Arial"/>
+        <a:font script="Bugi" typeface="Leelawadee UI"/>
+        <a:font script="Bopo" typeface="Microsoft JhengHei"/>
+        <a:font script="Java" typeface="Javanese Text"/>
+        <a:font script="Lisu" typeface="Segoe UI"/>
+        <a:font script="Mymr" typeface="Myanmar Text"/>
+        <a:font script="Nkoo" typeface="Ebrima"/>
+        <a:font script="Olck" typeface="Nirmala UI"/>
+        <a:font script="Osma" typeface="Ebrima"/>
+        <a:font script="Phag" typeface="Phagspa"/>
+        <a:font script="Syrn" typeface="Estrangelo Edessa"/>
+        <a:font script="Syrj" typeface="Estrangelo Edessa"/>
+        <a:font script="Syre" typeface="Estrangelo Edessa"/>
+        <a:font script="Sora" typeface="Nirmala UI"/>
+        <a:font script="Tale" typeface="Microsoft Tai Le"/>
+        <a:font script="Talu" typeface="Microsoft New Tai Lue"/>
+        <a:font script="Tfng" typeface="Ebrima"/>
       </a:minorFont>
     </a:fontScheme>
     <a:fmtScheme name="Office">
@@ -9086,180 +9029,136 @@
           <a:gsLst>
             <a:gs pos="0">
               <a:schemeClr val="phClr">
-                <a:tint val="50000"/>
-                <a:satMod val="300000"/>
+                <a:lumMod val="110000"/>
+                <a:satMod val="105000"/>
+                <a:tint val="67000"/>
               </a:schemeClr>
             </a:gs>
-            <a:gs pos="35000">
+            <a:gs pos="50000">
               <a:schemeClr val="phClr">
-                <a:tint val="37000"/>
-                <a:satMod val="300000"/>
+                <a:lumMod val="105000"/>
+                <a:satMod val="103000"/>
+                <a:tint val="73000"/>
               </a:schemeClr>
             </a:gs>
             <a:gs pos="100000">
               <a:schemeClr val="phClr">
-                <a:tint val="15000"/>
-                <a:satMod val="350000"/>
+                <a:lumMod val="105000"/>
+                <a:satMod val="109000"/>
+                <a:tint val="81000"/>
               </a:schemeClr>
             </a:gs>
           </a:gsLst>
-          <a:lin ang="16200000" scaled="1"/>
+          <a:lin ang="5400000" scaled="0"/>
         </a:gradFill>
         <a:gradFill rotWithShape="1">
           <a:gsLst>
             <a:gs pos="0">
               <a:schemeClr val="phClr">
-                <a:tint val="100000"/>
+                <a:satMod val="103000"/>
+                <a:lumMod val="102000"/>
+                <a:tint val="94000"/>
+              </a:schemeClr>
+            </a:gs>
+            <a:gs pos="50000">
+              <a:schemeClr val="phClr">
+                <a:satMod val="110000"/>
+                <a:lumMod val="100000"/>
                 <a:shade val="100000"/>
-                <a:satMod val="130000"/>
               </a:schemeClr>
             </a:gs>
             <a:gs pos="100000">
               <a:schemeClr val="phClr">
-                <a:tint val="50000"/>
-                <a:shade val="100000"/>
-                <a:satMod val="350000"/>
+                <a:lumMod val="99000"/>
+                <a:satMod val="120000"/>
+                <a:shade val="78000"/>
               </a:schemeClr>
             </a:gs>
           </a:gsLst>
-          <a:lin ang="16200000" scaled="0"/>
+          <a:lin ang="5400000" scaled="0"/>
         </a:gradFill>
       </a:fillStyleLst>
       <a:lnStyleLst>
-        <a:ln w="9525" cap="flat" cmpd="sng" algn="ctr">
+        <a:ln w="12700" cap="flat" cmpd="sng" algn="ctr">
           <a:solidFill>
-            <a:schemeClr val="phClr">
-              <a:shade val="95000"/>
-              <a:satMod val="105000"/>
-            </a:schemeClr>
+            <a:schemeClr val="phClr"/>
           </a:solidFill>
           <a:prstDash val="solid"/>
+          <a:miter lim="800000"/>
+        </a:ln>
+        <a:ln w="19050" cap="flat" cmpd="sng" algn="ctr">
+          <a:solidFill>
+            <a:schemeClr val="phClr"/>
+          </a:solidFill>
+          <a:prstDash val="solid"/>
+          <a:miter lim="800000"/>
         </a:ln>
         <a:ln w="25400" cap="flat" cmpd="sng" algn="ctr">
           <a:solidFill>
             <a:schemeClr val="phClr"/>
           </a:solidFill>
           <a:prstDash val="solid"/>
-        </a:ln>
-        <a:ln w="38100" cap="flat" cmpd="sng" algn="ctr">
-          <a:solidFill>
-            <a:schemeClr val="phClr"/>
-          </a:solidFill>
-          <a:prstDash val="solid"/>
+          <a:miter lim="800000"/>
         </a:ln>
       </a:lnStyleLst>
       <a:effectStyleLst>
         <a:effectStyle>
+          <a:effectLst/>
+        </a:effectStyle>
+        <a:effectStyle>
+          <a:effectLst/>
+        </a:effectStyle>
+        <a:effectStyle>
           <a:effectLst>
-            <a:outerShdw blurRad="40000" dist="20000" dir="5400000" rotWithShape="0">
+            <a:outerShdw blurRad="57150" dist="19050" dir="5400000" algn="ctr" rotWithShape="0">
               <a:srgbClr val="000000">
-                <a:alpha val="38000"/>
+                <a:alpha val="63000"/>
               </a:srgbClr>
             </a:outerShdw>
           </a:effectLst>
-        </a:effectStyle>
-        <a:effectStyle>
-          <a:effectLst>
-            <a:outerShdw blurRad="40000" dist="23000" dir="5400000" rotWithShape="0">
-              <a:srgbClr val="000000">
-                <a:alpha val="35000"/>
-              </a:srgbClr>
-            </a:outerShdw>
-          </a:effectLst>
-        </a:effectStyle>
-        <a:effectStyle>
-          <a:effectLst>
-            <a:outerShdw blurRad="40000" dist="23000" dir="5400000" rotWithShape="0">
-              <a:srgbClr val="000000">
-                <a:alpha val="35000"/>
-              </a:srgbClr>
-            </a:outerShdw>
-          </a:effectLst>
-          <a:scene3d>
-            <a:camera prst="orthographicFront">
-              <a:rot lat="0" lon="0" rev="0"/>
-            </a:camera>
-            <a:lightRig rig="threePt" dir="t">
-              <a:rot lat="0" lon="0" rev="1200000"/>
-            </a:lightRig>
-          </a:scene3d>
-          <a:sp3d>
-            <a:bevelT w="63500" h="25400"/>
-          </a:sp3d>
         </a:effectStyle>
       </a:effectStyleLst>
       <a:bgFillStyleLst>
         <a:solidFill>
           <a:schemeClr val="phClr"/>
         </a:solidFill>
+        <a:solidFill>
+          <a:schemeClr val="phClr">
+            <a:tint val="95000"/>
+            <a:satMod val="170000"/>
+          </a:schemeClr>
+        </a:solidFill>
         <a:gradFill rotWithShape="1">
           <a:gsLst>
             <a:gs pos="0">
               <a:schemeClr val="phClr">
-                <a:tint val="40000"/>
-                <a:satMod val="350000"/>
+                <a:tint val="93000"/>
+                <a:satMod val="150000"/>
+                <a:shade val="98000"/>
+                <a:lumMod val="102000"/>
               </a:schemeClr>
             </a:gs>
-            <a:gs pos="40000">
+            <a:gs pos="50000">
               <a:schemeClr val="phClr">
-                <a:tint val="45000"/>
-                <a:shade val="99000"/>
-                <a:satMod val="350000"/>
+                <a:tint val="98000"/>
+                <a:satMod val="130000"/>
+                <a:shade val="90000"/>
+                <a:lumMod val="103000"/>
               </a:schemeClr>
             </a:gs>
             <a:gs pos="100000">
               <a:schemeClr val="phClr">
-                <a:shade val="20000"/>
-                <a:satMod val="255000"/>
+                <a:shade val="63000"/>
+                <a:satMod val="120000"/>
               </a:schemeClr>
             </a:gs>
           </a:gsLst>
-          <a:path path="circle">
-            <a:fillToRect l="50000" t="-80000" r="50000" b="180000"/>
-          </a:path>
-        </a:gradFill>
-        <a:gradFill rotWithShape="1">
-          <a:gsLst>
-            <a:gs pos="0">
-              <a:schemeClr val="phClr">
-                <a:tint val="80000"/>
-                <a:satMod val="300000"/>
-              </a:schemeClr>
-            </a:gs>
-            <a:gs pos="100000">
-              <a:schemeClr val="phClr">
-                <a:shade val="30000"/>
-                <a:satMod val="200000"/>
-              </a:schemeClr>
-            </a:gs>
-          </a:gsLst>
-          <a:path path="circle">
-            <a:fillToRect l="50000" t="50000" r="50000" b="50000"/>
-          </a:path>
+          <a:lin ang="5400000" scaled="0"/>
         </a:gradFill>
       </a:bgFillStyleLst>
     </a:fmtScheme>
   </a:themeElements>
   <a:objectDefaults>
-    <a:spDef>
-      <a:spPr/>
-      <a:bodyPr/>
-      <a:lstStyle/>
-      <a:style>
-        <a:lnRef idx="1">
-          <a:schemeClr val="accent1"/>
-        </a:lnRef>
-        <a:fillRef idx="3">
-          <a:schemeClr val="accent1"/>
-        </a:fillRef>
-        <a:effectRef idx="2">
-          <a:schemeClr val="accent1"/>
-        </a:effectRef>
-        <a:fontRef idx="minor">
-          <a:schemeClr val="lt1"/>
-        </a:fontRef>
-      </a:style>
-    </a:spDef>
     <a:lnDef>
       <a:spPr/>
       <a:bodyPr/>
@@ -9281,5 +9180,10 @@
     </a:lnDef>
   </a:objectDefaults>
   <a:extraClrSchemeLst/>
+  <a:extLst>
+    <a:ext uri="{05A4C25C-085E-4340-85A3-A5531E510DB2}">
+      <thm15:themeFamily xmlns:thm15="http://schemas.microsoft.com/office/thememl/2012/main" name="Office Theme" id="{2E142A2C-CD16-42D6-873A-C26D2A0506FA}" vid="{1BDDFF52-6CD6-40A5-AB3C-68EB2F1E4D0A}"/>
+    </a:ext>
+  </a:extLst>
 </a:theme>
 </file>
--- a/app/slides/Final_Presentation.pptx
+++ b/app/slides/Final_Presentation.pptx
@@ -7195,13 +7195,22 @@
           <a:p>
             <a:pPr algn="ctr"/>
             <a:r>
-              <a:rPr sz="1800">
+              <a:rPr lang="en-AU" sz="1800" dirty="0">
                 <a:solidFill>
                   <a:srgbClr val="FFFFFF"/>
                 </a:solidFill>
                 <a:latin typeface="Segoe UI Semibold"/>
               </a:rPr>
-              <a:t>Race the models →</a:t>
+              <a:t>Interactive Model Race</a:t>
+            </a:r>
+            <a:r>
+              <a:rPr sz="1800" dirty="0">
+                <a:solidFill>
+                  <a:srgbClr val="FFFFFF"/>
+                </a:solidFill>
+                <a:latin typeface="Segoe UI Semibold"/>
+              </a:rPr>
+              <a:t>→</a:t>
             </a:r>
           </a:p>
         </p:txBody>

--- a/app/slides/Final_Presentation.pptx
+++ b/app/slides/Final_Presentation.pptx
@@ -369,7 +369,7 @@
           <a:lstStyle/>
           <a:p>
             <a:r>
-              <a:t>Explain the loop. The agent is a neural network. It sees the state (which jobs are waiting, how close their deadlines are, how full the machines are), chooses an action (which job to start next, or wait), and the environment returns a reward: minus the lateness cost. Repeat millions of times and it improves. We tried three things: classic rules, a network that learns on its own, and a network that first copies a rule. Then invite the audience to the interactive training demo (link to be added when the demo is built) and point to the cost formula on the right: weight times lateness squared, with optional late-job and energy terms.</a:t>
+              <a:t>Left: what the schedulers try to minimise. The main objective is J, the sum over jobs of importance times lateness squared, so a few very late jobs cost more than many slightly late ones. The combined-objective tests added three more terms (linear lateness, the number of late jobs, energy) to ask whether RL does better when no single hand-made rule targets the objective. The three words underneath are the MDP: state, action, reward. Right: what was compared on the same 50 unseen test cases per setting. Classic methods are 49 dispatching heuristics (a priority rule that picks the next job plus a placement rule that picks the machine) and an exact solver, CP-SAT, which gives a proven bound. The RL schedulers were trained with PPO and A2C and differ in how much the network decides: Option 0 picks the job and machine directly; Option 1 only picks which dispatching rule to apply; Options 2 and 3 learn a priority for the next job and a fixed rule places it (Option 3 adds the ATC index as an input); Option 4 chooses job and machine with two separate output heads. Every design had the same tuning budget. Then the button: a toy version you can train yourself.</a:t>
             </a:r>
           </a:p>
         </p:txBody>
@@ -3705,11 +3705,15 @@
             </a:avLst>
           </a:prstGeom>
           <a:solidFill>
-            <a:srgbClr val="EEF4FC"/>
+            <a:srgbClr val="EEF4FC">
+              <a:alpha val="55000"/>
+            </a:srgbClr>
           </a:solidFill>
           <a:ln w="15875">
             <a:solidFill>
-              <a:srgbClr val="CBD9EE"/>
+              <a:srgbClr val="CBD9EE">
+                <a:alpha val="55000"/>
+              </a:srgbClr>
             </a:solidFill>
           </a:ln>
           <a:effectLst/>
@@ -5254,11 +5258,15 @@
             </a:avLst>
           </a:prstGeom>
           <a:solidFill>
-            <a:srgbClr val="EEF4FC"/>
+            <a:srgbClr val="EEF4FC">
+              <a:alpha val="55000"/>
+            </a:srgbClr>
           </a:solidFill>
           <a:ln w="15875">
             <a:solidFill>
-              <a:srgbClr val="EEF4FC"/>
+              <a:srgbClr val="EEF4FC">
+                <a:alpha val="55000"/>
+              </a:srgbClr>
             </a:solidFill>
           </a:ln>
           <a:effectLst/>
@@ -5525,7 +5533,7 @@
                 </a:solidFill>
                 <a:latin typeface="Segoe UI Semibold"/>
               </a:rPr>
-              <a:t>The scheduler is a neural network that learns from reward</a:t>
+              <a:t>What it minimises, and what was compared</a:t>
             </a:r>
           </a:p>
         </p:txBody>
@@ -5610,595 +5618,14 @@
       </p:sp>
       <p:sp>
         <p:nvSpPr>
-          <p:cNvPr id="6" name="Rounded Rectangle 5"/>
+          <p:cNvPr id="26" name="Rounded Rectangle 25"/>
           <p:cNvSpPr/>
           <p:nvPr/>
         </p:nvSpPr>
         <p:spPr>
           <a:xfrm>
-            <a:off x="640080" y="1600200"/>
-            <a:ext cx="6766560" cy="3246120"/>
-          </a:xfrm>
-          <a:prstGeom prst="roundRect">
-            <a:avLst>
-              <a:gd name="adj" fmla="val 4000"/>
-            </a:avLst>
-          </a:prstGeom>
-          <a:solidFill>
-            <a:srgbClr val="EEF4FC"/>
-          </a:solidFill>
-          <a:ln w="15875">
-            <a:solidFill>
-              <a:srgbClr val="EEF4FC"/>
-            </a:solidFill>
-          </a:ln>
-          <a:effectLst/>
-        </p:spPr>
-        <p:style>
-          <a:lnRef idx="1">
-            <a:schemeClr val="accent1"/>
-          </a:lnRef>
-          <a:fillRef idx="3">
-            <a:schemeClr val="accent1"/>
-          </a:fillRef>
-          <a:effectRef idx="2">
-            <a:schemeClr val="accent1"/>
-          </a:effectRef>
-          <a:fontRef idx="minor">
-            <a:schemeClr val="lt1"/>
-          </a:fontRef>
-        </p:style>
-        <p:txBody>
-          <a:bodyPr rtlCol="0" anchor="ctr"/>
-          <a:lstStyle/>
-          <a:p>
-            <a:pPr algn="ctr"/>
-            <a:endParaRPr/>
-          </a:p>
-        </p:txBody>
-      </p:sp>
-      <p:sp>
-        <p:nvSpPr>
-          <p:cNvPr id="7" name="Rounded Rectangle 6"/>
-          <p:cNvSpPr/>
-          <p:nvPr/>
-        </p:nvSpPr>
-        <p:spPr>
-          <a:xfrm>
-            <a:off x="868680" y="2103120"/>
-            <a:ext cx="2286000" cy="1554480"/>
-          </a:xfrm>
-          <a:prstGeom prst="roundRect">
-            <a:avLst>
-              <a:gd name="adj" fmla="val 12000"/>
-            </a:avLst>
-          </a:prstGeom>
-          <a:solidFill>
-            <a:srgbClr val="2A6FD1"/>
-          </a:solidFill>
-          <a:ln>
-            <a:noFill/>
-          </a:ln>
-          <a:effectLst/>
-        </p:spPr>
-        <p:style>
-          <a:lnRef idx="1">
-            <a:schemeClr val="accent1"/>
-          </a:lnRef>
-          <a:fillRef idx="3">
-            <a:schemeClr val="accent1"/>
-          </a:fillRef>
-          <a:effectRef idx="2">
-            <a:schemeClr val="accent1"/>
-          </a:effectRef>
-          <a:fontRef idx="minor">
-            <a:schemeClr val="lt1"/>
-          </a:fontRef>
-        </p:style>
-        <p:txBody>
-          <a:bodyPr wrap="square" lIns="73152" rIns="73152" rtlCol="0" anchor="ctr"/>
-          <a:lstStyle/>
-          <a:p>
-            <a:pPr algn="ctr"/>
-            <a:r>
-              <a:rPr sz="1800">
-                <a:solidFill>
-                  <a:srgbClr val="FFFFFF"/>
-                </a:solidFill>
-                <a:latin typeface="Segoe UI Semibold"/>
-              </a:rPr>
-              <a:t>Agent</a:t>
-            </a:r>
-            <a:br/>
-            <a:r>
-              <a:rPr sz="1800">
-                <a:solidFill>
-                  <a:srgbClr val="FFFFFF"/>
-                </a:solidFill>
-                <a:latin typeface="Segoe UI Semibold"/>
-              </a:rPr>
-              <a:t>neural network</a:t>
-            </a:r>
-          </a:p>
-        </p:txBody>
-      </p:sp>
-      <p:sp>
-        <p:nvSpPr>
-          <p:cNvPr id="8" name="Rounded Rectangle 7"/>
-          <p:cNvSpPr/>
-          <p:nvPr/>
-        </p:nvSpPr>
-        <p:spPr>
-          <a:xfrm>
-            <a:off x="4892040" y="2103120"/>
-            <a:ext cx="2286000" cy="1554480"/>
-          </a:xfrm>
-          <a:prstGeom prst="roundRect">
-            <a:avLst>
-              <a:gd name="adj" fmla="val 12000"/>
-            </a:avLst>
-          </a:prstGeom>
-          <a:solidFill>
-            <a:srgbClr val="0E2238"/>
-          </a:solidFill>
-          <a:ln>
-            <a:noFill/>
-          </a:ln>
-          <a:effectLst/>
-        </p:spPr>
-        <p:style>
-          <a:lnRef idx="1">
-            <a:schemeClr val="accent1"/>
-          </a:lnRef>
-          <a:fillRef idx="3">
-            <a:schemeClr val="accent1"/>
-          </a:fillRef>
-          <a:effectRef idx="2">
-            <a:schemeClr val="accent1"/>
-          </a:effectRef>
-          <a:fontRef idx="minor">
-            <a:schemeClr val="lt1"/>
-          </a:fontRef>
-        </p:style>
-        <p:txBody>
-          <a:bodyPr wrap="square" lIns="73152" rIns="73152" rtlCol="0" anchor="ctr"/>
-          <a:lstStyle/>
-          <a:p>
-            <a:pPr algn="ctr"/>
-            <a:r>
-              <a:rPr sz="1800">
-                <a:solidFill>
-                  <a:srgbClr val="FFFFFF"/>
-                </a:solidFill>
-                <a:latin typeface="Segoe UI Semibold"/>
-              </a:rPr>
-              <a:t>Environment</a:t>
-            </a:r>
-            <a:br/>
-            <a:r>
-              <a:rPr sz="1800">
-                <a:solidFill>
-                  <a:srgbClr val="FFFFFF"/>
-                </a:solidFill>
-                <a:latin typeface="Segoe UI Semibold"/>
-              </a:rPr>
-              <a:t>10 machines + jobs</a:t>
-            </a:r>
-          </a:p>
-        </p:txBody>
-      </p:sp>
-      <p:sp>
-        <p:nvSpPr>
-          <p:cNvPr id="9" name="Right Arrow 8"/>
-          <p:cNvSpPr/>
-          <p:nvPr/>
-        </p:nvSpPr>
-        <p:spPr>
-          <a:xfrm>
-            <a:off x="3246120" y="2148840"/>
-            <a:ext cx="1554480" cy="502920"/>
-          </a:xfrm>
-          <a:prstGeom prst="rightArrow">
-            <a:avLst/>
-          </a:prstGeom>
-          <a:solidFill>
-            <a:srgbClr val="CBD9EE"/>
-          </a:solidFill>
-          <a:ln>
-            <a:noFill/>
-          </a:ln>
-          <a:effectLst/>
-        </p:spPr>
-        <p:style>
-          <a:lnRef idx="1">
-            <a:schemeClr val="accent1"/>
-          </a:lnRef>
-          <a:fillRef idx="3">
-            <a:schemeClr val="accent1"/>
-          </a:fillRef>
-          <a:effectRef idx="2">
-            <a:schemeClr val="accent1"/>
-          </a:effectRef>
-          <a:fontRef idx="minor">
-            <a:schemeClr val="lt1"/>
-          </a:fontRef>
-        </p:style>
-        <p:txBody>
-          <a:bodyPr rtlCol="0" anchor="ctr"/>
-          <a:lstStyle/>
-          <a:p>
-            <a:pPr algn="ctr"/>
-            <a:endParaRPr/>
-          </a:p>
-        </p:txBody>
-      </p:sp>
-      <p:sp>
-        <p:nvSpPr>
-          <p:cNvPr id="10" name="Left Arrow 9"/>
-          <p:cNvSpPr/>
-          <p:nvPr/>
-        </p:nvSpPr>
-        <p:spPr>
-          <a:xfrm>
-            <a:off x="3246120" y="3108960"/>
-            <a:ext cx="1554480" cy="502920"/>
-          </a:xfrm>
-          <a:prstGeom prst="leftArrow">
-            <a:avLst/>
-          </a:prstGeom>
-          <a:solidFill>
-            <a:srgbClr val="CBD9EE"/>
-          </a:solidFill>
-          <a:ln>
-            <a:noFill/>
-          </a:ln>
-          <a:effectLst/>
-        </p:spPr>
-        <p:style>
-          <a:lnRef idx="1">
-            <a:schemeClr val="accent1"/>
-          </a:lnRef>
-          <a:fillRef idx="3">
-            <a:schemeClr val="accent1"/>
-          </a:fillRef>
-          <a:effectRef idx="2">
-            <a:schemeClr val="accent1"/>
-          </a:effectRef>
-          <a:fontRef idx="minor">
-            <a:schemeClr val="lt1"/>
-          </a:fontRef>
-        </p:style>
-        <p:txBody>
-          <a:bodyPr rtlCol="0" anchor="ctr"/>
-          <a:lstStyle/>
-          <a:p>
-            <a:pPr algn="ctr"/>
-            <a:endParaRPr/>
-          </a:p>
-        </p:txBody>
-      </p:sp>
-      <p:sp>
-        <p:nvSpPr>
-          <p:cNvPr id="11" name="TextBox 10"/>
-          <p:cNvSpPr txBox="1"/>
-          <p:nvPr/>
-        </p:nvSpPr>
-        <p:spPr>
-          <a:xfrm>
-            <a:off x="3017520" y="2697480"/>
-            <a:ext cx="2011680" cy="274320"/>
-          </a:xfrm>
-          <a:prstGeom prst="rect">
-            <a:avLst/>
-          </a:prstGeom>
-          <a:noFill/>
-        </p:spPr>
-        <p:txBody>
-          <a:bodyPr wrap="square" lIns="0" tIns="0" rIns="0" bIns="0" anchor="t">
-            <a:spAutoFit/>
-          </a:bodyPr>
-          <a:lstStyle/>
-          <a:p>
-            <a:pPr algn="ctr">
-              <a:spcAft>
-                <a:spcPts val="600"/>
-              </a:spcAft>
-            </a:pPr>
-            <a:r>
-              <a:rPr sz="1300">
-                <a:solidFill>
-                  <a:srgbClr val="0E2238"/>
-                </a:solidFill>
-                <a:latin typeface="Segoe UI Semibold"/>
-              </a:rPr>
-              <a:t>action: start a job</a:t>
-            </a:r>
-          </a:p>
-        </p:txBody>
-      </p:sp>
-      <p:sp>
-        <p:nvSpPr>
-          <p:cNvPr id="12" name="TextBox 11"/>
-          <p:cNvSpPr txBox="1"/>
-          <p:nvPr/>
-        </p:nvSpPr>
-        <p:spPr>
-          <a:xfrm>
-            <a:off x="3017520" y="3639312"/>
-            <a:ext cx="2011680" cy="274320"/>
-          </a:xfrm>
-          <a:prstGeom prst="rect">
-            <a:avLst/>
-          </a:prstGeom>
-          <a:noFill/>
-        </p:spPr>
-        <p:txBody>
-          <a:bodyPr wrap="square" lIns="0" tIns="0" rIns="0" bIns="0" anchor="t">
-            <a:spAutoFit/>
-          </a:bodyPr>
-          <a:lstStyle/>
-          <a:p>
-            <a:pPr algn="ctr">
-              <a:spcAft>
-                <a:spcPts val="600"/>
-              </a:spcAft>
-            </a:pPr>
-            <a:r>
-              <a:rPr sz="1300">
-                <a:solidFill>
-                  <a:srgbClr val="0E2238"/>
-                </a:solidFill>
-                <a:latin typeface="Segoe UI Semibold"/>
-              </a:rPr>
-              <a:t>new state + reward</a:t>
-            </a:r>
-          </a:p>
-        </p:txBody>
-      </p:sp>
-      <p:sp>
-        <p:nvSpPr>
-          <p:cNvPr id="13" name="TextBox 12"/>
-          <p:cNvSpPr txBox="1"/>
-          <p:nvPr/>
-        </p:nvSpPr>
-        <p:spPr>
-          <a:xfrm>
-            <a:off x="868680" y="4069080"/>
-            <a:ext cx="2103120" cy="274320"/>
-          </a:xfrm>
-          <a:prstGeom prst="rect">
-            <a:avLst/>
-          </a:prstGeom>
-          <a:noFill/>
-        </p:spPr>
-        <p:txBody>
-          <a:bodyPr wrap="square" lIns="0" tIns="0" rIns="0" bIns="0" anchor="t">
-            <a:spAutoFit/>
-          </a:bodyPr>
-          <a:lstStyle/>
-          <a:p>
-            <a:pPr>
-              <a:spcAft>
-                <a:spcPts val="600"/>
-              </a:spcAft>
-            </a:pPr>
-            <a:r>
-              <a:rPr sz="1500">
-                <a:solidFill>
-                  <a:srgbClr val="2A6FD1"/>
-                </a:solidFill>
-                <a:latin typeface="Segoe UI Semibold"/>
-              </a:rPr>
-              <a:t>State</a:t>
-            </a:r>
-          </a:p>
-        </p:txBody>
-      </p:sp>
-      <p:sp>
-        <p:nvSpPr>
-          <p:cNvPr id="14" name="TextBox 13"/>
-          <p:cNvSpPr txBox="1"/>
-          <p:nvPr/>
-        </p:nvSpPr>
-        <p:spPr>
-          <a:xfrm>
-            <a:off x="868680" y="4370832"/>
-            <a:ext cx="2057400" cy="548640"/>
-          </a:xfrm>
-          <a:prstGeom prst="rect">
-            <a:avLst/>
-          </a:prstGeom>
-          <a:noFill/>
-        </p:spPr>
-        <p:txBody>
-          <a:bodyPr wrap="square" lIns="0" tIns="0" rIns="0" bIns="0" anchor="t">
-            <a:spAutoFit/>
-          </a:bodyPr>
-          <a:lstStyle/>
-          <a:p>
-            <a:pPr>
-              <a:spcAft>
-                <a:spcPts val="600"/>
-              </a:spcAft>
-            </a:pPr>
-            <a:r>
-              <a:rPr sz="1300">
-                <a:solidFill>
-                  <a:srgbClr val="56677A"/>
-                </a:solidFill>
-                <a:latin typeface="Segoe UI"/>
-              </a:rPr>
-              <a:t>waiting jobs, deadlines, machine loads</a:t>
-            </a:r>
-          </a:p>
-        </p:txBody>
-      </p:sp>
-      <p:sp>
-        <p:nvSpPr>
-          <p:cNvPr id="15" name="TextBox 14"/>
-          <p:cNvSpPr txBox="1"/>
-          <p:nvPr/>
-        </p:nvSpPr>
-        <p:spPr>
-          <a:xfrm>
-            <a:off x="3063239" y="4069080"/>
-            <a:ext cx="2103120" cy="274320"/>
-          </a:xfrm>
-          <a:prstGeom prst="rect">
-            <a:avLst/>
-          </a:prstGeom>
-          <a:noFill/>
-        </p:spPr>
-        <p:txBody>
-          <a:bodyPr wrap="square" lIns="0" tIns="0" rIns="0" bIns="0" anchor="t">
-            <a:spAutoFit/>
-          </a:bodyPr>
-          <a:lstStyle/>
-          <a:p>
-            <a:pPr>
-              <a:spcAft>
-                <a:spcPts val="600"/>
-              </a:spcAft>
-            </a:pPr>
-            <a:r>
-              <a:rPr sz="1500">
-                <a:solidFill>
-                  <a:srgbClr val="2A6FD1"/>
-                </a:solidFill>
-                <a:latin typeface="Segoe UI Semibold"/>
-              </a:rPr>
-              <a:t>Action</a:t>
-            </a:r>
-          </a:p>
-        </p:txBody>
-      </p:sp>
-      <p:sp>
-        <p:nvSpPr>
-          <p:cNvPr id="16" name="TextBox 15"/>
-          <p:cNvSpPr txBox="1"/>
-          <p:nvPr/>
-        </p:nvSpPr>
-        <p:spPr>
-          <a:xfrm>
-            <a:off x="3063239" y="4370832"/>
-            <a:ext cx="2057400" cy="548640"/>
-          </a:xfrm>
-          <a:prstGeom prst="rect">
-            <a:avLst/>
-          </a:prstGeom>
-          <a:noFill/>
-        </p:spPr>
-        <p:txBody>
-          <a:bodyPr wrap="square" lIns="0" tIns="0" rIns="0" bIns="0" anchor="t">
-            <a:spAutoFit/>
-          </a:bodyPr>
-          <a:lstStyle/>
-          <a:p>
-            <a:pPr>
-              <a:spcAft>
-                <a:spcPts val="600"/>
-              </a:spcAft>
-            </a:pPr>
-            <a:r>
-              <a:rPr sz="1300">
-                <a:solidFill>
-                  <a:srgbClr val="56677A"/>
-                </a:solidFill>
-                <a:latin typeface="Segoe UI"/>
-              </a:rPr>
-              <a:t>which job to start next (or wait)</a:t>
-            </a:r>
-          </a:p>
-        </p:txBody>
-      </p:sp>
-      <p:sp>
-        <p:nvSpPr>
-          <p:cNvPr id="17" name="TextBox 16"/>
-          <p:cNvSpPr txBox="1"/>
-          <p:nvPr/>
-        </p:nvSpPr>
-        <p:spPr>
-          <a:xfrm>
-            <a:off x="5257800" y="4069080"/>
-            <a:ext cx="2103120" cy="274320"/>
-          </a:xfrm>
-          <a:prstGeom prst="rect">
-            <a:avLst/>
-          </a:prstGeom>
-          <a:noFill/>
-        </p:spPr>
-        <p:txBody>
-          <a:bodyPr wrap="square" lIns="0" tIns="0" rIns="0" bIns="0" anchor="t">
-            <a:spAutoFit/>
-          </a:bodyPr>
-          <a:lstStyle/>
-          <a:p>
-            <a:pPr>
-              <a:spcAft>
-                <a:spcPts val="600"/>
-              </a:spcAft>
-            </a:pPr>
-            <a:r>
-              <a:rPr sz="1500">
-                <a:solidFill>
-                  <a:srgbClr val="2A6FD1"/>
-                </a:solidFill>
-                <a:latin typeface="Segoe UI Semibold"/>
-              </a:rPr>
-              <a:t>Reward</a:t>
-            </a:r>
-          </a:p>
-        </p:txBody>
-      </p:sp>
-      <p:sp>
-        <p:nvSpPr>
-          <p:cNvPr id="18" name="TextBox 17"/>
-          <p:cNvSpPr txBox="1"/>
-          <p:nvPr/>
-        </p:nvSpPr>
-        <p:spPr>
-          <a:xfrm>
-            <a:off x="5257800" y="4370832"/>
-            <a:ext cx="2057400" cy="548640"/>
-          </a:xfrm>
-          <a:prstGeom prst="rect">
-            <a:avLst/>
-          </a:prstGeom>
-          <a:noFill/>
-        </p:spPr>
-        <p:txBody>
-          <a:bodyPr wrap="square" lIns="0" tIns="0" rIns="0" bIns="0" anchor="t">
-            <a:spAutoFit/>
-          </a:bodyPr>
-          <a:lstStyle/>
-          <a:p>
-            <a:pPr>
-              <a:spcAft>
-                <a:spcPts val="600"/>
-              </a:spcAft>
-            </a:pPr>
-            <a:r>
-              <a:rPr sz="1300">
-                <a:solidFill>
-                  <a:srgbClr val="56677A"/>
-                </a:solidFill>
-                <a:latin typeface="Segoe UI"/>
-              </a:rPr>
-              <a:t>minus the lateness cost</a:t>
-            </a:r>
-          </a:p>
-        </p:txBody>
-      </p:sp>
-      <p:sp>
-        <p:nvSpPr>
-          <p:cNvPr id="19" name="Rounded Rectangle 18"/>
-          <p:cNvSpPr/>
-          <p:nvPr/>
-        </p:nvSpPr>
-        <p:spPr>
-          <a:xfrm>
-            <a:off x="7680960" y="1600200"/>
-            <a:ext cx="3886200" cy="1600200"/>
+            <a:off x="640080" y="5074920"/>
+            <a:ext cx="10927080" cy="1143000"/>
           </a:xfrm>
           <a:prstGeom prst="roundRect">
             <a:avLst>
@@ -6240,14 +5667,14 @@
       </p:sp>
       <p:sp>
         <p:nvSpPr>
-          <p:cNvPr id="20" name="TextBox 19"/>
+          <p:cNvPr id="27" name="TextBox 26"/>
           <p:cNvSpPr txBox="1"/>
           <p:nvPr/>
         </p:nvSpPr>
         <p:spPr>
           <a:xfrm>
-            <a:off x="7909560" y="1737360"/>
-            <a:ext cx="3383280" cy="274320"/>
+            <a:off x="914400" y="5303520"/>
+            <a:ext cx="6400800" cy="592470"/>
           </a:xfrm>
           <a:prstGeom prst="rect">
             <a:avLst/>
@@ -6262,122 +5689,66 @@
           <a:p>
             <a:pPr>
               <a:spcAft>
-                <a:spcPts val="600"/>
+                <a:spcPts val="300"/>
               </a:spcAft>
             </a:pPr>
             <a:r>
-              <a:rPr sz="1100">
-                <a:solidFill>
-                  <a:srgbClr val="2A6FD1"/>
+              <a:rPr sz="2200" dirty="0">
+                <a:solidFill>
+                  <a:srgbClr val="0E2238"/>
                 </a:solidFill>
                 <a:latin typeface="Segoe UI Semibold"/>
               </a:rPr>
-              <a:t>WHAT IT TRIES TO MINIMISE</a:t>
-            </a:r>
-          </a:p>
-        </p:txBody>
-      </p:sp>
-      <p:sp>
-        <p:nvSpPr>
-          <p:cNvPr id="21" name="TextBox 20"/>
-          <p:cNvSpPr txBox="1"/>
-          <p:nvPr/>
-        </p:nvSpPr>
-        <p:spPr>
-          <a:xfrm>
-            <a:off x="7955279" y="2011680"/>
-            <a:ext cx="3383280" cy="457200"/>
-          </a:xfrm>
-          <a:prstGeom prst="rect">
-            <a:avLst/>
-          </a:prstGeom>
-          <a:noFill/>
-        </p:spPr>
-        <p:txBody>
-          <a:bodyPr wrap="square" lIns="0" tIns="0" rIns="0" bIns="0" anchor="t">
-            <a:spAutoFit/>
-          </a:bodyPr>
-          <a:lstStyle/>
+              <a:t>Watch it learn</a:t>
+            </a:r>
+          </a:p>
           <a:p>
             <a:pPr>
               <a:spcAft>
-                <a:spcPts val="600"/>
+                <a:spcPts val="300"/>
               </a:spcAft>
             </a:pPr>
             <a:r>
-              <a:rPr sz="2400">
-                <a:solidFill>
-                  <a:srgbClr val="0E2238"/>
-                </a:solidFill>
-                <a:latin typeface="Segoe UI Semibold"/>
-              </a:rPr>
-              <a:t>J = Σ w × (lateness)²</a:t>
-            </a:r>
-          </a:p>
-        </p:txBody>
-      </p:sp>
-      <p:sp>
-        <p:nvSpPr>
-          <p:cNvPr id="22" name="TextBox 21"/>
-          <p:cNvSpPr txBox="1"/>
-          <p:nvPr/>
-        </p:nvSpPr>
-        <p:spPr>
-          <a:xfrm>
-            <a:off x="7955279" y="2606040"/>
-            <a:ext cx="3383280" cy="548640"/>
-          </a:xfrm>
-          <a:prstGeom prst="rect">
-            <a:avLst/>
-          </a:prstGeom>
-          <a:noFill/>
-        </p:spPr>
-        <p:txBody>
-          <a:bodyPr wrap="square" lIns="0" tIns="0" rIns="0" bIns="0" anchor="t">
-            <a:spAutoFit/>
-          </a:bodyPr>
-          <a:lstStyle/>
-          <a:p>
-            <a:pPr>
-              <a:spcAft>
-                <a:spcPts val="600"/>
-              </a:spcAft>
-            </a:pPr>
-            <a:r>
-              <a:rPr sz="1200">
+              <a:rPr lang="en-AU" sz="1400" dirty="0">
                 <a:solidFill>
                   <a:srgbClr val="56677A"/>
                 </a:solidFill>
                 <a:latin typeface="Segoe UI"/>
               </a:rPr>
-              <a:t>Late jobs hurt more the later they are; important jobs count more. Optional terms: late jobs, energy.</a:t>
-            </a:r>
-          </a:p>
-        </p:txBody>
-      </p:sp>
-      <p:sp>
-        <p:nvSpPr>
-          <p:cNvPr id="23" name="Rounded Rectangle 22"/>
+              <a:t>Train a tiny scheduler yourself and see how it learns</a:t>
+            </a:r>
+            <a:endParaRPr sz="1400" dirty="0">
+              <a:solidFill>
+                <a:srgbClr val="56677A"/>
+              </a:solidFill>
+              <a:latin typeface="Segoe UI"/>
+            </a:endParaRPr>
+          </a:p>
+        </p:txBody>
+      </p:sp>
+      <p:sp>
+        <p:nvSpPr>
+          <p:cNvPr id="28" name="Rounded Rectangle 27">
+            <a:hlinkClick r:id="rId3"/>
+          </p:cNvPr>
           <p:cNvSpPr/>
           <p:nvPr/>
         </p:nvSpPr>
         <p:spPr>
           <a:xfrm>
-            <a:off x="7680960" y="3337560"/>
-            <a:ext cx="3886200" cy="1508760"/>
+            <a:off x="7680960" y="5285232"/>
+            <a:ext cx="3611880" cy="731520"/>
           </a:xfrm>
           <a:prstGeom prst="roundRect">
             <a:avLst>
-              <a:gd name="adj" fmla="val 4000"/>
+              <a:gd name="adj" fmla="val 30000"/>
             </a:avLst>
           </a:prstGeom>
           <a:solidFill>
-            <a:srgbClr val="EEF4FC"/>
+            <a:srgbClr val="2A6FD1"/>
           </a:solidFill>
-          <a:ln w="15875">
-            <a:solidFill>
-              <a:srgbClr val="EEF4FC"/>
-            </a:solidFill>
+          <a:ln>
+            <a:noFill/>
           </a:ln>
           <a:effectLst/>
         </p:spPr>
@@ -6396,134 +5767,32 @@
           </a:fontRef>
         </p:style>
         <p:txBody>
-          <a:bodyPr rtlCol="0" anchor="ctr"/>
+          <a:bodyPr wrap="square" lIns="73152" rIns="73152" rtlCol="0" anchor="ctr"/>
           <a:lstStyle/>
           <a:p>
             <a:pPr algn="ctr"/>
-            <a:endParaRPr/>
-          </a:p>
-        </p:txBody>
-      </p:sp>
-      <p:sp>
-        <p:nvSpPr>
-          <p:cNvPr id="24" name="TextBox 23"/>
-          <p:cNvSpPr txBox="1"/>
-          <p:nvPr/>
-        </p:nvSpPr>
-        <p:spPr>
-          <a:xfrm>
-            <a:off x="7955279" y="3474720"/>
-            <a:ext cx="3383280" cy="274320"/>
-          </a:xfrm>
-          <a:prstGeom prst="rect">
-            <a:avLst/>
-          </a:prstGeom>
-          <a:noFill/>
-        </p:spPr>
-        <p:txBody>
-          <a:bodyPr wrap="square" lIns="0" tIns="0" rIns="0" bIns="0" anchor="t">
-            <a:spAutoFit/>
-          </a:bodyPr>
-          <a:lstStyle/>
-          <a:p>
-            <a:pPr>
-              <a:spcAft>
-                <a:spcPts val="600"/>
-              </a:spcAft>
-            </a:pPr>
-            <a:r>
-              <a:rPr sz="1100">
-                <a:solidFill>
-                  <a:srgbClr val="2A6FD1"/>
+            <a:r>
+              <a:rPr sz="1700" dirty="0">
+                <a:solidFill>
+                  <a:srgbClr val="FFFFFF"/>
                 </a:solidFill>
                 <a:latin typeface="Segoe UI Semibold"/>
               </a:rPr>
-              <a:t>THREE KINDS OF SCHEDULER</a:t>
-            </a:r>
-          </a:p>
-        </p:txBody>
-      </p:sp>
-      <p:sp>
-        <p:nvSpPr>
-          <p:cNvPr id="25" name="TextBox 24"/>
-          <p:cNvSpPr txBox="1"/>
-          <p:nvPr/>
-        </p:nvSpPr>
-        <p:spPr>
-          <a:xfrm>
-            <a:off x="7955279" y="3749039"/>
-            <a:ext cx="3429000" cy="1097280"/>
-          </a:xfrm>
-          <a:prstGeom prst="rect">
-            <a:avLst/>
-          </a:prstGeom>
-          <a:noFill/>
-        </p:spPr>
-        <p:txBody>
-          <a:bodyPr wrap="square" lIns="0" tIns="0" rIns="0" bIns="0" anchor="t">
-            <a:spAutoFit/>
-          </a:bodyPr>
-          <a:lstStyle/>
-          <a:p>
-            <a:pPr>
-              <a:spcAft>
-                <a:spcPts val="300"/>
-              </a:spcAft>
-            </a:pPr>
-            <a:r>
-              <a:rPr sz="1400">
-                <a:solidFill>
-                  <a:srgbClr val="0E2238"/>
-                </a:solidFill>
-                <a:latin typeface="Segoe UI"/>
-              </a:rPr>
-              <a:t>Classic rules, made by hand</a:t>
-            </a:r>
-          </a:p>
-          <a:p>
-            <a:pPr>
-              <a:spcAft>
-                <a:spcPts val="300"/>
-              </a:spcAft>
-            </a:pPr>
-            <a:r>
-              <a:rPr sz="1400">
-                <a:solidFill>
-                  <a:srgbClr val="0E2238"/>
-                </a:solidFill>
-                <a:latin typeface="Segoe UI"/>
-              </a:rPr>
-              <a:t>AI that learns on its own</a:t>
-            </a:r>
-          </a:p>
-          <a:p>
-            <a:pPr>
-              <a:spcAft>
-                <a:spcPts val="300"/>
-              </a:spcAft>
-            </a:pPr>
-            <a:r>
-              <a:rPr sz="1400">
-                <a:solidFill>
-                  <a:srgbClr val="0E2238"/>
-                </a:solidFill>
-                <a:latin typeface="Segoe UI"/>
-              </a:rPr>
-              <a:t>AI that first copies a rule</a:t>
-            </a:r>
-          </a:p>
-        </p:txBody>
-      </p:sp>
-      <p:sp>
-        <p:nvSpPr>
-          <p:cNvPr id="26" name="Rounded Rectangle 25"/>
+              <a:t>Interactive demo →</a:t>
+            </a:r>
+          </a:p>
+        </p:txBody>
+      </p:sp>
+      <p:sp>
+        <p:nvSpPr>
+          <p:cNvPr id="29" name="Rounded Rectangle 28"/>
           <p:cNvSpPr/>
           <p:nvPr/>
         </p:nvSpPr>
         <p:spPr>
           <a:xfrm>
-            <a:off x="640080" y="5074920"/>
-            <a:ext cx="10927080" cy="1143000"/>
+            <a:off x="640080" y="1600200"/>
+            <a:ext cx="5120640" cy="3246120"/>
           </a:xfrm>
           <a:prstGeom prst="roundRect">
             <a:avLst>
@@ -6559,20 +5828,19 @@
           <a:lstStyle/>
           <a:p>
             <a:pPr algn="ctr"/>
-            <a:endParaRPr/>
-          </a:p>
-        </p:txBody>
-      </p:sp>
-      <p:sp>
-        <p:nvSpPr>
-          <p:cNvPr id="27" name="TextBox 26"/>
+          </a:p>
+        </p:txBody>
+      </p:sp>
+      <p:sp>
+        <p:nvSpPr>
+          <p:cNvPr id="30" name="TextBox 29"/>
           <p:cNvSpPr txBox="1"/>
           <p:nvPr/>
         </p:nvSpPr>
         <p:spPr>
           <a:xfrm>
-            <a:off x="914400" y="5303520"/>
-            <a:ext cx="6400800" cy="592470"/>
+            <a:off x="868680" y="1737360"/>
+            <a:ext cx="4663440" cy="274320"/>
           </a:xfrm>
           <a:prstGeom prst="rect">
             <a:avLst/>
@@ -6580,66 +5848,1114 @@
           <a:noFill/>
         </p:spPr>
         <p:txBody>
-          <a:bodyPr wrap="square" lIns="0" tIns="0" rIns="0" bIns="0" anchor="t">
+          <a:bodyPr wrap="square" anchor="t" lIns="0" rIns="0" tIns="0" bIns="0">
             <a:spAutoFit/>
           </a:bodyPr>
           <a:lstStyle/>
           <a:p>
             <a:pPr>
               <a:spcAft>
-                <a:spcPts val="300"/>
+                <a:spcPts val="400"/>
               </a:spcAft>
             </a:pPr>
             <a:r>
-              <a:rPr sz="2200" dirty="0">
-                <a:solidFill>
-                  <a:srgbClr val="0E2238"/>
+              <a:rPr sz="1100">
+                <a:solidFill>
+                  <a:srgbClr val="2A6FD1"/>
                 </a:solidFill>
                 <a:latin typeface="Segoe UI Semibold"/>
               </a:rPr>
-              <a:t>Watch it learn</a:t>
-            </a:r>
-          </a:p>
+              <a:t>WHAT IT MINIMISES</a:t>
+            </a:r>
+          </a:p>
+        </p:txBody>
+      </p:sp>
+      <p:sp>
+        <p:nvSpPr>
+          <p:cNvPr id="31" name="TextBox 30"/>
+          <p:cNvSpPr txBox="1"/>
+          <p:nvPr/>
+        </p:nvSpPr>
+        <p:spPr>
+          <a:xfrm>
+            <a:off x="868680" y="1993392"/>
+            <a:ext cx="4663440" cy="640080"/>
+          </a:xfrm>
+          <a:prstGeom prst="rect">
+            <a:avLst/>
+          </a:prstGeom>
+          <a:noFill/>
+        </p:spPr>
+        <p:txBody>
+          <a:bodyPr wrap="square" anchor="t" lIns="0" rIns="0" tIns="0" bIns="0">
+            <a:spAutoFit/>
+          </a:bodyPr>
+          <a:lstStyle/>
           <a:p>
             <a:pPr>
               <a:spcAft>
-                <a:spcPts val="300"/>
+                <a:spcPts val="400"/>
               </a:spcAft>
             </a:pPr>
             <a:r>
-              <a:rPr lang="en-AU" sz="1400" dirty="0">
+              <a:rPr sz="3200">
+                <a:solidFill>
+                  <a:srgbClr val="0E2238"/>
+                </a:solidFill>
+                <a:latin typeface="Cambria Math"/>
+              </a:rPr>
+              <a:t>J</a:t>
+            </a:r>
+            <a:r>
+              <a:rPr sz="3200">
+                <a:solidFill>
+                  <a:srgbClr val="0E2238"/>
+                </a:solidFill>
+                <a:latin typeface="Cambria Math"/>
+              </a:rPr>
+              <a:t> = Σ w</a:t>
+            </a:r>
+            <a:r>
+              <a:rPr sz="3200" baseline="-25000">
+                <a:solidFill>
+                  <a:srgbClr val="0E2238"/>
+                </a:solidFill>
+                <a:latin typeface="Cambria Math"/>
+              </a:rPr>
+              <a:t>j</a:t>
+            </a:r>
+            <a:r>
+              <a:rPr sz="3200">
+                <a:solidFill>
+                  <a:srgbClr val="0E2238"/>
+                </a:solidFill>
+                <a:latin typeface="Cambria Math"/>
+              </a:rPr>
+              <a:t> T</a:t>
+            </a:r>
+            <a:r>
+              <a:rPr sz="3200" baseline="-25000">
+                <a:solidFill>
+                  <a:srgbClr val="0E2238"/>
+                </a:solidFill>
+                <a:latin typeface="Cambria Math"/>
+              </a:rPr>
+              <a:t>j</a:t>
+            </a:r>
+            <a:r>
+              <a:rPr sz="3200" baseline="30000">
+                <a:solidFill>
+                  <a:srgbClr val="0E2238"/>
+                </a:solidFill>
+                <a:latin typeface="Cambria Math"/>
+              </a:rPr>
+              <a:t>2</a:t>
+            </a:r>
+          </a:p>
+        </p:txBody>
+      </p:sp>
+      <p:sp>
+        <p:nvSpPr>
+          <p:cNvPr id="32" name="TextBox 31"/>
+          <p:cNvSpPr txBox="1"/>
+          <p:nvPr/>
+        </p:nvSpPr>
+        <p:spPr>
+          <a:xfrm>
+            <a:off x="868680" y="2651760"/>
+            <a:ext cx="4709160" cy="502920"/>
+          </a:xfrm>
+          <a:prstGeom prst="rect">
+            <a:avLst/>
+          </a:prstGeom>
+          <a:noFill/>
+        </p:spPr>
+        <p:txBody>
+          <a:bodyPr wrap="square" anchor="t" lIns="0" rIns="0" tIns="0" bIns="0">
+            <a:spAutoFit/>
+          </a:bodyPr>
+          <a:lstStyle/>
+          <a:p>
+            <a:pPr>
+              <a:spcAft>
+                <a:spcPts val="400"/>
+              </a:spcAft>
+            </a:pPr>
+            <a:r>
+              <a:rPr sz="1200">
                 <a:solidFill>
                   <a:srgbClr val="56677A"/>
                 </a:solidFill>
                 <a:latin typeface="Segoe UI"/>
               </a:rPr>
-              <a:t>Train a tiny scheduler yourself and see how it learns</a:t>
-            </a:r>
-            <a:endParaRPr sz="1400" dirty="0">
-              <a:solidFill>
-                <a:srgbClr val="56677A"/>
-              </a:solidFill>
-              <a:latin typeface="Segoe UI"/>
-            </a:endParaRPr>
-          </a:p>
-        </p:txBody>
-      </p:sp>
-      <p:sp>
-        <p:nvSpPr>
-          <p:cNvPr id="28" name="Rounded Rectangle 27">
-            <a:hlinkClick r:id="rId3"/>
-          </p:cNvPr>
+              <a:t>Main objective: how late each job finishes, squared, </a:t>
+            </a:r>
+            <a:r>
+              <a:rPr sz="1200">
+                <a:solidFill>
+                  <a:srgbClr val="56677A"/>
+                </a:solidFill>
+                <a:latin typeface="Segoe UI"/>
+              </a:rPr>
+              <a:t>weighted by how important it is.</a:t>
+            </a:r>
+          </a:p>
+        </p:txBody>
+      </p:sp>
+      <p:sp>
+        <p:nvSpPr>
+          <p:cNvPr id="33" name="TextBox 32"/>
+          <p:cNvSpPr txBox="1"/>
+          <p:nvPr/>
+        </p:nvSpPr>
+        <p:spPr>
+          <a:xfrm>
+            <a:off x="868680" y="3154680"/>
+            <a:ext cx="4663440" cy="228600"/>
+          </a:xfrm>
+          <a:prstGeom prst="rect">
+            <a:avLst/>
+          </a:prstGeom>
+          <a:noFill/>
+        </p:spPr>
+        <p:txBody>
+          <a:bodyPr wrap="square" anchor="t" lIns="0" rIns="0" tIns="0" bIns="0">
+            <a:spAutoFit/>
+          </a:bodyPr>
+          <a:lstStyle/>
+          <a:p>
+            <a:pPr>
+              <a:spcAft>
+                <a:spcPts val="400"/>
+              </a:spcAft>
+            </a:pPr>
+            <a:r>
+              <a:rPr sz="950">
+                <a:solidFill>
+                  <a:srgbClr val="2A6FD1"/>
+                </a:solidFill>
+                <a:latin typeface="Segoe UI Semibold"/>
+              </a:rPr>
+              <a:t>ADDED IN THE COMBINED-OBJECTIVE TESTS</a:t>
+            </a:r>
+          </a:p>
+        </p:txBody>
+      </p:sp>
+      <p:sp>
+        <p:nvSpPr>
+          <p:cNvPr id="34" name="TextBox 33"/>
+          <p:cNvSpPr txBox="1"/>
+          <p:nvPr/>
+        </p:nvSpPr>
+        <p:spPr>
+          <a:xfrm>
+            <a:off x="868680" y="3383280"/>
+            <a:ext cx="4754880" cy="365760"/>
+          </a:xfrm>
+          <a:prstGeom prst="rect">
+            <a:avLst/>
+          </a:prstGeom>
+          <a:noFill/>
+        </p:spPr>
+        <p:txBody>
+          <a:bodyPr wrap="square" anchor="t" lIns="0" rIns="0" tIns="0" bIns="0">
+            <a:spAutoFit/>
+          </a:bodyPr>
+          <a:lstStyle/>
+          <a:p>
+            <a:pPr>
+              <a:spcAft>
+                <a:spcPts val="400"/>
+              </a:spcAft>
+            </a:pPr>
+            <a:r>
+              <a:rPr sz="1450">
+                <a:solidFill>
+                  <a:srgbClr val="0E2238"/>
+                </a:solidFill>
+                <a:latin typeface="Cambria Math"/>
+              </a:rPr>
+              <a:t>J</a:t>
+            </a:r>
+            <a:r>
+              <a:rPr sz="1450" baseline="-25000">
+                <a:solidFill>
+                  <a:srgbClr val="0E2238"/>
+                </a:solidFill>
+                <a:latin typeface="Cambria Math"/>
+              </a:rPr>
+              <a:t>λ</a:t>
+            </a:r>
+            <a:r>
+              <a:rPr sz="1450">
+                <a:solidFill>
+                  <a:srgbClr val="0E2238"/>
+                </a:solidFill>
+                <a:latin typeface="Cambria Math"/>
+              </a:rPr>
+              <a:t> = J + λ</a:t>
+            </a:r>
+            <a:r>
+              <a:rPr sz="1450" baseline="-25000">
+                <a:solidFill>
+                  <a:srgbClr val="0E2238"/>
+                </a:solidFill>
+                <a:latin typeface="Cambria Math"/>
+              </a:rPr>
+              <a:t>T</a:t>
+            </a:r>
+            <a:r>
+              <a:rPr sz="1450">
+                <a:solidFill>
+                  <a:srgbClr val="0E2238"/>
+                </a:solidFill>
+                <a:latin typeface="Cambria Math"/>
+              </a:rPr>
+              <a:t> Σ w</a:t>
+            </a:r>
+            <a:r>
+              <a:rPr sz="1450" baseline="-25000">
+                <a:solidFill>
+                  <a:srgbClr val="0E2238"/>
+                </a:solidFill>
+                <a:latin typeface="Cambria Math"/>
+              </a:rPr>
+              <a:t>j</a:t>
+            </a:r>
+            <a:r>
+              <a:rPr sz="1450">
+                <a:solidFill>
+                  <a:srgbClr val="0E2238"/>
+                </a:solidFill>
+                <a:latin typeface="Cambria Math"/>
+              </a:rPr>
+              <a:t> T</a:t>
+            </a:r>
+            <a:r>
+              <a:rPr sz="1450" baseline="-25000">
+                <a:solidFill>
+                  <a:srgbClr val="0E2238"/>
+                </a:solidFill>
+                <a:latin typeface="Cambria Math"/>
+              </a:rPr>
+              <a:t>j</a:t>
+            </a:r>
+            <a:r>
+              <a:rPr sz="1450">
+                <a:solidFill>
+                  <a:srgbClr val="0E2238"/>
+                </a:solidFill>
+                <a:latin typeface="Cambria Math"/>
+              </a:rPr>
+              <a:t> + λ</a:t>
+            </a:r>
+            <a:r>
+              <a:rPr sz="1450" baseline="-25000">
+                <a:solidFill>
+                  <a:srgbClr val="0E2238"/>
+                </a:solidFill>
+                <a:latin typeface="Cambria Math"/>
+              </a:rPr>
+              <a:t>U</a:t>
+            </a:r>
+            <a:r>
+              <a:rPr sz="1450">
+                <a:solidFill>
+                  <a:srgbClr val="0E2238"/>
+                </a:solidFill>
+                <a:latin typeface="Cambria Math"/>
+              </a:rPr>
+              <a:t> Σ w</a:t>
+            </a:r>
+            <a:r>
+              <a:rPr sz="1450" baseline="-25000">
+                <a:solidFill>
+                  <a:srgbClr val="0E2238"/>
+                </a:solidFill>
+                <a:latin typeface="Cambria Math"/>
+              </a:rPr>
+              <a:t>j</a:t>
+            </a:r>
+            <a:r>
+              <a:rPr sz="1450">
+                <a:solidFill>
+                  <a:srgbClr val="0E2238"/>
+                </a:solidFill>
+                <a:latin typeface="Cambria Math"/>
+              </a:rPr>
+              <a:t> U</a:t>
+            </a:r>
+            <a:r>
+              <a:rPr sz="1450" baseline="-25000">
+                <a:solidFill>
+                  <a:srgbClr val="0E2238"/>
+                </a:solidFill>
+                <a:latin typeface="Cambria Math"/>
+              </a:rPr>
+              <a:t>j</a:t>
+            </a:r>
+            <a:r>
+              <a:rPr sz="1450">
+                <a:solidFill>
+                  <a:srgbClr val="0E2238"/>
+                </a:solidFill>
+                <a:latin typeface="Cambria Math"/>
+              </a:rPr>
+              <a:t> + λ</a:t>
+            </a:r>
+            <a:r>
+              <a:rPr sz="1450" baseline="-25000">
+                <a:solidFill>
+                  <a:srgbClr val="0E2238"/>
+                </a:solidFill>
+                <a:latin typeface="Cambria Math"/>
+              </a:rPr>
+              <a:t>E</a:t>
+            </a:r>
+            <a:r>
+              <a:rPr sz="1450">
+                <a:solidFill>
+                  <a:srgbClr val="0E2238"/>
+                </a:solidFill>
+                <a:latin typeface="Cambria Math"/>
+              </a:rPr>
+              <a:t> E</a:t>
+            </a:r>
+          </a:p>
+        </p:txBody>
+      </p:sp>
+      <p:sp>
+        <p:nvSpPr>
+          <p:cNvPr id="35" name="TextBox 34"/>
+          <p:cNvSpPr txBox="1"/>
+          <p:nvPr/>
+        </p:nvSpPr>
+        <p:spPr>
+          <a:xfrm>
+            <a:off x="868680" y="3749039"/>
+            <a:ext cx="4709160" cy="548640"/>
+          </a:xfrm>
+          <a:prstGeom prst="rect">
+            <a:avLst/>
+          </a:prstGeom>
+          <a:noFill/>
+        </p:spPr>
+        <p:txBody>
+          <a:bodyPr wrap="square" anchor="t" lIns="0" rIns="0" tIns="0" bIns="0">
+            <a:spAutoFit/>
+          </a:bodyPr>
+          <a:lstStyle/>
+          <a:p>
+            <a:pPr>
+              <a:spcAft>
+                <a:spcPts val="200"/>
+              </a:spcAft>
+            </a:pPr>
+            <a:r>
+              <a:rPr sz="1100">
+                <a:solidFill>
+                  <a:srgbClr val="0E2238"/>
+                </a:solidFill>
+                <a:latin typeface="Cambria Math"/>
+              </a:rPr>
+              <a:t>T</a:t>
+            </a:r>
+            <a:r>
+              <a:rPr sz="1100" baseline="-25000">
+                <a:solidFill>
+                  <a:srgbClr val="0E2238"/>
+                </a:solidFill>
+                <a:latin typeface="Cambria Math"/>
+              </a:rPr>
+              <a:t>j</a:t>
+            </a:r>
+            <a:r>
+              <a:rPr sz="1050">
+                <a:solidFill>
+                  <a:srgbClr val="56677A"/>
+                </a:solidFill>
+                <a:latin typeface="Segoe UI"/>
+              </a:rPr>
+              <a:t> = how late job j finishes (0 if on time)   </a:t>
+            </a:r>
+            <a:r>
+              <a:rPr sz="1100">
+                <a:solidFill>
+                  <a:srgbClr val="0E2238"/>
+                </a:solidFill>
+                <a:latin typeface="Cambria Math"/>
+              </a:rPr>
+              <a:t>U</a:t>
+            </a:r>
+            <a:r>
+              <a:rPr sz="1100" baseline="-25000">
+                <a:solidFill>
+                  <a:srgbClr val="0E2238"/>
+                </a:solidFill>
+                <a:latin typeface="Cambria Math"/>
+              </a:rPr>
+              <a:t>j</a:t>
+            </a:r>
+            <a:r>
+              <a:rPr sz="1050">
+                <a:solidFill>
+                  <a:srgbClr val="56677A"/>
+                </a:solidFill>
+                <a:latin typeface="Segoe UI"/>
+              </a:rPr>
+              <a:t> = 1 if it is late   </a:t>
+            </a:r>
+            <a:r>
+              <a:rPr sz="1100">
+                <a:solidFill>
+                  <a:srgbClr val="0E2238"/>
+                </a:solidFill>
+                <a:latin typeface="Cambria Math"/>
+              </a:rPr>
+              <a:t>w</a:t>
+            </a:r>
+            <a:r>
+              <a:rPr sz="1100" baseline="-25000">
+                <a:solidFill>
+                  <a:srgbClr val="0E2238"/>
+                </a:solidFill>
+                <a:latin typeface="Cambria Math"/>
+              </a:rPr>
+              <a:t>j</a:t>
+            </a:r>
+            <a:r>
+              <a:rPr sz="1050">
+                <a:solidFill>
+                  <a:srgbClr val="56677A"/>
+                </a:solidFill>
+                <a:latin typeface="Segoe UI"/>
+              </a:rPr>
+              <a:t> = its importance   </a:t>
+            </a:r>
+            <a:r>
+              <a:rPr sz="1100">
+                <a:solidFill>
+                  <a:srgbClr val="0E2238"/>
+                </a:solidFill>
+                <a:latin typeface="Cambria Math"/>
+              </a:rPr>
+              <a:t>E</a:t>
+            </a:r>
+            <a:r>
+              <a:rPr sz="1050">
+                <a:solidFill>
+                  <a:srgbClr val="56677A"/>
+                </a:solidFill>
+                <a:latin typeface="Segoe UI"/>
+              </a:rPr>
+              <a:t> = energy (machine-time switched on)</a:t>
+            </a:r>
+          </a:p>
+        </p:txBody>
+      </p:sp>
+      <p:sp>
+        <p:nvSpPr>
+          <p:cNvPr id="36" name="Rectangle 35"/>
           <p:cNvSpPr/>
           <p:nvPr/>
         </p:nvSpPr>
         <p:spPr>
           <a:xfrm>
-            <a:off x="7680960" y="5285232"/>
-            <a:ext cx="3611880" cy="731520"/>
+            <a:off x="868680" y="4279392"/>
+            <a:ext cx="4663440" cy="10972"/>
+          </a:xfrm>
+          <a:prstGeom prst="rect">
+            <a:avLst/>
+          </a:prstGeom>
+          <a:solidFill>
+            <a:srgbClr val="CBD9EE"/>
+          </a:solidFill>
+          <a:ln>
+            <a:noFill/>
+          </a:ln>
+          <a:effectLst/>
+        </p:spPr>
+        <p:style>
+          <a:lnRef idx="1">
+            <a:schemeClr val="accent1"/>
+          </a:lnRef>
+          <a:fillRef idx="3">
+            <a:schemeClr val="accent1"/>
+          </a:fillRef>
+          <a:effectRef idx="2">
+            <a:schemeClr val="accent1"/>
+          </a:effectRef>
+          <a:fontRef idx="minor">
+            <a:schemeClr val="lt1"/>
+          </a:fontRef>
+        </p:style>
+        <p:txBody>
+          <a:bodyPr rtlCol="0" anchor="ctr"/>
+          <a:lstStyle/>
+          <a:p>
+            <a:pPr algn="ctr"/>
+          </a:p>
+        </p:txBody>
+      </p:sp>
+      <p:sp>
+        <p:nvSpPr>
+          <p:cNvPr id="37" name="TextBox 36"/>
+          <p:cNvSpPr txBox="1"/>
+          <p:nvPr/>
+        </p:nvSpPr>
+        <p:spPr>
+          <a:xfrm>
+            <a:off x="868680" y="4352544"/>
+            <a:ext cx="1508760" cy="457200"/>
+          </a:xfrm>
+          <a:prstGeom prst="rect">
+            <a:avLst/>
+          </a:prstGeom>
+          <a:noFill/>
+        </p:spPr>
+        <p:txBody>
+          <a:bodyPr wrap="square" anchor="t" lIns="0" rIns="0" tIns="0" bIns="0">
+            <a:spAutoFit/>
+          </a:bodyPr>
+          <a:lstStyle/>
+          <a:p>
+            <a:pPr>
+              <a:spcAft>
+                <a:spcPts val="0"/>
+              </a:spcAft>
+            </a:pPr>
+            <a:r>
+              <a:rPr sz="1100">
+                <a:solidFill>
+                  <a:srgbClr val="2A6FD1"/>
+                </a:solidFill>
+                <a:latin typeface="Segoe UI Semibold"/>
+              </a:rPr>
+              <a:t>State</a:t>
+            </a:r>
+          </a:p>
+          <a:p>
+            <a:pPr>
+              <a:spcAft>
+                <a:spcPts val="0"/>
+              </a:spcAft>
+            </a:pPr>
+            <a:r>
+              <a:rPr sz="950">
+                <a:solidFill>
+                  <a:srgbClr val="56677A"/>
+                </a:solidFill>
+                <a:latin typeface="Segoe UI"/>
+              </a:rPr>
+              <a:t>jobs, free machine capacity</a:t>
+            </a:r>
+          </a:p>
+        </p:txBody>
+      </p:sp>
+      <p:sp>
+        <p:nvSpPr>
+          <p:cNvPr id="38" name="TextBox 37"/>
+          <p:cNvSpPr txBox="1"/>
+          <p:nvPr/>
+        </p:nvSpPr>
+        <p:spPr>
+          <a:xfrm>
+            <a:off x="2459736" y="4352544"/>
+            <a:ext cx="1508760" cy="457200"/>
+          </a:xfrm>
+          <a:prstGeom prst="rect">
+            <a:avLst/>
+          </a:prstGeom>
+          <a:noFill/>
+        </p:spPr>
+        <p:txBody>
+          <a:bodyPr wrap="square" anchor="t" lIns="0" rIns="0" tIns="0" bIns="0">
+            <a:spAutoFit/>
+          </a:bodyPr>
+          <a:lstStyle/>
+          <a:p>
+            <a:pPr>
+              <a:spcAft>
+                <a:spcPts val="0"/>
+              </a:spcAft>
+            </a:pPr>
+            <a:r>
+              <a:rPr sz="1100">
+                <a:solidFill>
+                  <a:srgbClr val="2A6FD1"/>
+                </a:solidFill>
+                <a:latin typeface="Segoe UI Semibold"/>
+              </a:rPr>
+              <a:t>Action</a:t>
+            </a:r>
+          </a:p>
+          <a:p>
+            <a:pPr>
+              <a:spcAft>
+                <a:spcPts val="0"/>
+              </a:spcAft>
+            </a:pPr>
+            <a:r>
+              <a:rPr sz="950">
+                <a:solidFill>
+                  <a:srgbClr val="56677A"/>
+                </a:solidFill>
+                <a:latin typeface="Segoe UI"/>
+              </a:rPr>
+              <a:t>start a job, or wait</a:t>
+            </a:r>
+          </a:p>
+        </p:txBody>
+      </p:sp>
+      <p:sp>
+        <p:nvSpPr>
+          <p:cNvPr id="39" name="TextBox 38"/>
+          <p:cNvSpPr txBox="1"/>
+          <p:nvPr/>
+        </p:nvSpPr>
+        <p:spPr>
+          <a:xfrm>
+            <a:off x="4050791" y="4352544"/>
+            <a:ext cx="1508760" cy="457200"/>
+          </a:xfrm>
+          <a:prstGeom prst="rect">
+            <a:avLst/>
+          </a:prstGeom>
+          <a:noFill/>
+        </p:spPr>
+        <p:txBody>
+          <a:bodyPr wrap="square" anchor="t" lIns="0" rIns="0" tIns="0" bIns="0">
+            <a:spAutoFit/>
+          </a:bodyPr>
+          <a:lstStyle/>
+          <a:p>
+            <a:pPr>
+              <a:spcAft>
+                <a:spcPts val="0"/>
+              </a:spcAft>
+            </a:pPr>
+            <a:r>
+              <a:rPr sz="1100">
+                <a:solidFill>
+                  <a:srgbClr val="2A6FD1"/>
+                </a:solidFill>
+                <a:latin typeface="Segoe UI Semibold"/>
+              </a:rPr>
+              <a:t>Reward</a:t>
+            </a:r>
+          </a:p>
+          <a:p>
+            <a:pPr>
+              <a:spcAft>
+                <a:spcPts val="0"/>
+              </a:spcAft>
+            </a:pPr>
+            <a:r>
+              <a:rPr sz="950">
+                <a:solidFill>
+                  <a:srgbClr val="56677A"/>
+                </a:solidFill>
+                <a:latin typeface="Segoe UI"/>
+              </a:rPr>
+              <a:t>minus the lateness cost</a:t>
+            </a:r>
+          </a:p>
+        </p:txBody>
+      </p:sp>
+      <p:sp>
+        <p:nvSpPr>
+          <p:cNvPr id="40" name="Rounded Rectangle 39"/>
+          <p:cNvSpPr/>
+          <p:nvPr/>
+        </p:nvSpPr>
+        <p:spPr>
+          <a:xfrm>
+            <a:off x="5943600" y="1600200"/>
+            <a:ext cx="5623560" cy="3246120"/>
           </a:xfrm>
           <a:prstGeom prst="roundRect">
             <a:avLst>
-              <a:gd name="adj" fmla="val 30000"/>
+              <a:gd name="adj" fmla="val 4000"/>
+            </a:avLst>
+          </a:prstGeom>
+          <a:solidFill>
+            <a:srgbClr val="FFFFFF"/>
+          </a:solidFill>
+          <a:ln w="15875">
+            <a:solidFill>
+              <a:srgbClr val="CBD9EE"/>
+            </a:solidFill>
+          </a:ln>
+          <a:effectLst/>
+        </p:spPr>
+        <p:style>
+          <a:lnRef idx="1">
+            <a:schemeClr val="accent1"/>
+          </a:lnRef>
+          <a:fillRef idx="3">
+            <a:schemeClr val="accent1"/>
+          </a:fillRef>
+          <a:effectRef idx="2">
+            <a:schemeClr val="accent1"/>
+          </a:effectRef>
+          <a:fontRef idx="minor">
+            <a:schemeClr val="lt1"/>
+          </a:fontRef>
+        </p:style>
+        <p:txBody>
+          <a:bodyPr rtlCol="0" anchor="ctr"/>
+          <a:lstStyle/>
+          <a:p>
+            <a:pPr algn="ctr"/>
+          </a:p>
+        </p:txBody>
+      </p:sp>
+      <p:sp>
+        <p:nvSpPr>
+          <p:cNvPr id="41" name="TextBox 40"/>
+          <p:cNvSpPr txBox="1"/>
+          <p:nvPr/>
+        </p:nvSpPr>
+        <p:spPr>
+          <a:xfrm>
+            <a:off x="6172200" y="1737360"/>
+            <a:ext cx="5120640" cy="274320"/>
+          </a:xfrm>
+          <a:prstGeom prst="rect">
+            <a:avLst/>
+          </a:prstGeom>
+          <a:noFill/>
+        </p:spPr>
+        <p:txBody>
+          <a:bodyPr wrap="square" anchor="t" lIns="0" rIns="0" tIns="0" bIns="0">
+            <a:spAutoFit/>
+          </a:bodyPr>
+          <a:lstStyle/>
+          <a:p>
+            <a:pPr>
+              <a:spcAft>
+                <a:spcPts val="400"/>
+              </a:spcAft>
+            </a:pPr>
+            <a:r>
+              <a:rPr sz="1100">
+                <a:solidFill>
+                  <a:srgbClr val="2A6FD1"/>
+                </a:solidFill>
+                <a:latin typeface="Segoe UI Semibold"/>
+              </a:rPr>
+              <a:t>WHAT WAS COMPARED</a:t>
+            </a:r>
+          </a:p>
+        </p:txBody>
+      </p:sp>
+      <p:sp>
+        <p:nvSpPr>
+          <p:cNvPr id="42" name="Rounded Rectangle 41"/>
+          <p:cNvSpPr/>
+          <p:nvPr/>
+        </p:nvSpPr>
+        <p:spPr>
+          <a:xfrm>
+            <a:off x="6172200" y="1993392"/>
+            <a:ext cx="2606040" cy="548640"/>
+          </a:xfrm>
+          <a:prstGeom prst="roundRect">
+            <a:avLst>
+              <a:gd name="adj" fmla="val 15000"/>
+            </a:avLst>
+          </a:prstGeom>
+          <a:solidFill>
+            <a:srgbClr val="EEF4FC"/>
+          </a:solidFill>
+          <a:ln w="12700">
+            <a:solidFill>
+              <a:srgbClr val="CBD9EE"/>
+            </a:solidFill>
+          </a:ln>
+          <a:effectLst/>
+        </p:spPr>
+        <p:style>
+          <a:lnRef idx="1">
+            <a:schemeClr val="accent1"/>
+          </a:lnRef>
+          <a:fillRef idx="3">
+            <a:schemeClr val="accent1"/>
+          </a:fillRef>
+          <a:effectRef idx="2">
+            <a:schemeClr val="accent1"/>
+          </a:effectRef>
+          <a:fontRef idx="minor">
+            <a:schemeClr val="lt1"/>
+          </a:fontRef>
+        </p:style>
+        <p:txBody>
+          <a:bodyPr rtlCol="0" anchor="ctr"/>
+          <a:lstStyle/>
+          <a:p>
+            <a:pPr algn="ctr"/>
+          </a:p>
+        </p:txBody>
+      </p:sp>
+      <p:sp>
+        <p:nvSpPr>
+          <p:cNvPr id="43" name="TextBox 42"/>
+          <p:cNvSpPr txBox="1"/>
+          <p:nvPr/>
+        </p:nvSpPr>
+        <p:spPr>
+          <a:xfrm>
+            <a:off x="6281928" y="2029968"/>
+            <a:ext cx="2423160" cy="502920"/>
+          </a:xfrm>
+          <a:prstGeom prst="rect">
+            <a:avLst/>
+          </a:prstGeom>
+          <a:noFill/>
+        </p:spPr>
+        <p:txBody>
+          <a:bodyPr wrap="square" anchor="t" lIns="0" rIns="0" tIns="0" bIns="0">
+            <a:spAutoFit/>
+          </a:bodyPr>
+          <a:lstStyle/>
+          <a:p>
+            <a:pPr>
+              <a:spcAft>
+                <a:spcPts val="0"/>
+              </a:spcAft>
+            </a:pPr>
+            <a:r>
+              <a:rPr sz="1150">
+                <a:solidFill>
+                  <a:srgbClr val="0E2238"/>
+                </a:solidFill>
+                <a:latin typeface="Segoe UI Semibold"/>
+              </a:rPr>
+              <a:t>49 dispatching heuristics</a:t>
+            </a:r>
+          </a:p>
+          <a:p>
+            <a:pPr>
+              <a:spcAft>
+                <a:spcPts val="0"/>
+              </a:spcAft>
+            </a:pPr>
+            <a:r>
+              <a:rPr sz="900">
+                <a:solidFill>
+                  <a:srgbClr val="56677A"/>
+                </a:solidFill>
+                <a:latin typeface="Segoe UI"/>
+              </a:rPr>
+              <a:t>a priority rule plus a placement rule, e.g. EDF + First-Fit</a:t>
+            </a:r>
+          </a:p>
+        </p:txBody>
+      </p:sp>
+      <p:sp>
+        <p:nvSpPr>
+          <p:cNvPr id="44" name="Rounded Rectangle 43"/>
+          <p:cNvSpPr/>
+          <p:nvPr/>
+        </p:nvSpPr>
+        <p:spPr>
+          <a:xfrm>
+            <a:off x="8869680" y="1993392"/>
+            <a:ext cx="2606040" cy="548640"/>
+          </a:xfrm>
+          <a:prstGeom prst="roundRect">
+            <a:avLst>
+              <a:gd name="adj" fmla="val 15000"/>
+            </a:avLst>
+          </a:prstGeom>
+          <a:solidFill>
+            <a:srgbClr val="EEF4FC"/>
+          </a:solidFill>
+          <a:ln w="12700">
+            <a:solidFill>
+              <a:srgbClr val="CBD9EE"/>
+            </a:solidFill>
+          </a:ln>
+          <a:effectLst/>
+        </p:spPr>
+        <p:style>
+          <a:lnRef idx="1">
+            <a:schemeClr val="accent1"/>
+          </a:lnRef>
+          <a:fillRef idx="3">
+            <a:schemeClr val="accent1"/>
+          </a:fillRef>
+          <a:effectRef idx="2">
+            <a:schemeClr val="accent1"/>
+          </a:effectRef>
+          <a:fontRef idx="minor">
+            <a:schemeClr val="lt1"/>
+          </a:fontRef>
+        </p:style>
+        <p:txBody>
+          <a:bodyPr rtlCol="0" anchor="ctr"/>
+          <a:lstStyle/>
+          <a:p>
+            <a:pPr algn="ctr"/>
+          </a:p>
+        </p:txBody>
+      </p:sp>
+      <p:sp>
+        <p:nvSpPr>
+          <p:cNvPr id="45" name="TextBox 44"/>
+          <p:cNvSpPr txBox="1"/>
+          <p:nvPr/>
+        </p:nvSpPr>
+        <p:spPr>
+          <a:xfrm>
+            <a:off x="8979407" y="2029968"/>
+            <a:ext cx="2423160" cy="502920"/>
+          </a:xfrm>
+          <a:prstGeom prst="rect">
+            <a:avLst/>
+          </a:prstGeom>
+          <a:noFill/>
+        </p:spPr>
+        <p:txBody>
+          <a:bodyPr wrap="square" anchor="t" lIns="0" rIns="0" tIns="0" bIns="0">
+            <a:spAutoFit/>
+          </a:bodyPr>
+          <a:lstStyle/>
+          <a:p>
+            <a:pPr>
+              <a:spcAft>
+                <a:spcPts val="0"/>
+              </a:spcAft>
+            </a:pPr>
+            <a:r>
+              <a:rPr sz="1150">
+                <a:solidFill>
+                  <a:srgbClr val="0E2238"/>
+                </a:solidFill>
+                <a:latin typeface="Segoe UI Semibold"/>
+              </a:rPr>
+              <a:t>CP-SAT exact solver</a:t>
+            </a:r>
+          </a:p>
+          <a:p>
+            <a:pPr>
+              <a:spcAft>
+                <a:spcPts val="0"/>
+              </a:spcAft>
+            </a:pPr>
+            <a:r>
+              <a:rPr sz="900">
+                <a:solidFill>
+                  <a:srgbClr val="56677A"/>
+                </a:solidFill>
+                <a:latin typeface="Segoe UI"/>
+              </a:rPr>
+              <a:t>gives a proven bound on the best possible</a:t>
+            </a:r>
+          </a:p>
+        </p:txBody>
+      </p:sp>
+      <p:sp>
+        <p:nvSpPr>
+          <p:cNvPr id="46" name="TextBox 45"/>
+          <p:cNvSpPr txBox="1"/>
+          <p:nvPr/>
+        </p:nvSpPr>
+        <p:spPr>
+          <a:xfrm>
+            <a:off x="6172200" y="2633472"/>
+            <a:ext cx="5212080" cy="228600"/>
+          </a:xfrm>
+          <a:prstGeom prst="rect">
+            <a:avLst/>
+          </a:prstGeom>
+          <a:noFill/>
+        </p:spPr>
+        <p:txBody>
+          <a:bodyPr wrap="square" anchor="t" lIns="0" rIns="0" tIns="0" bIns="0">
+            <a:spAutoFit/>
+          </a:bodyPr>
+          <a:lstStyle/>
+          <a:p>
+            <a:pPr>
+              <a:spcAft>
+                <a:spcPts val="400"/>
+              </a:spcAft>
+            </a:pPr>
+            <a:r>
+              <a:rPr sz="950">
+                <a:solidFill>
+                  <a:srgbClr val="2A6FD1"/>
+                </a:solidFill>
+                <a:latin typeface="Segoe UI Semibold"/>
+              </a:rPr>
+              <a:t>Reinforcement learning (PPO and A2C), five ways of choosing the action</a:t>
+            </a:r>
+          </a:p>
+        </p:txBody>
+      </p:sp>
+      <p:sp>
+        <p:nvSpPr>
+          <p:cNvPr id="47" name="TextBox 46"/>
+          <p:cNvSpPr txBox="1"/>
+          <p:nvPr/>
+        </p:nvSpPr>
+        <p:spPr>
+          <a:xfrm>
+            <a:off x="6172200" y="2907791"/>
+            <a:ext cx="2377440" cy="292608"/>
+          </a:xfrm>
+          <a:prstGeom prst="rect">
+            <a:avLst/>
+          </a:prstGeom>
+          <a:noFill/>
+        </p:spPr>
+        <p:txBody>
+          <a:bodyPr wrap="square" anchor="ctr" lIns="0" rIns="0" tIns="0" bIns="0">
+            <a:spAutoFit/>
+          </a:bodyPr>
+          <a:lstStyle/>
+          <a:p>
+            <a:pPr>
+              <a:spcAft>
+                <a:spcPts val="0"/>
+              </a:spcAft>
+            </a:pPr>
+            <a:r>
+              <a:rPr sz="1100">
+                <a:solidFill>
+                  <a:srgbClr val="0E2238"/>
+                </a:solidFill>
+                <a:latin typeface="Segoe UI Semibold"/>
+              </a:rPr>
+              <a:t>Option 0  </a:t>
+            </a:r>
+            <a:r>
+              <a:rPr sz="1100">
+                <a:solidFill>
+                  <a:srgbClr val="56677A"/>
+                </a:solidFill>
+                <a:latin typeface="Segoe UI"/>
+              </a:rPr>
+              <a:t>Direct pick</a:t>
+            </a:r>
+          </a:p>
+        </p:txBody>
+      </p:sp>
+      <p:sp>
+        <p:nvSpPr>
+          <p:cNvPr id="48" name="Rounded Rectangle 47"/>
+          <p:cNvSpPr/>
+          <p:nvPr/>
+        </p:nvSpPr>
+        <p:spPr>
+          <a:xfrm>
+            <a:off x="8641080" y="2907791"/>
+            <a:ext cx="2441448" cy="274320"/>
+          </a:xfrm>
+          <a:prstGeom prst="roundRect">
+            <a:avLst>
+              <a:gd name="adj" fmla="val 20000"/>
             </a:avLst>
           </a:prstGeom>
           <a:solidFill>
@@ -6665,18 +6981,820 @@
           </a:fontRef>
         </p:style>
         <p:txBody>
-          <a:bodyPr wrap="square" lIns="73152" rIns="73152" rtlCol="0" anchor="ctr"/>
+          <a:bodyPr rtlCol="0" anchor="ctr" wrap="square" lIns="45720" rIns="45720" tIns="0" bIns="0"/>
           <a:lstStyle/>
           <a:p>
             <a:pPr algn="ctr"/>
             <a:r>
-              <a:rPr sz="1700" dirty="0">
+              <a:rPr sz="900">
                 <a:solidFill>
                   <a:srgbClr val="FFFFFF"/>
                 </a:solidFill>
+                <a:latin typeface="Segoe UI"/>
+              </a:rPr>
+              <a:t>job + machine, one choice</a:t>
+            </a:r>
+          </a:p>
+        </p:txBody>
+      </p:sp>
+      <p:sp>
+        <p:nvSpPr>
+          <p:cNvPr id="49" name="TextBox 48"/>
+          <p:cNvSpPr txBox="1"/>
+          <p:nvPr/>
+        </p:nvSpPr>
+        <p:spPr>
+          <a:xfrm>
+            <a:off x="6172200" y="3255263"/>
+            <a:ext cx="2377440" cy="292608"/>
+          </a:xfrm>
+          <a:prstGeom prst="rect">
+            <a:avLst/>
+          </a:prstGeom>
+          <a:noFill/>
+        </p:spPr>
+        <p:txBody>
+          <a:bodyPr wrap="square" anchor="ctr" lIns="0" rIns="0" tIns="0" bIns="0">
+            <a:spAutoFit/>
+          </a:bodyPr>
+          <a:lstStyle/>
+          <a:p>
+            <a:pPr>
+              <a:spcAft>
+                <a:spcPts val="0"/>
+              </a:spcAft>
+            </a:pPr>
+            <a:r>
+              <a:rPr sz="1100">
+                <a:solidFill>
+                  <a:srgbClr val="0E2238"/>
+                </a:solidFill>
                 <a:latin typeface="Segoe UI Semibold"/>
               </a:rPr>
-              <a:t>Interactive demo →</a:t>
+              <a:t>Option 1  </a:t>
+            </a:r>
+            <a:r>
+              <a:rPr sz="1100">
+                <a:solidFill>
+                  <a:srgbClr val="56677A"/>
+                </a:solidFill>
+                <a:latin typeface="Segoe UI"/>
+              </a:rPr>
+              <a:t>Rule selection</a:t>
+            </a:r>
+          </a:p>
+        </p:txBody>
+      </p:sp>
+      <p:sp>
+        <p:nvSpPr>
+          <p:cNvPr id="50" name="Rounded Rectangle 49"/>
+          <p:cNvSpPr/>
+          <p:nvPr/>
+        </p:nvSpPr>
+        <p:spPr>
+          <a:xfrm>
+            <a:off x="8641080" y="3255263"/>
+            <a:ext cx="1207008" cy="274320"/>
+          </a:xfrm>
+          <a:prstGeom prst="roundRect">
+            <a:avLst>
+              <a:gd name="adj" fmla="val 20000"/>
+            </a:avLst>
+          </a:prstGeom>
+          <a:solidFill>
+            <a:srgbClr val="2A6FD1"/>
+          </a:solidFill>
+          <a:ln>
+            <a:noFill/>
+          </a:ln>
+          <a:effectLst/>
+        </p:spPr>
+        <p:style>
+          <a:lnRef idx="1">
+            <a:schemeClr val="accent1"/>
+          </a:lnRef>
+          <a:fillRef idx="3">
+            <a:schemeClr val="accent1"/>
+          </a:fillRef>
+          <a:effectRef idx="2">
+            <a:schemeClr val="accent1"/>
+          </a:effectRef>
+          <a:fontRef idx="minor">
+            <a:schemeClr val="lt1"/>
+          </a:fontRef>
+        </p:style>
+        <p:txBody>
+          <a:bodyPr rtlCol="0" anchor="ctr" wrap="square" lIns="45720" rIns="45720" tIns="0" bIns="0"/>
+          <a:lstStyle/>
+          <a:p>
+            <a:pPr algn="ctr"/>
+            <a:r>
+              <a:rPr sz="900">
+                <a:solidFill>
+                  <a:srgbClr val="FFFFFF"/>
+                </a:solidFill>
+                <a:latin typeface="Segoe UI"/>
+              </a:rPr>
+              <a:t>picks a rule</a:t>
+            </a:r>
+          </a:p>
+        </p:txBody>
+      </p:sp>
+      <p:sp>
+        <p:nvSpPr>
+          <p:cNvPr id="51" name="Rounded Rectangle 50"/>
+          <p:cNvSpPr/>
+          <p:nvPr/>
+        </p:nvSpPr>
+        <p:spPr>
+          <a:xfrm>
+            <a:off x="9875519" y="3255263"/>
+            <a:ext cx="1207008" cy="274320"/>
+          </a:xfrm>
+          <a:prstGeom prst="roundRect">
+            <a:avLst>
+              <a:gd name="adj" fmla="val 20000"/>
+            </a:avLst>
+          </a:prstGeom>
+          <a:solidFill>
+            <a:srgbClr val="8793A1"/>
+          </a:solidFill>
+          <a:ln>
+            <a:noFill/>
+          </a:ln>
+          <a:effectLst/>
+        </p:spPr>
+        <p:style>
+          <a:lnRef idx="1">
+            <a:schemeClr val="accent1"/>
+          </a:lnRef>
+          <a:fillRef idx="3">
+            <a:schemeClr val="accent1"/>
+          </a:fillRef>
+          <a:effectRef idx="2">
+            <a:schemeClr val="accent1"/>
+          </a:effectRef>
+          <a:fontRef idx="minor">
+            <a:schemeClr val="lt1"/>
+          </a:fontRef>
+        </p:style>
+        <p:txBody>
+          <a:bodyPr rtlCol="0" anchor="ctr" wrap="square" lIns="45720" rIns="45720" tIns="0" bIns="0"/>
+          <a:lstStyle/>
+          <a:p>
+            <a:pPr algn="ctr"/>
+            <a:r>
+              <a:rPr sz="900">
+                <a:solidFill>
+                  <a:srgbClr val="FFFFFF"/>
+                </a:solidFill>
+                <a:latin typeface="Segoe UI"/>
+              </a:rPr>
+              <a:t>the rule does the rest</a:t>
+            </a:r>
+          </a:p>
+        </p:txBody>
+      </p:sp>
+      <p:sp>
+        <p:nvSpPr>
+          <p:cNvPr id="52" name="TextBox 51"/>
+          <p:cNvSpPr txBox="1"/>
+          <p:nvPr/>
+        </p:nvSpPr>
+        <p:spPr>
+          <a:xfrm>
+            <a:off x="6172200" y="3602735"/>
+            <a:ext cx="2377440" cy="292608"/>
+          </a:xfrm>
+          <a:prstGeom prst="rect">
+            <a:avLst/>
+          </a:prstGeom>
+          <a:noFill/>
+        </p:spPr>
+        <p:txBody>
+          <a:bodyPr wrap="square" anchor="ctr" lIns="0" rIns="0" tIns="0" bIns="0">
+            <a:spAutoFit/>
+          </a:bodyPr>
+          <a:lstStyle/>
+          <a:p>
+            <a:pPr>
+              <a:spcAft>
+                <a:spcPts val="0"/>
+              </a:spcAft>
+            </a:pPr>
+            <a:r>
+              <a:rPr sz="1100">
+                <a:solidFill>
+                  <a:srgbClr val="0E2238"/>
+                </a:solidFill>
+                <a:latin typeface="Segoe UI Semibold"/>
+              </a:rPr>
+              <a:t>Option 2  </a:t>
+            </a:r>
+            <a:r>
+              <a:rPr sz="1100">
+                <a:solidFill>
+                  <a:srgbClr val="56677A"/>
+                </a:solidFill>
+                <a:latin typeface="Segoe UI"/>
+              </a:rPr>
+              <a:t>Priority learning</a:t>
+            </a:r>
+          </a:p>
+        </p:txBody>
+      </p:sp>
+      <p:sp>
+        <p:nvSpPr>
+          <p:cNvPr id="53" name="Rounded Rectangle 52"/>
+          <p:cNvSpPr/>
+          <p:nvPr/>
+        </p:nvSpPr>
+        <p:spPr>
+          <a:xfrm>
+            <a:off x="8641080" y="3602735"/>
+            <a:ext cx="1207008" cy="274320"/>
+          </a:xfrm>
+          <a:prstGeom prst="roundRect">
+            <a:avLst>
+              <a:gd name="adj" fmla="val 20000"/>
+            </a:avLst>
+          </a:prstGeom>
+          <a:solidFill>
+            <a:srgbClr val="2A6FD1"/>
+          </a:solidFill>
+          <a:ln>
+            <a:noFill/>
+          </a:ln>
+          <a:effectLst/>
+        </p:spPr>
+        <p:style>
+          <a:lnRef idx="1">
+            <a:schemeClr val="accent1"/>
+          </a:lnRef>
+          <a:fillRef idx="3">
+            <a:schemeClr val="accent1"/>
+          </a:fillRef>
+          <a:effectRef idx="2">
+            <a:schemeClr val="accent1"/>
+          </a:effectRef>
+          <a:fontRef idx="minor">
+            <a:schemeClr val="lt1"/>
+          </a:fontRef>
+        </p:style>
+        <p:txBody>
+          <a:bodyPr rtlCol="0" anchor="ctr" wrap="square" lIns="45720" rIns="45720" tIns="0" bIns="0"/>
+          <a:lstStyle/>
+          <a:p>
+            <a:pPr algn="ctr"/>
+            <a:r>
+              <a:rPr sz="900">
+                <a:solidFill>
+                  <a:srgbClr val="FFFFFF"/>
+                </a:solidFill>
+                <a:latin typeface="Segoe UI"/>
+              </a:rPr>
+              <a:t>job</a:t>
+            </a:r>
+          </a:p>
+        </p:txBody>
+      </p:sp>
+      <p:sp>
+        <p:nvSpPr>
+          <p:cNvPr id="54" name="Rounded Rectangle 53"/>
+          <p:cNvSpPr/>
+          <p:nvPr/>
+        </p:nvSpPr>
+        <p:spPr>
+          <a:xfrm>
+            <a:off x="9902952" y="3602735"/>
+            <a:ext cx="1207008" cy="274320"/>
+          </a:xfrm>
+          <a:prstGeom prst="roundRect">
+            <a:avLst>
+              <a:gd name="adj" fmla="val 20000"/>
+            </a:avLst>
+          </a:prstGeom>
+          <a:solidFill>
+            <a:srgbClr val="8793A1"/>
+          </a:solidFill>
+          <a:ln>
+            <a:noFill/>
+          </a:ln>
+          <a:effectLst/>
+        </p:spPr>
+        <p:style>
+          <a:lnRef idx="1">
+            <a:schemeClr val="accent1"/>
+          </a:lnRef>
+          <a:fillRef idx="3">
+            <a:schemeClr val="accent1"/>
+          </a:fillRef>
+          <a:effectRef idx="2">
+            <a:schemeClr val="accent1"/>
+          </a:effectRef>
+          <a:fontRef idx="minor">
+            <a:schemeClr val="lt1"/>
+          </a:fontRef>
+        </p:style>
+        <p:txBody>
+          <a:bodyPr rtlCol="0" anchor="ctr" wrap="square" lIns="45720" rIns="45720" tIns="0" bIns="0"/>
+          <a:lstStyle/>
+          <a:p>
+            <a:pPr algn="ctr"/>
+            <a:r>
+              <a:rPr sz="900">
+                <a:solidFill>
+                  <a:srgbClr val="FFFFFF"/>
+                </a:solidFill>
+                <a:latin typeface="Segoe UI"/>
+              </a:rPr>
+              <a:t>machine: First-Fit</a:t>
+            </a:r>
+          </a:p>
+        </p:txBody>
+      </p:sp>
+      <p:sp>
+        <p:nvSpPr>
+          <p:cNvPr id="55" name="TextBox 54"/>
+          <p:cNvSpPr txBox="1"/>
+          <p:nvPr/>
+        </p:nvSpPr>
+        <p:spPr>
+          <a:xfrm>
+            <a:off x="6172200" y="3950208"/>
+            <a:ext cx="2377440" cy="292608"/>
+          </a:xfrm>
+          <a:prstGeom prst="rect">
+            <a:avLst/>
+          </a:prstGeom>
+          <a:noFill/>
+        </p:spPr>
+        <p:txBody>
+          <a:bodyPr wrap="square" anchor="ctr" lIns="0" rIns="0" tIns="0" bIns="0">
+            <a:spAutoFit/>
+          </a:bodyPr>
+          <a:lstStyle/>
+          <a:p>
+            <a:pPr>
+              <a:spcAft>
+                <a:spcPts val="0"/>
+              </a:spcAft>
+            </a:pPr>
+            <a:r>
+              <a:rPr sz="1100">
+                <a:solidFill>
+                  <a:srgbClr val="0E2238"/>
+                </a:solidFill>
+                <a:latin typeface="Segoe UI Semibold"/>
+              </a:rPr>
+              <a:t>Option 3  </a:t>
+            </a:r>
+            <a:r>
+              <a:rPr sz="1100">
+                <a:solidFill>
+                  <a:srgbClr val="56677A"/>
+                </a:solidFill>
+                <a:latin typeface="Segoe UI"/>
+              </a:rPr>
+              <a:t>Priority + ATC feature</a:t>
+            </a:r>
+          </a:p>
+        </p:txBody>
+      </p:sp>
+      <p:sp>
+        <p:nvSpPr>
+          <p:cNvPr id="56" name="Rounded Rectangle 55"/>
+          <p:cNvSpPr/>
+          <p:nvPr/>
+        </p:nvSpPr>
+        <p:spPr>
+          <a:xfrm>
+            <a:off x="8641080" y="3950208"/>
+            <a:ext cx="1207008" cy="274320"/>
+          </a:xfrm>
+          <a:prstGeom prst="roundRect">
+            <a:avLst>
+              <a:gd name="adj" fmla="val 20000"/>
+            </a:avLst>
+          </a:prstGeom>
+          <a:solidFill>
+            <a:srgbClr val="2A6FD1"/>
+          </a:solidFill>
+          <a:ln>
+            <a:noFill/>
+          </a:ln>
+          <a:effectLst/>
+        </p:spPr>
+        <p:style>
+          <a:lnRef idx="1">
+            <a:schemeClr val="accent1"/>
+          </a:lnRef>
+          <a:fillRef idx="3">
+            <a:schemeClr val="accent1"/>
+          </a:fillRef>
+          <a:effectRef idx="2">
+            <a:schemeClr val="accent1"/>
+          </a:effectRef>
+          <a:fontRef idx="minor">
+            <a:schemeClr val="lt1"/>
+          </a:fontRef>
+        </p:style>
+        <p:txBody>
+          <a:bodyPr rtlCol="0" anchor="ctr" wrap="square" lIns="45720" rIns="45720" tIns="0" bIns="0"/>
+          <a:lstStyle/>
+          <a:p>
+            <a:pPr algn="ctr"/>
+            <a:r>
+              <a:rPr sz="900">
+                <a:solidFill>
+                  <a:srgbClr val="FFFFFF"/>
+                </a:solidFill>
+                <a:latin typeface="Segoe UI"/>
+              </a:rPr>
+              <a:t>job (+ ATC cue)</a:t>
+            </a:r>
+          </a:p>
+        </p:txBody>
+      </p:sp>
+      <p:sp>
+        <p:nvSpPr>
+          <p:cNvPr id="57" name="Rounded Rectangle 56"/>
+          <p:cNvSpPr/>
+          <p:nvPr/>
+        </p:nvSpPr>
+        <p:spPr>
+          <a:xfrm>
+            <a:off x="9875519" y="3950208"/>
+            <a:ext cx="1207008" cy="274320"/>
+          </a:xfrm>
+          <a:prstGeom prst="roundRect">
+            <a:avLst>
+              <a:gd name="adj" fmla="val 20000"/>
+            </a:avLst>
+          </a:prstGeom>
+          <a:solidFill>
+            <a:srgbClr val="8793A1"/>
+          </a:solidFill>
+          <a:ln>
+            <a:noFill/>
+          </a:ln>
+          <a:effectLst/>
+        </p:spPr>
+        <p:style>
+          <a:lnRef idx="1">
+            <a:schemeClr val="accent1"/>
+          </a:lnRef>
+          <a:fillRef idx="3">
+            <a:schemeClr val="accent1"/>
+          </a:fillRef>
+          <a:effectRef idx="2">
+            <a:schemeClr val="accent1"/>
+          </a:effectRef>
+          <a:fontRef idx="minor">
+            <a:schemeClr val="lt1"/>
+          </a:fontRef>
+        </p:style>
+        <p:txBody>
+          <a:bodyPr rtlCol="0" anchor="ctr" wrap="square" lIns="45720" rIns="45720" tIns="0" bIns="0"/>
+          <a:lstStyle/>
+          <a:p>
+            <a:pPr algn="ctr"/>
+            <a:r>
+              <a:rPr sz="900">
+                <a:solidFill>
+                  <a:srgbClr val="FFFFFF"/>
+                </a:solidFill>
+                <a:latin typeface="Segoe UI"/>
+              </a:rPr>
+              <a:t>machine: First-Fit</a:t>
+            </a:r>
+          </a:p>
+        </p:txBody>
+      </p:sp>
+      <p:sp>
+        <p:nvSpPr>
+          <p:cNvPr id="58" name="TextBox 57"/>
+          <p:cNvSpPr txBox="1"/>
+          <p:nvPr/>
+        </p:nvSpPr>
+        <p:spPr>
+          <a:xfrm>
+            <a:off x="6172200" y="4297680"/>
+            <a:ext cx="2377440" cy="292608"/>
+          </a:xfrm>
+          <a:prstGeom prst="rect">
+            <a:avLst/>
+          </a:prstGeom>
+          <a:noFill/>
+        </p:spPr>
+        <p:txBody>
+          <a:bodyPr wrap="square" anchor="ctr" lIns="0" rIns="0" tIns="0" bIns="0">
+            <a:spAutoFit/>
+          </a:bodyPr>
+          <a:lstStyle/>
+          <a:p>
+            <a:pPr>
+              <a:spcAft>
+                <a:spcPts val="0"/>
+              </a:spcAft>
+            </a:pPr>
+            <a:r>
+              <a:rPr sz="1100">
+                <a:solidFill>
+                  <a:srgbClr val="0E2238"/>
+                </a:solidFill>
+                <a:latin typeface="Segoe UI Semibold"/>
+              </a:rPr>
+              <a:t>Option 4  </a:t>
+            </a:r>
+            <a:r>
+              <a:rPr sz="1100">
+                <a:solidFill>
+                  <a:srgbClr val="56677A"/>
+                </a:solidFill>
+                <a:latin typeface="Segoe UI"/>
+              </a:rPr>
+              <a:t>Action branching</a:t>
+            </a:r>
+          </a:p>
+        </p:txBody>
+      </p:sp>
+      <p:sp>
+        <p:nvSpPr>
+          <p:cNvPr id="59" name="Rounded Rectangle 58"/>
+          <p:cNvSpPr/>
+          <p:nvPr/>
+        </p:nvSpPr>
+        <p:spPr>
+          <a:xfrm>
+            <a:off x="8641080" y="4297680"/>
+            <a:ext cx="1179576" cy="274320"/>
+          </a:xfrm>
+          <a:prstGeom prst="roundRect">
+            <a:avLst>
+              <a:gd name="adj" fmla="val 20000"/>
+            </a:avLst>
+          </a:prstGeom>
+          <a:solidFill>
+            <a:srgbClr val="2A6FD1"/>
+          </a:solidFill>
+          <a:ln>
+            <a:noFill/>
+          </a:ln>
+          <a:effectLst/>
+        </p:spPr>
+        <p:style>
+          <a:lnRef idx="1">
+            <a:schemeClr val="accent1"/>
+          </a:lnRef>
+          <a:fillRef idx="3">
+            <a:schemeClr val="accent1"/>
+          </a:fillRef>
+          <a:effectRef idx="2">
+            <a:schemeClr val="accent1"/>
+          </a:effectRef>
+          <a:fontRef idx="minor">
+            <a:schemeClr val="lt1"/>
+          </a:fontRef>
+        </p:style>
+        <p:txBody>
+          <a:bodyPr rtlCol="0" anchor="ctr" wrap="square" lIns="45720" rIns="45720" tIns="0" bIns="0"/>
+          <a:lstStyle/>
+          <a:p>
+            <a:pPr algn="ctr"/>
+            <a:r>
+              <a:rPr sz="900">
+                <a:solidFill>
+                  <a:srgbClr val="FFFFFF"/>
+                </a:solidFill>
+                <a:latin typeface="Segoe UI"/>
+              </a:rPr>
+              <a:t>job</a:t>
+            </a:r>
+          </a:p>
+        </p:txBody>
+      </p:sp>
+      <p:sp>
+        <p:nvSpPr>
+          <p:cNvPr id="60" name="Rounded Rectangle 59"/>
+          <p:cNvSpPr/>
+          <p:nvPr/>
+        </p:nvSpPr>
+        <p:spPr>
+          <a:xfrm>
+            <a:off x="9875519" y="4297680"/>
+            <a:ext cx="1179576" cy="274320"/>
+          </a:xfrm>
+          <a:prstGeom prst="roundRect">
+            <a:avLst>
+              <a:gd name="adj" fmla="val 20000"/>
+            </a:avLst>
+          </a:prstGeom>
+          <a:solidFill>
+            <a:srgbClr val="2A6FD1"/>
+          </a:solidFill>
+          <a:ln>
+            <a:noFill/>
+          </a:ln>
+          <a:effectLst/>
+        </p:spPr>
+        <p:style>
+          <a:lnRef idx="1">
+            <a:schemeClr val="accent1"/>
+          </a:lnRef>
+          <a:fillRef idx="3">
+            <a:schemeClr val="accent1"/>
+          </a:fillRef>
+          <a:effectRef idx="2">
+            <a:schemeClr val="accent1"/>
+          </a:effectRef>
+          <a:fontRef idx="minor">
+            <a:schemeClr val="lt1"/>
+          </a:fontRef>
+        </p:style>
+        <p:txBody>
+          <a:bodyPr rtlCol="0" anchor="ctr" wrap="square" lIns="45720" rIns="45720" tIns="0" bIns="0"/>
+          <a:lstStyle/>
+          <a:p>
+            <a:pPr algn="ctr"/>
+            <a:r>
+              <a:rPr sz="900">
+                <a:solidFill>
+                  <a:srgbClr val="FFFFFF"/>
+                </a:solidFill>
+                <a:latin typeface="Segoe UI"/>
+              </a:rPr>
+              <a:t>machine</a:t>
+            </a:r>
+          </a:p>
+        </p:txBody>
+      </p:sp>
+      <p:sp>
+        <p:nvSpPr>
+          <p:cNvPr id="61" name="Rounded Rectangle 60"/>
+          <p:cNvSpPr/>
+          <p:nvPr/>
+        </p:nvSpPr>
+        <p:spPr>
+          <a:xfrm>
+            <a:off x="8641080" y="4636008"/>
+            <a:ext cx="128016" cy="128016"/>
+          </a:xfrm>
+          <a:prstGeom prst="roundRect">
+            <a:avLst>
+              <a:gd name="adj" fmla="val 30000"/>
+            </a:avLst>
+          </a:prstGeom>
+          <a:solidFill>
+            <a:srgbClr val="2A6FD1"/>
+          </a:solidFill>
+          <a:ln>
+            <a:noFill/>
+          </a:ln>
+          <a:effectLst/>
+        </p:spPr>
+        <p:style>
+          <a:lnRef idx="1">
+            <a:schemeClr val="accent1"/>
+          </a:lnRef>
+          <a:fillRef idx="3">
+            <a:schemeClr val="accent1"/>
+          </a:fillRef>
+          <a:effectRef idx="2">
+            <a:schemeClr val="accent1"/>
+          </a:effectRef>
+          <a:fontRef idx="minor">
+            <a:schemeClr val="lt1"/>
+          </a:fontRef>
+        </p:style>
+        <p:txBody>
+          <a:bodyPr rtlCol="0" anchor="ctr"/>
+          <a:lstStyle/>
+          <a:p>
+            <a:pPr algn="ctr"/>
+          </a:p>
+        </p:txBody>
+      </p:sp>
+      <p:sp>
+        <p:nvSpPr>
+          <p:cNvPr id="62" name="TextBox 61"/>
+          <p:cNvSpPr txBox="1"/>
+          <p:nvPr/>
+        </p:nvSpPr>
+        <p:spPr>
+          <a:xfrm>
+            <a:off x="8823960" y="4608576"/>
+            <a:ext cx="1280160" cy="182880"/>
+          </a:xfrm>
+          <a:prstGeom prst="rect">
+            <a:avLst/>
+          </a:prstGeom>
+          <a:noFill/>
+        </p:spPr>
+        <p:txBody>
+          <a:bodyPr wrap="square" anchor="t" lIns="0" rIns="0" tIns="0" bIns="0">
+            <a:spAutoFit/>
+          </a:bodyPr>
+          <a:lstStyle/>
+          <a:p>
+            <a:pPr>
+              <a:spcAft>
+                <a:spcPts val="400"/>
+              </a:spcAft>
+            </a:pPr>
+            <a:r>
+              <a:rPr sz="900">
+                <a:solidFill>
+                  <a:srgbClr val="56677A"/>
+                </a:solidFill>
+                <a:latin typeface="Segoe UI"/>
+              </a:rPr>
+              <a:t>chosen by the network</a:t>
+            </a:r>
+          </a:p>
+        </p:txBody>
+      </p:sp>
+      <p:sp>
+        <p:nvSpPr>
+          <p:cNvPr id="63" name="Rounded Rectangle 62"/>
+          <p:cNvSpPr/>
+          <p:nvPr/>
+        </p:nvSpPr>
+        <p:spPr>
+          <a:xfrm>
+            <a:off x="10104120" y="4636008"/>
+            <a:ext cx="128016" cy="128016"/>
+          </a:xfrm>
+          <a:prstGeom prst="roundRect">
+            <a:avLst>
+              <a:gd name="adj" fmla="val 30000"/>
+            </a:avLst>
+          </a:prstGeom>
+          <a:solidFill>
+            <a:srgbClr val="8793A1"/>
+          </a:solidFill>
+          <a:ln>
+            <a:noFill/>
+          </a:ln>
+          <a:effectLst/>
+        </p:spPr>
+        <p:style>
+          <a:lnRef idx="1">
+            <a:schemeClr val="accent1"/>
+          </a:lnRef>
+          <a:fillRef idx="3">
+            <a:schemeClr val="accent1"/>
+          </a:fillRef>
+          <a:effectRef idx="2">
+            <a:schemeClr val="accent1"/>
+          </a:effectRef>
+          <a:fontRef idx="minor">
+            <a:schemeClr val="lt1"/>
+          </a:fontRef>
+        </p:style>
+        <p:txBody>
+          <a:bodyPr rtlCol="0" anchor="ctr"/>
+          <a:lstStyle/>
+          <a:p>
+            <a:pPr algn="ctr"/>
+          </a:p>
+        </p:txBody>
+      </p:sp>
+      <p:sp>
+        <p:nvSpPr>
+          <p:cNvPr id="64" name="TextBox 63"/>
+          <p:cNvSpPr txBox="1"/>
+          <p:nvPr/>
+        </p:nvSpPr>
+        <p:spPr>
+          <a:xfrm>
+            <a:off x="10287000" y="4608576"/>
+            <a:ext cx="1280160" cy="182880"/>
+          </a:xfrm>
+          <a:prstGeom prst="rect">
+            <a:avLst/>
+          </a:prstGeom>
+          <a:noFill/>
+        </p:spPr>
+        <p:txBody>
+          <a:bodyPr wrap="square" anchor="t" lIns="0" rIns="0" tIns="0" bIns="0">
+            <a:spAutoFit/>
+          </a:bodyPr>
+          <a:lstStyle/>
+          <a:p>
+            <a:pPr>
+              <a:spcAft>
+                <a:spcPts val="400"/>
+              </a:spcAft>
+            </a:pPr>
+            <a:r>
+              <a:rPr sz="900">
+                <a:solidFill>
+                  <a:srgbClr val="56677A"/>
+                </a:solidFill>
+                <a:latin typeface="Segoe UI"/>
+              </a:rPr>
+              <a:t>chosen by a fixed rule</a:t>
             </a:r>
           </a:p>
         </p:txBody>

--- a/app/slides/Final_Presentation.pptx
+++ b/app/slides/Final_Presentation.pptx
@@ -369,7 +369,7 @@
           <a:lstStyle/>
           <a:p>
             <a:r>
-              <a:t>Left: what the schedulers try to minimise. The main objective is J, the sum over jobs of importance times lateness squared, so a few very late jobs cost more than many slightly late ones. The combined-objective tests added three more terms (linear lateness, the number of late jobs, energy) to ask whether RL does better when no single hand-made rule targets the objective. The three words underneath are the MDP: state, action, reward. Right: what was compared on the same 50 unseen test cases per setting. Classic methods are 49 dispatching heuristics (a priority rule that picks the next job plus a placement rule that picks the machine) and an exact solver, CP-SAT, which gives a proven bound. The RL schedulers were trained with PPO and A2C and differ in how much the network decides: Option 0 picks the job and machine directly; Option 1 only picks which dispatching rule to apply; Options 2 and 3 learn a priority for the next job and a fixed rule places it (Option 3 adds the ATC index as an input); Option 4 chooses job and machine with two separate output heads. Every design had the same tuning budget. Then the button: a toy version you can train yourself.</a:t>
+              <a:t>Left: what every scheduler tries to minimise, the whole combined objective. Squared lateness punishes a few very late jobs more than many slightly late ones; linear lateness, the number of late jobs and energy are the other goals, and the lambdas set how much each one counts. Every method was scored on the full objective, with the weights of each term varied, to ask when RL is competitive when no single hand-made rule targets all the goals. The three words underneath are the MDP: state, action, reward. Right: what was compared on the same 50 unseen test cases per setting. Classic methods are 49 dispatching heuristics (a priority rule that picks the next job plus a placement rule that picks the machine) and an exact solver, CP-SAT, which gives a proven bound. The RL schedulers were trained with PPO and A2C and differ in how much the network decides: Option 0 picks the job and machine directly; Option 1 only picks which dispatching rule to apply; Options 2 and 3 learn a priority for the next job and a fixed rule places it (Option 3 adds the ATC index as an input); Option 4 chooses job and machine with two separate output heads. Every design had the same tuning budget. Then the button: a toy version you can train yourself.</a:t>
             </a:r>
           </a:p>
         </p:txBody>
@@ -3505,7 +3505,7 @@
             </a:gs>
             <a:gs pos="100000">
               <a:schemeClr val="tx2">
-                <a:alpha val="39000"/>
+                <a:alpha val="22000"/>
                 <a:lumMod val="20000"/>
                 <a:lumOff val="80000"/>
               </a:schemeClr>
@@ -3705,15 +3705,11 @@
             </a:avLst>
           </a:prstGeom>
           <a:solidFill>
-            <a:srgbClr val="EEF4FC">
-              <a:alpha val="55000"/>
-            </a:srgbClr>
+            <a:srgbClr val="EEF4FC"/>
           </a:solidFill>
           <a:ln w="15875">
             <a:solidFill>
-              <a:srgbClr val="CBD9EE">
-                <a:alpha val="55000"/>
-              </a:srgbClr>
+              <a:srgbClr val="CBD9EE"/>
             </a:solidFill>
           </a:ln>
           <a:effectLst/>
@@ -5258,15 +5254,11 @@
             </a:avLst>
           </a:prstGeom>
           <a:solidFill>
-            <a:srgbClr val="EEF4FC">
-              <a:alpha val="55000"/>
-            </a:srgbClr>
+            <a:srgbClr val="EEF4FC"/>
           </a:solidFill>
           <a:ln w="15875">
             <a:solidFill>
-              <a:srgbClr val="EEF4FC">
-                <a:alpha val="55000"/>
-              </a:srgbClr>
+              <a:srgbClr val="EEF4FC"/>
             </a:solidFill>
           </a:ln>
           <a:effectLst/>
@@ -5878,8 +5870,8 @@
         </p:nvSpPr>
         <p:spPr>
           <a:xfrm>
-            <a:off x="868680" y="1993392"/>
-            <a:ext cx="4663440" cy="640080"/>
+            <a:off x="868680" y="2011680"/>
+            <a:ext cx="4754880" cy="365760"/>
           </a:xfrm>
           <a:prstGeom prst="rect">
             <a:avLst/>
@@ -5898,7 +5890,7 @@
               </a:spcAft>
             </a:pPr>
             <a:r>
-              <a:rPr sz="3200">
+              <a:rPr sz="2200">
                 <a:solidFill>
                   <a:srgbClr val="0E2238"/>
                 </a:solidFill>
@@ -5907,16 +5899,25 @@
               <a:t>J</a:t>
             </a:r>
             <a:r>
-              <a:rPr sz="3200">
+              <a:rPr sz="2200" baseline="-25000">
                 <a:solidFill>
                   <a:srgbClr val="0E2238"/>
                 </a:solidFill>
                 <a:latin typeface="Cambria Math"/>
               </a:rPr>
+              <a:t>λ</a:t>
+            </a:r>
+            <a:r>
+              <a:rPr sz="2200">
+                <a:solidFill>
+                  <a:srgbClr val="0E2238"/>
+                </a:solidFill>
+                <a:latin typeface="Cambria Math"/>
+              </a:rPr>
               <a:t> = Σ w</a:t>
             </a:r>
             <a:r>
-              <a:rPr sz="3200" baseline="-25000">
+              <a:rPr sz="2200" baseline="-25000">
                 <a:solidFill>
                   <a:srgbClr val="0E2238"/>
                 </a:solidFill>
@@ -5925,7 +5926,7 @@
               <a:t>j</a:t>
             </a:r>
             <a:r>
-              <a:rPr sz="3200">
+              <a:rPr sz="2200">
                 <a:solidFill>
                   <a:srgbClr val="0E2238"/>
                 </a:solidFill>
@@ -5934,7 +5935,7 @@
               <a:t> T</a:t>
             </a:r>
             <a:r>
-              <a:rPr sz="3200" baseline="-25000">
+              <a:rPr sz="2200" baseline="-25000">
                 <a:solidFill>
                   <a:srgbClr val="0E2238"/>
                 </a:solidFill>
@@ -5943,13 +5944,67 @@
               <a:t>j</a:t>
             </a:r>
             <a:r>
-              <a:rPr sz="3200" baseline="30000">
+              <a:rPr sz="2200" baseline="30000">
                 <a:solidFill>
                   <a:srgbClr val="0E2238"/>
                 </a:solidFill>
                 <a:latin typeface="Cambria Math"/>
               </a:rPr>
               <a:t>2</a:t>
+            </a:r>
+            <a:r>
+              <a:rPr sz="2200">
+                <a:solidFill>
+                  <a:srgbClr val="0E2238"/>
+                </a:solidFill>
+                <a:latin typeface="Cambria Math"/>
+              </a:rPr>
+              <a:t> + λ</a:t>
+            </a:r>
+            <a:r>
+              <a:rPr sz="2200" baseline="-25000">
+                <a:solidFill>
+                  <a:srgbClr val="0E2238"/>
+                </a:solidFill>
+                <a:latin typeface="Cambria Math"/>
+              </a:rPr>
+              <a:t>T</a:t>
+            </a:r>
+            <a:r>
+              <a:rPr sz="2200">
+                <a:solidFill>
+                  <a:srgbClr val="0E2238"/>
+                </a:solidFill>
+                <a:latin typeface="Cambria Math"/>
+              </a:rPr>
+              <a:t> Σ w</a:t>
+            </a:r>
+            <a:r>
+              <a:rPr sz="2200" baseline="-25000">
+                <a:solidFill>
+                  <a:srgbClr val="0E2238"/>
+                </a:solidFill>
+                <a:latin typeface="Cambria Math"/>
+              </a:rPr>
+              <a:t>j</a:t>
+            </a:r>
+            <a:r>
+              <a:rPr sz="2200">
+                <a:solidFill>
+                  <a:srgbClr val="0E2238"/>
+                </a:solidFill>
+                <a:latin typeface="Cambria Math"/>
+              </a:rPr>
+              <a:t> T</a:t>
+            </a:r>
+            <a:r>
+              <a:rPr sz="2200" baseline="-25000">
+                <a:solidFill>
+                  <a:srgbClr val="0E2238"/>
+                </a:solidFill>
+                <a:latin typeface="Cambria Math"/>
+              </a:rPr>
+              <a:t>j</a:t>
             </a:r>
           </a:p>
         </p:txBody>
@@ -5962,8 +6017,8 @@
         </p:nvSpPr>
         <p:spPr>
           <a:xfrm>
-            <a:off x="868680" y="2651760"/>
-            <a:ext cx="4709160" cy="502920"/>
+            <a:off x="868680" y="2423160"/>
+            <a:ext cx="4754880" cy="365760"/>
           </a:xfrm>
           <a:prstGeom prst="rect">
             <a:avLst/>
@@ -5982,22 +6037,85 @@
               </a:spcAft>
             </a:pPr>
             <a:r>
-              <a:rPr sz="1200">
-                <a:solidFill>
-                  <a:srgbClr val="56677A"/>
-                </a:solidFill>
-                <a:latin typeface="Segoe UI"/>
-              </a:rPr>
-              <a:t>Main objective: how late each job finishes, squared, </a:t>
-            </a:r>
-            <a:r>
-              <a:rPr sz="1200">
-                <a:solidFill>
-                  <a:srgbClr val="56677A"/>
-                </a:solidFill>
-                <a:latin typeface="Segoe UI"/>
-              </a:rPr>
-              <a:t>weighted by how important it is.</a:t>
+              <a:rPr sz="2200">
+                <a:solidFill>
+                  <a:srgbClr val="0E2238"/>
+                </a:solidFill>
+                <a:latin typeface="Cambria Math"/>
+              </a:rPr>
+              <a:t>      + λ</a:t>
+            </a:r>
+            <a:r>
+              <a:rPr sz="2200" baseline="-25000">
+                <a:solidFill>
+                  <a:srgbClr val="0E2238"/>
+                </a:solidFill>
+                <a:latin typeface="Cambria Math"/>
+              </a:rPr>
+              <a:t>U</a:t>
+            </a:r>
+            <a:r>
+              <a:rPr sz="2200">
+                <a:solidFill>
+                  <a:srgbClr val="0E2238"/>
+                </a:solidFill>
+                <a:latin typeface="Cambria Math"/>
+              </a:rPr>
+              <a:t> Σ w</a:t>
+            </a:r>
+            <a:r>
+              <a:rPr sz="2200" baseline="-25000">
+                <a:solidFill>
+                  <a:srgbClr val="0E2238"/>
+                </a:solidFill>
+                <a:latin typeface="Cambria Math"/>
+              </a:rPr>
+              <a:t>j</a:t>
+            </a:r>
+            <a:r>
+              <a:rPr sz="2200">
+                <a:solidFill>
+                  <a:srgbClr val="0E2238"/>
+                </a:solidFill>
+                <a:latin typeface="Cambria Math"/>
+              </a:rPr>
+              <a:t> U</a:t>
+            </a:r>
+            <a:r>
+              <a:rPr sz="2200" baseline="-25000">
+                <a:solidFill>
+                  <a:srgbClr val="0E2238"/>
+                </a:solidFill>
+                <a:latin typeface="Cambria Math"/>
+              </a:rPr>
+              <a:t>j</a:t>
+            </a:r>
+            <a:r>
+              <a:rPr sz="2200">
+                <a:solidFill>
+                  <a:srgbClr val="0E2238"/>
+                </a:solidFill>
+                <a:latin typeface="Cambria Math"/>
+              </a:rPr>
+              <a:t> + λ</a:t>
+            </a:r>
+            <a:r>
+              <a:rPr sz="2200" baseline="-25000">
+                <a:solidFill>
+                  <a:srgbClr val="0E2238"/>
+                </a:solidFill>
+                <a:latin typeface="Cambria Math"/>
+              </a:rPr>
+              <a:t>E</a:t>
+            </a:r>
+            <a:r>
+              <a:rPr sz="2200">
+                <a:solidFill>
+                  <a:srgbClr val="0E2238"/>
+                </a:solidFill>
+                <a:latin typeface="Cambria Math"/>
+              </a:rPr>
+              <a:t> E</a:t>
             </a:r>
           </a:p>
         </p:txBody>
@@ -6010,8 +6128,8 @@
         </p:nvSpPr>
         <p:spPr>
           <a:xfrm>
-            <a:off x="868680" y="3154680"/>
-            <a:ext cx="4663440" cy="228600"/>
+            <a:off x="868680" y="2852928"/>
+            <a:ext cx="1188720" cy="274320"/>
           </a:xfrm>
           <a:prstGeom prst="rect">
             <a:avLst/>
@@ -6026,17 +6144,17 @@
           <a:p>
             <a:pPr>
               <a:spcAft>
-                <a:spcPts val="400"/>
+                <a:spcPts val="0"/>
               </a:spcAft>
             </a:pPr>
             <a:r>
-              <a:rPr sz="950">
+              <a:rPr sz="1200">
                 <a:solidFill>
                   <a:srgbClr val="2A6FD1"/>
                 </a:solidFill>
-                <a:latin typeface="Segoe UI Semibold"/>
-              </a:rPr>
-              <a:t>ADDED IN THE COMBINED-OBJECTIVE TESTS</a:t>
+                <a:latin typeface="Cambria Math"/>
+              </a:rPr>
+              <a:t>Σ w T²</a:t>
             </a:r>
           </a:p>
         </p:txBody>
@@ -6049,8 +6167,8 @@
         </p:nvSpPr>
         <p:spPr>
           <a:xfrm>
-            <a:off x="868680" y="3383280"/>
-            <a:ext cx="4754880" cy="365760"/>
+            <a:off x="2103120" y="2852928"/>
+            <a:ext cx="3520440" cy="274320"/>
           </a:xfrm>
           <a:prstGeom prst="rect">
             <a:avLst/>
@@ -6065,161 +6183,17 @@
           <a:p>
             <a:pPr>
               <a:spcAft>
-                <a:spcPts val="400"/>
+                <a:spcPts val="0"/>
               </a:spcAft>
             </a:pPr>
             <a:r>
-              <a:rPr sz="1450">
-                <a:solidFill>
-                  <a:srgbClr val="0E2238"/>
-                </a:solidFill>
-                <a:latin typeface="Cambria Math"/>
-              </a:rPr>
-              <a:t>J</a:t>
-            </a:r>
-            <a:r>
-              <a:rPr sz="1450" baseline="-25000">
-                <a:solidFill>
-                  <a:srgbClr val="0E2238"/>
-                </a:solidFill>
-                <a:latin typeface="Cambria Math"/>
-              </a:rPr>
-              <a:t>λ</a:t>
-            </a:r>
-            <a:r>
-              <a:rPr sz="1450">
-                <a:solidFill>
-                  <a:srgbClr val="0E2238"/>
-                </a:solidFill>
-                <a:latin typeface="Cambria Math"/>
-              </a:rPr>
-              <a:t> = J + λ</a:t>
-            </a:r>
-            <a:r>
-              <a:rPr sz="1450" baseline="-25000">
-                <a:solidFill>
-                  <a:srgbClr val="0E2238"/>
-                </a:solidFill>
-                <a:latin typeface="Cambria Math"/>
-              </a:rPr>
-              <a:t>T</a:t>
-            </a:r>
-            <a:r>
-              <a:rPr sz="1450">
-                <a:solidFill>
-                  <a:srgbClr val="0E2238"/>
-                </a:solidFill>
-                <a:latin typeface="Cambria Math"/>
-              </a:rPr>
-              <a:t> Σ w</a:t>
-            </a:r>
-            <a:r>
-              <a:rPr sz="1450" baseline="-25000">
-                <a:solidFill>
-                  <a:srgbClr val="0E2238"/>
-                </a:solidFill>
-                <a:latin typeface="Cambria Math"/>
-              </a:rPr>
-              <a:t>j</a:t>
-            </a:r>
-            <a:r>
-              <a:rPr sz="1450">
-                <a:solidFill>
-                  <a:srgbClr val="0E2238"/>
-                </a:solidFill>
-                <a:latin typeface="Cambria Math"/>
-              </a:rPr>
-              <a:t> T</a:t>
-            </a:r>
-            <a:r>
-              <a:rPr sz="1450" baseline="-25000">
-                <a:solidFill>
-                  <a:srgbClr val="0E2238"/>
-                </a:solidFill>
-                <a:latin typeface="Cambria Math"/>
-              </a:rPr>
-              <a:t>j</a:t>
-            </a:r>
-            <a:r>
-              <a:rPr sz="1450">
-                <a:solidFill>
-                  <a:srgbClr val="0E2238"/>
-                </a:solidFill>
-                <a:latin typeface="Cambria Math"/>
-              </a:rPr>
-              <a:t> + λ</a:t>
-            </a:r>
-            <a:r>
-              <a:rPr sz="1450" baseline="-25000">
-                <a:solidFill>
-                  <a:srgbClr val="0E2238"/>
-                </a:solidFill>
-                <a:latin typeface="Cambria Math"/>
-              </a:rPr>
-              <a:t>U</a:t>
-            </a:r>
-            <a:r>
-              <a:rPr sz="1450">
-                <a:solidFill>
-                  <a:srgbClr val="0E2238"/>
-                </a:solidFill>
-                <a:latin typeface="Cambria Math"/>
-              </a:rPr>
-              <a:t> Σ w</a:t>
-            </a:r>
-            <a:r>
-              <a:rPr sz="1450" baseline="-25000">
-                <a:solidFill>
-                  <a:srgbClr val="0E2238"/>
-                </a:solidFill>
-                <a:latin typeface="Cambria Math"/>
-              </a:rPr>
-              <a:t>j</a:t>
-            </a:r>
-            <a:r>
-              <a:rPr sz="1450">
-                <a:solidFill>
-                  <a:srgbClr val="0E2238"/>
-                </a:solidFill>
-                <a:latin typeface="Cambria Math"/>
-              </a:rPr>
-              <a:t> U</a:t>
-            </a:r>
-            <a:r>
-              <a:rPr sz="1450" baseline="-25000">
-                <a:solidFill>
-                  <a:srgbClr val="0E2238"/>
-                </a:solidFill>
-                <a:latin typeface="Cambria Math"/>
-              </a:rPr>
-              <a:t>j</a:t>
-            </a:r>
-            <a:r>
-              <a:rPr sz="1450">
-                <a:solidFill>
-                  <a:srgbClr val="0E2238"/>
-                </a:solidFill>
-                <a:latin typeface="Cambria Math"/>
-              </a:rPr>
-              <a:t> + λ</a:t>
-            </a:r>
-            <a:r>
-              <a:rPr sz="1450" baseline="-25000">
-                <a:solidFill>
-                  <a:srgbClr val="0E2238"/>
-                </a:solidFill>
-                <a:latin typeface="Cambria Math"/>
-              </a:rPr>
-              <a:t>E</a:t>
-            </a:r>
-            <a:r>
-              <a:rPr sz="1450">
-                <a:solidFill>
-                  <a:srgbClr val="0E2238"/>
-                </a:solidFill>
-                <a:latin typeface="Cambria Math"/>
-              </a:rPr>
-              <a:t> E</a:t>
+              <a:rPr sz="1050">
+                <a:solidFill>
+                  <a:srgbClr val="56677A"/>
+                </a:solidFill>
+                <a:latin typeface="Segoe UI"/>
+              </a:rPr>
+              <a:t>lateness squared, weighted by importance</a:t>
             </a:r>
           </a:p>
         </p:txBody>
@@ -6232,8 +6206,8 @@
         </p:nvSpPr>
         <p:spPr>
           <a:xfrm>
-            <a:off x="868680" y="3749039"/>
-            <a:ext cx="4709160" cy="548640"/>
+            <a:off x="868680" y="3127248"/>
+            <a:ext cx="1188720" cy="274320"/>
           </a:xfrm>
           <a:prstGeom prst="rect">
             <a:avLst/>
@@ -6248,11 +6222,245 @@
           <a:p>
             <a:pPr>
               <a:spcAft>
-                <a:spcPts val="200"/>
+                <a:spcPts val="0"/>
               </a:spcAft>
             </a:pPr>
             <a:r>
-              <a:rPr sz="1100">
+              <a:rPr sz="1200">
+                <a:solidFill>
+                  <a:srgbClr val="2A6FD1"/>
+                </a:solidFill>
+                <a:latin typeface="Cambria Math"/>
+              </a:rPr>
+              <a:t>λT Σ w T</a:t>
+            </a:r>
+          </a:p>
+        </p:txBody>
+      </p:sp>
+      <p:sp>
+        <p:nvSpPr>
+          <p:cNvPr id="36" name="TextBox 35"/>
+          <p:cNvSpPr txBox="1"/>
+          <p:nvPr/>
+        </p:nvSpPr>
+        <p:spPr>
+          <a:xfrm>
+            <a:off x="2103120" y="3127248"/>
+            <a:ext cx="3520440" cy="274320"/>
+          </a:xfrm>
+          <a:prstGeom prst="rect">
+            <a:avLst/>
+          </a:prstGeom>
+          <a:noFill/>
+        </p:spPr>
+        <p:txBody>
+          <a:bodyPr wrap="square" anchor="t" lIns="0" rIns="0" tIns="0" bIns="0">
+            <a:spAutoFit/>
+          </a:bodyPr>
+          <a:lstStyle/>
+          <a:p>
+            <a:pPr>
+              <a:spcAft>
+                <a:spcPts val="0"/>
+              </a:spcAft>
+            </a:pPr>
+            <a:r>
+              <a:rPr sz="1050">
+                <a:solidFill>
+                  <a:srgbClr val="56677A"/>
+                </a:solidFill>
+                <a:latin typeface="Segoe UI"/>
+              </a:rPr>
+              <a:t>lateness itself, weighted by importance</a:t>
+            </a:r>
+          </a:p>
+        </p:txBody>
+      </p:sp>
+      <p:sp>
+        <p:nvSpPr>
+          <p:cNvPr id="37" name="TextBox 36"/>
+          <p:cNvSpPr txBox="1"/>
+          <p:nvPr/>
+        </p:nvSpPr>
+        <p:spPr>
+          <a:xfrm>
+            <a:off x="868680" y="3401568"/>
+            <a:ext cx="1188720" cy="274320"/>
+          </a:xfrm>
+          <a:prstGeom prst="rect">
+            <a:avLst/>
+          </a:prstGeom>
+          <a:noFill/>
+        </p:spPr>
+        <p:txBody>
+          <a:bodyPr wrap="square" anchor="t" lIns="0" rIns="0" tIns="0" bIns="0">
+            <a:spAutoFit/>
+          </a:bodyPr>
+          <a:lstStyle/>
+          <a:p>
+            <a:pPr>
+              <a:spcAft>
+                <a:spcPts val="0"/>
+              </a:spcAft>
+            </a:pPr>
+            <a:r>
+              <a:rPr sz="1200">
+                <a:solidFill>
+                  <a:srgbClr val="2A6FD1"/>
+                </a:solidFill>
+                <a:latin typeface="Cambria Math"/>
+              </a:rPr>
+              <a:t>λU Σ w U</a:t>
+            </a:r>
+          </a:p>
+        </p:txBody>
+      </p:sp>
+      <p:sp>
+        <p:nvSpPr>
+          <p:cNvPr id="38" name="TextBox 37"/>
+          <p:cNvSpPr txBox="1"/>
+          <p:nvPr/>
+        </p:nvSpPr>
+        <p:spPr>
+          <a:xfrm>
+            <a:off x="2103120" y="3401568"/>
+            <a:ext cx="3520440" cy="274320"/>
+          </a:xfrm>
+          <a:prstGeom prst="rect">
+            <a:avLst/>
+          </a:prstGeom>
+          <a:noFill/>
+        </p:spPr>
+        <p:txBody>
+          <a:bodyPr wrap="square" anchor="t" lIns="0" rIns="0" tIns="0" bIns="0">
+            <a:spAutoFit/>
+          </a:bodyPr>
+          <a:lstStyle/>
+          <a:p>
+            <a:pPr>
+              <a:spcAft>
+                <a:spcPts val="0"/>
+              </a:spcAft>
+            </a:pPr>
+            <a:r>
+              <a:rPr sz="1050">
+                <a:solidFill>
+                  <a:srgbClr val="56677A"/>
+                </a:solidFill>
+                <a:latin typeface="Segoe UI"/>
+              </a:rPr>
+              <a:t>how many jobs finish late (deadlines missed)</a:t>
+            </a:r>
+          </a:p>
+        </p:txBody>
+      </p:sp>
+      <p:sp>
+        <p:nvSpPr>
+          <p:cNvPr id="39" name="TextBox 38"/>
+          <p:cNvSpPr txBox="1"/>
+          <p:nvPr/>
+        </p:nvSpPr>
+        <p:spPr>
+          <a:xfrm>
+            <a:off x="868680" y="3675887"/>
+            <a:ext cx="1188720" cy="274320"/>
+          </a:xfrm>
+          <a:prstGeom prst="rect">
+            <a:avLst/>
+          </a:prstGeom>
+          <a:noFill/>
+        </p:spPr>
+        <p:txBody>
+          <a:bodyPr wrap="square" anchor="t" lIns="0" rIns="0" tIns="0" bIns="0">
+            <a:spAutoFit/>
+          </a:bodyPr>
+          <a:lstStyle/>
+          <a:p>
+            <a:pPr>
+              <a:spcAft>
+                <a:spcPts val="0"/>
+              </a:spcAft>
+            </a:pPr>
+            <a:r>
+              <a:rPr sz="1200">
+                <a:solidFill>
+                  <a:srgbClr val="2A6FD1"/>
+                </a:solidFill>
+                <a:latin typeface="Cambria Math"/>
+              </a:rPr>
+              <a:t>λE E</a:t>
+            </a:r>
+          </a:p>
+        </p:txBody>
+      </p:sp>
+      <p:sp>
+        <p:nvSpPr>
+          <p:cNvPr id="40" name="TextBox 39"/>
+          <p:cNvSpPr txBox="1"/>
+          <p:nvPr/>
+        </p:nvSpPr>
+        <p:spPr>
+          <a:xfrm>
+            <a:off x="2103120" y="3675887"/>
+            <a:ext cx="3520440" cy="274320"/>
+          </a:xfrm>
+          <a:prstGeom prst="rect">
+            <a:avLst/>
+          </a:prstGeom>
+          <a:noFill/>
+        </p:spPr>
+        <p:txBody>
+          <a:bodyPr wrap="square" anchor="t" lIns="0" rIns="0" tIns="0" bIns="0">
+            <a:spAutoFit/>
+          </a:bodyPr>
+          <a:lstStyle/>
+          <a:p>
+            <a:pPr>
+              <a:spcAft>
+                <a:spcPts val="0"/>
+              </a:spcAft>
+            </a:pPr>
+            <a:r>
+              <a:rPr sz="1050">
+                <a:solidFill>
+                  <a:srgbClr val="56677A"/>
+                </a:solidFill>
+                <a:latin typeface="Segoe UI"/>
+              </a:rPr>
+              <a:t>energy: how long machines are switched on</a:t>
+            </a:r>
+          </a:p>
+        </p:txBody>
+      </p:sp>
+      <p:sp>
+        <p:nvSpPr>
+          <p:cNvPr id="41" name="TextBox 40"/>
+          <p:cNvSpPr txBox="1"/>
+          <p:nvPr/>
+        </p:nvSpPr>
+        <p:spPr>
+          <a:xfrm>
+            <a:off x="868680" y="3959352"/>
+            <a:ext cx="4754880" cy="274320"/>
+          </a:xfrm>
+          <a:prstGeom prst="rect">
+            <a:avLst/>
+          </a:prstGeom>
+          <a:noFill/>
+        </p:spPr>
+        <p:txBody>
+          <a:bodyPr wrap="square" anchor="t" lIns="0" rIns="0" tIns="0" bIns="0">
+            <a:spAutoFit/>
+          </a:bodyPr>
+          <a:lstStyle/>
+          <a:p>
+            <a:pPr>
+              <a:spcAft>
+                <a:spcPts val="0"/>
+              </a:spcAft>
+            </a:pPr>
+            <a:r>
+              <a:rPr sz="1050">
                 <a:solidFill>
                   <a:srgbClr val="0E2238"/>
                 </a:solidFill>
@@ -6261,7 +6469,7 @@
               <a:t>T</a:t>
             </a:r>
             <a:r>
-              <a:rPr sz="1100" baseline="-25000">
+              <a:rPr sz="1050" baseline="-25000">
                 <a:solidFill>
                   <a:srgbClr val="0E2238"/>
                 </a:solidFill>
@@ -6270,25 +6478,52 @@
               <a:t>j</a:t>
             </a:r>
             <a:r>
+              <a:rPr sz="950">
+                <a:solidFill>
+                  <a:srgbClr val="56677A"/>
+                </a:solidFill>
+                <a:latin typeface="Segoe UI"/>
+              </a:rPr>
+              <a:t> = how late job j finishes   </a:t>
+            </a:r>
+            <a:r>
               <a:rPr sz="1050">
                 <a:solidFill>
+                  <a:srgbClr val="0E2238"/>
+                </a:solidFill>
+                <a:latin typeface="Cambria Math"/>
+              </a:rPr>
+              <a:t>U</a:t>
+            </a:r>
+            <a:r>
+              <a:rPr sz="1050" baseline="-25000">
+                <a:solidFill>
+                  <a:srgbClr val="0E2238"/>
+                </a:solidFill>
+                <a:latin typeface="Cambria Math"/>
+              </a:rPr>
+              <a:t>j</a:t>
+            </a:r>
+            <a:r>
+              <a:rPr sz="950">
+                <a:solidFill>
                   <a:srgbClr val="56677A"/>
                 </a:solidFill>
                 <a:latin typeface="Segoe UI"/>
               </a:rPr>
-              <a:t> = how late job j finishes (0 if on time)   </a:t>
-            </a:r>
-            <a:r>
-              <a:rPr sz="1100">
+              <a:t> = 1 if late   </a:t>
+            </a:r>
+            <a:r>
+              <a:rPr sz="1050">
                 <a:solidFill>
                   <a:srgbClr val="0E2238"/>
                 </a:solidFill>
                 <a:latin typeface="Cambria Math"/>
               </a:rPr>
-              <a:t>U</a:t>
-            </a:r>
-            <a:r>
-              <a:rPr sz="1100" baseline="-25000">
+              <a:t>w</a:t>
+            </a:r>
+            <a:r>
+              <a:rPr sz="1050" baseline="-25000">
                 <a:solidFill>
                   <a:srgbClr val="0E2238"/>
                 </a:solidFill>
@@ -6297,65 +6532,38 @@
               <a:t>j</a:t>
             </a:r>
             <a:r>
+              <a:rPr sz="950">
+                <a:solidFill>
+                  <a:srgbClr val="56677A"/>
+                </a:solidFill>
+                <a:latin typeface="Segoe UI"/>
+              </a:rPr>
+              <a:t> = importance   </a:t>
+            </a:r>
+            <a:r>
               <a:rPr sz="1050">
                 <a:solidFill>
+                  <a:srgbClr val="0E2238"/>
+                </a:solidFill>
+                <a:latin typeface="Cambria Math"/>
+              </a:rPr>
+              <a:t>λ</a:t>
+            </a:r>
+            <a:r>
+              <a:rPr sz="950">
+                <a:solidFill>
                   <a:srgbClr val="56677A"/>
                 </a:solidFill>
                 <a:latin typeface="Segoe UI"/>
               </a:rPr>
-              <a:t> = 1 if it is late   </a:t>
-            </a:r>
-            <a:r>
-              <a:rPr sz="1100">
-                <a:solidFill>
-                  <a:srgbClr val="0E2238"/>
-                </a:solidFill>
-                <a:latin typeface="Cambria Math"/>
-              </a:rPr>
-              <a:t>w</a:t>
-            </a:r>
-            <a:r>
-              <a:rPr sz="1100" baseline="-25000">
-                <a:solidFill>
-                  <a:srgbClr val="0E2238"/>
-                </a:solidFill>
-                <a:latin typeface="Cambria Math"/>
-              </a:rPr>
-              <a:t>j</a:t>
-            </a:r>
-            <a:r>
-              <a:rPr sz="1050">
-                <a:solidFill>
-                  <a:srgbClr val="56677A"/>
-                </a:solidFill>
-                <a:latin typeface="Segoe UI"/>
-              </a:rPr>
-              <a:t> = its importance   </a:t>
-            </a:r>
-            <a:r>
-              <a:rPr sz="1100">
-                <a:solidFill>
-                  <a:srgbClr val="0E2238"/>
-                </a:solidFill>
-                <a:latin typeface="Cambria Math"/>
-              </a:rPr>
-              <a:t>E</a:t>
-            </a:r>
-            <a:r>
-              <a:rPr sz="1050">
-                <a:solidFill>
-                  <a:srgbClr val="56677A"/>
-                </a:solidFill>
-                <a:latin typeface="Segoe UI"/>
-              </a:rPr>
-              <a:t> = energy (machine-time switched on)</a:t>
-            </a:r>
-          </a:p>
-        </p:txBody>
-      </p:sp>
-      <p:sp>
-        <p:nvSpPr>
-          <p:cNvPr id="36" name="Rectangle 35"/>
+              <a:t> = weight of each goal</a:t>
+            </a:r>
+          </a:p>
+        </p:txBody>
+      </p:sp>
+      <p:sp>
+        <p:nvSpPr>
+          <p:cNvPr id="42" name="Rectangle 41"/>
           <p:cNvSpPr/>
           <p:nvPr/>
         </p:nvSpPr>
@@ -6399,7 +6607,7 @@
       </p:sp>
       <p:sp>
         <p:nvSpPr>
-          <p:cNvPr id="37" name="TextBox 36"/>
+          <p:cNvPr id="43" name="TextBox 42"/>
           <p:cNvSpPr txBox="1"/>
           <p:nvPr/>
         </p:nvSpPr>
@@ -6454,7 +6662,7 @@
       </p:sp>
       <p:sp>
         <p:nvSpPr>
-          <p:cNvPr id="38" name="TextBox 37"/>
+          <p:cNvPr id="44" name="TextBox 43"/>
           <p:cNvSpPr txBox="1"/>
           <p:nvPr/>
         </p:nvSpPr>
@@ -6509,7 +6717,7 @@
       </p:sp>
       <p:sp>
         <p:nvSpPr>
-          <p:cNvPr id="39" name="TextBox 38"/>
+          <p:cNvPr id="45" name="TextBox 44"/>
           <p:cNvSpPr txBox="1"/>
           <p:nvPr/>
         </p:nvSpPr>
@@ -6564,7 +6772,7 @@
       </p:sp>
       <p:sp>
         <p:nvSpPr>
-          <p:cNvPr id="40" name="Rounded Rectangle 39"/>
+          <p:cNvPr id="46" name="Rounded Rectangle 45"/>
           <p:cNvSpPr/>
           <p:nvPr/>
         </p:nvSpPr>
@@ -6612,7 +6820,7 @@
       </p:sp>
       <p:sp>
         <p:nvSpPr>
-          <p:cNvPr id="41" name="TextBox 40"/>
+          <p:cNvPr id="47" name="TextBox 46"/>
           <p:cNvSpPr txBox="1"/>
           <p:nvPr/>
         </p:nvSpPr>
@@ -6651,7 +6859,7 @@
       </p:sp>
       <p:sp>
         <p:nvSpPr>
-          <p:cNvPr id="42" name="Rounded Rectangle 41"/>
+          <p:cNvPr id="48" name="Rounded Rectangle 47"/>
           <p:cNvSpPr/>
           <p:nvPr/>
         </p:nvSpPr>
@@ -6699,7 +6907,7 @@
       </p:sp>
       <p:sp>
         <p:nvSpPr>
-          <p:cNvPr id="43" name="TextBox 42"/>
+          <p:cNvPr id="49" name="TextBox 48"/>
           <p:cNvSpPr txBox="1"/>
           <p:nvPr/>
         </p:nvSpPr>
@@ -6754,7 +6962,7 @@
       </p:sp>
       <p:sp>
         <p:nvSpPr>
-          <p:cNvPr id="44" name="Rounded Rectangle 43"/>
+          <p:cNvPr id="50" name="Rounded Rectangle 49"/>
           <p:cNvSpPr/>
           <p:nvPr/>
         </p:nvSpPr>
@@ -6802,7 +7010,7 @@
       </p:sp>
       <p:sp>
         <p:nvSpPr>
-          <p:cNvPr id="45" name="TextBox 44"/>
+          <p:cNvPr id="51" name="TextBox 50"/>
           <p:cNvSpPr txBox="1"/>
           <p:nvPr/>
         </p:nvSpPr>
@@ -6857,7 +7065,7 @@
       </p:sp>
       <p:sp>
         <p:nvSpPr>
-          <p:cNvPr id="46" name="TextBox 45"/>
+          <p:cNvPr id="52" name="TextBox 51"/>
           <p:cNvSpPr txBox="1"/>
           <p:nvPr/>
         </p:nvSpPr>
@@ -6896,7 +7104,7 @@
       </p:sp>
       <p:sp>
         <p:nvSpPr>
-          <p:cNvPr id="47" name="TextBox 46"/>
+          <p:cNvPr id="53" name="TextBox 52"/>
           <p:cNvSpPr txBox="1"/>
           <p:nvPr/>
         </p:nvSpPr>
@@ -6944,7 +7152,7 @@
       </p:sp>
       <p:sp>
         <p:nvSpPr>
-          <p:cNvPr id="48" name="Rounded Rectangle 47"/>
+          <p:cNvPr id="54" name="Rounded Rectangle 53"/>
           <p:cNvSpPr/>
           <p:nvPr/>
         </p:nvSpPr>
@@ -6999,7 +7207,7 @@
       </p:sp>
       <p:sp>
         <p:nvSpPr>
-          <p:cNvPr id="49" name="TextBox 48"/>
+          <p:cNvPr id="55" name="TextBox 54"/>
           <p:cNvSpPr txBox="1"/>
           <p:nvPr/>
         </p:nvSpPr>
@@ -7047,7 +7255,7 @@
       </p:sp>
       <p:sp>
         <p:nvSpPr>
-          <p:cNvPr id="50" name="Rounded Rectangle 49"/>
+          <p:cNvPr id="56" name="Rounded Rectangle 55"/>
           <p:cNvSpPr/>
           <p:nvPr/>
         </p:nvSpPr>
@@ -7102,7 +7310,7 @@
       </p:sp>
       <p:sp>
         <p:nvSpPr>
-          <p:cNvPr id="51" name="Rounded Rectangle 50"/>
+          <p:cNvPr id="57" name="Rounded Rectangle 56"/>
           <p:cNvSpPr/>
           <p:nvPr/>
         </p:nvSpPr>
@@ -7157,7 +7365,7 @@
       </p:sp>
       <p:sp>
         <p:nvSpPr>
-          <p:cNvPr id="52" name="TextBox 51"/>
+          <p:cNvPr id="58" name="TextBox 57"/>
           <p:cNvSpPr txBox="1"/>
           <p:nvPr/>
         </p:nvSpPr>
@@ -7205,7 +7413,7 @@
       </p:sp>
       <p:sp>
         <p:nvSpPr>
-          <p:cNvPr id="53" name="Rounded Rectangle 52"/>
+          <p:cNvPr id="59" name="Rounded Rectangle 58"/>
           <p:cNvSpPr/>
           <p:nvPr/>
         </p:nvSpPr>
@@ -7260,7 +7468,7 @@
       </p:sp>
       <p:sp>
         <p:nvSpPr>
-          <p:cNvPr id="54" name="Rounded Rectangle 53"/>
+          <p:cNvPr id="60" name="Rounded Rectangle 59"/>
           <p:cNvSpPr/>
           <p:nvPr/>
         </p:nvSpPr>
@@ -7315,7 +7523,7 @@
       </p:sp>
       <p:sp>
         <p:nvSpPr>
-          <p:cNvPr id="55" name="TextBox 54"/>
+          <p:cNvPr id="61" name="TextBox 60"/>
           <p:cNvSpPr txBox="1"/>
           <p:nvPr/>
         </p:nvSpPr>
@@ -7363,7 +7571,7 @@
       </p:sp>
       <p:sp>
         <p:nvSpPr>
-          <p:cNvPr id="56" name="Rounded Rectangle 55"/>
+          <p:cNvPr id="62" name="Rounded Rectangle 61"/>
           <p:cNvSpPr/>
           <p:nvPr/>
         </p:nvSpPr>
@@ -7418,7 +7626,7 @@
       </p:sp>
       <p:sp>
         <p:nvSpPr>
-          <p:cNvPr id="57" name="Rounded Rectangle 56"/>
+          <p:cNvPr id="63" name="Rounded Rectangle 62"/>
           <p:cNvSpPr/>
           <p:nvPr/>
         </p:nvSpPr>
@@ -7473,7 +7681,7 @@
       </p:sp>
       <p:sp>
         <p:nvSpPr>
-          <p:cNvPr id="58" name="TextBox 57"/>
+          <p:cNvPr id="64" name="TextBox 63"/>
           <p:cNvSpPr txBox="1"/>
           <p:nvPr/>
         </p:nvSpPr>
@@ -7521,7 +7729,7 @@
       </p:sp>
       <p:sp>
         <p:nvSpPr>
-          <p:cNvPr id="59" name="Rounded Rectangle 58"/>
+          <p:cNvPr id="65" name="Rounded Rectangle 64"/>
           <p:cNvSpPr/>
           <p:nvPr/>
         </p:nvSpPr>
@@ -7576,7 +7784,7 @@
       </p:sp>
       <p:sp>
         <p:nvSpPr>
-          <p:cNvPr id="60" name="Rounded Rectangle 59"/>
+          <p:cNvPr id="66" name="Rounded Rectangle 65"/>
           <p:cNvSpPr/>
           <p:nvPr/>
         </p:nvSpPr>
@@ -7631,7 +7839,7 @@
       </p:sp>
       <p:sp>
         <p:nvSpPr>
-          <p:cNvPr id="61" name="Rounded Rectangle 60"/>
+          <p:cNvPr id="67" name="Rounded Rectangle 66"/>
           <p:cNvSpPr/>
           <p:nvPr/>
         </p:nvSpPr>
@@ -7677,7 +7885,7 @@
       </p:sp>
       <p:sp>
         <p:nvSpPr>
-          <p:cNvPr id="62" name="TextBox 61"/>
+          <p:cNvPr id="68" name="TextBox 67"/>
           <p:cNvSpPr txBox="1"/>
           <p:nvPr/>
         </p:nvSpPr>
@@ -7716,7 +7924,7 @@
       </p:sp>
       <p:sp>
         <p:nvSpPr>
-          <p:cNvPr id="63" name="Rounded Rectangle 62"/>
+          <p:cNvPr id="69" name="Rounded Rectangle 68"/>
           <p:cNvSpPr/>
           <p:nvPr/>
         </p:nvSpPr>
@@ -7762,7 +7970,7 @@
       </p:sp>
       <p:sp>
         <p:nvSpPr>
-          <p:cNvPr id="64" name="TextBox 63"/>
+          <p:cNvPr id="70" name="TextBox 69"/>
           <p:cNvSpPr txBox="1"/>
           <p:nvPr/>
         </p:nvSpPr>

--- a/app/slides/Final_Presentation.pptx
+++ b/app/slides/Final_Presentation.pptx
@@ -3505,7 +3505,7 @@
             </a:gs>
             <a:gs pos="100000">
               <a:schemeClr val="tx2">
-                <a:alpha val="22000"/>
+                <a:alpha val="8000"/>
                 <a:lumMod val="20000"/>
                 <a:lumOff val="80000"/>
               </a:schemeClr>

--- a/app/slides/Final_Presentation.pptx
+++ b/app/slides/Final_Presentation.pptx
@@ -3493,15 +3493,15 @@
           <a:gsLst>
             <a:gs pos="0">
               <a:schemeClr val="accent1">
-                <a:lumMod val="5000"/>
-                <a:lumOff val="95000"/>
+                <a:lumMod val="2000"/>
+                <a:lumOff val="98000"/>
               </a:schemeClr>
             </a:gs>
             <a:gs pos="30266">
-              <a:srgbClr val="ECF2FA"/>
+              <a:srgbClr val="F7FAFD"/>
             </a:gs>
             <a:gs pos="17000">
-              <a:srgbClr val="EAF1F9"/>
+              <a:srgbClr val="F7F9FD"/>
             </a:gs>
             <a:gs pos="100000">
               <a:schemeClr val="tx2">

--- a/app/slides/Final_Presentation.pptx
+++ b/app/slides/Final_Presentation.pptx
@@ -3638,13 +3638,31 @@
               </a:spcAft>
             </a:pPr>
             <a:r>
-              <a:rPr sz="1000">
+              <a:rPr sz="1000" dirty="0">
                 <a:solidFill>
                   <a:srgbClr val="56677A"/>
                 </a:solidFill>
                 <a:latin typeface="Segoe UI"/>
               </a:rPr>
-              <a:t>Ethan Ty Riekert  |  Curtin University  |  Supervisors: Elham Mardaneh, Tony Mathew</a:t>
+              <a:t>Ethan Ty Riekert  |  Curtin University  |  Supervisors: Elham </a:t>
+            </a:r>
+            <a:r>
+              <a:rPr sz="1000" dirty="0" err="1">
+                <a:solidFill>
+                  <a:srgbClr val="56677A"/>
+                </a:solidFill>
+                <a:latin typeface="Segoe UI"/>
+              </a:rPr>
+              <a:t>Mardaneh</a:t>
+            </a:r>
+            <a:r>
+              <a:rPr sz="1000" dirty="0">
+                <a:solidFill>
+                  <a:srgbClr val="56677A"/>
+                </a:solidFill>
+                <a:latin typeface="Segoe UI"/>
+              </a:rPr>
+              <a:t>, Tony Mathew</a:t>
             </a:r>
           </a:p>
         </p:txBody>
@@ -4992,14 +5010,20 @@
               </a:spcAft>
             </a:pPr>
             <a:r>
-              <a:rPr sz="1300" dirty="0">
+              <a:rPr lang="en-AU" sz="1300" dirty="0">
                 <a:solidFill>
                   <a:srgbClr val="56677A"/>
                 </a:solidFill>
                 <a:latin typeface="Segoe UI"/>
               </a:rPr>
-              <a:t>A schedule: each block is a job on a machine. Orange jobs finish late.</a:t>
-            </a:r>
+              <a:t>A job-machine schedule over time. Orange means finishes late</a:t>
+            </a:r>
+            <a:endParaRPr sz="1300" dirty="0">
+              <a:solidFill>
+                <a:srgbClr val="56677A"/>
+              </a:solidFill>
+              <a:latin typeface="Segoe UI"/>
+            </a:endParaRPr>
           </a:p>
         </p:txBody>
       </p:sp>
@@ -5012,7 +5036,7 @@
         <p:spPr>
           <a:xfrm>
             <a:off x="7406640" y="1784927"/>
-            <a:ext cx="4114800" cy="685800"/>
+            <a:ext cx="4114800" cy="738664"/>
           </a:xfrm>
           <a:prstGeom prst="rect">
             <a:avLst/>
@@ -5031,11 +5055,11 @@
               </a:spcAft>
             </a:pPr>
             <a:r>
-              <a:rPr sz="3800">
+              <a:rPr sz="4800" b="1" dirty="0">
                 <a:solidFill>
                   <a:srgbClr val="2A6FD1"/>
                 </a:solidFill>
-                <a:latin typeface="Segoe UI Semibold"/>
+                <a:latin typeface="Amasis MT Pro Medium" panose="02040604050005020304" pitchFamily="18" charset="0"/>
               </a:rPr>
               <a:t>94%</a:t>
             </a:r>
@@ -5070,7 +5094,7 @@
               </a:spcAft>
             </a:pPr>
             <a:r>
-              <a:rPr sz="1400">
+              <a:rPr sz="1400" dirty="0">
                 <a:solidFill>
                   <a:srgbClr val="56677A"/>
                 </a:solidFill>
@@ -5090,7 +5114,7 @@
         <p:spPr>
           <a:xfrm>
             <a:off x="7406640" y="2882207"/>
-            <a:ext cx="4114800" cy="685800"/>
+            <a:ext cx="4114800" cy="738664"/>
           </a:xfrm>
           <a:prstGeom prst="rect">
             <a:avLst/>
@@ -5109,11 +5133,11 @@
               </a:spcAft>
             </a:pPr>
             <a:r>
-              <a:rPr sz="3800">
+              <a:rPr sz="4800" b="1" dirty="0">
                 <a:solidFill>
                   <a:srgbClr val="E0702A"/>
                 </a:solidFill>
-                <a:latin typeface="Segoe UI Semibold"/>
+                <a:latin typeface="Amasis MT Pro Medium" panose="02040604050005020304" pitchFamily="18" charset="0"/>
               </a:rPr>
               <a:t>$8,000 / min</a:t>
             </a:r>
@@ -5168,7 +5192,7 @@
         <p:spPr>
           <a:xfrm>
             <a:off x="7406640" y="3979487"/>
-            <a:ext cx="4114800" cy="685800"/>
+            <a:ext cx="4114800" cy="738664"/>
           </a:xfrm>
           <a:prstGeom prst="rect">
             <a:avLst/>
@@ -5187,11 +5211,11 @@
               </a:spcAft>
             </a:pPr>
             <a:r>
-              <a:rPr sz="3800">
+              <a:rPr sz="4800" b="1" dirty="0">
                 <a:solidFill>
                   <a:srgbClr val="2A6FD1"/>
                 </a:solidFill>
-                <a:latin typeface="Segoe UI Semibold"/>
+                <a:latin typeface="Amasis MT Pro Medium" panose="02040604050005020304" pitchFamily="18" charset="0"/>
               </a:rPr>
               <a:t>$1.7 trillion</a:t>
             </a:r>
@@ -5454,6 +5478,61 @@
       </p:grpSpPr>
       <p:sp>
         <p:nvSpPr>
+          <p:cNvPr id="13" name="Rounded Rectangle 40">
+            <a:extLst>
+              <a:ext uri="{FF2B5EF4-FFF2-40B4-BE49-F238E27FC236}">
+                <a16:creationId xmlns:a16="http://schemas.microsoft.com/office/drawing/2014/main" id="{88003689-D97D-2E6C-CDCE-ADC9492AC5DC}"/>
+              </a:ext>
+            </a:extLst>
+          </p:cNvPr>
+          <p:cNvSpPr/>
+          <p:nvPr/>
+        </p:nvSpPr>
+        <p:spPr>
+          <a:xfrm>
+            <a:off x="640080" y="4631726"/>
+            <a:ext cx="10637520" cy="397248"/>
+          </a:xfrm>
+          <a:prstGeom prst="roundRect">
+            <a:avLst>
+              <a:gd name="adj" fmla="val 4000"/>
+            </a:avLst>
+          </a:prstGeom>
+          <a:solidFill>
+            <a:srgbClr val="EEF4FC"/>
+          </a:solidFill>
+          <a:ln w="15875">
+            <a:solidFill>
+              <a:srgbClr val="EEF4FC"/>
+            </a:solidFill>
+          </a:ln>
+          <a:effectLst/>
+        </p:spPr>
+        <p:style>
+          <a:lnRef idx="1">
+            <a:schemeClr val="accent1"/>
+          </a:lnRef>
+          <a:fillRef idx="3">
+            <a:schemeClr val="accent1"/>
+          </a:fillRef>
+          <a:effectRef idx="2">
+            <a:schemeClr val="accent1"/>
+          </a:effectRef>
+          <a:fontRef idx="minor">
+            <a:schemeClr val="lt1"/>
+          </a:fontRef>
+        </p:style>
+        <p:txBody>
+          <a:bodyPr rtlCol="0" anchor="ctr"/>
+          <a:lstStyle/>
+          <a:p>
+            <a:pPr algn="ctr"/>
+            <a:endParaRPr dirty="0"/>
+          </a:p>
+        </p:txBody>
+      </p:sp>
+      <p:sp>
+        <p:nvSpPr>
           <p:cNvPr id="2" name="TextBox 1"/>
           <p:cNvSpPr txBox="1"/>
           <p:nvPr/>
@@ -5500,7 +5579,7 @@
         <p:spPr>
           <a:xfrm>
             <a:off x="640080" y="658368"/>
-            <a:ext cx="10881360" cy="914400"/>
+            <a:ext cx="10881360" cy="461665"/>
           </a:xfrm>
           <a:prstGeom prst="rect">
             <a:avLst/>
@@ -5519,14 +5598,20 @@
               </a:spcAft>
             </a:pPr>
             <a:r>
-              <a:rPr sz="3000" dirty="0">
+              <a:rPr lang="en-AU" sz="3000" dirty="0">
                 <a:solidFill>
                   <a:srgbClr val="0E2238"/>
                 </a:solidFill>
                 <a:latin typeface="Segoe UI Semibold"/>
               </a:rPr>
-              <a:t>What it minimises, and what was compared</a:t>
-            </a:r>
+              <a:t>Modelling Decisions and Methods Compared</a:t>
+            </a:r>
+            <a:endParaRPr sz="3000" dirty="0">
+              <a:solidFill>
+                <a:srgbClr val="0E2238"/>
+              </a:solidFill>
+              <a:latin typeface="Segoe UI Semibold"/>
+            </a:endParaRPr>
           </a:p>
         </p:txBody>
       </p:sp>
@@ -5616,7 +5701,7 @@
         </p:nvSpPr>
         <p:spPr>
           <a:xfrm>
-            <a:off x="640080" y="5074920"/>
+            <a:off x="640080" y="5169190"/>
             <a:ext cx="10927080" cy="1143000"/>
           </a:xfrm>
           <a:prstGeom prst="roundRect">
@@ -5665,7 +5750,7 @@
         </p:nvSpPr>
         <p:spPr>
           <a:xfrm>
-            <a:off x="914400" y="5303520"/>
+            <a:off x="914400" y="5397790"/>
             <a:ext cx="6400800" cy="592470"/>
           </a:xfrm>
           <a:prstGeom prst="rect">
@@ -5728,7 +5813,7 @@
         </p:nvSpPr>
         <p:spPr>
           <a:xfrm>
-            <a:off x="7680960" y="5285232"/>
+            <a:off x="7680960" y="5379502"/>
             <a:ext cx="3611880" cy="731520"/>
           </a:xfrm>
           <a:prstGeom prst="roundRect">
@@ -5783,7 +5868,7 @@
         </p:nvSpPr>
         <p:spPr>
           <a:xfrm>
-            <a:off x="640080" y="1600200"/>
+            <a:off x="640080" y="1295403"/>
             <a:ext cx="5120640" cy="3246120"/>
           </a:xfrm>
           <a:prstGeom prst="roundRect">
@@ -5820,6 +5905,7 @@
           <a:lstStyle/>
           <a:p>
             <a:pPr algn="ctr"/>
+            <a:endParaRPr/>
           </a:p>
         </p:txBody>
       </p:sp>
@@ -5831,8 +5917,8 @@
         </p:nvSpPr>
         <p:spPr>
           <a:xfrm>
-            <a:off x="868680" y="1737360"/>
-            <a:ext cx="4663440" cy="274320"/>
+            <a:off x="868680" y="1432563"/>
+            <a:ext cx="4663440" cy="169277"/>
           </a:xfrm>
           <a:prstGeom prst="rect">
             <a:avLst/>
@@ -5840,7 +5926,7 @@
           <a:noFill/>
         </p:spPr>
         <p:txBody>
-          <a:bodyPr wrap="square" anchor="t" lIns="0" rIns="0" tIns="0" bIns="0">
+          <a:bodyPr wrap="square" lIns="0" tIns="0" rIns="0" bIns="0" anchor="t">
             <a:spAutoFit/>
           </a:bodyPr>
           <a:lstStyle/>
@@ -5851,14 +5937,20 @@
               </a:spcAft>
             </a:pPr>
             <a:r>
-              <a:rPr sz="1100">
+              <a:rPr lang="en-AU" sz="1100" dirty="0">
                 <a:solidFill>
                   <a:srgbClr val="2A6FD1"/>
                 </a:solidFill>
                 <a:latin typeface="Segoe UI Semibold"/>
               </a:rPr>
-              <a:t>WHAT IT MINIMISES</a:t>
-            </a:r>
+              <a:t>THE OBJECTIVE FUNCTION</a:t>
+            </a:r>
+            <a:endParaRPr sz="1100" dirty="0">
+              <a:solidFill>
+                <a:srgbClr val="2A6FD1"/>
+              </a:solidFill>
+              <a:latin typeface="Segoe UI Semibold"/>
+            </a:endParaRPr>
           </a:p>
         </p:txBody>
       </p:sp>
@@ -5870,8 +5962,8 @@
         </p:nvSpPr>
         <p:spPr>
           <a:xfrm>
-            <a:off x="868680" y="2011680"/>
-            <a:ext cx="4754880" cy="365760"/>
+            <a:off x="868680" y="1706883"/>
+            <a:ext cx="4754880" cy="338554"/>
           </a:xfrm>
           <a:prstGeom prst="rect">
             <a:avLst/>
@@ -5879,7 +5971,7 @@
           <a:noFill/>
         </p:spPr>
         <p:txBody>
-          <a:bodyPr wrap="square" anchor="t" lIns="0" rIns="0" tIns="0" bIns="0">
+          <a:bodyPr wrap="square" lIns="0" tIns="0" rIns="0" bIns="0" anchor="t">
             <a:spAutoFit/>
           </a:bodyPr>
           <a:lstStyle/>
@@ -5890,7 +5982,7 @@
               </a:spcAft>
             </a:pPr>
             <a:r>
-              <a:rPr sz="2200">
+              <a:rPr sz="2200" dirty="0" err="1">
                 <a:solidFill>
                   <a:srgbClr val="0E2238"/>
                 </a:solidFill>
@@ -5899,7 +5991,7 @@
               <a:t>J</a:t>
             </a:r>
             <a:r>
-              <a:rPr sz="2200" baseline="-25000">
+              <a:rPr sz="2200" baseline="-25000" dirty="0" err="1">
                 <a:solidFill>
                   <a:srgbClr val="0E2238"/>
                 </a:solidFill>
@@ -5908,25 +6000,61 @@
               <a:t>λ</a:t>
             </a:r>
             <a:r>
-              <a:rPr sz="2200">
+              <a:rPr sz="2200" dirty="0">
                 <a:solidFill>
                   <a:srgbClr val="0E2238"/>
                 </a:solidFill>
                 <a:latin typeface="Cambria Math"/>
               </a:rPr>
-              <a:t> = Σ w</a:t>
-            </a:r>
-            <a:r>
-              <a:rPr sz="2200" baseline="-25000">
+              <a:t> = </a:t>
+            </a:r>
+            <a:r>
+              <a:rPr lang="el-GR" sz="2200" dirty="0">
                 <a:solidFill>
                   <a:srgbClr val="0E2238"/>
                 </a:solidFill>
                 <a:latin typeface="Cambria Math"/>
               </a:rPr>
+              <a:t>λ</a:t>
+            </a:r>
+            <a:r>
+              <a:rPr lang="en-AU" sz="2200" baseline="-25000" dirty="0">
+                <a:solidFill>
+                  <a:srgbClr val="0E2238"/>
+                </a:solidFill>
+                <a:latin typeface="Cambria Math"/>
+              </a:rPr>
+              <a:t>1</a:t>
+            </a:r>
+            <a:r>
+              <a:rPr sz="2200" dirty="0">
+                <a:solidFill>
+                  <a:srgbClr val="0E2238"/>
+                </a:solidFill>
+                <a:latin typeface="Cambria Math"/>
+              </a:rPr>
+              <a:t>Σ </a:t>
+            </a:r>
+            <a:r>
+              <a:rPr sz="2200" dirty="0" err="1">
+                <a:solidFill>
+                  <a:srgbClr val="0E2238"/>
+                </a:solidFill>
+                <a:latin typeface="Cambria Math"/>
+              </a:rPr>
+              <a:t>w</a:t>
+            </a:r>
+            <a:r>
+              <a:rPr sz="2200" baseline="-25000" dirty="0" err="1">
+                <a:solidFill>
+                  <a:srgbClr val="0E2238"/>
+                </a:solidFill>
+                <a:latin typeface="Cambria Math"/>
+              </a:rPr>
               <a:t>j</a:t>
             </a:r>
             <a:r>
-              <a:rPr sz="2200">
+              <a:rPr sz="2200" dirty="0">
                 <a:solidFill>
                   <a:srgbClr val="0E2238"/>
                 </a:solidFill>
@@ -5935,7 +6063,7 @@
               <a:t> T</a:t>
             </a:r>
             <a:r>
-              <a:rPr sz="2200" baseline="-25000">
+              <a:rPr sz="2200" baseline="-25000" dirty="0">
                 <a:solidFill>
                   <a:srgbClr val="0E2238"/>
                 </a:solidFill>
@@ -5944,7 +6072,7 @@
               <a:t>j</a:t>
             </a:r>
             <a:r>
-              <a:rPr sz="2200" baseline="30000">
+              <a:rPr sz="2200" baseline="30000" dirty="0">
                 <a:solidFill>
                   <a:srgbClr val="0E2238"/>
                 </a:solidFill>
@@ -5953,7 +6081,7 @@
               <a:t>2</a:t>
             </a:r>
             <a:r>
-              <a:rPr sz="2200">
+              <a:rPr sz="2200" dirty="0">
                 <a:solidFill>
                   <a:srgbClr val="0E2238"/>
                 </a:solidFill>
@@ -5962,50 +6090,74 @@
               <a:t> + λ</a:t>
             </a:r>
             <a:r>
-              <a:rPr sz="2200" baseline="-25000">
+              <a:rPr lang="en-AU" sz="2200" baseline="-25000" dirty="0">
                 <a:solidFill>
                   <a:srgbClr val="0E2238"/>
                 </a:solidFill>
                 <a:latin typeface="Cambria Math"/>
               </a:rPr>
+              <a:t>2</a:t>
+            </a:r>
+            <a:r>
+              <a:rPr sz="2200" dirty="0">
+                <a:solidFill>
+                  <a:srgbClr val="0E2238"/>
+                </a:solidFill>
+                <a:latin typeface="Cambria Math"/>
+              </a:rPr>
+              <a:t> Σ </a:t>
+            </a:r>
+            <a:r>
+              <a:rPr sz="2200" dirty="0" err="1">
+                <a:solidFill>
+                  <a:srgbClr val="0E2238"/>
+                </a:solidFill>
+                <a:latin typeface="Cambria Math"/>
+              </a:rPr>
+              <a:t>w</a:t>
+            </a:r>
+            <a:r>
+              <a:rPr sz="2200" baseline="-25000" dirty="0" err="1">
+                <a:solidFill>
+                  <a:srgbClr val="0E2238"/>
+                </a:solidFill>
+                <a:latin typeface="Cambria Math"/>
+              </a:rPr>
+              <a:t>j</a:t>
+            </a:r>
+            <a:r>
+              <a:rPr sz="2200" dirty="0">
+                <a:solidFill>
+                  <a:srgbClr val="0E2238"/>
+                </a:solidFill>
+                <a:latin typeface="Cambria Math"/>
+              </a:rPr>
+              <a:t> </a:t>
+            </a:r>
+            <a:r>
+              <a:rPr sz="2200" dirty="0" err="1">
+                <a:solidFill>
+                  <a:srgbClr val="0E2238"/>
+                </a:solidFill>
+                <a:latin typeface="Cambria Math"/>
+              </a:rPr>
               <a:t>T</a:t>
             </a:r>
             <a:r>
-              <a:rPr sz="2200">
+              <a:rPr sz="2200" baseline="-25000" dirty="0" err="1">
                 <a:solidFill>
                   <a:srgbClr val="0E2238"/>
                 </a:solidFill>
                 <a:latin typeface="Cambria Math"/>
               </a:rPr>
-              <a:t> Σ w</a:t>
-            </a:r>
-            <a:r>
-              <a:rPr sz="2200" baseline="-25000">
-                <a:solidFill>
-                  <a:srgbClr val="0E2238"/>
-                </a:solidFill>
-                <a:latin typeface="Cambria Math"/>
-              </a:rPr>
               <a:t>j</a:t>
             </a:r>
-            <a:r>
-              <a:rPr sz="2200">
-                <a:solidFill>
-                  <a:srgbClr val="0E2238"/>
-                </a:solidFill>
-                <a:latin typeface="Cambria Math"/>
-              </a:rPr>
-              <a:t> T</a:t>
-            </a:r>
-            <a:r>
-              <a:rPr sz="2200" baseline="-25000">
-                <a:solidFill>
-                  <a:srgbClr val="0E2238"/>
-                </a:solidFill>
-                <a:latin typeface="Cambria Math"/>
-              </a:rPr>
-              <a:t>j</a:t>
-            </a:r>
+            <a:endParaRPr sz="2200" baseline="-25000" dirty="0">
+              <a:solidFill>
+                <a:srgbClr val="0E2238"/>
+              </a:solidFill>
+              <a:latin typeface="Cambria Math"/>
+            </a:endParaRPr>
           </a:p>
         </p:txBody>
       </p:sp>
@@ -6017,8 +6169,8 @@
         </p:nvSpPr>
         <p:spPr>
           <a:xfrm>
-            <a:off x="868680" y="2423160"/>
-            <a:ext cx="4754880" cy="365760"/>
+            <a:off x="2169620" y="2127280"/>
+            <a:ext cx="4754880" cy="338554"/>
           </a:xfrm>
           <a:prstGeom prst="rect">
             <a:avLst/>
@@ -6026,7 +6178,7 @@
           <a:noFill/>
         </p:spPr>
         <p:txBody>
-          <a:bodyPr wrap="square" anchor="t" lIns="0" rIns="0" tIns="0" bIns="0">
+          <a:bodyPr wrap="square" lIns="0" tIns="0" rIns="0" bIns="0" anchor="t">
             <a:spAutoFit/>
           </a:bodyPr>
           <a:lstStyle/>
@@ -6037,7 +6189,7 @@
               </a:spcAft>
             </a:pPr>
             <a:r>
-              <a:rPr sz="2200">
+              <a:rPr sz="2200" dirty="0">
                 <a:solidFill>
                   <a:srgbClr val="0E2238"/>
                 </a:solidFill>
@@ -6046,70 +6198,88 @@
               <a:t>      + λ</a:t>
             </a:r>
             <a:r>
-              <a:rPr sz="2200" baseline="-25000">
+              <a:rPr lang="en-AU" sz="2200" baseline="-25000" dirty="0">
                 <a:solidFill>
                   <a:srgbClr val="0E2238"/>
                 </a:solidFill>
                 <a:latin typeface="Cambria Math"/>
               </a:rPr>
+              <a:t>3</a:t>
+            </a:r>
+            <a:r>
+              <a:rPr sz="2200" dirty="0">
+                <a:solidFill>
+                  <a:srgbClr val="0E2238"/>
+                </a:solidFill>
+                <a:latin typeface="Cambria Math"/>
+              </a:rPr>
+              <a:t> Σ </a:t>
+            </a:r>
+            <a:r>
+              <a:rPr sz="2200" dirty="0" err="1">
+                <a:solidFill>
+                  <a:srgbClr val="0E2238"/>
+                </a:solidFill>
+                <a:latin typeface="Cambria Math"/>
+              </a:rPr>
+              <a:t>w</a:t>
+            </a:r>
+            <a:r>
+              <a:rPr sz="2200" baseline="-25000" dirty="0" err="1">
+                <a:solidFill>
+                  <a:srgbClr val="0E2238"/>
+                </a:solidFill>
+                <a:latin typeface="Cambria Math"/>
+              </a:rPr>
+              <a:t>j</a:t>
+            </a:r>
+            <a:r>
+              <a:rPr sz="2200" dirty="0">
+                <a:solidFill>
+                  <a:srgbClr val="0E2238"/>
+                </a:solidFill>
+                <a:latin typeface="Cambria Math"/>
+              </a:rPr>
+              <a:t> </a:t>
+            </a:r>
+            <a:r>
+              <a:rPr sz="2200" dirty="0" err="1">
+                <a:solidFill>
+                  <a:srgbClr val="0E2238"/>
+                </a:solidFill>
+                <a:latin typeface="Cambria Math"/>
+              </a:rPr>
               <a:t>U</a:t>
             </a:r>
             <a:r>
-              <a:rPr sz="2200">
+              <a:rPr sz="2200" baseline="-25000" dirty="0" err="1">
                 <a:solidFill>
                   <a:srgbClr val="0E2238"/>
                 </a:solidFill>
                 <a:latin typeface="Cambria Math"/>
               </a:rPr>
-              <a:t> Σ w</a:t>
-            </a:r>
-            <a:r>
-              <a:rPr sz="2200" baseline="-25000">
+              <a:t>j</a:t>
+            </a:r>
+            <a:r>
+              <a:rPr sz="2200" dirty="0">
                 <a:solidFill>
                   <a:srgbClr val="0E2238"/>
                 </a:solidFill>
                 <a:latin typeface="Cambria Math"/>
               </a:rPr>
-              <a:t>j</a:t>
-            </a:r>
-            <a:r>
-              <a:rPr sz="2200">
+              <a:t> + λ</a:t>
+            </a:r>
+            <a:r>
+              <a:rPr lang="en-AU" sz="2200" baseline="-25000" dirty="0">
                 <a:solidFill>
                   <a:srgbClr val="0E2238"/>
                 </a:solidFill>
                 <a:latin typeface="Cambria Math"/>
               </a:rPr>
-              <a:t> U</a:t>
-            </a:r>
-            <a:r>
-              <a:rPr sz="2200" baseline="-25000">
-                <a:solidFill>
-                  <a:srgbClr val="0E2238"/>
-                </a:solidFill>
-                <a:latin typeface="Cambria Math"/>
-              </a:rPr>
-              <a:t>j</a:t>
-            </a:r>
-            <a:r>
-              <a:rPr sz="2200">
-                <a:solidFill>
-                  <a:srgbClr val="0E2238"/>
-                </a:solidFill>
-                <a:latin typeface="Cambria Math"/>
-              </a:rPr>
-              <a:t> + λ</a:t>
-            </a:r>
-            <a:r>
-              <a:rPr sz="2200" baseline="-25000">
-                <a:solidFill>
-                  <a:srgbClr val="0E2238"/>
-                </a:solidFill>
-                <a:latin typeface="Cambria Math"/>
-              </a:rPr>
-              <a:t>E</a:t>
-            </a:r>
-            <a:r>
-              <a:rPr sz="2200">
+              <a:t>4</a:t>
+            </a:r>
+            <a:r>
+              <a:rPr sz="2200" dirty="0">
                 <a:solidFill>
                   <a:srgbClr val="0E2238"/>
                 </a:solidFill>
@@ -6128,7 +6298,7 @@
         </p:nvSpPr>
         <p:spPr>
           <a:xfrm>
-            <a:off x="868680" y="2852928"/>
+            <a:off x="868680" y="2548131"/>
             <a:ext cx="1188720" cy="274320"/>
           </a:xfrm>
           <a:prstGeom prst="rect">
@@ -6137,7 +6307,7 @@
           <a:noFill/>
         </p:spPr>
         <p:txBody>
-          <a:bodyPr wrap="square" anchor="t" lIns="0" rIns="0" tIns="0" bIns="0">
+          <a:bodyPr wrap="square" lIns="0" tIns="0" rIns="0" bIns="0" anchor="t">
             <a:spAutoFit/>
           </a:bodyPr>
           <a:lstStyle/>
@@ -6167,8 +6337,8 @@
         </p:nvSpPr>
         <p:spPr>
           <a:xfrm>
-            <a:off x="2103120" y="2852928"/>
-            <a:ext cx="3520440" cy="274320"/>
+            <a:off x="2103120" y="2548131"/>
+            <a:ext cx="3520440" cy="161583"/>
           </a:xfrm>
           <a:prstGeom prst="rect">
             <a:avLst/>
@@ -6176,7 +6346,7 @@
           <a:noFill/>
         </p:spPr>
         <p:txBody>
-          <a:bodyPr wrap="square" anchor="t" lIns="0" rIns="0" tIns="0" bIns="0">
+          <a:bodyPr wrap="square" lIns="0" tIns="0" rIns="0" bIns="0" anchor="t">
             <a:spAutoFit/>
           </a:bodyPr>
           <a:lstStyle/>
@@ -6187,27 +6357,140 @@
               </a:spcAft>
             </a:pPr>
             <a:r>
-              <a:rPr sz="1050">
+              <a:rPr lang="en-AU" sz="1050" dirty="0">
                 <a:solidFill>
                   <a:srgbClr val="56677A"/>
                 </a:solidFill>
                 <a:latin typeface="Segoe UI"/>
               </a:rPr>
-              <a:t>lateness squared, weighted by importance</a:t>
-            </a:r>
-          </a:p>
-        </p:txBody>
-      </p:sp>
-      <p:sp>
-        <p:nvSpPr>
-          <p:cNvPr id="35" name="TextBox 34"/>
+              <a:t>L</a:t>
+            </a:r>
+            <a:r>
+              <a:rPr sz="1050" dirty="0" err="1">
+                <a:solidFill>
+                  <a:srgbClr val="56677A"/>
+                </a:solidFill>
+                <a:latin typeface="Segoe UI"/>
+              </a:rPr>
+              <a:t>ateness</a:t>
+            </a:r>
+            <a:r>
+              <a:rPr sz="1050" dirty="0">
+                <a:solidFill>
+                  <a:srgbClr val="56677A"/>
+                </a:solidFill>
+                <a:latin typeface="Segoe UI"/>
+              </a:rPr>
+              <a:t> squared, weighted by importance</a:t>
+            </a:r>
+          </a:p>
+        </p:txBody>
+      </p:sp>
+      <mc:AlternateContent xmlns:mc="http://schemas.openxmlformats.org/markup-compatibility/2006">
+        <mc:Choice xmlns:a14="http://schemas.microsoft.com/office/drawing/2010/main" Requires="a14">
+          <p:sp>
+            <p:nvSpPr>
+              <p:cNvPr id="35" name="TextBox 34"/>
+              <p:cNvSpPr txBox="1"/>
+              <p:nvPr/>
+            </p:nvSpPr>
+            <p:spPr>
+              <a:xfrm>
+                <a:off x="868680" y="2822451"/>
+                <a:ext cx="1188720" cy="184666"/>
+              </a:xfrm>
+              <a:prstGeom prst="rect">
+                <a:avLst/>
+              </a:prstGeom>
+              <a:noFill/>
+            </p:spPr>
+            <p:txBody>
+              <a:bodyPr wrap="square" lIns="0" tIns="0" rIns="0" bIns="0" anchor="t">
+                <a:spAutoFit/>
+              </a:bodyPr>
+              <a:lstStyle/>
+              <a:p>
+                <a:pPr>
+                  <a:spcAft>
+                    <a:spcPts val="0"/>
+                  </a:spcAft>
+                </a:pPr>
+                <a14:m>
+                  <m:oMath xmlns:m="http://schemas.openxmlformats.org/officeDocument/2006/math">
+                    <m:r>
+                      <a:rPr lang="en-AU" sz="1200" i="1" smtClean="0">
+                        <a:solidFill>
+                          <a:srgbClr val="2A6FD1"/>
+                        </a:solidFill>
+                        <a:latin typeface="Cambria Math" panose="02040503050406030204" pitchFamily="18" charset="0"/>
+                        <a:ea typeface="Cambria Math" panose="02040503050406030204" pitchFamily="18" charset="0"/>
+                      </a:rPr>
+                      <m:t>𝜆</m:t>
+                    </m:r>
+                  </m:oMath>
+                </a14:m>
+                <a:r>
+                  <a:rPr sz="1200" dirty="0">
+                    <a:solidFill>
+                      <a:srgbClr val="2A6FD1"/>
+                    </a:solidFill>
+                    <a:latin typeface="Cambria Math"/>
+                  </a:rPr>
+                  <a:t> Σ w T</a:t>
+                </a:r>
+              </a:p>
+            </p:txBody>
+          </p:sp>
+        </mc:Choice>
+        <mc:Fallback>
+          <p:sp>
+            <p:nvSpPr>
+              <p:cNvPr id="35" name="TextBox 34"/>
+              <p:cNvSpPr txBox="1">
+                <a:spLocks noRot="1" noChangeAspect="1" noMove="1" noResize="1" noEditPoints="1" noAdjustHandles="1" noChangeArrowheads="1" noChangeShapeType="1" noTextEdit="1"/>
+              </p:cNvSpPr>
+              <p:nvPr/>
+            </p:nvSpPr>
+            <p:spPr>
+              <a:xfrm>
+                <a:off x="868680" y="2822451"/>
+                <a:ext cx="1188720" cy="184666"/>
+              </a:xfrm>
+              <a:prstGeom prst="rect">
+                <a:avLst/>
+              </a:prstGeom>
+              <a:blipFill>
+                <a:blip r:embed="rId4"/>
+                <a:stretch>
+                  <a:fillRect l="-5128" t="-26667" b="-50000"/>
+                </a:stretch>
+              </a:blipFill>
+            </p:spPr>
+            <p:txBody>
+              <a:bodyPr/>
+              <a:lstStyle/>
+              <a:p>
+                <a:r>
+                  <a:rPr lang="en-AU">
+                    <a:noFill/>
+                  </a:rPr>
+                  <a:t> </a:t>
+                </a:r>
+              </a:p>
+            </p:txBody>
+          </p:sp>
+        </mc:Fallback>
+      </mc:AlternateContent>
+      <p:sp>
+        <p:nvSpPr>
+          <p:cNvPr id="36" name="TextBox 35"/>
           <p:cNvSpPr txBox="1"/>
           <p:nvPr/>
         </p:nvSpPr>
         <p:spPr>
           <a:xfrm>
-            <a:off x="868680" y="3127248"/>
-            <a:ext cx="1188720" cy="274320"/>
+            <a:off x="2103120" y="2822451"/>
+            <a:ext cx="3520440" cy="161583"/>
           </a:xfrm>
           <a:prstGeom prst="rect">
             <a:avLst/>
@@ -6215,7 +6498,7 @@
           <a:noFill/>
         </p:spPr>
         <p:txBody>
-          <a:bodyPr wrap="square" anchor="t" lIns="0" rIns="0" tIns="0" bIns="0">
+          <a:bodyPr wrap="square" lIns="0" tIns="0" rIns="0" bIns="0" anchor="t">
             <a:spAutoFit/>
           </a:bodyPr>
           <a:lstStyle/>
@@ -6226,27 +6509,45 @@
               </a:spcAft>
             </a:pPr>
             <a:r>
-              <a:rPr sz="1200">
-                <a:solidFill>
-                  <a:srgbClr val="2A6FD1"/>
-                </a:solidFill>
-                <a:latin typeface="Cambria Math"/>
-              </a:rPr>
-              <a:t>λT Σ w T</a:t>
-            </a:r>
-          </a:p>
-        </p:txBody>
-      </p:sp>
-      <p:sp>
-        <p:nvSpPr>
-          <p:cNvPr id="36" name="TextBox 35"/>
+              <a:rPr lang="en-AU" sz="1050" dirty="0">
+                <a:solidFill>
+                  <a:srgbClr val="56677A"/>
+                </a:solidFill>
+                <a:latin typeface="Segoe UI"/>
+              </a:rPr>
+              <a:t>La</a:t>
+            </a:r>
+            <a:r>
+              <a:rPr sz="1050" dirty="0" err="1">
+                <a:solidFill>
+                  <a:srgbClr val="56677A"/>
+                </a:solidFill>
+                <a:latin typeface="Segoe UI"/>
+              </a:rPr>
+              <a:t>teness</a:t>
+            </a:r>
+            <a:r>
+              <a:rPr sz="1050" dirty="0">
+                <a:solidFill>
+                  <a:srgbClr val="56677A"/>
+                </a:solidFill>
+                <a:latin typeface="Segoe UI"/>
+              </a:rPr>
+              <a:t> itself, weighted by importance</a:t>
+            </a:r>
+          </a:p>
+        </p:txBody>
+      </p:sp>
+      <p:sp>
+        <p:nvSpPr>
+          <p:cNvPr id="37" name="TextBox 36"/>
           <p:cNvSpPr txBox="1"/>
           <p:nvPr/>
         </p:nvSpPr>
         <p:spPr>
           <a:xfrm>
-            <a:off x="2103120" y="3127248"/>
-            <a:ext cx="3520440" cy="274320"/>
+            <a:off x="868680" y="3096771"/>
+            <a:ext cx="1188720" cy="184666"/>
           </a:xfrm>
           <a:prstGeom prst="rect">
             <a:avLst/>
@@ -6254,7 +6555,7 @@
           <a:noFill/>
         </p:spPr>
         <p:txBody>
-          <a:bodyPr wrap="square" anchor="t" lIns="0" rIns="0" tIns="0" bIns="0">
+          <a:bodyPr wrap="square" lIns="0" tIns="0" rIns="0" bIns="0" anchor="t">
             <a:spAutoFit/>
           </a:bodyPr>
           <a:lstStyle/>
@@ -6265,27 +6566,27 @@
               </a:spcAft>
             </a:pPr>
             <a:r>
-              <a:rPr sz="1050">
-                <a:solidFill>
-                  <a:srgbClr val="56677A"/>
-                </a:solidFill>
-                <a:latin typeface="Segoe UI"/>
-              </a:rPr>
-              <a:t>lateness itself, weighted by importance</a:t>
-            </a:r>
-          </a:p>
-        </p:txBody>
-      </p:sp>
-      <p:sp>
-        <p:nvSpPr>
-          <p:cNvPr id="37" name="TextBox 36"/>
+              <a:rPr sz="1200" dirty="0">
+                <a:solidFill>
+                  <a:srgbClr val="2A6FD1"/>
+                </a:solidFill>
+                <a:latin typeface="Cambria Math"/>
+              </a:rPr>
+              <a:t>λ Σ w U</a:t>
+            </a:r>
+          </a:p>
+        </p:txBody>
+      </p:sp>
+      <p:sp>
+        <p:nvSpPr>
+          <p:cNvPr id="38" name="TextBox 37"/>
           <p:cNvSpPr txBox="1"/>
           <p:nvPr/>
         </p:nvSpPr>
         <p:spPr>
           <a:xfrm>
-            <a:off x="868680" y="3401568"/>
-            <a:ext cx="1188720" cy="274320"/>
+            <a:off x="2103120" y="3096771"/>
+            <a:ext cx="3520440" cy="161583"/>
           </a:xfrm>
           <a:prstGeom prst="rect">
             <a:avLst/>
@@ -6293,7 +6594,7 @@
           <a:noFill/>
         </p:spPr>
         <p:txBody>
-          <a:bodyPr wrap="square" anchor="t" lIns="0" rIns="0" tIns="0" bIns="0">
+          <a:bodyPr wrap="square" lIns="0" tIns="0" rIns="0" bIns="0" anchor="t">
             <a:spAutoFit/>
           </a:bodyPr>
           <a:lstStyle/>
@@ -6304,27 +6605,36 @@
               </a:spcAft>
             </a:pPr>
             <a:r>
-              <a:rPr sz="1200">
-                <a:solidFill>
-                  <a:srgbClr val="2A6FD1"/>
-                </a:solidFill>
-                <a:latin typeface="Cambria Math"/>
-              </a:rPr>
-              <a:t>λU Σ w U</a:t>
-            </a:r>
-          </a:p>
-        </p:txBody>
-      </p:sp>
-      <p:sp>
-        <p:nvSpPr>
-          <p:cNvPr id="38" name="TextBox 37"/>
+              <a:rPr lang="en-AU" sz="1050" dirty="0">
+                <a:solidFill>
+                  <a:srgbClr val="56677A"/>
+                </a:solidFill>
+                <a:latin typeface="Segoe UI"/>
+              </a:rPr>
+              <a:t>H</a:t>
+            </a:r>
+            <a:r>
+              <a:rPr sz="1050" dirty="0">
+                <a:solidFill>
+                  <a:srgbClr val="56677A"/>
+                </a:solidFill>
+                <a:latin typeface="Segoe UI"/>
+              </a:rPr>
+              <a:t>ow many jobs finish late (deadlines missed)</a:t>
+            </a:r>
+          </a:p>
+        </p:txBody>
+      </p:sp>
+      <p:sp>
+        <p:nvSpPr>
+          <p:cNvPr id="39" name="TextBox 38"/>
           <p:cNvSpPr txBox="1"/>
           <p:nvPr/>
         </p:nvSpPr>
         <p:spPr>
           <a:xfrm>
-            <a:off x="2103120" y="3401568"/>
-            <a:ext cx="3520440" cy="274320"/>
+            <a:off x="868680" y="3371090"/>
+            <a:ext cx="1188720" cy="184666"/>
           </a:xfrm>
           <a:prstGeom prst="rect">
             <a:avLst/>
@@ -6332,7 +6642,7 @@
           <a:noFill/>
         </p:spPr>
         <p:txBody>
-          <a:bodyPr wrap="square" anchor="t" lIns="0" rIns="0" tIns="0" bIns="0">
+          <a:bodyPr wrap="square" lIns="0" tIns="0" rIns="0" bIns="0" anchor="t">
             <a:spAutoFit/>
           </a:bodyPr>
           <a:lstStyle/>
@@ -6343,27 +6653,27 @@
               </a:spcAft>
             </a:pPr>
             <a:r>
-              <a:rPr sz="1050">
-                <a:solidFill>
-                  <a:srgbClr val="56677A"/>
-                </a:solidFill>
-                <a:latin typeface="Segoe UI"/>
-              </a:rPr>
-              <a:t>how many jobs finish late (deadlines missed)</a:t>
-            </a:r>
-          </a:p>
-        </p:txBody>
-      </p:sp>
-      <p:sp>
-        <p:nvSpPr>
-          <p:cNvPr id="39" name="TextBox 38"/>
+              <a:rPr sz="1200" dirty="0">
+                <a:solidFill>
+                  <a:srgbClr val="2A6FD1"/>
+                </a:solidFill>
+                <a:latin typeface="Cambria Math"/>
+              </a:rPr>
+              <a:t>λ E</a:t>
+            </a:r>
+          </a:p>
+        </p:txBody>
+      </p:sp>
+      <p:sp>
+        <p:nvSpPr>
+          <p:cNvPr id="40" name="TextBox 39"/>
           <p:cNvSpPr txBox="1"/>
           <p:nvPr/>
         </p:nvSpPr>
         <p:spPr>
           <a:xfrm>
-            <a:off x="868680" y="3675887"/>
-            <a:ext cx="1188720" cy="274320"/>
+            <a:off x="2103120" y="3371090"/>
+            <a:ext cx="3520440" cy="161583"/>
           </a:xfrm>
           <a:prstGeom prst="rect">
             <a:avLst/>
@@ -6371,7 +6681,7 @@
           <a:noFill/>
         </p:spPr>
         <p:txBody>
-          <a:bodyPr wrap="square" anchor="t" lIns="0" rIns="0" tIns="0" bIns="0">
+          <a:bodyPr wrap="square" lIns="0" tIns="0" rIns="0" bIns="0" anchor="t">
             <a:spAutoFit/>
           </a:bodyPr>
           <a:lstStyle/>
@@ -6382,27 +6692,36 @@
               </a:spcAft>
             </a:pPr>
             <a:r>
-              <a:rPr sz="1200">
-                <a:solidFill>
-                  <a:srgbClr val="2A6FD1"/>
-                </a:solidFill>
-                <a:latin typeface="Cambria Math"/>
-              </a:rPr>
-              <a:t>λE E</a:t>
-            </a:r>
-          </a:p>
-        </p:txBody>
-      </p:sp>
-      <p:sp>
-        <p:nvSpPr>
-          <p:cNvPr id="40" name="TextBox 39"/>
+              <a:rPr lang="en-AU" sz="1050" dirty="0">
+                <a:solidFill>
+                  <a:srgbClr val="56677A"/>
+                </a:solidFill>
+                <a:latin typeface="Segoe UI"/>
+              </a:rPr>
+              <a:t>Energy:</a:t>
+            </a:r>
+            <a:r>
+              <a:rPr sz="1050" dirty="0">
+                <a:solidFill>
+                  <a:srgbClr val="56677A"/>
+                </a:solidFill>
+                <a:latin typeface="Segoe UI"/>
+              </a:rPr>
+              <a:t> how long machines are switched on</a:t>
+            </a:r>
+          </a:p>
+        </p:txBody>
+      </p:sp>
+      <p:sp>
+        <p:nvSpPr>
+          <p:cNvPr id="41" name="TextBox 40"/>
           <p:cNvSpPr txBox="1"/>
           <p:nvPr/>
         </p:nvSpPr>
         <p:spPr>
           <a:xfrm>
-            <a:off x="2103120" y="3675887"/>
-            <a:ext cx="3520440" cy="274320"/>
+            <a:off x="868680" y="3654555"/>
+            <a:ext cx="4754880" cy="274320"/>
           </a:xfrm>
           <a:prstGeom prst="rect">
             <a:avLst/>
@@ -6410,7 +6729,7 @@
           <a:noFill/>
         </p:spPr>
         <p:txBody>
-          <a:bodyPr wrap="square" anchor="t" lIns="0" rIns="0" tIns="0" bIns="0">
+          <a:bodyPr wrap="square" lIns="0" tIns="0" rIns="0" bIns="0" anchor="t">
             <a:spAutoFit/>
           </a:bodyPr>
           <a:lstStyle/>
@@ -6423,45 +6742,6 @@
             <a:r>
               <a:rPr sz="1050">
                 <a:solidFill>
-                  <a:srgbClr val="56677A"/>
-                </a:solidFill>
-                <a:latin typeface="Segoe UI"/>
-              </a:rPr>
-              <a:t>energy: how long machines are switched on</a:t>
-            </a:r>
-          </a:p>
-        </p:txBody>
-      </p:sp>
-      <p:sp>
-        <p:nvSpPr>
-          <p:cNvPr id="41" name="TextBox 40"/>
-          <p:cNvSpPr txBox="1"/>
-          <p:nvPr/>
-        </p:nvSpPr>
-        <p:spPr>
-          <a:xfrm>
-            <a:off x="868680" y="3959352"/>
-            <a:ext cx="4754880" cy="274320"/>
-          </a:xfrm>
-          <a:prstGeom prst="rect">
-            <a:avLst/>
-          </a:prstGeom>
-          <a:noFill/>
-        </p:spPr>
-        <p:txBody>
-          <a:bodyPr wrap="square" anchor="t" lIns="0" rIns="0" tIns="0" bIns="0">
-            <a:spAutoFit/>
-          </a:bodyPr>
-          <a:lstStyle/>
-          <a:p>
-            <a:pPr>
-              <a:spcAft>
-                <a:spcPts val="0"/>
-              </a:spcAft>
-            </a:pPr>
-            <a:r>
-              <a:rPr sz="1050">
-                <a:solidFill>
                   <a:srgbClr val="0E2238"/>
                 </a:solidFill>
                 <a:latin typeface="Cambria Math"/>
@@ -6569,7 +6849,7 @@
         </p:nvSpPr>
         <p:spPr>
           <a:xfrm>
-            <a:off x="868680" y="4279392"/>
+            <a:off x="868680" y="3974595"/>
             <a:ext cx="4663440" cy="10972"/>
           </a:xfrm>
           <a:prstGeom prst="rect">
@@ -6602,6 +6882,7 @@
           <a:lstStyle/>
           <a:p>
             <a:pPr algn="ctr"/>
+            <a:endParaRPr/>
           </a:p>
         </p:txBody>
       </p:sp>
@@ -6613,8 +6894,8 @@
         </p:nvSpPr>
         <p:spPr>
           <a:xfrm>
-            <a:off x="868680" y="4352544"/>
-            <a:ext cx="1508760" cy="457200"/>
+            <a:off x="868679" y="4047747"/>
+            <a:ext cx="4663439" cy="461665"/>
           </a:xfrm>
           <a:prstGeom prst="rect">
             <a:avLst/>
@@ -6622,7 +6903,7 @@
           <a:noFill/>
         </p:spPr>
         <p:txBody>
-          <a:bodyPr wrap="square" anchor="t" lIns="0" rIns="0" tIns="0" bIns="0">
+          <a:bodyPr wrap="square" lIns="0" tIns="0" rIns="0" bIns="0" anchor="t">
             <a:spAutoFit/>
           </a:bodyPr>
           <a:lstStyle/>
@@ -6633,14 +6914,20 @@
               </a:spcAft>
             </a:pPr>
             <a:r>
-              <a:rPr sz="1100">
+              <a:rPr lang="en-AU" sz="1100" dirty="0">
                 <a:solidFill>
                   <a:srgbClr val="2A6FD1"/>
                 </a:solidFill>
                 <a:latin typeface="Segoe UI Semibold"/>
               </a:rPr>
-              <a:t>State</a:t>
-            </a:r>
+              <a:t>MODELLED AS</a:t>
+            </a:r>
+            <a:endParaRPr sz="1100" dirty="0">
+              <a:solidFill>
+                <a:srgbClr val="2A6FD1"/>
+              </a:solidFill>
+              <a:latin typeface="Segoe UI Semibold"/>
+            </a:endParaRPr>
           </a:p>
           <a:p>
             <a:pPr>
@@ -6649,124 +6936,20 @@
               </a:spcAft>
             </a:pPr>
             <a:r>
-              <a:rPr sz="950">
+              <a:rPr lang="en-AU" sz="950" dirty="0">
                 <a:solidFill>
                   <a:srgbClr val="56677A"/>
                 </a:solidFill>
                 <a:latin typeface="Segoe UI"/>
               </a:rPr>
-              <a:t>jobs, free machine capacity</a:t>
-            </a:r>
-          </a:p>
-        </p:txBody>
-      </p:sp>
-      <p:sp>
-        <p:nvSpPr>
-          <p:cNvPr id="44" name="TextBox 43"/>
-          <p:cNvSpPr txBox="1"/>
-          <p:nvPr/>
-        </p:nvSpPr>
-        <p:spPr>
-          <a:xfrm>
-            <a:off x="2459736" y="4352544"/>
-            <a:ext cx="1508760" cy="457200"/>
-          </a:xfrm>
-          <a:prstGeom prst="rect">
-            <a:avLst/>
-          </a:prstGeom>
-          <a:noFill/>
-        </p:spPr>
-        <p:txBody>
-          <a:bodyPr wrap="square" anchor="t" lIns="0" rIns="0" tIns="0" bIns="0">
-            <a:spAutoFit/>
-          </a:bodyPr>
-          <a:lstStyle/>
-          <a:p>
-            <a:pPr>
-              <a:spcAft>
-                <a:spcPts val="0"/>
-              </a:spcAft>
-            </a:pPr>
-            <a:r>
-              <a:rPr sz="1100">
-                <a:solidFill>
-                  <a:srgbClr val="2A6FD1"/>
-                </a:solidFill>
-                <a:latin typeface="Segoe UI Semibold"/>
-              </a:rPr>
-              <a:t>Action</a:t>
-            </a:r>
-          </a:p>
-          <a:p>
-            <a:pPr>
-              <a:spcAft>
-                <a:spcPts val="0"/>
-              </a:spcAft>
-            </a:pPr>
-            <a:r>
-              <a:rPr sz="950">
-                <a:solidFill>
-                  <a:srgbClr val="56677A"/>
-                </a:solidFill>
-                <a:latin typeface="Segoe UI"/>
-              </a:rPr>
-              <a:t>start a job, or wait</a:t>
-            </a:r>
-          </a:p>
-        </p:txBody>
-      </p:sp>
-      <p:sp>
-        <p:nvSpPr>
-          <p:cNvPr id="45" name="TextBox 44"/>
-          <p:cNvSpPr txBox="1"/>
-          <p:nvPr/>
-        </p:nvSpPr>
-        <p:spPr>
-          <a:xfrm>
-            <a:off x="4050791" y="4352544"/>
-            <a:ext cx="1508760" cy="457200"/>
-          </a:xfrm>
-          <a:prstGeom prst="rect">
-            <a:avLst/>
-          </a:prstGeom>
-          <a:noFill/>
-        </p:spPr>
-        <p:txBody>
-          <a:bodyPr wrap="square" anchor="t" lIns="0" rIns="0" tIns="0" bIns="0">
-            <a:spAutoFit/>
-          </a:bodyPr>
-          <a:lstStyle/>
-          <a:p>
-            <a:pPr>
-              <a:spcAft>
-                <a:spcPts val="0"/>
-              </a:spcAft>
-            </a:pPr>
-            <a:r>
-              <a:rPr sz="1100">
-                <a:solidFill>
-                  <a:srgbClr val="2A6FD1"/>
-                </a:solidFill>
-                <a:latin typeface="Segoe UI Semibold"/>
-              </a:rPr>
-              <a:t>Reward</a:t>
-            </a:r>
-          </a:p>
-          <a:p>
-            <a:pPr>
-              <a:spcAft>
-                <a:spcPts val="0"/>
-              </a:spcAft>
-            </a:pPr>
-            <a:r>
-              <a:rPr sz="950">
-                <a:solidFill>
-                  <a:srgbClr val="56677A"/>
-                </a:solidFill>
-                <a:latin typeface="Segoe UI"/>
-              </a:rPr>
-              <a:t>minus the lateness cost</a:t>
-            </a:r>
+              <a:t>Resource Constrained Scheduling Optimisation (RCSO) with Markov Decision Process (MDP) modelling for reinforcement learning</a:t>
+            </a:r>
+            <a:endParaRPr sz="950" dirty="0">
+              <a:solidFill>
+                <a:srgbClr val="56677A"/>
+              </a:solidFill>
+              <a:latin typeface="Segoe UI"/>
+            </a:endParaRPr>
           </a:p>
         </p:txBody>
       </p:sp>
@@ -6778,7 +6961,7 @@
         </p:nvSpPr>
         <p:spPr>
           <a:xfrm>
-            <a:off x="5943600" y="1600200"/>
+            <a:off x="5943600" y="1295403"/>
             <a:ext cx="5623560" cy="3246120"/>
           </a:xfrm>
           <a:prstGeom prst="roundRect">
@@ -6815,6 +6998,7 @@
           <a:lstStyle/>
           <a:p>
             <a:pPr algn="ctr"/>
+            <a:endParaRPr/>
           </a:p>
         </p:txBody>
       </p:sp>
@@ -6826,7 +7010,7 @@
         </p:nvSpPr>
         <p:spPr>
           <a:xfrm>
-            <a:off x="6172200" y="1737360"/>
+            <a:off x="6172200" y="1432563"/>
             <a:ext cx="5120640" cy="274320"/>
           </a:xfrm>
           <a:prstGeom prst="rect">
@@ -6835,7 +7019,7 @@
           <a:noFill/>
         </p:spPr>
         <p:txBody>
-          <a:bodyPr wrap="square" anchor="t" lIns="0" rIns="0" tIns="0" bIns="0">
+          <a:bodyPr wrap="square" lIns="0" tIns="0" rIns="0" bIns="0" anchor="t">
             <a:spAutoFit/>
           </a:bodyPr>
           <a:lstStyle/>
@@ -6865,7 +7049,7 @@
         </p:nvSpPr>
         <p:spPr>
           <a:xfrm>
-            <a:off x="6172200" y="1993392"/>
+            <a:off x="6172200" y="1688595"/>
             <a:ext cx="2606040" cy="548640"/>
           </a:xfrm>
           <a:prstGeom prst="roundRect">
@@ -6902,6 +7086,7 @@
           <a:lstStyle/>
           <a:p>
             <a:pPr algn="ctr"/>
+            <a:endParaRPr/>
           </a:p>
         </p:txBody>
       </p:sp>
@@ -6913,7 +7098,7 @@
         </p:nvSpPr>
         <p:spPr>
           <a:xfrm>
-            <a:off x="6281928" y="2029968"/>
+            <a:off x="6281928" y="1725171"/>
             <a:ext cx="2423160" cy="502920"/>
           </a:xfrm>
           <a:prstGeom prst="rect">
@@ -6922,7 +7107,7 @@
           <a:noFill/>
         </p:spPr>
         <p:txBody>
-          <a:bodyPr wrap="square" anchor="t" lIns="0" rIns="0" tIns="0" bIns="0">
+          <a:bodyPr wrap="square" lIns="0" tIns="0" rIns="0" bIns="0" anchor="t">
             <a:spAutoFit/>
           </a:bodyPr>
           <a:lstStyle/>
@@ -6968,7 +7153,7 @@
         </p:nvSpPr>
         <p:spPr>
           <a:xfrm>
-            <a:off x="8869680" y="1993392"/>
+            <a:off x="8869680" y="1688595"/>
             <a:ext cx="2606040" cy="548640"/>
           </a:xfrm>
           <a:prstGeom prst="roundRect">
@@ -7005,6 +7190,7 @@
           <a:lstStyle/>
           <a:p>
             <a:pPr algn="ctr"/>
+            <a:endParaRPr/>
           </a:p>
         </p:txBody>
       </p:sp>
@@ -7016,7 +7202,7 @@
         </p:nvSpPr>
         <p:spPr>
           <a:xfrm>
-            <a:off x="8979407" y="2029968"/>
+            <a:off x="8979407" y="1725171"/>
             <a:ext cx="2423160" cy="502920"/>
           </a:xfrm>
           <a:prstGeom prst="rect">
@@ -7025,7 +7211,7 @@
           <a:noFill/>
         </p:spPr>
         <p:txBody>
-          <a:bodyPr wrap="square" anchor="t" lIns="0" rIns="0" tIns="0" bIns="0">
+          <a:bodyPr wrap="square" lIns="0" tIns="0" rIns="0" bIns="0" anchor="t">
             <a:spAutoFit/>
           </a:bodyPr>
           <a:lstStyle/>
@@ -7036,7 +7222,7 @@
               </a:spcAft>
             </a:pPr>
             <a:r>
-              <a:rPr sz="1150">
+              <a:rPr sz="1150" dirty="0">
                 <a:solidFill>
                   <a:srgbClr val="0E2238"/>
                 </a:solidFill>
@@ -7052,7 +7238,7 @@
               </a:spcAft>
             </a:pPr>
             <a:r>
-              <a:rPr sz="900">
+              <a:rPr sz="900" dirty="0">
                 <a:solidFill>
                   <a:srgbClr val="56677A"/>
                 </a:solidFill>
@@ -7071,8 +7257,8 @@
         </p:nvSpPr>
         <p:spPr>
           <a:xfrm>
-            <a:off x="6172200" y="2633472"/>
-            <a:ext cx="5212080" cy="228600"/>
+            <a:off x="6172200" y="2328675"/>
+            <a:ext cx="5212080" cy="146194"/>
           </a:xfrm>
           <a:prstGeom prst="rect">
             <a:avLst/>
@@ -7080,7 +7266,7 @@
           <a:noFill/>
         </p:spPr>
         <p:txBody>
-          <a:bodyPr wrap="square" anchor="t" lIns="0" rIns="0" tIns="0" bIns="0">
+          <a:bodyPr wrap="square" lIns="0" tIns="0" rIns="0" bIns="0" anchor="t">
             <a:spAutoFit/>
           </a:bodyPr>
           <a:lstStyle/>
@@ -7091,14 +7277,29 @@
               </a:spcAft>
             </a:pPr>
             <a:r>
-              <a:rPr sz="950">
+              <a:rPr sz="950" dirty="0">
                 <a:solidFill>
                   <a:srgbClr val="2A6FD1"/>
                 </a:solidFill>
                 <a:latin typeface="Segoe UI Semibold"/>
               </a:rPr>
-              <a:t>Reinforcement learning (PPO and A2C), five ways of choosing the action</a:t>
-            </a:r>
+              <a:t>Reinforcement learning (PPO and A2C</a:t>
+            </a:r>
+            <a:r>
+              <a:rPr lang="en-AU" sz="950" dirty="0">
+                <a:solidFill>
+                  <a:srgbClr val="2A6FD1"/>
+                </a:solidFill>
+                <a:latin typeface="Segoe UI Semibold"/>
+              </a:rPr>
+              <a:t>) across 5 variations of action-space modelling</a:t>
+            </a:r>
+            <a:endParaRPr sz="950" dirty="0">
+              <a:solidFill>
+                <a:srgbClr val="2A6FD1"/>
+              </a:solidFill>
+              <a:latin typeface="Segoe UI Semibold"/>
+            </a:endParaRPr>
           </a:p>
         </p:txBody>
       </p:sp>
@@ -7110,7 +7311,7 @@
         </p:nvSpPr>
         <p:spPr>
           <a:xfrm>
-            <a:off x="6172200" y="2907791"/>
+            <a:off x="6172200" y="2602994"/>
             <a:ext cx="2377440" cy="292608"/>
           </a:xfrm>
           <a:prstGeom prst="rect">
@@ -7119,7 +7320,7 @@
           <a:noFill/>
         </p:spPr>
         <p:txBody>
-          <a:bodyPr wrap="square" anchor="ctr" lIns="0" rIns="0" tIns="0" bIns="0">
+          <a:bodyPr wrap="square" lIns="0" tIns="0" rIns="0" bIns="0" anchor="ctr">
             <a:spAutoFit/>
           </a:bodyPr>
           <a:lstStyle/>
@@ -7158,7 +7359,7 @@
         </p:nvSpPr>
         <p:spPr>
           <a:xfrm>
-            <a:off x="8641080" y="2907791"/>
+            <a:off x="8641080" y="2602994"/>
             <a:ext cx="2441448" cy="274320"/>
           </a:xfrm>
           <a:prstGeom prst="roundRect">
@@ -7189,7 +7390,7 @@
           </a:fontRef>
         </p:style>
         <p:txBody>
-          <a:bodyPr rtlCol="0" anchor="ctr" wrap="square" lIns="45720" rIns="45720" tIns="0" bIns="0"/>
+          <a:bodyPr wrap="square" lIns="45720" tIns="0" rIns="45720" bIns="0" rtlCol="0" anchor="ctr"/>
           <a:lstStyle/>
           <a:p>
             <a:pPr algn="ctr"/>
@@ -7213,7 +7414,7 @@
         </p:nvSpPr>
         <p:spPr>
           <a:xfrm>
-            <a:off x="6172200" y="3255263"/>
+            <a:off x="6172200" y="2950466"/>
             <a:ext cx="2377440" cy="292608"/>
           </a:xfrm>
           <a:prstGeom prst="rect">
@@ -7222,7 +7423,7 @@
           <a:noFill/>
         </p:spPr>
         <p:txBody>
-          <a:bodyPr wrap="square" anchor="ctr" lIns="0" rIns="0" tIns="0" bIns="0">
+          <a:bodyPr wrap="square" lIns="0" tIns="0" rIns="0" bIns="0" anchor="ctr">
             <a:spAutoFit/>
           </a:bodyPr>
           <a:lstStyle/>
@@ -7233,7 +7434,7 @@
               </a:spcAft>
             </a:pPr>
             <a:r>
-              <a:rPr sz="1100">
+              <a:rPr sz="1100" dirty="0">
                 <a:solidFill>
                   <a:srgbClr val="0E2238"/>
                 </a:solidFill>
@@ -7242,7 +7443,7 @@
               <a:t>Option 1  </a:t>
             </a:r>
             <a:r>
-              <a:rPr sz="1100">
+              <a:rPr sz="1100" dirty="0">
                 <a:solidFill>
                   <a:srgbClr val="56677A"/>
                 </a:solidFill>
@@ -7261,7 +7462,7 @@
         </p:nvSpPr>
         <p:spPr>
           <a:xfrm>
-            <a:off x="8641080" y="3255263"/>
+            <a:off x="8641080" y="2950466"/>
             <a:ext cx="1207008" cy="274320"/>
           </a:xfrm>
           <a:prstGeom prst="roundRect">
@@ -7292,12 +7493,12 @@
           </a:fontRef>
         </p:style>
         <p:txBody>
-          <a:bodyPr rtlCol="0" anchor="ctr" wrap="square" lIns="45720" rIns="45720" tIns="0" bIns="0"/>
+          <a:bodyPr wrap="square" lIns="45720" tIns="0" rIns="45720" bIns="0" rtlCol="0" anchor="ctr"/>
           <a:lstStyle/>
           <a:p>
             <a:pPr algn="ctr"/>
             <a:r>
-              <a:rPr sz="900">
+              <a:rPr sz="900" dirty="0">
                 <a:solidFill>
                   <a:srgbClr val="FFFFFF"/>
                 </a:solidFill>
@@ -7316,7 +7517,7 @@
         </p:nvSpPr>
         <p:spPr>
           <a:xfrm>
-            <a:off x="9875519" y="3255263"/>
+            <a:off x="9875519" y="2950466"/>
             <a:ext cx="1207008" cy="274320"/>
           </a:xfrm>
           <a:prstGeom prst="roundRect">
@@ -7347,12 +7548,12 @@
           </a:fontRef>
         </p:style>
         <p:txBody>
-          <a:bodyPr rtlCol="0" anchor="ctr" wrap="square" lIns="45720" rIns="45720" tIns="0" bIns="0"/>
+          <a:bodyPr wrap="square" lIns="45720" tIns="0" rIns="45720" bIns="0" rtlCol="0" anchor="ctr"/>
           <a:lstStyle/>
           <a:p>
             <a:pPr algn="ctr"/>
             <a:r>
-              <a:rPr sz="900">
+              <a:rPr sz="900" dirty="0">
                 <a:solidFill>
                   <a:srgbClr val="FFFFFF"/>
                 </a:solidFill>
@@ -7371,7 +7572,7 @@
         </p:nvSpPr>
         <p:spPr>
           <a:xfrm>
-            <a:off x="6172200" y="3602735"/>
+            <a:off x="6172200" y="3297938"/>
             <a:ext cx="2377440" cy="292608"/>
           </a:xfrm>
           <a:prstGeom prst="rect">
@@ -7380,7 +7581,7 @@
           <a:noFill/>
         </p:spPr>
         <p:txBody>
-          <a:bodyPr wrap="square" anchor="ctr" lIns="0" rIns="0" tIns="0" bIns="0">
+          <a:bodyPr wrap="square" lIns="0" tIns="0" rIns="0" bIns="0" anchor="ctr">
             <a:spAutoFit/>
           </a:bodyPr>
           <a:lstStyle/>
@@ -7419,7 +7620,7 @@
         </p:nvSpPr>
         <p:spPr>
           <a:xfrm>
-            <a:off x="8641080" y="3602735"/>
+            <a:off x="8641080" y="3297938"/>
             <a:ext cx="1207008" cy="274320"/>
           </a:xfrm>
           <a:prstGeom prst="roundRect">
@@ -7450,7 +7651,7 @@
           </a:fontRef>
         </p:style>
         <p:txBody>
-          <a:bodyPr rtlCol="0" anchor="ctr" wrap="square" lIns="45720" rIns="45720" tIns="0" bIns="0"/>
+          <a:bodyPr wrap="square" lIns="45720" tIns="0" rIns="45720" bIns="0" rtlCol="0" anchor="ctr"/>
           <a:lstStyle/>
           <a:p>
             <a:pPr algn="ctr"/>
@@ -7474,7 +7675,7 @@
         </p:nvSpPr>
         <p:spPr>
           <a:xfrm>
-            <a:off x="9902952" y="3602735"/>
+            <a:off x="9875244" y="3297938"/>
             <a:ext cx="1207008" cy="274320"/>
           </a:xfrm>
           <a:prstGeom prst="roundRect">
@@ -7505,12 +7706,12 @@
           </a:fontRef>
         </p:style>
         <p:txBody>
-          <a:bodyPr rtlCol="0" anchor="ctr" wrap="square" lIns="45720" rIns="45720" tIns="0" bIns="0"/>
+          <a:bodyPr wrap="square" lIns="45720" tIns="0" rIns="45720" bIns="0" rtlCol="0" anchor="ctr"/>
           <a:lstStyle/>
           <a:p>
             <a:pPr algn="ctr"/>
             <a:r>
-              <a:rPr sz="900">
+              <a:rPr sz="900" dirty="0">
                 <a:solidFill>
                   <a:srgbClr val="FFFFFF"/>
                 </a:solidFill>
@@ -7518,6 +7719,21 @@
               </a:rPr>
               <a:t>machine: First-Fit</a:t>
             </a:r>
+            <a:r>
+              <a:rPr lang="en-AU" sz="900" dirty="0">
+                <a:solidFill>
+                  <a:srgbClr val="FFFFFF"/>
+                </a:solidFill>
+                <a:latin typeface="Segoe UI"/>
+              </a:rPr>
+              <a:t>*</a:t>
+            </a:r>
+            <a:endParaRPr sz="900" dirty="0">
+              <a:solidFill>
+                <a:srgbClr val="FFFFFF"/>
+              </a:solidFill>
+              <a:latin typeface="Segoe UI"/>
+            </a:endParaRPr>
           </a:p>
         </p:txBody>
       </p:sp>
@@ -7529,7 +7745,7 @@
         </p:nvSpPr>
         <p:spPr>
           <a:xfrm>
-            <a:off x="6172200" y="3950208"/>
+            <a:off x="6172200" y="3645411"/>
             <a:ext cx="2377440" cy="292608"/>
           </a:xfrm>
           <a:prstGeom prst="rect">
@@ -7538,7 +7754,7 @@
           <a:noFill/>
         </p:spPr>
         <p:txBody>
-          <a:bodyPr wrap="square" anchor="ctr" lIns="0" rIns="0" tIns="0" bIns="0">
+          <a:bodyPr wrap="square" lIns="0" tIns="0" rIns="0" bIns="0" anchor="ctr">
             <a:spAutoFit/>
           </a:bodyPr>
           <a:lstStyle/>
@@ -7577,7 +7793,7 @@
         </p:nvSpPr>
         <p:spPr>
           <a:xfrm>
-            <a:off x="8641080" y="3950208"/>
+            <a:off x="8641080" y="3645411"/>
             <a:ext cx="1207008" cy="274320"/>
           </a:xfrm>
           <a:prstGeom prst="roundRect">
@@ -7608,18 +7824,36 @@
           </a:fontRef>
         </p:style>
         <p:txBody>
-          <a:bodyPr rtlCol="0" anchor="ctr" wrap="square" lIns="45720" rIns="45720" tIns="0" bIns="0"/>
+          <a:bodyPr wrap="square" lIns="45720" tIns="0" rIns="45720" bIns="0" rtlCol="0" anchor="ctr"/>
           <a:lstStyle/>
           <a:p>
             <a:pPr algn="ctr"/>
             <a:r>
-              <a:rPr sz="900">
+              <a:rPr sz="900" dirty="0">
                 <a:solidFill>
                   <a:srgbClr val="FFFFFF"/>
                 </a:solidFill>
                 <a:latin typeface="Segoe UI"/>
               </a:rPr>
-              <a:t>job (+ ATC cue)</a:t>
+              <a:t>job (+ ATC </a:t>
+            </a:r>
+            <a:r>
+              <a:rPr lang="en-AU" sz="900" dirty="0">
+                <a:solidFill>
+                  <a:srgbClr val="FFFFFF"/>
+                </a:solidFill>
+                <a:latin typeface="Segoe UI"/>
+              </a:rPr>
+              <a:t>hint</a:t>
+            </a:r>
+            <a:r>
+              <a:rPr sz="900" dirty="0">
+                <a:solidFill>
+                  <a:srgbClr val="FFFFFF"/>
+                </a:solidFill>
+                <a:latin typeface="Segoe UI"/>
+              </a:rPr>
+              <a:t>)</a:t>
             </a:r>
           </a:p>
         </p:txBody>
@@ -7632,7 +7866,7 @@
         </p:nvSpPr>
         <p:spPr>
           <a:xfrm>
-            <a:off x="9875519" y="3950208"/>
+            <a:off x="9875519" y="3645411"/>
             <a:ext cx="1207008" cy="274320"/>
           </a:xfrm>
           <a:prstGeom prst="roundRect">
@@ -7663,12 +7897,12 @@
           </a:fontRef>
         </p:style>
         <p:txBody>
-          <a:bodyPr rtlCol="0" anchor="ctr" wrap="square" lIns="45720" rIns="45720" tIns="0" bIns="0"/>
+          <a:bodyPr wrap="square" lIns="45720" tIns="0" rIns="45720" bIns="0" rtlCol="0" anchor="ctr"/>
           <a:lstStyle/>
           <a:p>
             <a:pPr algn="ctr"/>
             <a:r>
-              <a:rPr sz="900">
+              <a:rPr sz="900" dirty="0">
                 <a:solidFill>
                   <a:srgbClr val="FFFFFF"/>
                 </a:solidFill>
@@ -7676,6 +7910,21 @@
               </a:rPr>
               <a:t>machine: First-Fit</a:t>
             </a:r>
+            <a:r>
+              <a:rPr lang="en-AU" sz="900" dirty="0">
+                <a:solidFill>
+                  <a:srgbClr val="FFFFFF"/>
+                </a:solidFill>
+                <a:latin typeface="Segoe UI"/>
+              </a:rPr>
+              <a:t>*</a:t>
+            </a:r>
+            <a:endParaRPr sz="900" dirty="0">
+              <a:solidFill>
+                <a:srgbClr val="FFFFFF"/>
+              </a:solidFill>
+              <a:latin typeface="Segoe UI"/>
+            </a:endParaRPr>
           </a:p>
         </p:txBody>
       </p:sp>
@@ -7687,7 +7936,7 @@
         </p:nvSpPr>
         <p:spPr>
           <a:xfrm>
-            <a:off x="6172200" y="4297680"/>
+            <a:off x="6172200" y="3992883"/>
             <a:ext cx="2377440" cy="292608"/>
           </a:xfrm>
           <a:prstGeom prst="rect">
@@ -7696,7 +7945,7 @@
           <a:noFill/>
         </p:spPr>
         <p:txBody>
-          <a:bodyPr wrap="square" anchor="ctr" lIns="0" rIns="0" tIns="0" bIns="0">
+          <a:bodyPr wrap="square" lIns="0" tIns="0" rIns="0" bIns="0" anchor="ctr">
             <a:spAutoFit/>
           </a:bodyPr>
           <a:lstStyle/>
@@ -7735,7 +7984,7 @@
         </p:nvSpPr>
         <p:spPr>
           <a:xfrm>
-            <a:off x="8641080" y="4297680"/>
+            <a:off x="8641080" y="3992883"/>
             <a:ext cx="1179576" cy="274320"/>
           </a:xfrm>
           <a:prstGeom prst="roundRect">
@@ -7766,7 +8015,7 @@
           </a:fontRef>
         </p:style>
         <p:txBody>
-          <a:bodyPr rtlCol="0" anchor="ctr" wrap="square" lIns="45720" rIns="45720" tIns="0" bIns="0"/>
+          <a:bodyPr wrap="square" lIns="45720" tIns="0" rIns="45720" bIns="0" rtlCol="0" anchor="ctr"/>
           <a:lstStyle/>
           <a:p>
             <a:pPr algn="ctr"/>
@@ -7790,7 +8039,7 @@
         </p:nvSpPr>
         <p:spPr>
           <a:xfrm>
-            <a:off x="9875519" y="4297680"/>
+            <a:off x="9875519" y="3992883"/>
             <a:ext cx="1179576" cy="274320"/>
           </a:xfrm>
           <a:prstGeom prst="roundRect">
@@ -7821,7 +8070,7 @@
           </a:fontRef>
         </p:style>
         <p:txBody>
-          <a:bodyPr rtlCol="0" anchor="ctr" wrap="square" lIns="45720" rIns="45720" tIns="0" bIns="0"/>
+          <a:bodyPr wrap="square" lIns="45720" tIns="0" rIns="45720" bIns="0" rtlCol="0" anchor="ctr"/>
           <a:lstStyle/>
           <a:p>
             <a:pPr algn="ctr"/>
@@ -7845,7 +8094,7 @@
         </p:nvSpPr>
         <p:spPr>
           <a:xfrm>
-            <a:off x="8641080" y="4636008"/>
+            <a:off x="8641080" y="4331211"/>
             <a:ext cx="128016" cy="128016"/>
           </a:xfrm>
           <a:prstGeom prst="roundRect">
@@ -7880,6 +8129,7 @@
           <a:lstStyle/>
           <a:p>
             <a:pPr algn="ctr"/>
+            <a:endParaRPr/>
           </a:p>
         </p:txBody>
       </p:sp>
@@ -7891,7 +8141,7 @@
         </p:nvSpPr>
         <p:spPr>
           <a:xfrm>
-            <a:off x="8823960" y="4608576"/>
+            <a:off x="8823960" y="4322251"/>
             <a:ext cx="1280160" cy="182880"/>
           </a:xfrm>
           <a:prstGeom prst="rect">
@@ -7900,7 +8150,7 @@
           <a:noFill/>
         </p:spPr>
         <p:txBody>
-          <a:bodyPr wrap="square" anchor="t" lIns="0" rIns="0" tIns="0" bIns="0">
+          <a:bodyPr wrap="square" lIns="0" tIns="0" rIns="0" bIns="0" anchor="t">
             <a:spAutoFit/>
           </a:bodyPr>
           <a:lstStyle/>
@@ -7911,7 +8161,7 @@
               </a:spcAft>
             </a:pPr>
             <a:r>
-              <a:rPr sz="900">
+              <a:rPr sz="900" dirty="0">
                 <a:solidFill>
                   <a:srgbClr val="56677A"/>
                 </a:solidFill>
@@ -7930,7 +8180,7 @@
         </p:nvSpPr>
         <p:spPr>
           <a:xfrm>
-            <a:off x="10104120" y="4636008"/>
+            <a:off x="10104120" y="4331211"/>
             <a:ext cx="128016" cy="128016"/>
           </a:xfrm>
           <a:prstGeom prst="roundRect">
@@ -7965,6 +8215,7 @@
           <a:lstStyle/>
           <a:p>
             <a:pPr algn="ctr"/>
+            <a:endParaRPr/>
           </a:p>
         </p:txBody>
       </p:sp>
@@ -7976,7 +8227,7 @@
         </p:nvSpPr>
         <p:spPr>
           <a:xfrm>
-            <a:off x="10287000" y="4608576"/>
+            <a:off x="10287000" y="4322251"/>
             <a:ext cx="1280160" cy="182880"/>
           </a:xfrm>
           <a:prstGeom prst="rect">
@@ -7985,7 +8236,7 @@
           <a:noFill/>
         </p:spPr>
         <p:txBody>
-          <a:bodyPr wrap="square" anchor="t" lIns="0" rIns="0" tIns="0" bIns="0">
+          <a:bodyPr wrap="square" lIns="0" tIns="0" rIns="0" bIns="0" anchor="t">
             <a:spAutoFit/>
           </a:bodyPr>
           <a:lstStyle/>
@@ -7996,13 +8247,109 @@
               </a:spcAft>
             </a:pPr>
             <a:r>
-              <a:rPr sz="900">
+              <a:rPr sz="900" dirty="0">
                 <a:solidFill>
                   <a:srgbClr val="56677A"/>
                 </a:solidFill>
                 <a:latin typeface="Segoe UI"/>
               </a:rPr>
               <a:t>chosen by a fixed rule</a:t>
+            </a:r>
+          </a:p>
+        </p:txBody>
+      </p:sp>
+      <p:sp>
+        <p:nvSpPr>
+          <p:cNvPr id="7" name="TextBox 6">
+            <a:extLst>
+              <a:ext uri="{FF2B5EF4-FFF2-40B4-BE49-F238E27FC236}">
+                <a16:creationId xmlns:a16="http://schemas.microsoft.com/office/drawing/2014/main" id="{ECA9E938-4076-3B99-3954-44544B6440C2}"/>
+              </a:ext>
+            </a:extLst>
+          </p:cNvPr>
+          <p:cNvSpPr txBox="1"/>
+          <p:nvPr/>
+        </p:nvSpPr>
+        <p:spPr>
+          <a:xfrm rot="16200000">
+            <a:off x="10238673" y="2914622"/>
+            <a:ext cx="2423160" cy="138499"/>
+          </a:xfrm>
+          <a:prstGeom prst="rect">
+            <a:avLst/>
+          </a:prstGeom>
+          <a:noFill/>
+        </p:spPr>
+        <p:txBody>
+          <a:bodyPr wrap="square" lIns="0" tIns="0" rIns="0" bIns="0" anchor="t">
+            <a:spAutoFit/>
+          </a:bodyPr>
+          <a:lstStyle/>
+          <a:p>
+            <a:pPr>
+              <a:spcAft>
+                <a:spcPts val="0"/>
+              </a:spcAft>
+            </a:pPr>
+            <a:r>
+              <a:rPr lang="en-AU" sz="900" dirty="0">
+                <a:solidFill>
+                  <a:srgbClr val="56677A"/>
+                </a:solidFill>
+                <a:latin typeface="Segoe UI"/>
+              </a:rPr>
+              <a:t>Other placement rules were tested*</a:t>
+            </a:r>
+            <a:endParaRPr sz="900" dirty="0">
+              <a:solidFill>
+                <a:srgbClr val="56677A"/>
+              </a:solidFill>
+              <a:latin typeface="Segoe UI"/>
+            </a:endParaRPr>
+          </a:p>
+        </p:txBody>
+      </p:sp>
+      <p:sp>
+        <p:nvSpPr>
+          <p:cNvPr id="11" name="TextBox 10">
+            <a:extLst>
+              <a:ext uri="{FF2B5EF4-FFF2-40B4-BE49-F238E27FC236}">
+                <a16:creationId xmlns:a16="http://schemas.microsoft.com/office/drawing/2014/main" id="{2ED2E0C4-6DD4-9C5A-2CBD-F8CD1A13E701}"/>
+              </a:ext>
+            </a:extLst>
+          </p:cNvPr>
+          <p:cNvSpPr txBox="1"/>
+          <p:nvPr/>
+        </p:nvSpPr>
+        <p:spPr>
+          <a:xfrm>
+            <a:off x="640080" y="4641169"/>
+            <a:ext cx="10927080" cy="369332"/>
+          </a:xfrm>
+          <a:prstGeom prst="rect">
+            <a:avLst/>
+          </a:prstGeom>
+          <a:noFill/>
+        </p:spPr>
+        <p:txBody>
+          <a:bodyPr wrap="square">
+            <a:spAutoFit/>
+          </a:bodyPr>
+          <a:lstStyle/>
+          <a:p>
+            <a:pPr>
+              <a:spcAft>
+                <a:spcPts val="400"/>
+              </a:spcAft>
+            </a:pPr>
+            <a:r>
+              <a:rPr lang="en-US" dirty="0">
+                <a:solidFill>
+                  <a:srgbClr val="0E2238"/>
+                </a:solidFill>
+                <a:latin typeface="Segoe UI Semibold"/>
+              </a:rPr>
+              <a:t>We explore different metric and job arrival scenarios to see if RL can outperform</a:t>
             </a:r>
           </a:p>
         </p:txBody>
@@ -8088,7 +8435,7 @@
         <p:spPr>
           <a:xfrm>
             <a:off x="640080" y="658368"/>
-            <a:ext cx="10881360" cy="914400"/>
+            <a:ext cx="10881360" cy="461665"/>
           </a:xfrm>
           <a:prstGeom prst="rect">
             <a:avLst/>
@@ -8107,14 +8454,20 @@
               </a:spcAft>
             </a:pPr>
             <a:r>
-              <a:rPr sz="3000">
+              <a:rPr lang="en-AU" sz="3000" dirty="0">
                 <a:solidFill>
                   <a:srgbClr val="0E2238"/>
                 </a:solidFill>
                 <a:latin typeface="Segoe UI Semibold"/>
               </a:rPr>
-              <a:t>The AI learned to match the best rules, but did not beat them</a:t>
-            </a:r>
+              <a:t>RL Almost Never Beat Classical Heuristics </a:t>
+            </a:r>
+            <a:endParaRPr sz="3000" dirty="0">
+              <a:solidFill>
+                <a:srgbClr val="0E2238"/>
+              </a:solidFill>
+              <a:latin typeface="Segoe UI Semibold"/>
+            </a:endParaRPr>
           </a:p>
         </p:txBody>
       </p:sp>
@@ -8273,7 +8626,7 @@
               </a:spcAft>
             </a:pPr>
             <a:r>
-              <a:rPr sz="1300">
+              <a:rPr lang="en-US" sz="1300" dirty="0">
                 <a:solidFill>
                   <a:srgbClr val="0E2238"/>
                 </a:solidFill>
@@ -8281,6 +8634,12 @@
               </a:rPr>
               <a:t>Busy machines: cost on 50 fresh test cases</a:t>
             </a:r>
+            <a:endParaRPr sz="1300" dirty="0">
+              <a:solidFill>
+                <a:srgbClr val="0E2238"/>
+              </a:solidFill>
+              <a:latin typeface="Segoe UI Semibold"/>
+            </a:endParaRPr>
           </a:p>
         </p:txBody>
       </p:sp>
@@ -8583,7 +8942,7 @@
         <p:spPr>
           <a:xfrm>
             <a:off x="640080" y="365760"/>
-            <a:ext cx="8229600" cy="274320"/>
+            <a:ext cx="8229600" cy="184666"/>
           </a:xfrm>
           <a:prstGeom prst="rect">
             <a:avLst/>
@@ -8602,14 +8961,20 @@
               </a:spcAft>
             </a:pPr>
             <a:r>
-              <a:rPr sz="1200">
+              <a:rPr lang="en-AU" sz="1200">
                 <a:solidFill>
                   <a:srgbClr val="2A6FD1"/>
                 </a:solidFill>
                 <a:latin typeface="Segoe UI Semibold"/>
               </a:rPr>
-              <a:t>WHAT I BUILT AND WHERE IT LEADS</a:t>
-            </a:r>
+              <a:t>PROFESSIONAL DEVELOPMENT AND FUTURE WORK</a:t>
+            </a:r>
+            <a:endParaRPr sz="1200" dirty="0">
+              <a:solidFill>
+                <a:srgbClr val="2A6FD1"/>
+              </a:solidFill>
+              <a:latin typeface="Segoe UI Semibold"/>
+            </a:endParaRPr>
           </a:p>
         </p:txBody>
       </p:sp>

--- a/app/slides/Final_Presentation.pptx
+++ b/app/slides/Final_Presentation.pptx
@@ -298,9 +298,7 @@
           <a:bodyPr/>
           <a:lstStyle/>
           <a:p>
-            <a:r>
-              <a:t>Open with the picture. Each block is a job on a machine; the orange ones finish after their deadline and cost money. Then the three numbers: nearly every business already runs on the cloud, an hour of downtime is very expensive, and the market is still growing. The same decision (which job next, on which machine) appears in hospitals, factories and deliveries, which is why a better scheduler matters beyond computing. Finish on the question: can reinforcement learning, a computer teaching itself by reward, schedule better than the best hand-made rule? [1] DigitalDefynd, 2026.</a:t>
-            </a:r>
+            <a:endParaRPr dirty="0"/>
           </a:p>
         </p:txBody>
       </p:sp>
@@ -368,9 +366,7 @@
           <a:bodyPr/>
           <a:lstStyle/>
           <a:p>
-            <a:r>
-              <a:t>Left: what every scheduler tries to minimise, the whole combined objective. Squared lateness punishes a few very late jobs more than many slightly late ones; linear lateness, the number of late jobs and energy are the other goals, and the lambdas set how much each one counts. Every method was scored on the full objective, with the weights of each term varied, to ask when RL is competitive when no single hand-made rule targets all the goals. The three words underneath are the MDP: state, action, reward. Right: what was compared on the same 50 unseen test cases per setting. Classic methods are 49 dispatching heuristics (a priority rule that picks the next job plus a placement rule that picks the machine) and an exact solver, CP-SAT, which gives a proven bound. The RL schedulers were trained with PPO and A2C and differ in how much the network decides: Option 0 picks the job and machine directly; Option 1 only picks which dispatching rule to apply; Options 2 and 3 learn a priority for the next job and a fixed rule places it (Option 3 adds the ATC index as an input); Option 4 chooses job and machine with two separate output heads. Every design had the same tuning budget. Then the button: a toy version you can train yourself.</a:t>
-            </a:r>
+            <a:endParaRPr dirty="0"/>
           </a:p>
         </p:txBody>
       </p:sp>
@@ -438,9 +434,7 @@
           <a:bodyPr/>
           <a:lstStyle/>
           <a:p>
-            <a:r>
-              <a:t>Left graph: busy machines, 50 fresh test cases the models had never seen. Lower is better. The grey bar is the best classic rule. The AI that copies a rule lands close to it; extra training did not help; learning completely on its own was worse and varied a lot between runs (the dots are separate training runs). Right graph: the same story in five scenarios, cost relative to the best rule. Be honest about the limits: 3 to 10 training runs per bar, exploratory results, no AI scheduler was significantly better than the best rule. Then send the audience to the Scheduler Race page to choose their own priorities (late jobs, waiting, energy) and see who wins.</a:t>
-            </a:r>
+            <a:endParaRPr dirty="0"/>
           </a:p>
         </p:txBody>
       </p:sp>
@@ -508,9 +502,7 @@
           <a:bodyPr/>
           <a:lstStyle/>
           <a:p>
-            <a:r>
-              <a:t>Skills: I turned a real cloud problem into mathematics, learned reinforcement and imitation learning, designed experiments with fresh test data, and reported a null result honestly. Link to the future: in second year I made quantum vibrations visible in MATLAB; this year I made scheduling decisions visible and interactive. The thread is the same, using computation to make hidden dynamics understandable to non-experts. Machine learning and mathematical optimisation are the direction I want to build a career in. Next: train for trade-offs between late jobs and energy, test forecasts of arriving jobs, explain why learning from scratch is unstable, and take a more active role in leading a project. [Replace the last bullet with your own next step.]</a:t>
-            </a:r>
+            <a:endParaRPr dirty="0"/>
           </a:p>
         </p:txBody>
       </p:sp>
@@ -2980,9 +2972,34 @@
 <p:sldMaster xmlns:a="http://schemas.openxmlformats.org/drawingml/2006/main" xmlns:r="http://schemas.openxmlformats.org/officeDocument/2006/relationships" xmlns:p="http://schemas.openxmlformats.org/presentationml/2006/main">
   <p:cSld>
     <p:bg>
-      <p:bgRef idx="1001">
-        <a:schemeClr val="bg1"/>
-      </p:bgRef>
+      <p:bgPr>
+        <a:gradFill flip="none" rotWithShape="1">
+          <a:gsLst>
+            <a:gs pos="0">
+              <a:schemeClr val="accent1">
+                <a:lumMod val="2000"/>
+                <a:lumOff val="98000"/>
+              </a:schemeClr>
+            </a:gs>
+            <a:gs pos="30266">
+              <a:srgbClr val="F7FAFD"/>
+            </a:gs>
+            <a:gs pos="17000">
+              <a:srgbClr val="F7F9FD"/>
+            </a:gs>
+            <a:gs pos="100000">
+              <a:schemeClr val="tx2">
+                <a:alpha val="8000"/>
+                <a:lumMod val="20000"/>
+                <a:lumOff val="80000"/>
+              </a:schemeClr>
+            </a:gs>
+          </a:gsLst>
+          <a:lin ang="10800000" scaled="1"/>
+          <a:tileRect/>
+        </a:gradFill>
+        <a:effectLst/>
+      </p:bgPr>
     </p:bg>
     <p:spTree>
       <p:nvGrpSpPr>
@@ -3487,36 +3504,6 @@
 <file path=ppt/slides/slide1.xml><?xml version="1.0" encoding="utf-8"?>
 <p:sld xmlns:a="http://schemas.openxmlformats.org/drawingml/2006/main" xmlns:r="http://schemas.openxmlformats.org/officeDocument/2006/relationships" xmlns:p="http://schemas.openxmlformats.org/presentationml/2006/main">
   <p:cSld>
-    <p:bg>
-      <p:bgPr>
-        <a:gradFill flip="none" rotWithShape="1">
-          <a:gsLst>
-            <a:gs pos="0">
-              <a:schemeClr val="accent1">
-                <a:lumMod val="2000"/>
-                <a:lumOff val="98000"/>
-              </a:schemeClr>
-            </a:gs>
-            <a:gs pos="30266">
-              <a:srgbClr val="F7FAFD"/>
-            </a:gs>
-            <a:gs pos="17000">
-              <a:srgbClr val="F7F9FD"/>
-            </a:gs>
-            <a:gs pos="100000">
-              <a:schemeClr val="tx2">
-                <a:alpha val="8000"/>
-                <a:lumMod val="20000"/>
-                <a:lumOff val="80000"/>
-              </a:schemeClr>
-            </a:gs>
-          </a:gsLst>
-          <a:lin ang="10800000" scaled="1"/>
-          <a:tileRect/>
-        </a:gradFill>
-        <a:effectLst/>
-      </p:bgPr>
-    </p:bg>
     <p:spTree>
       <p:nvGrpSpPr>
         <p:cNvPr id="1" name=""/>
@@ -3579,7 +3566,7 @@
         <p:spPr>
           <a:xfrm>
             <a:off x="640080" y="658368"/>
-            <a:ext cx="10881360" cy="984885"/>
+            <a:ext cx="10881360" cy="923330"/>
           </a:xfrm>
           <a:prstGeom prst="rect">
             <a:avLst/>
@@ -3598,7 +3585,12 @@
               </a:spcAft>
             </a:pPr>
             <a:r>
-              <a:rPr lang="en-AU" sz="3200" dirty="0"/>
+              <a:rPr lang="en-AU" sz="3000" dirty="0">
+                <a:solidFill>
+                  <a:srgbClr val="0E2238"/>
+                </a:solidFill>
+                <a:latin typeface="Segoe UI Semibold"/>
+              </a:rPr>
               <a:t>Packing Smarter: Can AI Learn to Outperform Traditional Methods for Managing Cloud Resources </a:t>
             </a:r>
             <a:endParaRPr sz="3000" dirty="0">
@@ -5454,14 +5446,6 @@
 <file path=ppt/slides/slide2.xml><?xml version="1.0" encoding="utf-8"?>
 <p:sld xmlns:a="http://schemas.openxmlformats.org/drawingml/2006/main" xmlns:r="http://schemas.openxmlformats.org/officeDocument/2006/relationships" xmlns:p="http://schemas.openxmlformats.org/presentationml/2006/main">
   <p:cSld>
-    <p:bg>
-      <p:bgPr>
-        <a:solidFill>
-          <a:srgbClr val="FFFFFF"/>
-        </a:solidFill>
-        <a:effectLst/>
-      </p:bgPr>
-    </p:bg>
     <p:spTree>
       <p:nvGrpSpPr>
         <p:cNvPr id="1" name=""/>
@@ -8365,14 +8349,6 @@
 <file path=ppt/slides/slide3.xml><?xml version="1.0" encoding="utf-8"?>
 <p:sld xmlns:a="http://schemas.openxmlformats.org/drawingml/2006/main" xmlns:r="http://schemas.openxmlformats.org/officeDocument/2006/relationships" xmlns:p="http://schemas.openxmlformats.org/presentationml/2006/main">
   <p:cSld>
-    <p:bg>
-      <p:bgPr>
-        <a:solidFill>
-          <a:srgbClr val="FFFFFF"/>
-        </a:solidFill>
-        <a:effectLst/>
-      </p:bgPr>
-    </p:bg>
     <p:spTree>
       <p:nvGrpSpPr>
         <p:cNvPr id="1" name=""/>
@@ -8396,7 +8372,7 @@
         <p:spPr>
           <a:xfrm>
             <a:off x="640080" y="365760"/>
-            <a:ext cx="8229600" cy="274320"/>
+            <a:ext cx="8229600" cy="184666"/>
           </a:xfrm>
           <a:prstGeom prst="rect">
             <a:avLst/>
@@ -8415,14 +8391,20 @@
               </a:spcAft>
             </a:pPr>
             <a:r>
-              <a:rPr sz="1200">
+              <a:rPr lang="en-AU" sz="1200" dirty="0">
                 <a:solidFill>
                   <a:srgbClr val="2A6FD1"/>
                 </a:solidFill>
                 <a:latin typeface="Segoe UI Semibold"/>
               </a:rPr>
-              <a:t>WHAT WE FOUND</a:t>
-            </a:r>
+              <a:t>THE RESULTS</a:t>
+            </a:r>
+            <a:endParaRPr sz="1200" dirty="0">
+              <a:solidFill>
+                <a:srgbClr val="2A6FD1"/>
+              </a:solidFill>
+              <a:latin typeface="Segoe UI Semibold"/>
+            </a:endParaRPr>
           </a:p>
         </p:txBody>
       </p:sp>
@@ -8557,7 +8539,7 @@
         </p:nvSpPr>
         <p:spPr>
           <a:xfrm>
-            <a:off x="640080" y="1600200"/>
+            <a:off x="640080" y="1421090"/>
             <a:ext cx="5349240" cy="3611880"/>
           </a:xfrm>
           <a:prstGeom prst="roundRect">
@@ -8606,7 +8588,7 @@
         </p:nvSpPr>
         <p:spPr>
           <a:xfrm>
-            <a:off x="868680" y="1719072"/>
+            <a:off x="868680" y="1539962"/>
             <a:ext cx="4937760" cy="274320"/>
           </a:xfrm>
           <a:prstGeom prst="rect">
@@ -8659,7 +8641,7 @@
         </p:blipFill>
         <p:spPr>
           <a:xfrm>
-            <a:off x="822959" y="2029968"/>
+            <a:off x="822959" y="1850858"/>
             <a:ext cx="4983480" cy="3180429"/>
           </a:xfrm>
           <a:prstGeom prst="rect">
@@ -8675,7 +8657,7 @@
         </p:nvSpPr>
         <p:spPr>
           <a:xfrm>
-            <a:off x="6217920" y="1600200"/>
+            <a:off x="6217920" y="1421090"/>
             <a:ext cx="5349240" cy="3611880"/>
           </a:xfrm>
           <a:prstGeom prst="roundRect">
@@ -8724,7 +8706,7 @@
         </p:nvSpPr>
         <p:spPr>
           <a:xfrm>
-            <a:off x="6446520" y="1719072"/>
+            <a:off x="6446520" y="1539962"/>
             <a:ext cx="4937760" cy="274320"/>
           </a:xfrm>
           <a:prstGeom prst="rect">
@@ -8771,7 +8753,7 @@
         </p:blipFill>
         <p:spPr>
           <a:xfrm>
-            <a:off x="6400800" y="2029968"/>
+            <a:off x="6400800" y="1850858"/>
             <a:ext cx="4983480" cy="3180429"/>
           </a:xfrm>
           <a:prstGeom prst="rect">
@@ -8787,8 +8769,8 @@
         </p:nvSpPr>
         <p:spPr>
           <a:xfrm>
-            <a:off x="640080" y="5349240"/>
-            <a:ext cx="7315200" cy="822960"/>
+            <a:off x="640080" y="5170130"/>
+            <a:ext cx="7315200" cy="1054135"/>
           </a:xfrm>
           <a:prstGeom prst="rect">
             <a:avLst/>
@@ -8807,7 +8789,7 @@
               </a:spcAft>
             </a:pPr>
             <a:r>
-              <a:rPr sz="1800">
+              <a:rPr sz="1800" dirty="0">
                 <a:solidFill>
                   <a:srgbClr val="0E2238"/>
                 </a:solidFill>
@@ -8823,14 +8805,20 @@
               </a:spcAft>
             </a:pPr>
             <a:r>
-              <a:rPr sz="1200">
+              <a:rPr lang="en-AU" sz="1200" dirty="0">
                 <a:solidFill>
                   <a:srgbClr val="56677A"/>
                 </a:solidFill>
                 <a:latin typeface="Segoe UI"/>
               </a:rPr>
-              <a:t>Exploratory results: 50 fresh test cases per scenario, 3 to 10 training runs per bar (dots).</a:t>
-            </a:r>
+              <a:t>But there is still opportunity. When the objective mixes several goals and jobs differ in importance, RL did beat the best rule by up to 10%. Online it needed far more training and closed most of the gap but did not overtake it. Moreover, on incredibly small problems RL did outperform. So the gap looks like a training and design problem worth pursuing, but I’ve yet to explore this insight.</a:t>
+            </a:r>
+            <a:endParaRPr sz="1200" dirty="0">
+              <a:solidFill>
+                <a:srgbClr val="56677A"/>
+              </a:solidFill>
+              <a:latin typeface="Segoe UI"/>
+            </a:endParaRPr>
           </a:p>
         </p:txBody>
       </p:sp>
@@ -8844,7 +8832,7 @@
         </p:nvSpPr>
         <p:spPr>
           <a:xfrm>
-            <a:off x="8229600" y="5394960"/>
+            <a:off x="8229600" y="5215850"/>
             <a:ext cx="3337560" cy="731520"/>
           </a:xfrm>
           <a:prstGeom prst="roundRect">
@@ -8911,14 +8899,6 @@
 <file path=ppt/slides/slide4.xml><?xml version="1.0" encoding="utf-8"?>
 <p:sld xmlns:a="http://schemas.openxmlformats.org/drawingml/2006/main" xmlns:r="http://schemas.openxmlformats.org/officeDocument/2006/relationships" xmlns:p="http://schemas.openxmlformats.org/presentationml/2006/main">
   <p:cSld>
-    <p:bg>
-      <p:bgPr>
-        <a:solidFill>
-          <a:srgbClr val="FFFFFF"/>
-        </a:solidFill>
-        <a:effectLst/>
-      </p:bgPr>
-    </p:bg>
     <p:spTree>
       <p:nvGrpSpPr>
         <p:cNvPr id="1" name=""/>
@@ -8961,7 +8941,7 @@
               </a:spcAft>
             </a:pPr>
             <a:r>
-              <a:rPr lang="en-AU" sz="1200">
+              <a:rPr lang="en-AU" sz="1200" dirty="0">
                 <a:solidFill>
                   <a:srgbClr val="2A6FD1"/>
                 </a:solidFill>
@@ -8980,14 +8960,14 @@
       </p:sp>
       <p:sp>
         <p:nvSpPr>
-          <p:cNvPr id="3" name="TextBox 2"/>
+          <p:cNvPr id="4" name="TextBox 3"/>
           <p:cNvSpPr txBox="1"/>
           <p:nvPr/>
         </p:nvSpPr>
         <p:spPr>
           <a:xfrm>
-            <a:off x="640080" y="658368"/>
-            <a:ext cx="10881360" cy="914400"/>
+            <a:off x="640080" y="6653912"/>
+            <a:ext cx="7315200" cy="274320"/>
           </a:xfrm>
           <a:prstGeom prst="rect">
             <a:avLst/>
@@ -9006,52 +8986,31 @@
               </a:spcAft>
             </a:pPr>
             <a:r>
-              <a:rPr sz="3000">
-                <a:solidFill>
-                  <a:srgbClr val="0E2238"/>
-                </a:solidFill>
-                <a:latin typeface="Segoe UI Semibold"/>
-              </a:rPr>
-              <a:t>From following a plan to leading the next project</a:t>
-            </a:r>
-          </a:p>
-        </p:txBody>
-      </p:sp>
-      <p:sp>
-        <p:nvSpPr>
-          <p:cNvPr id="4" name="TextBox 3"/>
-          <p:cNvSpPr txBox="1"/>
-          <p:nvPr/>
-        </p:nvSpPr>
-        <p:spPr>
-          <a:xfrm>
-            <a:off x="640080" y="6446520"/>
-            <a:ext cx="7315200" cy="274320"/>
-          </a:xfrm>
-          <a:prstGeom prst="rect">
-            <a:avLst/>
-          </a:prstGeom>
-          <a:noFill/>
-        </p:spPr>
-        <p:txBody>
-          <a:bodyPr wrap="square" lIns="0" tIns="0" rIns="0" bIns="0" anchor="t">
-            <a:spAutoFit/>
-          </a:bodyPr>
-          <a:lstStyle/>
-          <a:p>
-            <a:pPr>
-              <a:spcAft>
-                <a:spcPts val="600"/>
-              </a:spcAft>
-            </a:pPr>
-            <a:r>
-              <a:rPr sz="1000">
+              <a:rPr sz="1000" dirty="0">
                 <a:solidFill>
                   <a:srgbClr val="56677A"/>
                 </a:solidFill>
                 <a:latin typeface="Segoe UI"/>
               </a:rPr>
-              <a:t>Ethan Ty Riekert  |  Curtin University  |  Supervisors: Elham Mardaneh, Tony Mathew</a:t>
+              <a:t>Ethan Ty Riekert  |  Curtin University  |  Supervisors: Elham </a:t>
+            </a:r>
+            <a:r>
+              <a:rPr sz="1000" dirty="0" err="1">
+                <a:solidFill>
+                  <a:srgbClr val="56677A"/>
+                </a:solidFill>
+                <a:latin typeface="Segoe UI"/>
+              </a:rPr>
+              <a:t>Mardaneh</a:t>
+            </a:r>
+            <a:r>
+              <a:rPr sz="1000" dirty="0">
+                <a:solidFill>
+                  <a:srgbClr val="56677A"/>
+                </a:solidFill>
+                <a:latin typeface="Segoe UI"/>
+              </a:rPr>
+              <a:t>, Tony Mathew</a:t>
             </a:r>
           </a:p>
         </p:txBody>
@@ -9103,7 +9062,7 @@
         </p:nvSpPr>
         <p:spPr>
           <a:xfrm>
-            <a:off x="640080" y="1600200"/>
+            <a:off x="594360" y="756030"/>
             <a:ext cx="3520440" cy="3246120"/>
           </a:xfrm>
           <a:prstGeom prst="roundRect">
@@ -9152,7 +9111,7 @@
         </p:nvSpPr>
         <p:spPr>
           <a:xfrm>
-            <a:off x="914400" y="1600200"/>
+            <a:off x="868680" y="756030"/>
             <a:ext cx="822960" cy="64008"/>
           </a:xfrm>
           <a:prstGeom prst="rect">
@@ -9197,7 +9156,7 @@
         </p:nvSpPr>
         <p:spPr>
           <a:xfrm>
-            <a:off x="914400" y="1810512"/>
+            <a:off x="868680" y="947488"/>
             <a:ext cx="3017520" cy="365760"/>
           </a:xfrm>
           <a:prstGeom prst="rect">
@@ -9236,8 +9195,8 @@
         </p:nvSpPr>
         <p:spPr>
           <a:xfrm>
-            <a:off x="914400" y="2331720"/>
-            <a:ext cx="3017520" cy="2468880"/>
+            <a:off x="868680" y="1327291"/>
+            <a:ext cx="3017520" cy="2431435"/>
           </a:xfrm>
           <a:prstGeom prst="rect">
             <a:avLst/>
@@ -9256,7 +9215,16 @@
               </a:spcAft>
             </a:pPr>
             <a:r>
-              <a:rPr sz="1500">
+              <a:rPr lang="en-AU" sz="1500" dirty="0">
+                <a:solidFill>
+                  <a:srgbClr val="0E2238"/>
+                </a:solidFill>
+                <a:latin typeface="Segoe UI Semibold"/>
+              </a:rPr>
+              <a:t>Optimisation and </a:t>
+            </a:r>
+            <a:r>
+              <a:rPr sz="1500" dirty="0">
                 <a:solidFill>
                   <a:srgbClr val="0E2238"/>
                 </a:solidFill>
@@ -9272,14 +9240,20 @@
               </a:spcAft>
             </a:pPr>
             <a:r>
-              <a:rPr sz="1300">
+              <a:rPr lang="en-AU" sz="1300" dirty="0">
                 <a:solidFill>
                   <a:srgbClr val="56677A"/>
                 </a:solidFill>
                 <a:latin typeface="Segoe UI"/>
               </a:rPr>
-              <a:t>a cloud problem turned into mathematics</a:t>
-            </a:r>
+              <a:t>Modelling a cloud issue as a type of resource allocation problem</a:t>
+            </a:r>
+            <a:endParaRPr sz="1300" dirty="0">
+              <a:solidFill>
+                <a:srgbClr val="56677A"/>
+              </a:solidFill>
+              <a:latin typeface="Segoe UI"/>
+            </a:endParaRPr>
           </a:p>
           <a:p>
             <a:pPr>
@@ -9288,13 +9262,31 @@
               </a:spcAft>
             </a:pPr>
             <a:r>
-              <a:rPr sz="1500">
+              <a:rPr sz="1500" dirty="0">
                 <a:solidFill>
                   <a:srgbClr val="0E2238"/>
                 </a:solidFill>
                 <a:latin typeface="Segoe UI Semibold"/>
               </a:rPr>
-              <a:t>Machine learning</a:t>
+              <a:t>Machine </a:t>
+            </a:r>
+            <a:r>
+              <a:rPr lang="en-AU" sz="1500" dirty="0">
+                <a:solidFill>
+                  <a:srgbClr val="0E2238"/>
+                </a:solidFill>
+                <a:latin typeface="Segoe UI Semibold"/>
+              </a:rPr>
+              <a:t>L</a:t>
+            </a:r>
+            <a:r>
+              <a:rPr sz="1500" dirty="0">
+                <a:solidFill>
+                  <a:srgbClr val="0E2238"/>
+                </a:solidFill>
+                <a:latin typeface="Segoe UI Semibold"/>
+              </a:rPr>
+              <a:t>earning</a:t>
             </a:r>
           </a:p>
           <a:p>
@@ -9304,14 +9296,20 @@
               </a:spcAft>
             </a:pPr>
             <a:r>
-              <a:rPr sz="1300">
+              <a:rPr lang="en-AU" sz="1300" dirty="0">
                 <a:solidFill>
                   <a:srgbClr val="56677A"/>
                 </a:solidFill>
                 <a:latin typeface="Segoe UI"/>
               </a:rPr>
-              <a:t>reinforcement and imitation learning</a:t>
-            </a:r>
+              <a:t>Implementing varying RL algorithms</a:t>
+            </a:r>
+            <a:endParaRPr sz="1300" dirty="0">
+              <a:solidFill>
+                <a:srgbClr val="56677A"/>
+              </a:solidFill>
+              <a:latin typeface="Segoe UI"/>
+            </a:endParaRPr>
           </a:p>
           <a:p>
             <a:pPr>
@@ -9320,14 +9318,29 @@
               </a:spcAft>
             </a:pPr>
             <a:r>
-              <a:rPr sz="1500">
+              <a:rPr sz="1500" dirty="0">
                 <a:solidFill>
                   <a:srgbClr val="0E2238"/>
                 </a:solidFill>
                 <a:latin typeface="Segoe UI Semibold"/>
               </a:rPr>
-              <a:t>Research rigour</a:t>
-            </a:r>
+              <a:t>Research </a:t>
+            </a:r>
+            <a:r>
+              <a:rPr lang="en-AU" sz="1500" dirty="0">
+                <a:solidFill>
+                  <a:srgbClr val="0E2238"/>
+                </a:solidFill>
+                <a:latin typeface="Segoe UI Semibold"/>
+              </a:rPr>
+              <a:t>and Communication</a:t>
+            </a:r>
+            <a:endParaRPr sz="1500" dirty="0">
+              <a:solidFill>
+                <a:srgbClr val="0E2238"/>
+              </a:solidFill>
+              <a:latin typeface="Segoe UI Semibold"/>
+            </a:endParaRPr>
           </a:p>
           <a:p>
             <a:pPr>
@@ -9336,14 +9349,20 @@
               </a:spcAft>
             </a:pPr>
             <a:r>
-              <a:rPr sz="1300">
+              <a:rPr lang="en-AU" sz="1300" dirty="0">
                 <a:solidFill>
                   <a:srgbClr val="56677A"/>
                 </a:solidFill>
                 <a:latin typeface="Segoe UI"/>
               </a:rPr>
-              <a:t>fresh test data, honest reporting</a:t>
-            </a:r>
+              <a:t>Ability to collate and communicate information</a:t>
+            </a:r>
+            <a:endParaRPr sz="1300" dirty="0">
+              <a:solidFill>
+                <a:srgbClr val="56677A"/>
+              </a:solidFill>
+              <a:latin typeface="Segoe UI"/>
+            </a:endParaRPr>
           </a:p>
           <a:p>
             <a:pPr>
@@ -9352,7 +9371,7 @@
               </a:spcAft>
             </a:pPr>
             <a:r>
-              <a:rPr sz="1500">
+              <a:rPr sz="1500" dirty="0">
                 <a:solidFill>
                   <a:srgbClr val="0E2238"/>
                 </a:solidFill>
@@ -9368,7 +9387,7 @@
               </a:spcAft>
             </a:pPr>
             <a:r>
-              <a:rPr sz="1300">
+              <a:rPr sz="1300" dirty="0">
                 <a:solidFill>
                   <a:srgbClr val="56677A"/>
                 </a:solidFill>
@@ -9387,7 +9406,7 @@
         </p:nvSpPr>
         <p:spPr>
           <a:xfrm>
-            <a:off x="4343400" y="1600200"/>
+            <a:off x="4297679" y="759141"/>
             <a:ext cx="3520440" cy="3246120"/>
           </a:xfrm>
           <a:prstGeom prst="roundRect">
@@ -9436,7 +9455,7 @@
         </p:nvSpPr>
         <p:spPr>
           <a:xfrm>
-            <a:off x="4617720" y="1600200"/>
+            <a:off x="4571999" y="759141"/>
             <a:ext cx="822960" cy="64008"/>
           </a:xfrm>
           <a:prstGeom prst="rect">
@@ -9481,8 +9500,8 @@
         </p:nvSpPr>
         <p:spPr>
           <a:xfrm>
-            <a:off x="4617720" y="1810512"/>
-            <a:ext cx="3017520" cy="365760"/>
+            <a:off x="4571999" y="950599"/>
+            <a:ext cx="3017520" cy="307777"/>
           </a:xfrm>
           <a:prstGeom prst="rect">
             <a:avLst/>
@@ -9501,14 +9520,20 @@
               </a:spcAft>
             </a:pPr>
             <a:r>
-              <a:rPr sz="2000">
+              <a:rPr lang="en-AU" sz="2000" dirty="0">
                 <a:solidFill>
                   <a:srgbClr val="0E2238"/>
                 </a:solidFill>
                 <a:latin typeface="Segoe UI Semibold"/>
               </a:rPr>
-              <a:t>Where it leads</a:t>
-            </a:r>
+              <a:t>Personal Relation</a:t>
+            </a:r>
+            <a:endParaRPr sz="2000" dirty="0">
+              <a:solidFill>
+                <a:srgbClr val="0E2238"/>
+              </a:solidFill>
+              <a:latin typeface="Segoe UI Semibold"/>
+            </a:endParaRPr>
           </a:p>
         </p:txBody>
       </p:sp>
@@ -9520,8 +9545,8 @@
         </p:nvSpPr>
         <p:spPr>
           <a:xfrm>
-            <a:off x="4617720" y="2331720"/>
-            <a:ext cx="3017520" cy="2468880"/>
+            <a:off x="4571999" y="1330402"/>
+            <a:ext cx="3017520" cy="1564531"/>
           </a:xfrm>
           <a:prstGeom prst="rect">
             <a:avLst/>
@@ -9540,14 +9565,29 @@
               </a:spcAft>
             </a:pPr>
             <a:r>
-              <a:rPr sz="1500">
+              <a:rPr sz="1500" dirty="0">
                 <a:solidFill>
                   <a:srgbClr val="0E2238"/>
                 </a:solidFill>
                 <a:latin typeface="Segoe UI Semibold"/>
               </a:rPr>
-              <a:t>My direction</a:t>
-            </a:r>
+              <a:t>My </a:t>
+            </a:r>
+            <a:r>
+              <a:rPr lang="en-AU" sz="1500" dirty="0">
+                <a:solidFill>
+                  <a:srgbClr val="0E2238"/>
+                </a:solidFill>
+                <a:latin typeface="Segoe UI Semibold"/>
+              </a:rPr>
+              <a:t>Direction</a:t>
+            </a:r>
+            <a:endParaRPr sz="1500" dirty="0">
+              <a:solidFill>
+                <a:srgbClr val="0E2238"/>
+              </a:solidFill>
+              <a:latin typeface="Segoe UI Semibold"/>
+            </a:endParaRPr>
           </a:p>
           <a:p>
             <a:pPr>
@@ -9556,14 +9596,20 @@
               </a:spcAft>
             </a:pPr>
             <a:r>
-              <a:rPr sz="1300">
+              <a:rPr lang="en-AU" sz="1300" dirty="0">
                 <a:solidFill>
                   <a:srgbClr val="56677A"/>
                 </a:solidFill>
                 <a:latin typeface="Segoe UI"/>
               </a:rPr>
-              <a:t>machine learning and mathematical optimisation</a:t>
-            </a:r>
+              <a:t>Machine learning, optimisation, computational physics</a:t>
+            </a:r>
+            <a:endParaRPr sz="1300" dirty="0">
+              <a:solidFill>
+                <a:srgbClr val="56677A"/>
+              </a:solidFill>
+              <a:latin typeface="Segoe UI"/>
+            </a:endParaRPr>
           </a:p>
           <a:p>
             <a:pPr>
@@ -9572,14 +9618,20 @@
               </a:spcAft>
             </a:pPr>
             <a:r>
-              <a:rPr sz="1500">
+              <a:rPr lang="en-AU" sz="1500" dirty="0">
                 <a:solidFill>
                   <a:srgbClr val="0E2238"/>
                 </a:solidFill>
                 <a:latin typeface="Segoe UI Semibold"/>
               </a:rPr>
-              <a:t>The thread</a:t>
-            </a:r>
+              <a:t>Skills to Develop</a:t>
+            </a:r>
+            <a:endParaRPr sz="1500" dirty="0">
+              <a:solidFill>
+                <a:srgbClr val="0E2238"/>
+              </a:solidFill>
+              <a:latin typeface="Segoe UI Semibold"/>
+            </a:endParaRPr>
           </a:p>
           <a:p>
             <a:pPr>
@@ -9588,46 +9640,20 @@
               </a:spcAft>
             </a:pPr>
             <a:r>
-              <a:rPr sz="1300">
+              <a:rPr lang="en-AU" sz="1300" dirty="0">
                 <a:solidFill>
                   <a:srgbClr val="56677A"/>
                 </a:solidFill>
                 <a:latin typeface="Segoe UI"/>
               </a:rPr>
-              <a:t>computation that makes hidden dynamics visible</a:t>
-            </a:r>
-          </a:p>
-          <a:p>
-            <a:pPr>
-              <a:spcAft>
-                <a:spcPts val="0"/>
-              </a:spcAft>
-            </a:pPr>
-            <a:r>
-              <a:rPr sz="1500">
-                <a:solidFill>
-                  <a:srgbClr val="0E2238"/>
-                </a:solidFill>
-                <a:latin typeface="Segoe UI Semibold"/>
-              </a:rPr>
-              <a:t>Audience</a:t>
-            </a:r>
-          </a:p>
-          <a:p>
-            <a:pPr>
-              <a:spcAft>
-                <a:spcPts val="800"/>
-              </a:spcAft>
-            </a:pPr>
-            <a:r>
-              <a:rPr sz="1300">
-                <a:solidFill>
-                  <a:srgbClr val="56677A"/>
-                </a:solidFill>
-                <a:latin typeface="Segoe UI"/>
-              </a:rPr>
-              <a:t>from experts to curious visitors</a:t>
-            </a:r>
+              <a:t>Critical-thinking, data analysis and visualisation, algorithmic design, advanced mathematics, programming</a:t>
+            </a:r>
+            <a:endParaRPr sz="1300" dirty="0">
+              <a:solidFill>
+                <a:srgbClr val="56677A"/>
+              </a:solidFill>
+              <a:latin typeface="Segoe UI"/>
+            </a:endParaRPr>
           </a:p>
         </p:txBody>
       </p:sp>
@@ -9639,7 +9665,7 @@
         </p:nvSpPr>
         <p:spPr>
           <a:xfrm>
-            <a:off x="8046719" y="1600200"/>
+            <a:off x="8000998" y="790532"/>
             <a:ext cx="3520440" cy="3246120"/>
           </a:xfrm>
           <a:prstGeom prst="roundRect">
@@ -9688,7 +9714,7 @@
         </p:nvSpPr>
         <p:spPr>
           <a:xfrm>
-            <a:off x="8321040" y="1600200"/>
+            <a:off x="8275319" y="790532"/>
             <a:ext cx="822960" cy="64008"/>
           </a:xfrm>
           <a:prstGeom prst="rect">
@@ -9733,8 +9759,8 @@
         </p:nvSpPr>
         <p:spPr>
           <a:xfrm>
-            <a:off x="8321040" y="1810512"/>
-            <a:ext cx="3017520" cy="365760"/>
+            <a:off x="8275319" y="981990"/>
+            <a:ext cx="3017520" cy="307777"/>
           </a:xfrm>
           <a:prstGeom prst="rect">
             <a:avLst/>
@@ -9753,14 +9779,20 @@
               </a:spcAft>
             </a:pPr>
             <a:r>
-              <a:rPr sz="2000">
+              <a:rPr lang="en-AU" sz="2000" dirty="0">
                 <a:solidFill>
                   <a:srgbClr val="0E2238"/>
                 </a:solidFill>
                 <a:latin typeface="Segoe UI Semibold"/>
               </a:rPr>
-              <a:t>What is next</a:t>
-            </a:r>
+              <a:t>Future Project Work</a:t>
+            </a:r>
+            <a:endParaRPr sz="2000" dirty="0">
+              <a:solidFill>
+                <a:srgbClr val="0E2238"/>
+              </a:solidFill>
+              <a:latin typeface="Segoe UI Semibold"/>
+            </a:endParaRPr>
           </a:p>
         </p:txBody>
       </p:sp>
@@ -9772,8 +9804,8 @@
         </p:nvSpPr>
         <p:spPr>
           <a:xfrm>
-            <a:off x="8321040" y="2331720"/>
-            <a:ext cx="3017520" cy="2468880"/>
+            <a:off x="8275319" y="1361793"/>
+            <a:ext cx="3017520" cy="2698175"/>
           </a:xfrm>
           <a:prstGeom prst="rect">
             <a:avLst/>
@@ -9792,14 +9824,20 @@
               </a:spcAft>
             </a:pPr>
             <a:r>
-              <a:rPr sz="1500">
+              <a:rPr lang="en-AU" sz="1500" dirty="0">
                 <a:solidFill>
                   <a:srgbClr val="0E2238"/>
                 </a:solidFill>
                 <a:latin typeface="Segoe UI Semibold"/>
               </a:rPr>
-              <a:t>Trade-offs</a:t>
-            </a:r>
+              <a:t>Training</a:t>
+            </a:r>
+            <a:endParaRPr sz="1500" dirty="0">
+              <a:solidFill>
+                <a:srgbClr val="0E2238"/>
+              </a:solidFill>
+              <a:latin typeface="Segoe UI Semibold"/>
+            </a:endParaRPr>
           </a:p>
           <a:p>
             <a:pPr>
@@ -9808,14 +9846,20 @@
               </a:spcAft>
             </a:pPr>
             <a:r>
-              <a:rPr sz="1300">
+              <a:rPr lang="en-AU" sz="1300" dirty="0">
                 <a:solidFill>
                   <a:srgbClr val="56677A"/>
                 </a:solidFill>
                 <a:latin typeface="Segoe UI"/>
               </a:rPr>
-              <a:t>train for late jobs versus energy</a:t>
-            </a:r>
+              <a:t>RL training is incredibly costly, potentially use a cloud machine to train instead for longer periods – maybe RL can still outperform</a:t>
+            </a:r>
+            <a:endParaRPr sz="1300" dirty="0">
+              <a:solidFill>
+                <a:srgbClr val="56677A"/>
+              </a:solidFill>
+              <a:latin typeface="Segoe UI"/>
+            </a:endParaRPr>
           </a:p>
           <a:p>
             <a:pPr>
@@ -9824,14 +9868,20 @@
               </a:spcAft>
             </a:pPr>
             <a:r>
-              <a:rPr sz="1500">
+              <a:rPr lang="en-AU" sz="1500" dirty="0">
                 <a:solidFill>
                   <a:srgbClr val="0E2238"/>
                 </a:solidFill>
                 <a:latin typeface="Segoe UI Semibold"/>
               </a:rPr>
-              <a:t>Forecasts</a:t>
-            </a:r>
+              <a:t>Real Data</a:t>
+            </a:r>
+            <a:endParaRPr sz="1500" dirty="0">
+              <a:solidFill>
+                <a:srgbClr val="0E2238"/>
+              </a:solidFill>
+              <a:latin typeface="Segoe UI Semibold"/>
+            </a:endParaRPr>
           </a:p>
           <a:p>
             <a:pPr>
@@ -9840,14 +9890,20 @@
               </a:spcAft>
             </a:pPr>
             <a:r>
-              <a:rPr sz="1300">
+              <a:rPr lang="en-AU" sz="1300" dirty="0">
                 <a:solidFill>
                   <a:srgbClr val="56677A"/>
                 </a:solidFill>
                 <a:latin typeface="Segoe UI"/>
               </a:rPr>
-              <a:t>can predicting arrivals help?</a:t>
-            </a:r>
+              <a:t>Use real traces from Google instead of synthetically created data</a:t>
+            </a:r>
+            <a:endParaRPr sz="1300" dirty="0">
+              <a:solidFill>
+                <a:srgbClr val="56677A"/>
+              </a:solidFill>
+              <a:latin typeface="Segoe UI"/>
+            </a:endParaRPr>
           </a:p>
           <a:p>
             <a:pPr>
@@ -9856,13 +9912,13 @@
               </a:spcAft>
             </a:pPr>
             <a:r>
-              <a:rPr sz="1500">
+              <a:rPr lang="en-US" sz="1500" dirty="0">
                 <a:solidFill>
                   <a:srgbClr val="0E2238"/>
                 </a:solidFill>
                 <a:latin typeface="Segoe UI Semibold"/>
               </a:rPr>
-              <a:t>Understanding</a:t>
+              <a:t>Future Projects</a:t>
             </a:r>
           </a:p>
           <a:p>
@@ -9872,379 +9928,53 @@
               </a:spcAft>
             </a:pPr>
             <a:r>
-              <a:rPr sz="1300">
+              <a:rPr lang="en-AU" sz="1300" dirty="0">
                 <a:solidFill>
                   <a:srgbClr val="56677A"/>
                 </a:solidFill>
                 <a:latin typeface="Segoe UI"/>
               </a:rPr>
-              <a:t>why learning on its own is unstable</a:t>
-            </a:r>
-          </a:p>
-          <a:p>
-            <a:pPr>
-              <a:spcAft>
-                <a:spcPts val="0"/>
-              </a:spcAft>
-            </a:pPr>
-            <a:r>
-              <a:rPr sz="1500">
-                <a:solidFill>
-                  <a:srgbClr val="0E2238"/>
-                </a:solidFill>
-                <a:latin typeface="Segoe UI Semibold"/>
-              </a:rPr>
-              <a:t>Leading</a:t>
-            </a:r>
-          </a:p>
-          <a:p>
-            <a:pPr>
-              <a:spcAft>
-                <a:spcPts val="800"/>
-              </a:spcAft>
-            </a:pPr>
-            <a:r>
-              <a:rPr sz="1300">
-                <a:solidFill>
-                  <a:srgbClr val="56677A"/>
-                </a:solidFill>
-                <a:latin typeface="Segoe UI"/>
-              </a:rPr>
-              <a:t>[my next step: own a project]</a:t>
-            </a:r>
-          </a:p>
-        </p:txBody>
-      </p:sp>
-      <p:sp>
-        <p:nvSpPr>
-          <p:cNvPr id="18" name="Pentagon 17"/>
-          <p:cNvSpPr/>
-          <p:nvPr/>
-        </p:nvSpPr>
-        <p:spPr>
-          <a:xfrm>
-            <a:off x="640080" y="5120640"/>
-            <a:ext cx="3520440" cy="1097280"/>
-          </a:xfrm>
-          <a:prstGeom prst="homePlate">
-            <a:avLst/>
-          </a:prstGeom>
-          <a:solidFill>
-            <a:srgbClr val="EEF4FC"/>
-          </a:solidFill>
-          <a:ln>
-            <a:noFill/>
-          </a:ln>
-          <a:effectLst/>
-        </p:spPr>
-        <p:style>
-          <a:lnRef idx="1">
-            <a:schemeClr val="accent1"/>
-          </a:lnRef>
-          <a:fillRef idx="3">
-            <a:schemeClr val="accent1"/>
-          </a:fillRef>
-          <a:effectRef idx="2">
-            <a:schemeClr val="accent1"/>
-          </a:effectRef>
-          <a:fontRef idx="minor">
-            <a:schemeClr val="lt1"/>
-          </a:fontRef>
-        </p:style>
-        <p:txBody>
-          <a:bodyPr rtlCol="0" anchor="ctr"/>
-          <a:lstStyle/>
-          <a:p>
-            <a:pPr algn="ctr"/>
-            <a:endParaRPr/>
-          </a:p>
-        </p:txBody>
-      </p:sp>
-      <p:sp>
-        <p:nvSpPr>
-          <p:cNvPr id="19" name="TextBox 18"/>
-          <p:cNvSpPr txBox="1"/>
-          <p:nvPr/>
-        </p:nvSpPr>
-        <p:spPr>
-          <a:xfrm>
-            <a:off x="914400" y="5212080"/>
-            <a:ext cx="2834640" cy="914400"/>
+              <a:t>Other optimisation problems and approaches, agentic systems, quantum computing</a:t>
+            </a:r>
+            <a:endParaRPr sz="1300" dirty="0">
+              <a:solidFill>
+                <a:srgbClr val="56677A"/>
+              </a:solidFill>
+              <a:latin typeface="Segoe UI"/>
+            </a:endParaRPr>
+          </a:p>
+        </p:txBody>
+      </p:sp>
+      <p:pic>
+        <p:nvPicPr>
+          <p:cNvPr id="27" name="Picture 26">
+            <a:extLst>
+              <a:ext uri="{FF2B5EF4-FFF2-40B4-BE49-F238E27FC236}">
+                <a16:creationId xmlns:a16="http://schemas.microsoft.com/office/drawing/2014/main" id="{F07DACA6-C5CF-2C11-D82D-A60EDF5375B8}"/>
+              </a:ext>
+            </a:extLst>
+          </p:cNvPr>
+          <p:cNvPicPr>
+            <a:picLocks noChangeAspect="1"/>
+          </p:cNvPicPr>
+          <p:nvPr/>
+        </p:nvPicPr>
+        <p:blipFill>
+          <a:blip r:embed="rId3"/>
+          <a:stretch>
+            <a:fillRect/>
+          </a:stretch>
+        </p:blipFill>
+        <p:spPr>
+          <a:xfrm>
+            <a:off x="1981200" y="4126132"/>
+            <a:ext cx="8229600" cy="2444352"/>
           </a:xfrm>
           <a:prstGeom prst="rect">
             <a:avLst/>
           </a:prstGeom>
-          <a:noFill/>
-        </p:spPr>
-        <p:txBody>
-          <a:bodyPr wrap="square" lIns="0" tIns="0" rIns="0" bIns="0" anchor="t">
-            <a:spAutoFit/>
-          </a:bodyPr>
-          <a:lstStyle/>
-          <a:p>
-            <a:pPr>
-              <a:spcAft>
-                <a:spcPts val="200"/>
-              </a:spcAft>
-            </a:pPr>
-            <a:r>
-              <a:rPr sz="1500">
-                <a:solidFill>
-                  <a:srgbClr val="2A6FD1"/>
-                </a:solidFill>
-                <a:latin typeface="Segoe UI Semibold"/>
-              </a:rPr>
-              <a:t>Year 2</a:t>
-            </a:r>
-          </a:p>
-          <a:p>
-            <a:pPr>
-              <a:spcAft>
-                <a:spcPts val="200"/>
-              </a:spcAft>
-            </a:pPr>
-            <a:r>
-              <a:rPr sz="1200">
-                <a:solidFill>
-                  <a:srgbClr val="0E2238"/>
-                </a:solidFill>
-                <a:latin typeface="Segoe UI"/>
-              </a:rPr>
-              <a:t>CO₂ and quantum vibrations</a:t>
-            </a:r>
-            <a:br/>
-            <a:r>
-              <a:rPr sz="1200">
-                <a:solidFill>
-                  <a:srgbClr val="0E2238"/>
-                </a:solidFill>
-                <a:latin typeface="Segoe UI"/>
-              </a:rPr>
-              <a:t>MATLAB visualisation</a:t>
-            </a:r>
-          </a:p>
-        </p:txBody>
-      </p:sp>
-      <p:sp>
-        <p:nvSpPr>
-          <p:cNvPr id="20" name="Pentagon 19"/>
-          <p:cNvSpPr/>
-          <p:nvPr/>
-        </p:nvSpPr>
-        <p:spPr>
-          <a:xfrm>
-            <a:off x="4343400" y="5120640"/>
-            <a:ext cx="3520440" cy="1097280"/>
-          </a:xfrm>
-          <a:prstGeom prst="homePlate">
-            <a:avLst/>
-          </a:prstGeom>
-          <a:solidFill>
-            <a:srgbClr val="EEF4FC"/>
-          </a:solidFill>
-          <a:ln>
-            <a:noFill/>
-          </a:ln>
-          <a:effectLst/>
-        </p:spPr>
-        <p:style>
-          <a:lnRef idx="1">
-            <a:schemeClr val="accent1"/>
-          </a:lnRef>
-          <a:fillRef idx="3">
-            <a:schemeClr val="accent1"/>
-          </a:fillRef>
-          <a:effectRef idx="2">
-            <a:schemeClr val="accent1"/>
-          </a:effectRef>
-          <a:fontRef idx="minor">
-            <a:schemeClr val="lt1"/>
-          </a:fontRef>
-        </p:style>
-        <p:txBody>
-          <a:bodyPr rtlCol="0" anchor="ctr"/>
-          <a:lstStyle/>
-          <a:p>
-            <a:pPr algn="ctr"/>
-            <a:endParaRPr/>
-          </a:p>
-        </p:txBody>
-      </p:sp>
-      <p:sp>
-        <p:nvSpPr>
-          <p:cNvPr id="21" name="TextBox 20"/>
-          <p:cNvSpPr txBox="1"/>
-          <p:nvPr/>
-        </p:nvSpPr>
-        <p:spPr>
-          <a:xfrm>
-            <a:off x="4617720" y="5212080"/>
-            <a:ext cx="2834640" cy="914400"/>
-          </a:xfrm>
-          <a:prstGeom prst="rect">
-            <a:avLst/>
-          </a:prstGeom>
-          <a:noFill/>
-        </p:spPr>
-        <p:txBody>
-          <a:bodyPr wrap="square" lIns="0" tIns="0" rIns="0" bIns="0" anchor="t">
-            <a:spAutoFit/>
-          </a:bodyPr>
-          <a:lstStyle/>
-          <a:p>
-            <a:pPr>
-              <a:spcAft>
-                <a:spcPts val="200"/>
-              </a:spcAft>
-            </a:pPr>
-            <a:r>
-              <a:rPr sz="1500">
-                <a:solidFill>
-                  <a:srgbClr val="2A6FD1"/>
-                </a:solidFill>
-                <a:latin typeface="Segoe UI Semibold"/>
-              </a:rPr>
-              <a:t>Year 3</a:t>
-            </a:r>
-          </a:p>
-          <a:p>
-            <a:pPr>
-              <a:spcAft>
-                <a:spcPts val="200"/>
-              </a:spcAft>
-            </a:pPr>
-            <a:r>
-              <a:rPr sz="1200">
-                <a:solidFill>
-                  <a:srgbClr val="0E2238"/>
-                </a:solidFill>
-                <a:latin typeface="Segoe UI"/>
-              </a:rPr>
-              <a:t>Cloud scheduling with RL</a:t>
-            </a:r>
-            <a:br/>
-            <a:r>
-              <a:rPr sz="1200">
-                <a:solidFill>
-                  <a:srgbClr val="0E2238"/>
-                </a:solidFill>
-                <a:latin typeface="Segoe UI"/>
-              </a:rPr>
-              <a:t>Python, interactive demos</a:t>
-            </a:r>
-          </a:p>
-        </p:txBody>
-      </p:sp>
-      <p:sp>
-        <p:nvSpPr>
-          <p:cNvPr id="22" name="Pentagon 21"/>
-          <p:cNvSpPr/>
-          <p:nvPr/>
-        </p:nvSpPr>
-        <p:spPr>
-          <a:xfrm>
-            <a:off x="8046719" y="5120640"/>
-            <a:ext cx="3520440" cy="1097280"/>
-          </a:xfrm>
-          <a:prstGeom prst="homePlate">
-            <a:avLst/>
-          </a:prstGeom>
-          <a:solidFill>
-            <a:srgbClr val="0E2238"/>
-          </a:solidFill>
-          <a:ln>
-            <a:noFill/>
-          </a:ln>
-          <a:effectLst/>
-        </p:spPr>
-        <p:style>
-          <a:lnRef idx="1">
-            <a:schemeClr val="accent1"/>
-          </a:lnRef>
-          <a:fillRef idx="3">
-            <a:schemeClr val="accent1"/>
-          </a:fillRef>
-          <a:effectRef idx="2">
-            <a:schemeClr val="accent1"/>
-          </a:effectRef>
-          <a:fontRef idx="minor">
-            <a:schemeClr val="lt1"/>
-          </a:fontRef>
-        </p:style>
-        <p:txBody>
-          <a:bodyPr rtlCol="0" anchor="ctr"/>
-          <a:lstStyle/>
-          <a:p>
-            <a:pPr algn="ctr"/>
-            <a:endParaRPr/>
-          </a:p>
-        </p:txBody>
-      </p:sp>
-      <p:sp>
-        <p:nvSpPr>
-          <p:cNvPr id="23" name="TextBox 22"/>
-          <p:cNvSpPr txBox="1"/>
-          <p:nvPr/>
-        </p:nvSpPr>
-        <p:spPr>
-          <a:xfrm>
-            <a:off x="8321040" y="5212080"/>
-            <a:ext cx="2834640" cy="914400"/>
-          </a:xfrm>
-          <a:prstGeom prst="rect">
-            <a:avLst/>
-          </a:prstGeom>
-          <a:noFill/>
-        </p:spPr>
-        <p:txBody>
-          <a:bodyPr wrap="square" lIns="0" tIns="0" rIns="0" bIns="0" anchor="t">
-            <a:spAutoFit/>
-          </a:bodyPr>
-          <a:lstStyle/>
-          <a:p>
-            <a:pPr>
-              <a:spcAft>
-                <a:spcPts val="200"/>
-              </a:spcAft>
-            </a:pPr>
-            <a:r>
-              <a:rPr sz="1500">
-                <a:solidFill>
-                  <a:srgbClr val="FFFFFF"/>
-                </a:solidFill>
-                <a:latin typeface="Segoe UI Semibold"/>
-              </a:rPr>
-              <a:t>Next</a:t>
-            </a:r>
-          </a:p>
-          <a:p>
-            <a:pPr>
-              <a:spcAft>
-                <a:spcPts val="200"/>
-              </a:spcAft>
-            </a:pPr>
-            <a:r>
-              <a:rPr sz="1200">
-                <a:solidFill>
-                  <a:srgbClr val="FFFFFF"/>
-                </a:solidFill>
-                <a:latin typeface="Segoe UI"/>
-              </a:rPr>
-              <a:t>Lead a project</a:t>
-            </a:r>
-            <a:br/>
-            <a:r>
-              <a:rPr sz="1200">
-                <a:solidFill>
-                  <a:srgbClr val="FFFFFF"/>
-                </a:solidFill>
-                <a:latin typeface="Segoe UI"/>
-              </a:rPr>
-              <a:t>machine learning + optimisation</a:t>
-            </a:r>
-          </a:p>
-        </p:txBody>
-      </p:sp>
+        </p:spPr>
+      </p:pic>
     </p:spTree>
   </p:cSld>
   <p:clrMapOvr>
